--- a/RFID读取评估_2026-10-21/09_报告/RFID读取能力评估_2026-10-23.pptx
+++ b/RFID读取评估_2026-10-21/09_报告/RFID读取能力评估_2026-10-23.pptx
@@ -12,13 +12,12 @@
     <p:sldId id="258" r:id="rId3"/>
     <p:sldId id="267" r:id="rId4"/>
     <p:sldId id="265" r:id="rId5"/>
+    <p:sldId id="262" r:id="rId11"/>
     <p:sldId id="259" r:id="rId6"/>
     <p:sldId id="269" r:id="rId7"/>
     <p:sldId id="260" r:id="rId8"/>
     <p:sldId id="261" r:id="rId9"/>
     <p:sldId id="266" r:id="rId10"/>
-    <p:sldId id="262" r:id="rId11"/>
-    <p:sldId id="270" r:id="rId18"/>
     <p:sldId id="268" r:id="rId12"/>
   </p:sldIdLst>
   <p:sldSz cx="12192000" cy="6858000"/>
@@ -743,52 +742,6 @@
           </p:nvPr>
         </p:nvSpPr>
         <p:spPr/>
-      </p:sp>
-    </p:spTree>
-  </p:cSld>
-  <p:clrMapOvr>
-    <a:masterClrMapping/>
-  </p:clrMapOvr>
-</p:notes>
-</file>
-
-<file path=ppt/notesSlides/notesSlide8.xml><?xml version="1.0" encoding="utf-8"?>
-<p:notes xmlns:a="http://schemas.openxmlformats.org/drawingml/2006/main" xmlns:p="http://schemas.openxmlformats.org/presentationml/2006/main" xmlns:r="http://schemas.openxmlformats.org/officeDocument/2006/relationships">
-  <p:cSld>
-    <p:spTree>
-      <p:nvGrpSpPr>
-        <p:cNvPr id="1" name=""/>
-        <p:cNvGrpSpPr/>
-        <p:nvPr/>
-      </p:nvGrpSpPr>
-      <p:grpSpPr>
-        <a:xfrm>
-          <a:off x="0" y="0"/>
-          <a:ext cx="0" cy="0"/>
-          <a:chOff x="0" y="0"/>
-          <a:chExt cx="0" cy="0"/>
-        </a:xfrm>
-      </p:grpSpPr>
-      <p:sp>
-        <p:nvSpPr>
-          <p:cNvPr id="3" name="Notes Placeholder 2"/>
-          <p:cNvSpPr>
-            <a:spLocks noGrp="1"/>
-          </p:cNvSpPr>
-          <p:nvPr>
-            <p:ph type="body" sz="quarter" idx="3"/>
-          </p:nvPr>
-        </p:nvSpPr>
-        <p:spPr/>
-        <p:txBody>
-          <a:bodyPr/>
-          <a:lstStyle/>
-          <a:p>
-            <a:r>
-              <a:t>这一页是 10-23 按经理口径新加的：分析单元改成「包装机型」，不是 RFID 厂家。两条硬件事实决定了读取几何：金属背壳版的标签贴在中框，正下方被金属背壳屏蔽，只能用侧向天线读；塑料背壳版的标签直接贴在背壳上，正对箱底，下置天线是最好条件。KKE 是带卡通保护壳包装，N-KKE 是只有平板本身，卡通壳按模型固定再吃 2.5 dB。四个象限的预测：塑料下置 5.95–5.99，金属下置只有 1.63–3.05、换侧向 5.22–5.73。这正好解释 10-22 现场「0 到 40 cm 读数都在 0–1」：不是距离不够近，是照射方向与标签位置不匹配。另外要主动交代三点：一是现网日志里没有 KKE/N-KKE 字段，只有 (Metal)/(Plastic)，所以之前只能按机型+背壳分组，要按四象限重算箱数需要事业部给配置码或 BOM 区分；二是厂家 A/B 的 2 dB 是模型假设，模组实测还没做（唐工下午补），必须在固定包装机型的前提下重测，否则厂家与包装混在一起，结论不可用。三是这一页与 R6 页的实测不矛盾：现网按背壳分也几乎全漏（98.9% vs 95.2%），材质差异被系统级漏读压平；金属背壳的真正问题是照射方向与标签位置不匹配，不是「金属就一定更差」。</a:t>
-            </a:r>
-          </a:p>
-        </p:txBody>
       </p:sp>
     </p:spTree>
   </p:cSld>
@@ -4085,7 +4038,7 @@
                 <a:ea typeface="微软雅黑"/>
                 <a:cs typeface="Arial"/>
               </a:rPr>
-              <a:t>R6：六种箱型 —— 在产四组实测没拉开差距</a:t>
+              <a:t>机型口径结论：四个在产组合都没拉开差距</a:t>
             </a:r>
           </a:p>
         </p:txBody>
@@ -4126,7 +4079,7 @@
                 <a:ea typeface="微软雅黑"/>
                 <a:cs typeface="Arial"/>
               </a:rPr>
-              <a:t>代号＝HQ代码-背壳（客户代码见「机型口径」页）；右表只做代号对照，实测见左栏（31 天逐箱对齐）</a:t>
+              <a:t>R6（同一读码器 × 箱型）的答案：代号＝HQ代码-背壳，实测见左栏（31 天逐箱对齐）；AX7771 / AX7513 本线无包装日志，已从口径表移除</a:t>
             </a:r>
           </a:p>
         </p:txBody>
@@ -4769,232 +4722,6 @@
                   </a:ext>
                 </a:extLst>
               </a:tr>
-              <a:tr h="365760">
-                <a:tc>
-                  <a:txBody>
-                    <a:bodyPr/>
-                    <a:lstStyle/>
-                    <a:p>
-                      <a:pPr algn="ctr">
-                        <a:lnSpc>
-                          <a:spcPct val="100000"/>
-                        </a:lnSpc>
-                      </a:pPr>
-                      <a:r>
-                        <a:rPr sz="950" b="1">
-                          <a:solidFill>
-                            <a:srgbClr val="1A1A1A"/>
-                          </a:solidFill>
-                          <a:latin typeface="Arial"/>
-                          <a:ea typeface="微软雅黑"/>
-                          <a:cs typeface="Arial"/>
-                        </a:rPr>
-                        <a:t>7771-M</a:t>
-                      </a:r>
-                    </a:p>
-                  </a:txBody>
-                  <a:tcPr marL="50292" marR="50292" marT="13716" marB="13716" anchor="ctr">
-                    <a:lnL w="9525" cap="flat" cmpd="sng" algn="ctr">
-                      <a:solidFill>
-                        <a:srgbClr val="D9D9D9"/>
-                      </a:solidFill>
-                      <a:prstDash val="solid"/>
-                    </a:lnL>
-                    <a:lnR w="9525" cap="flat" cmpd="sng" algn="ctr">
-                      <a:solidFill>
-                        <a:srgbClr val="D9D9D9"/>
-                      </a:solidFill>
-                      <a:prstDash val="solid"/>
-                    </a:lnR>
-                    <a:lnT w="9525" cap="flat" cmpd="sng" algn="ctr">
-                      <a:solidFill>
-                        <a:srgbClr val="D9D9D9"/>
-                      </a:solidFill>
-                      <a:prstDash val="solid"/>
-                    </a:lnT>
-                    <a:lnB w="9525" cap="flat" cmpd="sng" algn="ctr">
-                      <a:solidFill>
-                        <a:srgbClr val="D9D9D9"/>
-                      </a:solidFill>
-                      <a:prstDash val="solid"/>
-                    </a:lnB>
-                    <a:solidFill>
-                      <a:srgbClr val="FFFFFF"/>
-                    </a:solidFill>
-                  </a:tcPr>
-                </a:tc>
-                <a:tc>
-                  <a:txBody>
-                    <a:bodyPr/>
-                    <a:lstStyle/>
-                    <a:p>
-                      <a:pPr algn="l">
-                        <a:lnSpc>
-                          <a:spcPct val="100000"/>
-                        </a:lnSpc>
-                      </a:pPr>
-                      <a:r>
-                        <a:rPr sz="950" b="0">
-                          <a:solidFill>
-                            <a:srgbClr val="1A1A1A"/>
-                          </a:solidFill>
-                          <a:latin typeface="Arial"/>
-                          <a:ea typeface="微软雅黑"/>
-                          <a:cs typeface="Arial"/>
-                        </a:rPr>
-                        <a:t>AX7771 · 8″ · 金属</a:t>
-                      </a:r>
-                    </a:p>
-                  </a:txBody>
-                  <a:tcPr marL="50292" marR="50292" marT="13716" marB="13716" anchor="ctr">
-                    <a:lnL w="9525" cap="flat" cmpd="sng" algn="ctr">
-                      <a:solidFill>
-                        <a:srgbClr val="D9D9D9"/>
-                      </a:solidFill>
-                      <a:prstDash val="solid"/>
-                    </a:lnL>
-                    <a:lnR w="9525" cap="flat" cmpd="sng" algn="ctr">
-                      <a:solidFill>
-                        <a:srgbClr val="D9D9D9"/>
-                      </a:solidFill>
-                      <a:prstDash val="solid"/>
-                    </a:lnR>
-                    <a:lnT w="9525" cap="flat" cmpd="sng" algn="ctr">
-                      <a:solidFill>
-                        <a:srgbClr val="D9D9D9"/>
-                      </a:solidFill>
-                      <a:prstDash val="solid"/>
-                    </a:lnT>
-                    <a:lnB w="9525" cap="flat" cmpd="sng" algn="ctr">
-                      <a:solidFill>
-                        <a:srgbClr val="D9D9D9"/>
-                      </a:solidFill>
-                      <a:prstDash val="solid"/>
-                    </a:lnB>
-                    <a:solidFill>
-                      <a:srgbClr val="FFFFFF"/>
-                    </a:solidFill>
-                  </a:tcPr>
-                </a:tc>
-                <a:extLst>
-                  <a:ext uri="{0D108BD9-81ED-4DB2-BD59-A6C34878D82A}">
-                    <a16:rowId xmlns:a16="http://schemas.microsoft.com/office/drawing/2014/main" val="10005"/>
-                  </a:ext>
-                </a:extLst>
-              </a:tr>
-              <a:tr h="365760">
-                <a:tc>
-                  <a:txBody>
-                    <a:bodyPr/>
-                    <a:lstStyle/>
-                    <a:p>
-                      <a:pPr algn="ctr">
-                        <a:lnSpc>
-                          <a:spcPct val="100000"/>
-                        </a:lnSpc>
-                      </a:pPr>
-                      <a:r>
-                        <a:rPr sz="950" b="1">
-                          <a:solidFill>
-                            <a:srgbClr val="1A1A1A"/>
-                          </a:solidFill>
-                          <a:latin typeface="Arial"/>
-                          <a:ea typeface="微软雅黑"/>
-                          <a:cs typeface="Arial"/>
-                        </a:rPr>
-                        <a:t>7513-M</a:t>
-                      </a:r>
-                    </a:p>
-                  </a:txBody>
-                  <a:tcPr marL="50292" marR="50292" marT="13716" marB="13716" anchor="ctr">
-                    <a:lnL w="9525" cap="flat" cmpd="sng" algn="ctr">
-                      <a:solidFill>
-                        <a:srgbClr val="D9D9D9"/>
-                      </a:solidFill>
-                      <a:prstDash val="solid"/>
-                    </a:lnL>
-                    <a:lnR w="9525" cap="flat" cmpd="sng" algn="ctr">
-                      <a:solidFill>
-                        <a:srgbClr val="D9D9D9"/>
-                      </a:solidFill>
-                      <a:prstDash val="solid"/>
-                    </a:lnR>
-                    <a:lnT w="9525" cap="flat" cmpd="sng" algn="ctr">
-                      <a:solidFill>
-                        <a:srgbClr val="D9D9D9"/>
-                      </a:solidFill>
-                      <a:prstDash val="solid"/>
-                    </a:lnT>
-                    <a:lnB w="9525" cap="flat" cmpd="sng" algn="ctr">
-                      <a:solidFill>
-                        <a:srgbClr val="D9D9D9"/>
-                      </a:solidFill>
-                      <a:prstDash val="solid"/>
-                    </a:lnB>
-                    <a:solidFill>
-                      <a:srgbClr val="FFFFFF"/>
-                    </a:solidFill>
-                  </a:tcPr>
-                </a:tc>
-                <a:tc>
-                  <a:txBody>
-                    <a:bodyPr/>
-                    <a:lstStyle/>
-                    <a:p>
-                      <a:pPr algn="l">
-                        <a:lnSpc>
-                          <a:spcPct val="100000"/>
-                        </a:lnSpc>
-                      </a:pPr>
-                      <a:r>
-                        <a:rPr sz="950" b="0">
-                          <a:solidFill>
-                            <a:srgbClr val="1A1A1A"/>
-                          </a:solidFill>
-                          <a:latin typeface="Arial"/>
-                          <a:ea typeface="微软雅黑"/>
-                          <a:cs typeface="Arial"/>
-                        </a:rPr>
-                        <a:t>AX7513 · 11″ · 金属</a:t>
-                      </a:r>
-                    </a:p>
-                  </a:txBody>
-                  <a:tcPr marL="50292" marR="50292" marT="13716" marB="13716" anchor="ctr">
-                    <a:lnL w="9525" cap="flat" cmpd="sng" algn="ctr">
-                      <a:solidFill>
-                        <a:srgbClr val="D9D9D9"/>
-                      </a:solidFill>
-                      <a:prstDash val="solid"/>
-                    </a:lnL>
-                    <a:lnR w="9525" cap="flat" cmpd="sng" algn="ctr">
-                      <a:solidFill>
-                        <a:srgbClr val="D9D9D9"/>
-                      </a:solidFill>
-                      <a:prstDash val="solid"/>
-                    </a:lnR>
-                    <a:lnT w="9525" cap="flat" cmpd="sng" algn="ctr">
-                      <a:solidFill>
-                        <a:srgbClr val="D9D9D9"/>
-                      </a:solidFill>
-                      <a:prstDash val="solid"/>
-                    </a:lnT>
-                    <a:lnB w="9525" cap="flat" cmpd="sng" algn="ctr">
-                      <a:solidFill>
-                        <a:srgbClr val="D9D9D9"/>
-                      </a:solidFill>
-                      <a:prstDash val="solid"/>
-                    </a:lnB>
-                    <a:solidFill>
-                      <a:srgbClr val="FFFFFF"/>
-                    </a:solidFill>
-                  </a:tcPr>
-                </a:tc>
-                <a:extLst>
-                  <a:ext uri="{0D108BD9-81ED-4DB2-BD59-A6C34878D82A}">
-                    <a16:rowId xmlns:a16="http://schemas.microsoft.com/office/drawing/2014/main" val="10006"/>
-                  </a:ext>
-                </a:extLst>
-              </a:tr>
             </a:tbl>
           </a:graphicData>
         </a:graphic>
@@ -5007,8 +4734,8 @@
         </p:nvSpPr>
         <p:spPr>
           <a:xfrm>
-            <a:off x="6903720" y="4041648"/>
-            <a:ext cx="4718304" cy="1481328"/>
+            <a:off x="6903720" y="3310128"/>
+            <a:ext cx="4718304" cy="1335024"/>
           </a:xfrm>
           <a:prstGeom prst="rect">
             <a:avLst/>
@@ -5052,8 +4779,8 @@
         </p:nvSpPr>
         <p:spPr>
           <a:xfrm>
-            <a:off x="7059168" y="4133087"/>
-            <a:ext cx="4434840" cy="1325880"/>
+            <a:off x="7059168" y="3401568"/>
+            <a:ext cx="4434840" cy="1188720"/>
           </a:xfrm>
           <a:prstGeom prst="rect">
             <a:avLst/>
@@ -5220,7 +4947,7 @@
                 <a:ea typeface="微软雅黑"/>
                 <a:cs typeface="Arial"/>
               </a:rPr>
-              <a:t>若产线要上金属背壳机型（标签在中框）：把读取方向改成侧向，下置天线对它无效（见下页四象限）</a:t>
+              <a:t>若产线要上金属背壳机型：要么改贴标位置（避开金属面），要么在箱外/开口侧增设天线</a:t>
             </a:r>
           </a:p>
         </p:txBody>
@@ -5580,8 +5307,8 @@
         </p:nvSpPr>
         <p:spPr>
           <a:xfrm>
-            <a:off x="566928" y="2944368"/>
-            <a:ext cx="5897880" cy="1737360"/>
+            <a:off x="2212848" y="2889504"/>
+            <a:ext cx="4251960" cy="1700784"/>
           </a:xfrm>
           <a:prstGeom prst="rect">
             <a:avLst/>
@@ -5596,11 +5323,11 @@
           <a:p>
             <a:pPr algn="l">
               <a:lnSpc>
-                <a:spcPct val="150000"/>
+                <a:spcPct val="118000"/>
               </a:lnSpc>
             </a:pPr>
             <a:r>
-              <a:rPr sz="1050" b="0">
+              <a:rPr sz="1120" b="0">
                 <a:solidFill>
                   <a:srgbClr val="1A1A1A"/>
                 </a:solidFill>
@@ -5614,11 +5341,11 @@
           <a:p>
             <a:pPr algn="l">
               <a:lnSpc>
-                <a:spcPct val="150000"/>
+                <a:spcPct val="118000"/>
               </a:lnSpc>
             </a:pPr>
             <a:r>
-              <a:rPr sz="1050" b="0">
+              <a:rPr sz="1120" b="0">
                 <a:solidFill>
                   <a:srgbClr val="1A1A1A"/>
                 </a:solidFill>
@@ -5632,11 +5359,11 @@
           <a:p>
             <a:pPr algn="l">
               <a:lnSpc>
-                <a:spcPct val="150000"/>
+                <a:spcPct val="118000"/>
               </a:lnSpc>
             </a:pPr>
             <a:r>
-              <a:rPr sz="1050" b="0">
+              <a:rPr sz="1120" b="0">
                 <a:solidFill>
                   <a:srgbClr val="1A1A1A"/>
                 </a:solidFill>
@@ -5650,11 +5377,11 @@
           <a:p>
             <a:pPr algn="l">
               <a:lnSpc>
-                <a:spcPct val="150000"/>
+                <a:spcPct val="118000"/>
               </a:lnSpc>
             </a:pPr>
             <a:r>
-              <a:rPr sz="1050" b="1">
+              <a:rPr sz="1120" b="1">
                 <a:solidFill>
                   <a:srgbClr val="C0504D"/>
                 </a:solidFill>
@@ -5675,8 +5402,8 @@
         </p:nvSpPr>
         <p:spPr>
           <a:xfrm>
-            <a:off x="566928" y="4617720"/>
-            <a:ext cx="5897880" cy="457200"/>
+            <a:off x="2212848" y="4626864"/>
+            <a:ext cx="4251960" cy="566928"/>
           </a:xfrm>
           <a:prstGeom prst="rect">
             <a:avLst/>
@@ -5695,7 +5422,7 @@
               </a:lnSpc>
             </a:pPr>
             <a:r>
-              <a:rPr sz="850" b="0">
+              <a:rPr sz="819" b="0">
                 <a:solidFill>
                   <a:srgbClr val="8C8C8C"/>
                 </a:solidFill>
@@ -5703,7 +5430,90 @@
                 <a:ea typeface="微软雅黑"/>
                 <a:cs typeface="Arial"/>
               </a:rPr>
-              <a:t>口径：readStatus × EpcLog 按箱窗口对齐；读全 6 个＝一箱 6 个整机标签都在窗口内读到。四个在产组合占 83,706 箱（74%）；AX7771 / AX7513 本线未生产，7907 的背壳 MES 未标注，实测只能到机型级。</a:t>
+              <a:t>口径：readStatus × EpcLog 按箱窗口对齐；读全 6 个＝一箱 6 个整机标签都在窗口内读到。四个在产组合占 83,706 箱（74%）；7907 的背壳 MES 未标注，实测只能到机型级。</a:t>
+            </a:r>
+          </a:p>
+        </p:txBody>
+      </p:sp>
+      <p:pic>
+        <p:nvPicPr>
+          <p:cNvPr id="24" name="S5_fig" descr="fig_reader_layout.png"/>
+          <p:cNvPicPr>
+            <a:picLocks noChangeAspect="1"/>
+          </p:cNvPicPr>
+          <p:nvPr/>
+        </p:nvPicPr>
+        <p:blipFill>
+          <a:blip r:embed="rId3"/>
+          <a:stretch>
+            <a:fillRect/>
+          </a:stretch>
+        </p:blipFill>
+        <p:spPr>
+          <a:xfrm>
+            <a:off x="548640" y="2852928"/>
+            <a:ext cx="1685259" cy="2487168"/>
+          </a:xfrm>
+          <a:prstGeom prst="rect">
+            <a:avLst/>
+          </a:prstGeom>
+        </p:spPr>
+      </p:pic>
+      <p:sp>
+        <p:nvSpPr>
+          <p:cNvPr id="25" name="S5_cap"/>
+          <p:cNvSpPr txBox="1"/>
+          <p:nvPr/>
+        </p:nvSpPr>
+        <p:spPr>
+          <a:xfrm>
+            <a:off x="566928" y="5440680"/>
+            <a:ext cx="1700784" cy="310896"/>
+          </a:xfrm>
+          <a:prstGeom prst="rect">
+            <a:avLst/>
+          </a:prstGeom>
+          <a:noFill/>
+        </p:spPr>
+        <p:txBody>
+          <a:bodyPr wrap="square" lIns="0" rIns="0" tIns="0" bIns="0">
+            <a:spAutoFit/>
+          </a:bodyPr>
+          <a:lstStyle/>
+          <a:p>
+            <a:pPr>
+              <a:lnSpc>
+                <a:spcPct val="105000"/>
+              </a:lnSpc>
+            </a:pPr>
+            <a:r>
+              <a:rPr sz="760" b="1">
+                <a:solidFill>
+                  <a:srgbClr val="1A1A1A"/>
+                </a:solidFill>
+                <a:latin typeface="Arial"/>
+                <a:ea typeface="微软雅黑"/>
+                <a:cs typeface="Arial"/>
+              </a:rPr>
+              <a:t>读取方式（现网）</a:t>
+            </a:r>
+          </a:p>
+          <a:p>
+            <a:pPr>
+              <a:lnSpc>
+                <a:spcPct val="105000"/>
+              </a:lnSpc>
+            </a:pPr>
+            <a:r>
+              <a:rPr sz="760" b="0">
+                <a:solidFill>
+                  <a:srgbClr val="8C8C8C"/>
+                </a:solidFill>
+                <a:latin typeface="Arial"/>
+                <a:ea typeface="微软雅黑"/>
+                <a:cs typeface="Arial"/>
+              </a:rPr>
+              <a:t>正立 · 顶部 + 左侧天线</a:t>
             </a:r>
           </a:p>
         </p:txBody>
@@ -6241,2295 +6051,6 @@
                 <a:cs typeface="Arial"/>
               </a:rPr>
               <a:t>8. 价格、交期、现场调试支持？</a:t>
-            </a:r>
-          </a:p>
-        </p:txBody>
-      </p:sp>
-    </p:spTree>
-  </p:cSld>
-  <p:clrMapOvr>
-    <a:masterClrMapping/>
-  </p:clrMapOvr>
-</p:sld>
-</file>
-
-<file path=ppt/slides/slide12.xml><?xml version="1.0" encoding="utf-8"?>
-<p:sld xmlns:a="http://schemas.openxmlformats.org/drawingml/2006/main" xmlns:p="http://schemas.openxmlformats.org/presentationml/2006/main" xmlns:r="http://schemas.openxmlformats.org/officeDocument/2006/relationships">
-  <p:cSld>
-    <p:spTree>
-      <p:nvGrpSpPr>
-        <p:cNvPr id="1" name=""/>
-        <p:cNvGrpSpPr/>
-        <p:nvPr/>
-      </p:nvGrpSpPr>
-      <p:grpSpPr/>
-      <p:sp>
-        <p:nvSpPr>
-          <p:cNvPr id="2" name="S10_title"/>
-          <p:cNvSpPr txBox="1"/>
-          <p:nvPr/>
-        </p:nvSpPr>
-        <p:spPr>
-          <a:xfrm>
-            <a:off x="566928" y="365760"/>
-            <a:ext cx="11057839" cy="502920"/>
-          </a:xfrm>
-          <a:prstGeom prst="rect">
-            <a:avLst/>
-          </a:prstGeom>
-          <a:noFill/>
-        </p:spPr>
-        <p:txBody>
-          <a:bodyPr wrap="square" anchor="t" lIns="0" rIns="0" tIns="0" bIns="0">
-            <a:spAutoFit/>
-          </a:bodyPr>
-          <a:lstStyle/>
-          <a:p>
-            <a:pPr algn="l">
-              <a:lnSpc>
-                <a:spcPct val="100000"/>
-              </a:lnSpc>
-            </a:pPr>
-            <a:r>
-              <a:rPr sz="2200" b="1">
-                <a:solidFill>
-                  <a:srgbClr val="1A1A1A"/>
-                </a:solidFill>
-                <a:latin typeface="Arial"/>
-                <a:ea typeface="微软雅黑"/>
-                <a:cs typeface="Arial"/>
-              </a:rPr>
-              <a:t>包装机型口径：KKE / N-KKE × 背壳 —— 厂家不能混在包装里比</a:t>
-            </a:r>
-          </a:p>
-        </p:txBody>
-      </p:sp>
-      <p:sp>
-        <p:nvSpPr>
-          <p:cNvPr id="3" name="S10_kick"/>
-          <p:cNvSpPr txBox="1"/>
-          <p:nvPr/>
-        </p:nvSpPr>
-        <p:spPr>
-          <a:xfrm>
-            <a:off x="566928" y="877824"/>
-            <a:ext cx="11057839" cy="274320"/>
-          </a:xfrm>
-          <a:prstGeom prst="rect">
-            <a:avLst/>
-          </a:prstGeom>
-          <a:noFill/>
-        </p:spPr>
-        <p:txBody>
-          <a:bodyPr wrap="square" anchor="t" lIns="0" rIns="0" tIns="0" bIns="0">
-            <a:spAutoFit/>
-          </a:bodyPr>
-          <a:lstStyle/>
-          <a:p>
-            <a:pPr algn="l">
-              <a:lnSpc>
-                <a:spcPct val="100000"/>
-              </a:lnSpc>
-            </a:pPr>
-            <a:r>
-              <a:rPr sz="980" b="0">
-                <a:solidFill>
-                  <a:srgbClr val="8C8C8C"/>
-                </a:solidFill>
-                <a:latin typeface="Arial"/>
-                <a:ea typeface="微软雅黑"/>
-                <a:cs typeface="Arial"/>
-              </a:rPr>
-              <a:t>经理 10-23 口径：金属背壳版标签贴中框、塑料背壳版贴背壳；KKE＝带卡通保护壳、N-KKE＝只有平板本身。条件 9 dBi / 箱面 10 cm / 姿态 A1，数值为模型预测</a:t>
-            </a:r>
-          </a:p>
-        </p:txBody>
-      </p:sp>
-      <p:cxnSp>
-        <p:nvCxnSpPr>
-          <p:cNvPr id="4" name="S10_line"/>
-          <p:cNvCxnSpPr/>
-          <p:nvPr/>
-        </p:nvCxnSpPr>
-        <p:spPr>
-          <a:xfrm>
-            <a:off x="566928" y="1207008"/>
-            <a:ext cx="11057839" cy="0"/>
-          </a:xfrm>
-          <a:prstGeom prst="line">
-            <a:avLst/>
-          </a:prstGeom>
-          <a:ln w="9525">
-            <a:solidFill>
-              <a:srgbClr val="D9D9D9"/>
-            </a:solidFill>
-          </a:ln>
-        </p:spPr>
-        <p:style>
-          <a:lnRef idx="2">
-            <a:schemeClr val="accent1"/>
-          </a:lnRef>
-          <a:fillRef idx="0">
-            <a:schemeClr val="accent1"/>
-          </a:fillRef>
-          <a:effectRef idx="1">
-            <a:schemeClr val="accent1"/>
-          </a:effectRef>
-          <a:fontRef idx="minor">
-            <a:schemeClr val="tx1"/>
-          </a:fontRef>
-        </p:style>
-      </p:cxnSp>
-      <p:graphicFrame>
-        <p:nvGraphicFramePr>
-          <p:cNvPr id="5" name="S10_table"/>
-          <p:cNvGraphicFramePr>
-            <a:graphicFrameLocks noGrp="1"/>
-          </p:cNvGraphicFramePr>
-          <p:nvPr/>
-        </p:nvGraphicFramePr>
-        <p:xfrm>
-          <a:off x="566928" y="1335024"/>
-          <a:ext cx="5989316" cy="1920240"/>
-        </p:xfrm>
-        <a:graphic>
-          <a:graphicData uri="http://schemas.openxmlformats.org/drawingml/2006/table">
-            <a:tbl>
-              <a:tblPr/>
-              <a:tblGrid>
-                <a:gridCol w="1523909"/>
-                <a:gridCol w="691075"/>
-                <a:gridCol w="903713"/>
-                <a:gridCol w="903713"/>
-                <a:gridCol w="637915"/>
-                <a:gridCol w="1328991"/>
-              </a:tblGrid>
-              <a:tr h="384048">
-                <a:tc>
-                  <a:txBody>
-                    <a:bodyPr/>
-                    <a:lstStyle/>
-                    <a:p>
-                      <a:pPr algn="l">
-                        <a:lnSpc>
-                          <a:spcPct val="100000"/>
-                        </a:lnSpc>
-                      </a:pPr>
-                      <a:r>
-                        <a:rPr sz="800" b="1">
-                          <a:solidFill>
-                            <a:srgbClr val="1A1A1A"/>
-                          </a:solidFill>
-                          <a:latin typeface="Arial"/>
-                          <a:ea typeface="微软雅黑"/>
-                          <a:cs typeface="Arial"/>
-                        </a:rPr>
-                        <a:t>包装机型</a:t>
-                      </a:r>
-                    </a:p>
-                  </a:txBody>
-                  <a:tcPr marL="45720" marR="45720" marT="9144" marB="9144" anchor="ctr">
-                    <a:lnL w="9525" cap="flat" cmpd="sng" algn="ctr">
-                      <a:solidFill>
-                        <a:srgbClr val="D9D9D9"/>
-                      </a:solidFill>
-                      <a:prstDash val="solid"/>
-                    </a:lnL>
-                    <a:lnR w="9525" cap="flat" cmpd="sng" algn="ctr">
-                      <a:solidFill>
-                        <a:srgbClr val="D9D9D9"/>
-                      </a:solidFill>
-                      <a:prstDash val="solid"/>
-                    </a:lnR>
-                    <a:lnT w="9525" cap="flat" cmpd="sng" algn="ctr">
-                      <a:solidFill>
-                        <a:srgbClr val="D9D9D9"/>
-                      </a:solidFill>
-                      <a:prstDash val="solid"/>
-                    </a:lnT>
-                    <a:lnB w="9525" cap="flat" cmpd="sng" algn="ctr">
-                      <a:solidFill>
-                        <a:srgbClr val="D9D9D9"/>
-                      </a:solidFill>
-                      <a:prstDash val="solid"/>
-                    </a:lnB>
-                    <a:solidFill>
-                      <a:srgbClr val="F2F2F2"/>
-                    </a:solidFill>
-                  </a:tcPr>
-                </a:tc>
-                <a:tc>
-                  <a:txBody>
-                    <a:bodyPr/>
-                    <a:lstStyle/>
-                    <a:p>
-                      <a:pPr algn="ctr">
-                        <a:lnSpc>
-                          <a:spcPct val="100000"/>
-                        </a:lnSpc>
-                      </a:pPr>
-                      <a:r>
-                        <a:rPr sz="800" b="1">
-                          <a:solidFill>
-                            <a:srgbClr val="1A1A1A"/>
-                          </a:solidFill>
-                          <a:latin typeface="Arial"/>
-                          <a:ea typeface="微软雅黑"/>
-                          <a:cs typeface="Arial"/>
-                        </a:rPr>
-                        <a:t>标签位置</a:t>
-                      </a:r>
-                    </a:p>
-                  </a:txBody>
-                  <a:tcPr marL="45720" marR="45720" marT="9144" marB="9144" anchor="ctr">
-                    <a:lnL w="9525" cap="flat" cmpd="sng" algn="ctr">
-                      <a:solidFill>
-                        <a:srgbClr val="D9D9D9"/>
-                      </a:solidFill>
-                      <a:prstDash val="solid"/>
-                    </a:lnL>
-                    <a:lnR w="9525" cap="flat" cmpd="sng" algn="ctr">
-                      <a:solidFill>
-                        <a:srgbClr val="D9D9D9"/>
-                      </a:solidFill>
-                      <a:prstDash val="solid"/>
-                    </a:lnR>
-                    <a:lnT w="9525" cap="flat" cmpd="sng" algn="ctr">
-                      <a:solidFill>
-                        <a:srgbClr val="D9D9D9"/>
-                      </a:solidFill>
-                      <a:prstDash val="solid"/>
-                    </a:lnT>
-                    <a:lnB w="9525" cap="flat" cmpd="sng" algn="ctr">
-                      <a:solidFill>
-                        <a:srgbClr val="D9D9D9"/>
-                      </a:solidFill>
-                      <a:prstDash val="solid"/>
-                    </a:lnB>
-                    <a:solidFill>
-                      <a:srgbClr val="F2F2F2"/>
-                    </a:solidFill>
-                  </a:tcPr>
-                </a:tc>
-                <a:tc>
-                  <a:txBody>
-                    <a:bodyPr/>
-                    <a:lstStyle/>
-                    <a:p>
-                      <a:pPr algn="ctr">
-                        <a:lnSpc>
-                          <a:spcPct val="100000"/>
-                        </a:lnSpc>
-                      </a:pPr>
-                      <a:r>
-                        <a:rPr sz="800" b="1">
-                          <a:solidFill>
-                            <a:srgbClr val="1A1A1A"/>
-                          </a:solidFill>
-                          <a:latin typeface="Arial"/>
-                          <a:ea typeface="微软雅黑"/>
-                          <a:cs typeface="Arial"/>
-                        </a:rPr>
-                        <a:t>下置 读全/6</a:t>
-                      </a:r>
-                    </a:p>
-                  </a:txBody>
-                  <a:tcPr marL="45720" marR="45720" marT="9144" marB="9144" anchor="ctr">
-                    <a:lnL w="9525" cap="flat" cmpd="sng" algn="ctr">
-                      <a:solidFill>
-                        <a:srgbClr val="D9D9D9"/>
-                      </a:solidFill>
-                      <a:prstDash val="solid"/>
-                    </a:lnL>
-                    <a:lnR w="9525" cap="flat" cmpd="sng" algn="ctr">
-                      <a:solidFill>
-                        <a:srgbClr val="D9D9D9"/>
-                      </a:solidFill>
-                      <a:prstDash val="solid"/>
-                    </a:lnR>
-                    <a:lnT w="9525" cap="flat" cmpd="sng" algn="ctr">
-                      <a:solidFill>
-                        <a:srgbClr val="D9D9D9"/>
-                      </a:solidFill>
-                      <a:prstDash val="solid"/>
-                    </a:lnT>
-                    <a:lnB w="9525" cap="flat" cmpd="sng" algn="ctr">
-                      <a:solidFill>
-                        <a:srgbClr val="D9D9D9"/>
-                      </a:solidFill>
-                      <a:prstDash val="solid"/>
-                    </a:lnB>
-                    <a:solidFill>
-                      <a:srgbClr val="F2F2F2"/>
-                    </a:solidFill>
-                  </a:tcPr>
-                </a:tc>
-                <a:tc>
-                  <a:txBody>
-                    <a:bodyPr/>
-                    <a:lstStyle/>
-                    <a:p>
-                      <a:pPr algn="ctr">
-                        <a:lnSpc>
-                          <a:spcPct val="100000"/>
-                        </a:lnSpc>
-                      </a:pPr>
-                      <a:r>
-                        <a:rPr sz="800" b="1">
-                          <a:solidFill>
-                            <a:srgbClr val="1A1A1A"/>
-                          </a:solidFill>
-                          <a:latin typeface="Arial"/>
-                          <a:ea typeface="微软雅黑"/>
-                          <a:cs typeface="Arial"/>
-                        </a:rPr>
-                        <a:t>侧向 读全/6</a:t>
-                      </a:r>
-                    </a:p>
-                  </a:txBody>
-                  <a:tcPr marL="45720" marR="45720" marT="9144" marB="9144" anchor="ctr">
-                    <a:lnL w="9525" cap="flat" cmpd="sng" algn="ctr">
-                      <a:solidFill>
-                        <a:srgbClr val="D9D9D9"/>
-                      </a:solidFill>
-                      <a:prstDash val="solid"/>
-                    </a:lnL>
-                    <a:lnR w="9525" cap="flat" cmpd="sng" algn="ctr">
-                      <a:solidFill>
-                        <a:srgbClr val="D9D9D9"/>
-                      </a:solidFill>
-                      <a:prstDash val="solid"/>
-                    </a:lnR>
-                    <a:lnT w="9525" cap="flat" cmpd="sng" algn="ctr">
-                      <a:solidFill>
-                        <a:srgbClr val="D9D9D9"/>
-                      </a:solidFill>
-                      <a:prstDash val="solid"/>
-                    </a:lnT>
-                    <a:lnB w="9525" cap="flat" cmpd="sng" algn="ctr">
-                      <a:solidFill>
-                        <a:srgbClr val="D9D9D9"/>
-                      </a:solidFill>
-                      <a:prstDash val="solid"/>
-                    </a:lnB>
-                    <a:solidFill>
-                      <a:srgbClr val="F2F2F2"/>
-                    </a:solidFill>
-                  </a:tcPr>
-                </a:tc>
-                <a:tc>
-                  <a:txBody>
-                    <a:bodyPr/>
-                    <a:lstStyle/>
-                    <a:p>
-                      <a:pPr algn="ctr">
-                        <a:lnSpc>
-                          <a:spcPct val="100000"/>
-                        </a:lnSpc>
-                      </a:pPr>
-                      <a:r>
-                        <a:rPr sz="800" b="1">
-                          <a:solidFill>
-                            <a:srgbClr val="1A1A1A"/>
-                          </a:solidFill>
-                          <a:latin typeface="Arial"/>
-                          <a:ea typeface="微软雅黑"/>
-                          <a:cs typeface="Arial"/>
-                        </a:rPr>
-                        <a:t>推荐</a:t>
-                      </a:r>
-                    </a:p>
-                  </a:txBody>
-                  <a:tcPr marL="45720" marR="45720" marT="9144" marB="9144" anchor="ctr">
-                    <a:lnL w="9525" cap="flat" cmpd="sng" algn="ctr">
-                      <a:solidFill>
-                        <a:srgbClr val="D9D9D9"/>
-                      </a:solidFill>
-                      <a:prstDash val="solid"/>
-                    </a:lnL>
-                    <a:lnR w="9525" cap="flat" cmpd="sng" algn="ctr">
-                      <a:solidFill>
-                        <a:srgbClr val="D9D9D9"/>
-                      </a:solidFill>
-                      <a:prstDash val="solid"/>
-                    </a:lnR>
-                    <a:lnT w="9525" cap="flat" cmpd="sng" algn="ctr">
-                      <a:solidFill>
-                        <a:srgbClr val="D9D9D9"/>
-                      </a:solidFill>
-                      <a:prstDash val="solid"/>
-                    </a:lnT>
-                    <a:lnB w="9525" cap="flat" cmpd="sng" algn="ctr">
-                      <a:solidFill>
-                        <a:srgbClr val="D9D9D9"/>
-                      </a:solidFill>
-                      <a:prstDash val="solid"/>
-                    </a:lnB>
-                    <a:solidFill>
-                      <a:srgbClr val="F2F2F2"/>
-                    </a:solidFill>
-                  </a:tcPr>
-                </a:tc>
-                <a:tc>
-                  <a:txBody>
-                    <a:bodyPr/>
-                    <a:lstStyle/>
-                    <a:p>
-                      <a:pPr algn="ctr">
-                        <a:lnSpc>
-                          <a:spcPct val="100000"/>
-                        </a:lnSpc>
-                      </a:pPr>
-                      <a:r>
-                        <a:rPr sz="800" b="1">
-                          <a:solidFill>
-                            <a:srgbClr val="1A1A1A"/>
-                          </a:solidFill>
-                          <a:latin typeface="Arial"/>
-                          <a:ea typeface="微软雅黑"/>
-                          <a:cs typeface="Arial"/>
-                        </a:rPr>
-                        <a:t>7″ 大件
-下置 / 侧向</a:t>
-                      </a:r>
-                    </a:p>
-                  </a:txBody>
-                  <a:tcPr marL="45720" marR="45720" marT="9144" marB="9144" anchor="ctr">
-                    <a:lnL w="9525" cap="flat" cmpd="sng" algn="ctr">
-                      <a:solidFill>
-                        <a:srgbClr val="D9D9D9"/>
-                      </a:solidFill>
-                      <a:prstDash val="solid"/>
-                    </a:lnL>
-                    <a:lnR w="9525" cap="flat" cmpd="sng" algn="ctr">
-                      <a:solidFill>
-                        <a:srgbClr val="D9D9D9"/>
-                      </a:solidFill>
-                      <a:prstDash val="solid"/>
-                    </a:lnR>
-                    <a:lnT w="9525" cap="flat" cmpd="sng" algn="ctr">
-                      <a:solidFill>
-                        <a:srgbClr val="D9D9D9"/>
-                      </a:solidFill>
-                      <a:prstDash val="solid"/>
-                    </a:lnT>
-                    <a:lnB w="9525" cap="flat" cmpd="sng" algn="ctr">
-                      <a:solidFill>
-                        <a:srgbClr val="D9D9D9"/>
-                      </a:solidFill>
-                      <a:prstDash val="solid"/>
-                    </a:lnB>
-                    <a:solidFill>
-                      <a:srgbClr val="F2F2F2"/>
-                    </a:solidFill>
-                  </a:tcPr>
-                </a:tc>
-              </a:tr>
-              <a:tr h="384048">
-                <a:tc>
-                  <a:txBody>
-                    <a:bodyPr/>
-                    <a:lstStyle/>
-                    <a:p>
-                      <a:pPr algn="l">
-                        <a:lnSpc>
-                          <a:spcPct val="100000"/>
-                        </a:lnSpc>
-                      </a:pPr>
-                      <a:r>
-                        <a:rPr sz="919" b="1">
-                          <a:solidFill>
-                            <a:srgbClr val="1A1A1A"/>
-                          </a:solidFill>
-                          <a:latin typeface="Arial"/>
-                          <a:ea typeface="微软雅黑"/>
-                          <a:cs typeface="Arial"/>
-                        </a:rPr>
-                        <a:t>N-KKE-塑料</a:t>
-                      </a:r>
-                    </a:p>
-                  </a:txBody>
-                  <a:tcPr marL="45720" marR="45720" marT="9144" marB="9144" anchor="ctr">
-                    <a:lnL w="9525" cap="flat" cmpd="sng" algn="ctr">
-                      <a:solidFill>
-                        <a:srgbClr val="D9D9D9"/>
-                      </a:solidFill>
-                      <a:prstDash val="solid"/>
-                    </a:lnL>
-                    <a:lnR w="9525" cap="flat" cmpd="sng" algn="ctr">
-                      <a:solidFill>
-                        <a:srgbClr val="D9D9D9"/>
-                      </a:solidFill>
-                      <a:prstDash val="solid"/>
-                    </a:lnR>
-                    <a:lnT w="9525" cap="flat" cmpd="sng" algn="ctr">
-                      <a:solidFill>
-                        <a:srgbClr val="D9D9D9"/>
-                      </a:solidFill>
-                      <a:prstDash val="solid"/>
-                    </a:lnT>
-                    <a:lnB w="9525" cap="flat" cmpd="sng" algn="ctr">
-                      <a:solidFill>
-                        <a:srgbClr val="D9D9D9"/>
-                      </a:solidFill>
-                      <a:prstDash val="solid"/>
-                    </a:lnB>
-                    <a:solidFill>
-                      <a:srgbClr val="FFFFFF"/>
-                    </a:solidFill>
-                  </a:tcPr>
-                </a:tc>
-                <a:tc>
-                  <a:txBody>
-                    <a:bodyPr/>
-                    <a:lstStyle/>
-                    <a:p>
-                      <a:pPr algn="ctr">
-                        <a:lnSpc>
-                          <a:spcPct val="100000"/>
-                        </a:lnSpc>
-                      </a:pPr>
-                      <a:r>
-                        <a:rPr sz="919" b="0">
-                          <a:solidFill>
-                            <a:srgbClr val="1A1A1A"/>
-                          </a:solidFill>
-                          <a:latin typeface="Arial"/>
-                          <a:ea typeface="微软雅黑"/>
-                          <a:cs typeface="Arial"/>
-                        </a:rPr>
-                        <a:t>背壳</a:t>
-                      </a:r>
-                    </a:p>
-                  </a:txBody>
-                  <a:tcPr marL="45720" marR="45720" marT="9144" marB="9144" anchor="ctr">
-                    <a:lnL w="9525" cap="flat" cmpd="sng" algn="ctr">
-                      <a:solidFill>
-                        <a:srgbClr val="D9D9D9"/>
-                      </a:solidFill>
-                      <a:prstDash val="solid"/>
-                    </a:lnL>
-                    <a:lnR w="9525" cap="flat" cmpd="sng" algn="ctr">
-                      <a:solidFill>
-                        <a:srgbClr val="D9D9D9"/>
-                      </a:solidFill>
-                      <a:prstDash val="solid"/>
-                    </a:lnR>
-                    <a:lnT w="9525" cap="flat" cmpd="sng" algn="ctr">
-                      <a:solidFill>
-                        <a:srgbClr val="D9D9D9"/>
-                      </a:solidFill>
-                      <a:prstDash val="solid"/>
-                    </a:lnT>
-                    <a:lnB w="9525" cap="flat" cmpd="sng" algn="ctr">
-                      <a:solidFill>
-                        <a:srgbClr val="D9D9D9"/>
-                      </a:solidFill>
-                      <a:prstDash val="solid"/>
-                    </a:lnB>
-                    <a:solidFill>
-                      <a:srgbClr val="FFFFFF"/>
-                    </a:solidFill>
-                  </a:tcPr>
-                </a:tc>
-                <a:tc>
-                  <a:txBody>
-                    <a:bodyPr/>
-                    <a:lstStyle/>
-                    <a:p>
-                      <a:pPr algn="ctr">
-                        <a:lnSpc>
-                          <a:spcPct val="100000"/>
-                        </a:lnSpc>
-                      </a:pPr>
-                      <a:r>
-                        <a:rPr sz="960" b="1">
-                          <a:solidFill>
-                            <a:srgbClr val="3E5DA8"/>
-                          </a:solidFill>
-                          <a:latin typeface="Arial"/>
-                          <a:ea typeface="微软雅黑"/>
-                          <a:cs typeface="Arial"/>
-                        </a:rPr>
-                        <a:t>5.99</a:t>
-                      </a:r>
-                    </a:p>
-                  </a:txBody>
-                  <a:tcPr marL="45720" marR="45720" marT="9144" marB="9144" anchor="ctr">
-                    <a:lnL w="9525" cap="flat" cmpd="sng" algn="ctr">
-                      <a:solidFill>
-                        <a:srgbClr val="D9D9D9"/>
-                      </a:solidFill>
-                      <a:prstDash val="solid"/>
-                    </a:lnL>
-                    <a:lnR w="9525" cap="flat" cmpd="sng" algn="ctr">
-                      <a:solidFill>
-                        <a:srgbClr val="D9D9D9"/>
-                      </a:solidFill>
-                      <a:prstDash val="solid"/>
-                    </a:lnR>
-                    <a:lnT w="9525" cap="flat" cmpd="sng" algn="ctr">
-                      <a:solidFill>
-                        <a:srgbClr val="D9D9D9"/>
-                      </a:solidFill>
-                      <a:prstDash val="solid"/>
-                    </a:lnT>
-                    <a:lnB w="9525" cap="flat" cmpd="sng" algn="ctr">
-                      <a:solidFill>
-                        <a:srgbClr val="D9D9D9"/>
-                      </a:solidFill>
-                      <a:prstDash val="solid"/>
-                    </a:lnB>
-                    <a:solidFill>
-                      <a:srgbClr val="FFFFFF"/>
-                    </a:solidFill>
-                  </a:tcPr>
-                </a:tc>
-                <a:tc>
-                  <a:txBody>
-                    <a:bodyPr/>
-                    <a:lstStyle/>
-                    <a:p>
-                      <a:pPr algn="ctr">
-                        <a:lnSpc>
-                          <a:spcPct val="100000"/>
-                        </a:lnSpc>
-                      </a:pPr>
-                      <a:r>
-                        <a:rPr sz="919" b="0">
-                          <a:solidFill>
-                            <a:srgbClr val="1A1A1A"/>
-                          </a:solidFill>
-                          <a:latin typeface="Arial"/>
-                          <a:ea typeface="微软雅黑"/>
-                          <a:cs typeface="Arial"/>
-                        </a:rPr>
-                        <a:t>5.06</a:t>
-                      </a:r>
-                    </a:p>
-                  </a:txBody>
-                  <a:tcPr marL="45720" marR="45720" marT="9144" marB="9144" anchor="ctr">
-                    <a:lnL w="9525" cap="flat" cmpd="sng" algn="ctr">
-                      <a:solidFill>
-                        <a:srgbClr val="D9D9D9"/>
-                      </a:solidFill>
-                      <a:prstDash val="solid"/>
-                    </a:lnL>
-                    <a:lnR w="9525" cap="flat" cmpd="sng" algn="ctr">
-                      <a:solidFill>
-                        <a:srgbClr val="D9D9D9"/>
-                      </a:solidFill>
-                      <a:prstDash val="solid"/>
-                    </a:lnR>
-                    <a:lnT w="9525" cap="flat" cmpd="sng" algn="ctr">
-                      <a:solidFill>
-                        <a:srgbClr val="D9D9D9"/>
-                      </a:solidFill>
-                      <a:prstDash val="solid"/>
-                    </a:lnT>
-                    <a:lnB w="9525" cap="flat" cmpd="sng" algn="ctr">
-                      <a:solidFill>
-                        <a:srgbClr val="D9D9D9"/>
-                      </a:solidFill>
-                      <a:prstDash val="solid"/>
-                    </a:lnB>
-                    <a:solidFill>
-                      <a:srgbClr val="FFFFFF"/>
-                    </a:solidFill>
-                  </a:tcPr>
-                </a:tc>
-                <a:tc>
-                  <a:txBody>
-                    <a:bodyPr/>
-                    <a:lstStyle/>
-                    <a:p>
-                      <a:pPr algn="ctr">
-                        <a:lnSpc>
-                          <a:spcPct val="100000"/>
-                        </a:lnSpc>
-                      </a:pPr>
-                      <a:r>
-                        <a:rPr sz="900" b="1">
-                          <a:solidFill>
-                            <a:srgbClr val="3E5DA8"/>
-                          </a:solidFill>
-                          <a:latin typeface="Arial"/>
-                          <a:ea typeface="微软雅黑"/>
-                          <a:cs typeface="Arial"/>
-                        </a:rPr>
-                        <a:t>下置</a:t>
-                      </a:r>
-                    </a:p>
-                  </a:txBody>
-                  <a:tcPr marL="45720" marR="45720" marT="9144" marB="9144" anchor="ctr">
-                    <a:lnL w="9525" cap="flat" cmpd="sng" algn="ctr">
-                      <a:solidFill>
-                        <a:srgbClr val="D9D9D9"/>
-                      </a:solidFill>
-                      <a:prstDash val="solid"/>
-                    </a:lnL>
-                    <a:lnR w="9525" cap="flat" cmpd="sng" algn="ctr">
-                      <a:solidFill>
-                        <a:srgbClr val="D9D9D9"/>
-                      </a:solidFill>
-                      <a:prstDash val="solid"/>
-                    </a:lnR>
-                    <a:lnT w="9525" cap="flat" cmpd="sng" algn="ctr">
-                      <a:solidFill>
-                        <a:srgbClr val="D9D9D9"/>
-                      </a:solidFill>
-                      <a:prstDash val="solid"/>
-                    </a:lnT>
-                    <a:lnB w="9525" cap="flat" cmpd="sng" algn="ctr">
-                      <a:solidFill>
-                        <a:srgbClr val="D9D9D9"/>
-                      </a:solidFill>
-                      <a:prstDash val="solid"/>
-                    </a:lnB>
-                    <a:solidFill>
-                      <a:srgbClr val="FFFFFF"/>
-                    </a:solidFill>
-                  </a:tcPr>
-                </a:tc>
-                <a:tc>
-                  <a:txBody>
-                    <a:bodyPr/>
-                    <a:lstStyle/>
-                    <a:p>
-                      <a:pPr algn="ctr">
-                        <a:lnSpc>
-                          <a:spcPct val="100000"/>
-                        </a:lnSpc>
-                      </a:pPr>
-                      <a:r>
-                        <a:rPr sz="919" b="0">
-                          <a:solidFill>
-                            <a:srgbClr val="1A1A1A"/>
-                          </a:solidFill>
-                          <a:latin typeface="Arial"/>
-                          <a:ea typeface="微软雅黑"/>
-                          <a:cs typeface="Arial"/>
-                        </a:rPr>
-                        <a:t>5.92 / 3.34</a:t>
-                      </a:r>
-                    </a:p>
-                  </a:txBody>
-                  <a:tcPr marL="45720" marR="45720" marT="9144" marB="9144" anchor="ctr">
-                    <a:lnL w="9525" cap="flat" cmpd="sng" algn="ctr">
-                      <a:solidFill>
-                        <a:srgbClr val="D9D9D9"/>
-                      </a:solidFill>
-                      <a:prstDash val="solid"/>
-                    </a:lnL>
-                    <a:lnR w="9525" cap="flat" cmpd="sng" algn="ctr">
-                      <a:solidFill>
-                        <a:srgbClr val="D9D9D9"/>
-                      </a:solidFill>
-                      <a:prstDash val="solid"/>
-                    </a:lnR>
-                    <a:lnT w="9525" cap="flat" cmpd="sng" algn="ctr">
-                      <a:solidFill>
-                        <a:srgbClr val="D9D9D9"/>
-                      </a:solidFill>
-                      <a:prstDash val="solid"/>
-                    </a:lnT>
-                    <a:lnB w="9525" cap="flat" cmpd="sng" algn="ctr">
-                      <a:solidFill>
-                        <a:srgbClr val="D9D9D9"/>
-                      </a:solidFill>
-                      <a:prstDash val="solid"/>
-                    </a:lnB>
-                    <a:solidFill>
-                      <a:srgbClr val="FFFFFF"/>
-                    </a:solidFill>
-                  </a:tcPr>
-                </a:tc>
-              </a:tr>
-              <a:tr h="384048">
-                <a:tc>
-                  <a:txBody>
-                    <a:bodyPr/>
-                    <a:lstStyle/>
-                    <a:p>
-                      <a:pPr algn="l">
-                        <a:lnSpc>
-                          <a:spcPct val="100000"/>
-                        </a:lnSpc>
-                      </a:pPr>
-                      <a:r>
-                        <a:rPr sz="919" b="1">
-                          <a:solidFill>
-                            <a:srgbClr val="1A1A1A"/>
-                          </a:solidFill>
-                          <a:latin typeface="Arial"/>
-                          <a:ea typeface="微软雅黑"/>
-                          <a:cs typeface="Arial"/>
-                        </a:rPr>
-                        <a:t>N-KKE-金属</a:t>
-                      </a:r>
-                    </a:p>
-                  </a:txBody>
-                  <a:tcPr marL="45720" marR="45720" marT="9144" marB="9144" anchor="ctr">
-                    <a:lnL w="9525" cap="flat" cmpd="sng" algn="ctr">
-                      <a:solidFill>
-                        <a:srgbClr val="D9D9D9"/>
-                      </a:solidFill>
-                      <a:prstDash val="solid"/>
-                    </a:lnL>
-                    <a:lnR w="9525" cap="flat" cmpd="sng" algn="ctr">
-                      <a:solidFill>
-                        <a:srgbClr val="D9D9D9"/>
-                      </a:solidFill>
-                      <a:prstDash val="solid"/>
-                    </a:lnR>
-                    <a:lnT w="9525" cap="flat" cmpd="sng" algn="ctr">
-                      <a:solidFill>
-                        <a:srgbClr val="D9D9D9"/>
-                      </a:solidFill>
-                      <a:prstDash val="solid"/>
-                    </a:lnT>
-                    <a:lnB w="9525" cap="flat" cmpd="sng" algn="ctr">
-                      <a:solidFill>
-                        <a:srgbClr val="D9D9D9"/>
-                      </a:solidFill>
-                      <a:prstDash val="solid"/>
-                    </a:lnB>
-                    <a:solidFill>
-                      <a:srgbClr val="FFFFFF"/>
-                    </a:solidFill>
-                  </a:tcPr>
-                </a:tc>
-                <a:tc>
-                  <a:txBody>
-                    <a:bodyPr/>
-                    <a:lstStyle/>
-                    <a:p>
-                      <a:pPr algn="ctr">
-                        <a:lnSpc>
-                          <a:spcPct val="100000"/>
-                        </a:lnSpc>
-                      </a:pPr>
-                      <a:r>
-                        <a:rPr sz="919" b="0">
-                          <a:solidFill>
-                            <a:srgbClr val="1A1A1A"/>
-                          </a:solidFill>
-                          <a:latin typeface="Arial"/>
-                          <a:ea typeface="微软雅黑"/>
-                          <a:cs typeface="Arial"/>
-                        </a:rPr>
-                        <a:t>中框</a:t>
-                      </a:r>
-                    </a:p>
-                  </a:txBody>
-                  <a:tcPr marL="45720" marR="45720" marT="9144" marB="9144" anchor="ctr">
-                    <a:lnL w="9525" cap="flat" cmpd="sng" algn="ctr">
-                      <a:solidFill>
-                        <a:srgbClr val="D9D9D9"/>
-                      </a:solidFill>
-                      <a:prstDash val="solid"/>
-                    </a:lnL>
-                    <a:lnR w="9525" cap="flat" cmpd="sng" algn="ctr">
-                      <a:solidFill>
-                        <a:srgbClr val="D9D9D9"/>
-                      </a:solidFill>
-                      <a:prstDash val="solid"/>
-                    </a:lnR>
-                    <a:lnT w="9525" cap="flat" cmpd="sng" algn="ctr">
-                      <a:solidFill>
-                        <a:srgbClr val="D9D9D9"/>
-                      </a:solidFill>
-                      <a:prstDash val="solid"/>
-                    </a:lnT>
-                    <a:lnB w="9525" cap="flat" cmpd="sng" algn="ctr">
-                      <a:solidFill>
-                        <a:srgbClr val="D9D9D9"/>
-                      </a:solidFill>
-                      <a:prstDash val="solid"/>
-                    </a:lnB>
-                    <a:solidFill>
-                      <a:srgbClr val="FFFFFF"/>
-                    </a:solidFill>
-                  </a:tcPr>
-                </a:tc>
-                <a:tc>
-                  <a:txBody>
-                    <a:bodyPr/>
-                    <a:lstStyle/>
-                    <a:p>
-                      <a:pPr algn="ctr">
-                        <a:lnSpc>
-                          <a:spcPct val="100000"/>
-                        </a:lnSpc>
-                      </a:pPr>
-                      <a:r>
-                        <a:rPr sz="919" b="0">
-                          <a:solidFill>
-                            <a:srgbClr val="1A1A1A"/>
-                          </a:solidFill>
-                          <a:latin typeface="Arial"/>
-                          <a:ea typeface="微软雅黑"/>
-                          <a:cs typeface="Arial"/>
-                        </a:rPr>
-                        <a:t>3.05</a:t>
-                      </a:r>
-                    </a:p>
-                  </a:txBody>
-                  <a:tcPr marL="45720" marR="45720" marT="9144" marB="9144" anchor="ctr">
-                    <a:lnL w="9525" cap="flat" cmpd="sng" algn="ctr">
-                      <a:solidFill>
-                        <a:srgbClr val="D9D9D9"/>
-                      </a:solidFill>
-                      <a:prstDash val="solid"/>
-                    </a:lnL>
-                    <a:lnR w="9525" cap="flat" cmpd="sng" algn="ctr">
-                      <a:solidFill>
-                        <a:srgbClr val="D9D9D9"/>
-                      </a:solidFill>
-                      <a:prstDash val="solid"/>
-                    </a:lnR>
-                    <a:lnT w="9525" cap="flat" cmpd="sng" algn="ctr">
-                      <a:solidFill>
-                        <a:srgbClr val="D9D9D9"/>
-                      </a:solidFill>
-                      <a:prstDash val="solid"/>
-                    </a:lnT>
-                    <a:lnB w="9525" cap="flat" cmpd="sng" algn="ctr">
-                      <a:solidFill>
-                        <a:srgbClr val="D9D9D9"/>
-                      </a:solidFill>
-                      <a:prstDash val="solid"/>
-                    </a:lnB>
-                    <a:solidFill>
-                      <a:srgbClr val="FFFFFF"/>
-                    </a:solidFill>
-                  </a:tcPr>
-                </a:tc>
-                <a:tc>
-                  <a:txBody>
-                    <a:bodyPr/>
-                    <a:lstStyle/>
-                    <a:p>
-                      <a:pPr algn="ctr">
-                        <a:lnSpc>
-                          <a:spcPct val="100000"/>
-                        </a:lnSpc>
-                      </a:pPr>
-                      <a:r>
-                        <a:rPr sz="960" b="1">
-                          <a:solidFill>
-                            <a:srgbClr val="3E5DA8"/>
-                          </a:solidFill>
-                          <a:latin typeface="Arial"/>
-                          <a:ea typeface="微软雅黑"/>
-                          <a:cs typeface="Arial"/>
-                        </a:rPr>
-                        <a:t>5.73</a:t>
-                      </a:r>
-                    </a:p>
-                  </a:txBody>
-                  <a:tcPr marL="45720" marR="45720" marT="9144" marB="9144" anchor="ctr">
-                    <a:lnL w="9525" cap="flat" cmpd="sng" algn="ctr">
-                      <a:solidFill>
-                        <a:srgbClr val="D9D9D9"/>
-                      </a:solidFill>
-                      <a:prstDash val="solid"/>
-                    </a:lnL>
-                    <a:lnR w="9525" cap="flat" cmpd="sng" algn="ctr">
-                      <a:solidFill>
-                        <a:srgbClr val="D9D9D9"/>
-                      </a:solidFill>
-                      <a:prstDash val="solid"/>
-                    </a:lnR>
-                    <a:lnT w="9525" cap="flat" cmpd="sng" algn="ctr">
-                      <a:solidFill>
-                        <a:srgbClr val="D9D9D9"/>
-                      </a:solidFill>
-                      <a:prstDash val="solid"/>
-                    </a:lnT>
-                    <a:lnB w="9525" cap="flat" cmpd="sng" algn="ctr">
-                      <a:solidFill>
-                        <a:srgbClr val="D9D9D9"/>
-                      </a:solidFill>
-                      <a:prstDash val="solid"/>
-                    </a:lnB>
-                    <a:solidFill>
-                      <a:srgbClr val="FFFFFF"/>
-                    </a:solidFill>
-                  </a:tcPr>
-                </a:tc>
-                <a:tc>
-                  <a:txBody>
-                    <a:bodyPr/>
-                    <a:lstStyle/>
-                    <a:p>
-                      <a:pPr algn="ctr">
-                        <a:lnSpc>
-                          <a:spcPct val="100000"/>
-                        </a:lnSpc>
-                      </a:pPr>
-                      <a:r>
-                        <a:rPr sz="900" b="1">
-                          <a:solidFill>
-                            <a:srgbClr val="3E5DA8"/>
-                          </a:solidFill>
-                          <a:latin typeface="Arial"/>
-                          <a:ea typeface="微软雅黑"/>
-                          <a:cs typeface="Arial"/>
-                        </a:rPr>
-                        <a:t>侧向</a:t>
-                      </a:r>
-                    </a:p>
-                  </a:txBody>
-                  <a:tcPr marL="45720" marR="45720" marT="9144" marB="9144" anchor="ctr">
-                    <a:lnL w="9525" cap="flat" cmpd="sng" algn="ctr">
-                      <a:solidFill>
-                        <a:srgbClr val="D9D9D9"/>
-                      </a:solidFill>
-                      <a:prstDash val="solid"/>
-                    </a:lnL>
-                    <a:lnR w="9525" cap="flat" cmpd="sng" algn="ctr">
-                      <a:solidFill>
-                        <a:srgbClr val="D9D9D9"/>
-                      </a:solidFill>
-                      <a:prstDash val="solid"/>
-                    </a:lnR>
-                    <a:lnT w="9525" cap="flat" cmpd="sng" algn="ctr">
-                      <a:solidFill>
-                        <a:srgbClr val="D9D9D9"/>
-                      </a:solidFill>
-                      <a:prstDash val="solid"/>
-                    </a:lnT>
-                    <a:lnB w="9525" cap="flat" cmpd="sng" algn="ctr">
-                      <a:solidFill>
-                        <a:srgbClr val="D9D9D9"/>
-                      </a:solidFill>
-                      <a:prstDash val="solid"/>
-                    </a:lnB>
-                    <a:solidFill>
-                      <a:srgbClr val="FFFFFF"/>
-                    </a:solidFill>
-                  </a:tcPr>
-                </a:tc>
-                <a:tc>
-                  <a:txBody>
-                    <a:bodyPr/>
-                    <a:lstStyle/>
-                    <a:p>
-                      <a:pPr algn="ctr">
-                        <a:lnSpc>
-                          <a:spcPct val="100000"/>
-                        </a:lnSpc>
-                      </a:pPr>
-                      <a:r>
-                        <a:rPr sz="919" b="0">
-                          <a:solidFill>
-                            <a:srgbClr val="1A1A1A"/>
-                          </a:solidFill>
-                          <a:latin typeface="Arial"/>
-                          <a:ea typeface="微软雅黑"/>
-                          <a:cs typeface="Arial"/>
-                        </a:rPr>
-                        <a:t>1.17 / 4.88</a:t>
-                      </a:r>
-                    </a:p>
-                  </a:txBody>
-                  <a:tcPr marL="45720" marR="45720" marT="9144" marB="9144" anchor="ctr">
-                    <a:lnL w="9525" cap="flat" cmpd="sng" algn="ctr">
-                      <a:solidFill>
-                        <a:srgbClr val="D9D9D9"/>
-                      </a:solidFill>
-                      <a:prstDash val="solid"/>
-                    </a:lnL>
-                    <a:lnR w="9525" cap="flat" cmpd="sng" algn="ctr">
-                      <a:solidFill>
-                        <a:srgbClr val="D9D9D9"/>
-                      </a:solidFill>
-                      <a:prstDash val="solid"/>
-                    </a:lnR>
-                    <a:lnT w="9525" cap="flat" cmpd="sng" algn="ctr">
-                      <a:solidFill>
-                        <a:srgbClr val="D9D9D9"/>
-                      </a:solidFill>
-                      <a:prstDash val="solid"/>
-                    </a:lnT>
-                    <a:lnB w="9525" cap="flat" cmpd="sng" algn="ctr">
-                      <a:solidFill>
-                        <a:srgbClr val="D9D9D9"/>
-                      </a:solidFill>
-                      <a:prstDash val="solid"/>
-                    </a:lnB>
-                    <a:solidFill>
-                      <a:srgbClr val="FFFFFF"/>
-                    </a:solidFill>
-                  </a:tcPr>
-                </a:tc>
-              </a:tr>
-              <a:tr h="384048">
-                <a:tc>
-                  <a:txBody>
-                    <a:bodyPr/>
-                    <a:lstStyle/>
-                    <a:p>
-                      <a:pPr algn="l">
-                        <a:lnSpc>
-                          <a:spcPct val="100000"/>
-                        </a:lnSpc>
-                      </a:pPr>
-                      <a:r>
-                        <a:rPr sz="919" b="1">
-                          <a:solidFill>
-                            <a:srgbClr val="1A1A1A"/>
-                          </a:solidFill>
-                          <a:latin typeface="Arial"/>
-                          <a:ea typeface="微软雅黑"/>
-                          <a:cs typeface="Arial"/>
-                        </a:rPr>
-                        <a:t>KKE-塑料</a:t>
-                      </a:r>
-                    </a:p>
-                  </a:txBody>
-                  <a:tcPr marL="45720" marR="45720" marT="9144" marB="9144" anchor="ctr">
-                    <a:lnL w="9525" cap="flat" cmpd="sng" algn="ctr">
-                      <a:solidFill>
-                        <a:srgbClr val="D9D9D9"/>
-                      </a:solidFill>
-                      <a:prstDash val="solid"/>
-                    </a:lnL>
-                    <a:lnR w="9525" cap="flat" cmpd="sng" algn="ctr">
-                      <a:solidFill>
-                        <a:srgbClr val="D9D9D9"/>
-                      </a:solidFill>
-                      <a:prstDash val="solid"/>
-                    </a:lnR>
-                    <a:lnT w="9525" cap="flat" cmpd="sng" algn="ctr">
-                      <a:solidFill>
-                        <a:srgbClr val="D9D9D9"/>
-                      </a:solidFill>
-                      <a:prstDash val="solid"/>
-                    </a:lnT>
-                    <a:lnB w="9525" cap="flat" cmpd="sng" algn="ctr">
-                      <a:solidFill>
-                        <a:srgbClr val="D9D9D9"/>
-                      </a:solidFill>
-                      <a:prstDash val="solid"/>
-                    </a:lnB>
-                    <a:solidFill>
-                      <a:srgbClr val="FFFFFF"/>
-                    </a:solidFill>
-                  </a:tcPr>
-                </a:tc>
-                <a:tc>
-                  <a:txBody>
-                    <a:bodyPr/>
-                    <a:lstStyle/>
-                    <a:p>
-                      <a:pPr algn="ctr">
-                        <a:lnSpc>
-                          <a:spcPct val="100000"/>
-                        </a:lnSpc>
-                      </a:pPr>
-                      <a:r>
-                        <a:rPr sz="919" b="0">
-                          <a:solidFill>
-                            <a:srgbClr val="1A1A1A"/>
-                          </a:solidFill>
-                          <a:latin typeface="Arial"/>
-                          <a:ea typeface="微软雅黑"/>
-                          <a:cs typeface="Arial"/>
-                        </a:rPr>
-                        <a:t>背壳</a:t>
-                      </a:r>
-                    </a:p>
-                  </a:txBody>
-                  <a:tcPr marL="45720" marR="45720" marT="9144" marB="9144" anchor="ctr">
-                    <a:lnL w="9525" cap="flat" cmpd="sng" algn="ctr">
-                      <a:solidFill>
-                        <a:srgbClr val="D9D9D9"/>
-                      </a:solidFill>
-                      <a:prstDash val="solid"/>
-                    </a:lnL>
-                    <a:lnR w="9525" cap="flat" cmpd="sng" algn="ctr">
-                      <a:solidFill>
-                        <a:srgbClr val="D9D9D9"/>
-                      </a:solidFill>
-                      <a:prstDash val="solid"/>
-                    </a:lnR>
-                    <a:lnT w="9525" cap="flat" cmpd="sng" algn="ctr">
-                      <a:solidFill>
-                        <a:srgbClr val="D9D9D9"/>
-                      </a:solidFill>
-                      <a:prstDash val="solid"/>
-                    </a:lnT>
-                    <a:lnB w="9525" cap="flat" cmpd="sng" algn="ctr">
-                      <a:solidFill>
-                        <a:srgbClr val="D9D9D9"/>
-                      </a:solidFill>
-                      <a:prstDash val="solid"/>
-                    </a:lnB>
-                    <a:solidFill>
-                      <a:srgbClr val="FFFFFF"/>
-                    </a:solidFill>
-                  </a:tcPr>
-                </a:tc>
-                <a:tc>
-                  <a:txBody>
-                    <a:bodyPr/>
-                    <a:lstStyle/>
-                    <a:p>
-                      <a:pPr algn="ctr">
-                        <a:lnSpc>
-                          <a:spcPct val="100000"/>
-                        </a:lnSpc>
-                      </a:pPr>
-                      <a:r>
-                        <a:rPr sz="960" b="1">
-                          <a:solidFill>
-                            <a:srgbClr val="3E5DA8"/>
-                          </a:solidFill>
-                          <a:latin typeface="Arial"/>
-                          <a:ea typeface="微软雅黑"/>
-                          <a:cs typeface="Arial"/>
-                        </a:rPr>
-                        <a:t>5.95</a:t>
-                      </a:r>
-                    </a:p>
-                  </a:txBody>
-                  <a:tcPr marL="45720" marR="45720" marT="9144" marB="9144" anchor="ctr">
-                    <a:lnL w="9525" cap="flat" cmpd="sng" algn="ctr">
-                      <a:solidFill>
-                        <a:srgbClr val="D9D9D9"/>
-                      </a:solidFill>
-                      <a:prstDash val="solid"/>
-                    </a:lnL>
-                    <a:lnR w="9525" cap="flat" cmpd="sng" algn="ctr">
-                      <a:solidFill>
-                        <a:srgbClr val="D9D9D9"/>
-                      </a:solidFill>
-                      <a:prstDash val="solid"/>
-                    </a:lnR>
-                    <a:lnT w="9525" cap="flat" cmpd="sng" algn="ctr">
-                      <a:solidFill>
-                        <a:srgbClr val="D9D9D9"/>
-                      </a:solidFill>
-                      <a:prstDash val="solid"/>
-                    </a:lnT>
-                    <a:lnB w="9525" cap="flat" cmpd="sng" algn="ctr">
-                      <a:solidFill>
-                        <a:srgbClr val="D9D9D9"/>
-                      </a:solidFill>
-                      <a:prstDash val="solid"/>
-                    </a:lnB>
-                    <a:solidFill>
-                      <a:srgbClr val="FFFFFF"/>
-                    </a:solidFill>
-                  </a:tcPr>
-                </a:tc>
-                <a:tc>
-                  <a:txBody>
-                    <a:bodyPr/>
-                    <a:lstStyle/>
-                    <a:p>
-                      <a:pPr algn="ctr">
-                        <a:lnSpc>
-                          <a:spcPct val="100000"/>
-                        </a:lnSpc>
-                      </a:pPr>
-                      <a:r>
-                        <a:rPr sz="919" b="0">
-                          <a:solidFill>
-                            <a:srgbClr val="1A1A1A"/>
-                          </a:solidFill>
-                          <a:latin typeface="Arial"/>
-                          <a:ea typeface="微软雅黑"/>
-                          <a:cs typeface="Arial"/>
-                        </a:rPr>
-                        <a:t>3.92</a:t>
-                      </a:r>
-                    </a:p>
-                  </a:txBody>
-                  <a:tcPr marL="45720" marR="45720" marT="9144" marB="9144" anchor="ctr">
-                    <a:lnL w="9525" cap="flat" cmpd="sng" algn="ctr">
-                      <a:solidFill>
-                        <a:srgbClr val="D9D9D9"/>
-                      </a:solidFill>
-                      <a:prstDash val="solid"/>
-                    </a:lnL>
-                    <a:lnR w="9525" cap="flat" cmpd="sng" algn="ctr">
-                      <a:solidFill>
-                        <a:srgbClr val="D9D9D9"/>
-                      </a:solidFill>
-                      <a:prstDash val="solid"/>
-                    </a:lnR>
-                    <a:lnT w="9525" cap="flat" cmpd="sng" algn="ctr">
-                      <a:solidFill>
-                        <a:srgbClr val="D9D9D9"/>
-                      </a:solidFill>
-                      <a:prstDash val="solid"/>
-                    </a:lnT>
-                    <a:lnB w="9525" cap="flat" cmpd="sng" algn="ctr">
-                      <a:solidFill>
-                        <a:srgbClr val="D9D9D9"/>
-                      </a:solidFill>
-                      <a:prstDash val="solid"/>
-                    </a:lnB>
-                    <a:solidFill>
-                      <a:srgbClr val="FFFFFF"/>
-                    </a:solidFill>
-                  </a:tcPr>
-                </a:tc>
-                <a:tc>
-                  <a:txBody>
-                    <a:bodyPr/>
-                    <a:lstStyle/>
-                    <a:p>
-                      <a:pPr algn="ctr">
-                        <a:lnSpc>
-                          <a:spcPct val="100000"/>
-                        </a:lnSpc>
-                      </a:pPr>
-                      <a:r>
-                        <a:rPr sz="900" b="1">
-                          <a:solidFill>
-                            <a:srgbClr val="3E5DA8"/>
-                          </a:solidFill>
-                          <a:latin typeface="Arial"/>
-                          <a:ea typeface="微软雅黑"/>
-                          <a:cs typeface="Arial"/>
-                        </a:rPr>
-                        <a:t>下置</a:t>
-                      </a:r>
-                    </a:p>
-                  </a:txBody>
-                  <a:tcPr marL="45720" marR="45720" marT="9144" marB="9144" anchor="ctr">
-                    <a:lnL w="9525" cap="flat" cmpd="sng" algn="ctr">
-                      <a:solidFill>
-                        <a:srgbClr val="D9D9D9"/>
-                      </a:solidFill>
-                      <a:prstDash val="solid"/>
-                    </a:lnL>
-                    <a:lnR w="9525" cap="flat" cmpd="sng" algn="ctr">
-                      <a:solidFill>
-                        <a:srgbClr val="D9D9D9"/>
-                      </a:solidFill>
-                      <a:prstDash val="solid"/>
-                    </a:lnR>
-                    <a:lnT w="9525" cap="flat" cmpd="sng" algn="ctr">
-                      <a:solidFill>
-                        <a:srgbClr val="D9D9D9"/>
-                      </a:solidFill>
-                      <a:prstDash val="solid"/>
-                    </a:lnT>
-                    <a:lnB w="9525" cap="flat" cmpd="sng" algn="ctr">
-                      <a:solidFill>
-                        <a:srgbClr val="D9D9D9"/>
-                      </a:solidFill>
-                      <a:prstDash val="solid"/>
-                    </a:lnB>
-                    <a:solidFill>
-                      <a:srgbClr val="FFFFFF"/>
-                    </a:solidFill>
-                  </a:tcPr>
-                </a:tc>
-                <a:tc>
-                  <a:txBody>
-                    <a:bodyPr/>
-                    <a:lstStyle/>
-                    <a:p>
-                      <a:pPr algn="ctr">
-                        <a:lnSpc>
-                          <a:spcPct val="100000"/>
-                        </a:lnSpc>
-                      </a:pPr>
-                      <a:r>
-                        <a:rPr sz="919" b="0">
-                          <a:solidFill>
-                            <a:srgbClr val="1A1A1A"/>
-                          </a:solidFill>
-                          <a:latin typeface="Arial"/>
-                          <a:ea typeface="微软雅黑"/>
-                          <a:cs typeface="Arial"/>
-                        </a:rPr>
-                        <a:t>5.73 / 1.89</a:t>
-                      </a:r>
-                    </a:p>
-                  </a:txBody>
-                  <a:tcPr marL="45720" marR="45720" marT="9144" marB="9144" anchor="ctr">
-                    <a:lnL w="9525" cap="flat" cmpd="sng" algn="ctr">
-                      <a:solidFill>
-                        <a:srgbClr val="D9D9D9"/>
-                      </a:solidFill>
-                      <a:prstDash val="solid"/>
-                    </a:lnL>
-                    <a:lnR w="9525" cap="flat" cmpd="sng" algn="ctr">
-                      <a:solidFill>
-                        <a:srgbClr val="D9D9D9"/>
-                      </a:solidFill>
-                      <a:prstDash val="solid"/>
-                    </a:lnR>
-                    <a:lnT w="9525" cap="flat" cmpd="sng" algn="ctr">
-                      <a:solidFill>
-                        <a:srgbClr val="D9D9D9"/>
-                      </a:solidFill>
-                      <a:prstDash val="solid"/>
-                    </a:lnT>
-                    <a:lnB w="9525" cap="flat" cmpd="sng" algn="ctr">
-                      <a:solidFill>
-                        <a:srgbClr val="D9D9D9"/>
-                      </a:solidFill>
-                      <a:prstDash val="solid"/>
-                    </a:lnB>
-                    <a:solidFill>
-                      <a:srgbClr val="FFFFFF"/>
-                    </a:solidFill>
-                  </a:tcPr>
-                </a:tc>
-              </a:tr>
-              <a:tr h="384048">
-                <a:tc>
-                  <a:txBody>
-                    <a:bodyPr/>
-                    <a:lstStyle/>
-                    <a:p>
-                      <a:pPr algn="l">
-                        <a:lnSpc>
-                          <a:spcPct val="100000"/>
-                        </a:lnSpc>
-                      </a:pPr>
-                      <a:r>
-                        <a:rPr sz="919" b="1">
-                          <a:solidFill>
-                            <a:srgbClr val="1A1A1A"/>
-                          </a:solidFill>
-                          <a:latin typeface="Arial"/>
-                          <a:ea typeface="微软雅黑"/>
-                          <a:cs typeface="Arial"/>
-                        </a:rPr>
-                        <a:t>KKE-金属</a:t>
-                      </a:r>
-                    </a:p>
-                  </a:txBody>
-                  <a:tcPr marL="45720" marR="45720" marT="9144" marB="9144" anchor="ctr">
-                    <a:lnL w="9525" cap="flat" cmpd="sng" algn="ctr">
-                      <a:solidFill>
-                        <a:srgbClr val="D9D9D9"/>
-                      </a:solidFill>
-                      <a:prstDash val="solid"/>
-                    </a:lnL>
-                    <a:lnR w="9525" cap="flat" cmpd="sng" algn="ctr">
-                      <a:solidFill>
-                        <a:srgbClr val="D9D9D9"/>
-                      </a:solidFill>
-                      <a:prstDash val="solid"/>
-                    </a:lnR>
-                    <a:lnT w="9525" cap="flat" cmpd="sng" algn="ctr">
-                      <a:solidFill>
-                        <a:srgbClr val="D9D9D9"/>
-                      </a:solidFill>
-                      <a:prstDash val="solid"/>
-                    </a:lnT>
-                    <a:lnB w="9525" cap="flat" cmpd="sng" algn="ctr">
-                      <a:solidFill>
-                        <a:srgbClr val="D9D9D9"/>
-                      </a:solidFill>
-                      <a:prstDash val="solid"/>
-                    </a:lnB>
-                    <a:solidFill>
-                      <a:srgbClr val="FFFFFF"/>
-                    </a:solidFill>
-                  </a:tcPr>
-                </a:tc>
-                <a:tc>
-                  <a:txBody>
-                    <a:bodyPr/>
-                    <a:lstStyle/>
-                    <a:p>
-                      <a:pPr algn="ctr">
-                        <a:lnSpc>
-                          <a:spcPct val="100000"/>
-                        </a:lnSpc>
-                      </a:pPr>
-                      <a:r>
-                        <a:rPr sz="919" b="0">
-                          <a:solidFill>
-                            <a:srgbClr val="1A1A1A"/>
-                          </a:solidFill>
-                          <a:latin typeface="Arial"/>
-                          <a:ea typeface="微软雅黑"/>
-                          <a:cs typeface="Arial"/>
-                        </a:rPr>
-                        <a:t>中框</a:t>
-                      </a:r>
-                    </a:p>
-                  </a:txBody>
-                  <a:tcPr marL="45720" marR="45720" marT="9144" marB="9144" anchor="ctr">
-                    <a:lnL w="9525" cap="flat" cmpd="sng" algn="ctr">
-                      <a:solidFill>
-                        <a:srgbClr val="D9D9D9"/>
-                      </a:solidFill>
-                      <a:prstDash val="solid"/>
-                    </a:lnL>
-                    <a:lnR w="9525" cap="flat" cmpd="sng" algn="ctr">
-                      <a:solidFill>
-                        <a:srgbClr val="D9D9D9"/>
-                      </a:solidFill>
-                      <a:prstDash val="solid"/>
-                    </a:lnR>
-                    <a:lnT w="9525" cap="flat" cmpd="sng" algn="ctr">
-                      <a:solidFill>
-                        <a:srgbClr val="D9D9D9"/>
-                      </a:solidFill>
-                      <a:prstDash val="solid"/>
-                    </a:lnT>
-                    <a:lnB w="9525" cap="flat" cmpd="sng" algn="ctr">
-                      <a:solidFill>
-                        <a:srgbClr val="D9D9D9"/>
-                      </a:solidFill>
-                      <a:prstDash val="solid"/>
-                    </a:lnB>
-                    <a:solidFill>
-                      <a:srgbClr val="FFFFFF"/>
-                    </a:solidFill>
-                  </a:tcPr>
-                </a:tc>
-                <a:tc>
-                  <a:txBody>
-                    <a:bodyPr/>
-                    <a:lstStyle/>
-                    <a:p>
-                      <a:pPr algn="ctr">
-                        <a:lnSpc>
-                          <a:spcPct val="100000"/>
-                        </a:lnSpc>
-                      </a:pPr>
-                      <a:r>
-                        <a:rPr sz="919" b="0">
-                          <a:solidFill>
-                            <a:srgbClr val="1A1A1A"/>
-                          </a:solidFill>
-                          <a:latin typeface="Arial"/>
-                          <a:ea typeface="微软雅黑"/>
-                          <a:cs typeface="Arial"/>
-                        </a:rPr>
-                        <a:t>1.63</a:t>
-                      </a:r>
-                    </a:p>
-                  </a:txBody>
-                  <a:tcPr marL="45720" marR="45720" marT="9144" marB="9144" anchor="ctr">
-                    <a:lnL w="9525" cap="flat" cmpd="sng" algn="ctr">
-                      <a:solidFill>
-                        <a:srgbClr val="D9D9D9"/>
-                      </a:solidFill>
-                      <a:prstDash val="solid"/>
-                    </a:lnL>
-                    <a:lnR w="9525" cap="flat" cmpd="sng" algn="ctr">
-                      <a:solidFill>
-                        <a:srgbClr val="D9D9D9"/>
-                      </a:solidFill>
-                      <a:prstDash val="solid"/>
-                    </a:lnR>
-                    <a:lnT w="9525" cap="flat" cmpd="sng" algn="ctr">
-                      <a:solidFill>
-                        <a:srgbClr val="D9D9D9"/>
-                      </a:solidFill>
-                      <a:prstDash val="solid"/>
-                    </a:lnT>
-                    <a:lnB w="9525" cap="flat" cmpd="sng" algn="ctr">
-                      <a:solidFill>
-                        <a:srgbClr val="D9D9D9"/>
-                      </a:solidFill>
-                      <a:prstDash val="solid"/>
-                    </a:lnB>
-                    <a:solidFill>
-                      <a:srgbClr val="FFFFFF"/>
-                    </a:solidFill>
-                  </a:tcPr>
-                </a:tc>
-                <a:tc>
-                  <a:txBody>
-                    <a:bodyPr/>
-                    <a:lstStyle/>
-                    <a:p>
-                      <a:pPr algn="ctr">
-                        <a:lnSpc>
-                          <a:spcPct val="100000"/>
-                        </a:lnSpc>
-                      </a:pPr>
-                      <a:r>
-                        <a:rPr sz="960" b="1">
-                          <a:solidFill>
-                            <a:srgbClr val="3E5DA8"/>
-                          </a:solidFill>
-                          <a:latin typeface="Arial"/>
-                          <a:ea typeface="微软雅黑"/>
-                          <a:cs typeface="Arial"/>
-                        </a:rPr>
-                        <a:t>5.22</a:t>
-                      </a:r>
-                    </a:p>
-                  </a:txBody>
-                  <a:tcPr marL="45720" marR="45720" marT="9144" marB="9144" anchor="ctr">
-                    <a:lnL w="9525" cap="flat" cmpd="sng" algn="ctr">
-                      <a:solidFill>
-                        <a:srgbClr val="D9D9D9"/>
-                      </a:solidFill>
-                      <a:prstDash val="solid"/>
-                    </a:lnL>
-                    <a:lnR w="9525" cap="flat" cmpd="sng" algn="ctr">
-                      <a:solidFill>
-                        <a:srgbClr val="D9D9D9"/>
-                      </a:solidFill>
-                      <a:prstDash val="solid"/>
-                    </a:lnR>
-                    <a:lnT w="9525" cap="flat" cmpd="sng" algn="ctr">
-                      <a:solidFill>
-                        <a:srgbClr val="D9D9D9"/>
-                      </a:solidFill>
-                      <a:prstDash val="solid"/>
-                    </a:lnT>
-                    <a:lnB w="9525" cap="flat" cmpd="sng" algn="ctr">
-                      <a:solidFill>
-                        <a:srgbClr val="D9D9D9"/>
-                      </a:solidFill>
-                      <a:prstDash val="solid"/>
-                    </a:lnB>
-                    <a:solidFill>
-                      <a:srgbClr val="FFFFFF"/>
-                    </a:solidFill>
-                  </a:tcPr>
-                </a:tc>
-                <a:tc>
-                  <a:txBody>
-                    <a:bodyPr/>
-                    <a:lstStyle/>
-                    <a:p>
-                      <a:pPr algn="ctr">
-                        <a:lnSpc>
-                          <a:spcPct val="100000"/>
-                        </a:lnSpc>
-                      </a:pPr>
-                      <a:r>
-                        <a:rPr sz="900" b="1">
-                          <a:solidFill>
-                            <a:srgbClr val="3E5DA8"/>
-                          </a:solidFill>
-                          <a:latin typeface="Arial"/>
-                          <a:ea typeface="微软雅黑"/>
-                          <a:cs typeface="Arial"/>
-                        </a:rPr>
-                        <a:t>侧向</a:t>
-                      </a:r>
-                    </a:p>
-                  </a:txBody>
-                  <a:tcPr marL="45720" marR="45720" marT="9144" marB="9144" anchor="ctr">
-                    <a:lnL w="9525" cap="flat" cmpd="sng" algn="ctr">
-                      <a:solidFill>
-                        <a:srgbClr val="D9D9D9"/>
-                      </a:solidFill>
-                      <a:prstDash val="solid"/>
-                    </a:lnL>
-                    <a:lnR w="9525" cap="flat" cmpd="sng" algn="ctr">
-                      <a:solidFill>
-                        <a:srgbClr val="D9D9D9"/>
-                      </a:solidFill>
-                      <a:prstDash val="solid"/>
-                    </a:lnR>
-                    <a:lnT w="9525" cap="flat" cmpd="sng" algn="ctr">
-                      <a:solidFill>
-                        <a:srgbClr val="D9D9D9"/>
-                      </a:solidFill>
-                      <a:prstDash val="solid"/>
-                    </a:lnT>
-                    <a:lnB w="9525" cap="flat" cmpd="sng" algn="ctr">
-                      <a:solidFill>
-                        <a:srgbClr val="D9D9D9"/>
-                      </a:solidFill>
-                      <a:prstDash val="solid"/>
-                    </a:lnB>
-                    <a:solidFill>
-                      <a:srgbClr val="FFFFFF"/>
-                    </a:solidFill>
-                  </a:tcPr>
-                </a:tc>
-                <a:tc>
-                  <a:txBody>
-                    <a:bodyPr/>
-                    <a:lstStyle/>
-                    <a:p>
-                      <a:pPr algn="ctr">
-                        <a:lnSpc>
-                          <a:spcPct val="100000"/>
-                        </a:lnSpc>
-                      </a:pPr>
-                      <a:r>
-                        <a:rPr sz="919" b="0">
-                          <a:solidFill>
-                            <a:srgbClr val="1A1A1A"/>
-                          </a:solidFill>
-                          <a:latin typeface="Arial"/>
-                          <a:ea typeface="微软雅黑"/>
-                          <a:cs typeface="Arial"/>
-                        </a:rPr>
-                        <a:t>0.43 / 3.64</a:t>
-                      </a:r>
-                    </a:p>
-                  </a:txBody>
-                  <a:tcPr marL="45720" marR="45720" marT="9144" marB="9144" anchor="ctr">
-                    <a:lnL w="9525" cap="flat" cmpd="sng" algn="ctr">
-                      <a:solidFill>
-                        <a:srgbClr val="D9D9D9"/>
-                      </a:solidFill>
-                      <a:prstDash val="solid"/>
-                    </a:lnL>
-                    <a:lnR w="9525" cap="flat" cmpd="sng" algn="ctr">
-                      <a:solidFill>
-                        <a:srgbClr val="D9D9D9"/>
-                      </a:solidFill>
-                      <a:prstDash val="solid"/>
-                    </a:lnR>
-                    <a:lnT w="9525" cap="flat" cmpd="sng" algn="ctr">
-                      <a:solidFill>
-                        <a:srgbClr val="D9D9D9"/>
-                      </a:solidFill>
-                      <a:prstDash val="solid"/>
-                    </a:lnT>
-                    <a:lnB w="9525" cap="flat" cmpd="sng" algn="ctr">
-                      <a:solidFill>
-                        <a:srgbClr val="D9D9D9"/>
-                      </a:solidFill>
-                      <a:prstDash val="solid"/>
-                    </a:lnB>
-                    <a:solidFill>
-                      <a:srgbClr val="FFFFFF"/>
-                    </a:solidFill>
-                  </a:tcPr>
-                </a:tc>
-              </a:tr>
-            </a:tbl>
-          </a:graphicData>
-        </a:graphic>
-      </p:graphicFrame>
-      <p:sp>
-        <p:nvSpPr>
-          <p:cNvPr id="6" name="S10_tabcap"/>
-          <p:cNvSpPr txBox="1"/>
-          <p:nvPr/>
-        </p:nvSpPr>
-        <p:spPr>
-          <a:xfrm>
-            <a:off x="566928" y="3310128"/>
-            <a:ext cx="5989320" cy="219456"/>
-          </a:xfrm>
-          <a:prstGeom prst="rect">
-            <a:avLst/>
-          </a:prstGeom>
-          <a:noFill/>
-        </p:spPr>
-        <p:txBody>
-          <a:bodyPr wrap="square" anchor="t" lIns="0" rIns="0" tIns="0" bIns="0">
-            <a:spAutoFit/>
-          </a:bodyPr>
-          <a:lstStyle/>
-          <a:p>
-            <a:pPr algn="l">
-              <a:lnSpc>
-                <a:spcPct val="100000"/>
-              </a:lnSpc>
-            </a:pPr>
-            <a:r>
-              <a:rPr sz="780" b="0">
-                <a:solidFill>
-                  <a:srgbClr val="8C8C8C"/>
-                </a:solidFill>
-                <a:latin typeface="Arial"/>
-                <a:ea typeface="微软雅黑"/>
-                <a:cs typeface="Arial"/>
-              </a:rPr>
-              <a:t>同一读码器 9 dBi、箱面 10 cm、姿态 A1、A 厂；蓝色＝该包装机型的推荐照射方向</a:t>
-            </a:r>
-          </a:p>
-        </p:txBody>
-      </p:sp>
-      <p:sp>
-        <p:nvSpPr>
-          <p:cNvPr id="7" name="S10_read"/>
-          <p:cNvSpPr txBox="1"/>
-          <p:nvPr/>
-        </p:nvSpPr>
-        <p:spPr>
-          <a:xfrm>
-            <a:off x="566928" y="3621024"/>
-            <a:ext cx="5989320" cy="1298448"/>
-          </a:xfrm>
-          <a:prstGeom prst="rect">
-            <a:avLst/>
-          </a:prstGeom>
-          <a:noFill/>
-        </p:spPr>
-        <p:txBody>
-          <a:bodyPr wrap="square" lIns="0" rIns="0" tIns="0" bIns="0">
-            <a:spAutoFit/>
-          </a:bodyPr>
-          <a:lstStyle/>
-          <a:p>
-            <a:pPr>
-              <a:lnSpc>
-                <a:spcPct val="122000"/>
-              </a:lnSpc>
-            </a:pPr>
-            <a:r>
-              <a:rPr sz="960" b="1">
-                <a:solidFill>
-                  <a:srgbClr val="3E5DA8"/>
-                </a:solidFill>
-                <a:latin typeface="Arial"/>
-                <a:ea typeface="微软雅黑"/>
-                <a:cs typeface="Arial"/>
-              </a:rPr>
-              <a:t>读法：照射方向必须跟标签位置配对</a:t>
-            </a:r>
-          </a:p>
-          <a:p>
-            <a:pPr>
-              <a:lnSpc>
-                <a:spcPct val="122000"/>
-              </a:lnSpc>
-            </a:pPr>
-            <a:r>
-              <a:rPr sz="860" b="0">
-                <a:solidFill>
-                  <a:srgbClr val="1A1A1A"/>
-                </a:solidFill>
-                <a:latin typeface="Arial"/>
-                <a:ea typeface="微软雅黑"/>
-                <a:cs typeface="Arial"/>
-              </a:rPr>
-              <a:t>① 标签在背壳（塑料版）⇒ 用下置天线；标签在中框（金属版）⇒ 用侧向天线。</a:t>
-            </a:r>
-          </a:p>
-          <a:p>
-            <a:pPr>
-              <a:lnSpc>
-                <a:spcPct val="122000"/>
-              </a:lnSpc>
-            </a:pPr>
-            <a:r>
-              <a:rPr sz="860" b="0">
-                <a:solidFill>
-                  <a:srgbClr val="1A1A1A"/>
-                </a:solidFill>
-                <a:latin typeface="Arial"/>
-                <a:ea typeface="微软雅黑"/>
-                <a:cs typeface="Arial"/>
-              </a:rPr>
-              <a:t>② 用错方向：金属批次 5.73 → 3.05。10-22 现场「距离 0→40 cm 读数都在 0–1」正对上 —— 下置天线对中框标签本来就无效，不是距离不够近。</a:t>
-            </a:r>
-          </a:p>
-          <a:p>
-            <a:pPr>
-              <a:lnSpc>
-                <a:spcPct val="122000"/>
-              </a:lnSpc>
-            </a:pPr>
-            <a:r>
-              <a:rPr sz="860" b="0">
-                <a:solidFill>
-                  <a:srgbClr val="1A1A1A"/>
-                </a:solidFill>
-                <a:latin typeface="Arial"/>
-                <a:ea typeface="微软雅黑"/>
-                <a:cs typeface="Arial"/>
-              </a:rPr>
-              <a:t>③ KKE 相对 N-KKE 固定再吃 2.5 dB；大件 7″ 再 −3.5 dB，金属 + KKE 大件最差（0.43/6）。</a:t>
-            </a:r>
-          </a:p>
-        </p:txBody>
-      </p:sp>
-      <p:sp>
-        <p:nvSpPr>
-          <p:cNvPr id="8" name="S10_venbox"/>
-          <p:cNvSpPr/>
-          <p:nvPr/>
-        </p:nvSpPr>
-        <p:spPr>
-          <a:xfrm>
-            <a:off x="566928" y="4718304"/>
-            <a:ext cx="5989320" cy="877824"/>
-          </a:xfrm>
-          <a:prstGeom prst="rect">
-            <a:avLst/>
-          </a:prstGeom>
-          <a:solidFill>
-            <a:srgbClr val="E6EDF9"/>
-          </a:solidFill>
-          <a:ln>
-            <a:noFill/>
-          </a:ln>
-          <a:effectLst/>
-        </p:spPr>
-        <p:style>
-          <a:lnRef idx="1">
-            <a:schemeClr val="accent1"/>
-          </a:lnRef>
-          <a:fillRef idx="3">
-            <a:schemeClr val="accent1"/>
-          </a:fillRef>
-          <a:effectRef idx="2">
-            <a:schemeClr val="accent1"/>
-          </a:effectRef>
-          <a:fontRef idx="minor">
-            <a:schemeClr val="lt1"/>
-          </a:fontRef>
-        </p:style>
-        <p:txBody>
-          <a:bodyPr rtlCol="0" anchor="ctr"/>
-          <a:lstStyle/>
-          <a:p>
-            <a:pPr algn="ctr"/>
-          </a:p>
-        </p:txBody>
-      </p:sp>
-      <p:sp>
-        <p:nvSpPr>
-          <p:cNvPr id="9" name="S10_vendor"/>
-          <p:cNvSpPr txBox="1"/>
-          <p:nvPr/>
-        </p:nvSpPr>
-        <p:spPr>
-          <a:xfrm>
-            <a:off x="694944" y="4791456"/>
-            <a:ext cx="5751576" cy="768096"/>
-          </a:xfrm>
-          <a:prstGeom prst="rect">
-            <a:avLst/>
-          </a:prstGeom>
-          <a:noFill/>
-        </p:spPr>
-        <p:txBody>
-          <a:bodyPr wrap="square" lIns="0" rIns="0" tIns="0" bIns="0">
-            <a:spAutoFit/>
-          </a:bodyPr>
-          <a:lstStyle/>
-          <a:p>
-            <a:pPr>
-              <a:lnSpc>
-                <a:spcPct val="120000"/>
-              </a:lnSpc>
-            </a:pPr>
-            <a:r>
-              <a:rPr sz="919" b="1">
-                <a:solidFill>
-                  <a:srgbClr val="3E5DA8"/>
-                </a:solidFill>
-                <a:latin typeface="Arial"/>
-                <a:ea typeface="微软雅黑"/>
-                <a:cs typeface="Arial"/>
-              </a:rPr>
-              <a:t>厂家对比：把「厂家」从包装变量里拆出来</a:t>
-            </a:r>
-          </a:p>
-          <a:p>
-            <a:pPr>
-              <a:lnSpc>
-                <a:spcPct val="120000"/>
-              </a:lnSpc>
-            </a:pPr>
-            <a:r>
-              <a:rPr sz="819" b="0">
-                <a:solidFill>
-                  <a:srgbClr val="1A1A1A"/>
-                </a:solidFill>
-                <a:latin typeface="Arial"/>
-                <a:ea typeface="微软雅黑"/>
-                <a:cs typeface="Arial"/>
-              </a:rPr>
-              <a:t>固定：包装机型 + 箱型 + 姿态 A1 + 天线方向/距离 + 过板 ≥30 s × ≥3 箱；变量：只换读码器/天线。</a:t>
-            </a:r>
-          </a:p>
-          <a:p>
-            <a:pPr>
-              <a:lnSpc>
-                <a:spcPct val="120000"/>
-              </a:lnSpc>
-            </a:pPr>
-            <a:r>
-              <a:rPr sz="819" b="0">
-                <a:solidFill>
-                  <a:srgbClr val="C0504D"/>
-                </a:solidFill>
-                <a:latin typeface="Arial"/>
-                <a:ea typeface="微软雅黑"/>
-                <a:cs typeface="Arial"/>
-              </a:rPr>
-              <a:t>厂家（A/B 模组）实测仍未做（唐工 10-23）；报告里的「B 厂 −2 dB」是模型假设 —— 必须在同一包装机型、同一箱体下只换读码器重测。</a:t>
-            </a:r>
-          </a:p>
-        </p:txBody>
-      </p:sp>
-      <p:pic>
-        <p:nvPicPr>
-          <p:cNvPr id="10" name="S10_fig" descr="fig14_pkg_variants.png"/>
-          <p:cNvPicPr>
-            <a:picLocks noChangeAspect="1"/>
-          </p:cNvPicPr>
-          <p:nvPr/>
-        </p:nvPicPr>
-        <p:blipFill>
-          <a:blip r:embed="rId2"/>
-          <a:stretch>
-            <a:fillRect/>
-          </a:stretch>
-        </p:blipFill>
-        <p:spPr>
-          <a:xfrm>
-            <a:off x="6519672" y="1335024"/>
-            <a:ext cx="5219917" cy="2468880"/>
-          </a:xfrm>
-          <a:prstGeom prst="rect">
-            <a:avLst/>
-          </a:prstGeom>
-        </p:spPr>
-      </p:pic>
-      <p:sp>
-        <p:nvSpPr>
-          <p:cNvPr id="11" name="S10_gapbox"/>
-          <p:cNvSpPr/>
-          <p:nvPr/>
-        </p:nvSpPr>
-        <p:spPr>
-          <a:xfrm>
-            <a:off x="6519672" y="3913632"/>
-            <a:ext cx="5102352" cy="1682496"/>
-          </a:xfrm>
-          <a:prstGeom prst="rect">
-            <a:avLst/>
-          </a:prstGeom>
-          <a:solidFill>
-            <a:srgbClr val="FFFFFF"/>
-          </a:solidFill>
-          <a:ln w="9525">
-            <a:solidFill>
-              <a:srgbClr val="D9D9D9"/>
-            </a:solidFill>
-          </a:ln>
-          <a:effectLst/>
-        </p:spPr>
-        <p:style>
-          <a:lnRef idx="1">
-            <a:schemeClr val="accent1"/>
-          </a:lnRef>
-          <a:fillRef idx="3">
-            <a:schemeClr val="accent1"/>
-          </a:fillRef>
-          <a:effectRef idx="2">
-            <a:schemeClr val="accent1"/>
-          </a:effectRef>
-          <a:fontRef idx="minor">
-            <a:schemeClr val="lt1"/>
-          </a:fontRef>
-        </p:style>
-        <p:txBody>
-          <a:bodyPr rtlCol="0" anchor="ctr"/>
-          <a:lstStyle/>
-          <a:p>
-            <a:pPr algn="ctr"/>
-          </a:p>
-        </p:txBody>
-      </p:sp>
-      <p:sp>
-        <p:nvSpPr>
-          <p:cNvPr id="12" name="S10_gap"/>
-          <p:cNvSpPr txBox="1"/>
-          <p:nvPr/>
-        </p:nvSpPr>
-        <p:spPr>
-          <a:xfrm>
-            <a:off x="6647688" y="3986784"/>
-            <a:ext cx="4864608" cy="1554480"/>
-          </a:xfrm>
-          <a:prstGeom prst="rect">
-            <a:avLst/>
-          </a:prstGeom>
-          <a:noFill/>
-        </p:spPr>
-        <p:txBody>
-          <a:bodyPr wrap="square" lIns="0" rIns="0" tIns="0" bIns="0">
-            <a:spAutoFit/>
-          </a:bodyPr>
-          <a:lstStyle/>
-          <a:p>
-            <a:pPr>
-              <a:lnSpc>
-                <a:spcPct val="118000"/>
-              </a:lnSpc>
-            </a:pPr>
-            <a:r>
-              <a:rPr sz="940" b="1">
-                <a:solidFill>
-                  <a:srgbClr val="C0504D"/>
-                </a:solidFill>
-                <a:latin typeface="Arial"/>
-                <a:ea typeface="微软雅黑"/>
-                <a:cs typeface="Arial"/>
-              </a:rPr>
-              <a:t>现网还分不出 KKE / N-KKE</a:t>
-            </a:r>
-          </a:p>
-          <a:p>
-            <a:pPr>
-              <a:lnSpc>
-                <a:spcPct val="118000"/>
-              </a:lnSpc>
-            </a:pPr>
-            <a:r>
-              <a:rPr sz="819" b="0">
-                <a:solidFill>
-                  <a:srgbClr val="1A1A1A"/>
-                </a:solidFill>
-                <a:latin typeface="Arial"/>
-                <a:ea typeface="微软雅黑"/>
-                <a:cs typeface="Arial"/>
-              </a:rPr>
-              <a:t>背壳材质有：MES CongfigSize 写 (Metal)/(Plastic)，AX8252 两种都在产。</a:t>
-            </a:r>
-          </a:p>
-          <a:p>
-            <a:pPr>
-              <a:lnSpc>
-                <a:spcPct val="118000"/>
-              </a:lnSpc>
-            </a:pPr>
-            <a:r>
-              <a:rPr sz="819" b="0">
-                <a:solidFill>
-                  <a:srgbClr val="1A1A1A"/>
-                </a:solidFill>
-                <a:latin typeface="Arial"/>
-                <a:ea typeface="微软雅黑"/>
-                <a:cs typeface="Arial"/>
-              </a:rPr>
-              <a:t>KKE / N-KKE 没有：机台日志、Rfid_&lt;日期&gt;.log、EpcLog 里都没有这个字段。</a:t>
-            </a:r>
-          </a:p>
-          <a:p>
-            <a:pPr>
-              <a:lnSpc>
-                <a:spcPct val="118000"/>
-              </a:lnSpc>
-            </a:pPr>
-            <a:r>
-              <a:rPr sz="819" b="0">
-                <a:solidFill>
-                  <a:srgbClr val="1A1A1A"/>
-                </a:solidFill>
-                <a:latin typeface="Arial"/>
-                <a:ea typeface="微软雅黑"/>
-                <a:cs typeface="Arial"/>
-              </a:rPr>
-              <a:t>现网能按背壳分：8252 塑料 98.9%、8252 金属 95.2%、7907 未标注 99.1%（都是几乎全漏）；KKE / N-KKE 分不出 —— 材质与外壳的效应被系统级漏读压平（与 R6 页「没拉开差距」不矛盾）。</a:t>
-            </a:r>
-          </a:p>
-          <a:p>
-            <a:pPr>
-              <a:lnSpc>
-                <a:spcPct val="118000"/>
-              </a:lnSpc>
-            </a:pPr>
-            <a:r>
-              <a:rPr sz="819" b="1">
-                <a:solidFill>
-                  <a:srgbClr val="3E5DA8"/>
-                </a:solidFill>
-                <a:latin typeface="Arial"/>
-                <a:ea typeface="微软雅黑"/>
-                <a:cs typeface="Arial"/>
-              </a:rPr>
-              <a:t>需要：机型 × KKE/N-KKE 的配置码或 BOM 区分方式（拿到才能按四象限重算箱数）。</a:t>
-            </a:r>
-          </a:p>
-        </p:txBody>
-      </p:sp>
-      <p:sp>
-        <p:nvSpPr>
-          <p:cNvPr id="13" name="S10_bar"/>
-          <p:cNvSpPr/>
-          <p:nvPr/>
-        </p:nvSpPr>
-        <p:spPr>
-          <a:xfrm>
-            <a:off x="566928" y="5961888"/>
-            <a:ext cx="45720" cy="292608"/>
-          </a:xfrm>
-          <a:prstGeom prst="rect">
-            <a:avLst/>
-          </a:prstGeom>
-          <a:solidFill>
-            <a:srgbClr val="3E5DA8"/>
-          </a:solidFill>
-          <a:ln>
-            <a:noFill/>
-          </a:ln>
-          <a:effectLst/>
-        </p:spPr>
-        <p:style>
-          <a:lnRef idx="1">
-            <a:schemeClr val="accent1"/>
-          </a:lnRef>
-          <a:fillRef idx="3">
-            <a:schemeClr val="accent1"/>
-          </a:fillRef>
-          <a:effectRef idx="2">
-            <a:schemeClr val="accent1"/>
-          </a:effectRef>
-          <a:fontRef idx="minor">
-            <a:schemeClr val="lt1"/>
-          </a:fontRef>
-        </p:style>
-        <p:txBody>
-          <a:bodyPr rtlCol="0" anchor="ctr"/>
-          <a:lstStyle/>
-          <a:p>
-            <a:pPr algn="ctr"/>
-          </a:p>
-        </p:txBody>
-      </p:sp>
-      <p:sp>
-        <p:nvSpPr>
-          <p:cNvPr id="14" name="S10_take"/>
-          <p:cNvSpPr txBox="1"/>
-          <p:nvPr/>
-        </p:nvSpPr>
-        <p:spPr>
-          <a:xfrm>
-            <a:off x="713232" y="5971032"/>
-            <a:ext cx="10874959" cy="274320"/>
-          </a:xfrm>
-          <a:prstGeom prst="rect">
-            <a:avLst/>
-          </a:prstGeom>
-          <a:noFill/>
-        </p:spPr>
-        <p:txBody>
-          <a:bodyPr wrap="square" anchor="ctr" lIns="0" rIns="0" tIns="0" bIns="0">
-            <a:spAutoFit/>
-          </a:bodyPr>
-          <a:lstStyle/>
-          <a:p>
-            <a:pPr algn="l">
-              <a:lnSpc>
-                <a:spcPct val="100000"/>
-              </a:lnSpc>
-            </a:pPr>
-            <a:r>
-              <a:rPr sz="1019" b="1">
-                <a:solidFill>
-                  <a:srgbClr val="1A1A1A"/>
-                </a:solidFill>
-                <a:latin typeface="Arial"/>
-                <a:ea typeface="微软雅黑"/>
-                <a:cs typeface="Arial"/>
-              </a:rPr>
-              <a:t>按包装机型分组：金属背壳批次改侧向读（3.05 → 5.73）；KKE 再吃 2.5 dB —— 厂家差异要在这之后才谈</a:t>
             </a:r>
           </a:p>
         </p:txBody>
@@ -16407,777 +13928,6 @@
                 <a:extLst>
                   <a:ext uri="{0D108BD9-81ED-4DB2-BD59-A6C34878D82A}">
                     <a16:rowId xmlns:a16="http://schemas.microsoft.com/office/drawing/2014/main" val="10004"/>
-                  </a:ext>
-                </a:extLst>
-              </a:tr>
-              <a:tr h="347444">
-                <a:tc>
-                  <a:txBody>
-                    <a:bodyPr/>
-                    <a:lstStyle/>
-                    <a:p>
-                      <a:pPr algn="l">
-                        <a:lnSpc>
-                          <a:spcPct val="100000"/>
-                        </a:lnSpc>
-                      </a:pPr>
-                      <a:r>
-                        <a:rPr sz="880" b="1">
-                          <a:solidFill>
-                            <a:srgbClr val="1A1A1A"/>
-                          </a:solidFill>
-                          <a:latin typeface="Arial"/>
-                          <a:ea typeface="微软雅黑"/>
-                          <a:cs typeface="Arial"/>
-                        </a:rPr>
-                        <a:t>AX7771</a:t>
-                      </a:r>
-                    </a:p>
-                  </a:txBody>
-                  <a:tcPr marL="50292" marR="50292" marT="10972" marB="10972" anchor="ctr">
-                    <a:lnL w="9525" cap="flat" cmpd="sng" algn="ctr">
-                      <a:solidFill>
-                        <a:srgbClr val="D9D9D9"/>
-                      </a:solidFill>
-                      <a:prstDash val="solid"/>
-                    </a:lnL>
-                    <a:lnR w="9525" cap="flat" cmpd="sng" algn="ctr">
-                      <a:solidFill>
-                        <a:srgbClr val="D9D9D9"/>
-                      </a:solidFill>
-                      <a:prstDash val="solid"/>
-                    </a:lnR>
-                    <a:lnT w="9525" cap="flat" cmpd="sng" algn="ctr">
-                      <a:solidFill>
-                        <a:srgbClr val="D9D9D9"/>
-                      </a:solidFill>
-                      <a:prstDash val="solid"/>
-                    </a:lnT>
-                    <a:lnB w="9525" cap="flat" cmpd="sng" algn="ctr">
-                      <a:solidFill>
-                        <a:srgbClr val="D9D9D9"/>
-                      </a:solidFill>
-                      <a:prstDash val="solid"/>
-                    </a:lnB>
-                    <a:solidFill>
-                      <a:srgbClr val="FFFFFF"/>
-                    </a:solidFill>
-                  </a:tcPr>
-                </a:tc>
-                <a:tc>
-                  <a:txBody>
-                    <a:bodyPr/>
-                    <a:lstStyle/>
-                    <a:p>
-                      <a:pPr algn="l">
-                        <a:lnSpc>
-                          <a:spcPct val="100000"/>
-                        </a:lnSpc>
-                      </a:pPr>
-                      <a:r>
-                        <a:rPr sz="880" b="0">
-                          <a:solidFill>
-                            <a:srgbClr val="1A1A1A"/>
-                          </a:solidFill>
-                          <a:latin typeface="Arial"/>
-                          <a:ea typeface="微软雅黑"/>
-                          <a:cs typeface="Arial"/>
-                        </a:rPr>
-                        <a:t>Roselite</a:t>
-                      </a:r>
-                    </a:p>
-                  </a:txBody>
-                  <a:tcPr marL="50292" marR="50292" marT="10972" marB="10972" anchor="ctr">
-                    <a:lnL w="9525" cap="flat" cmpd="sng" algn="ctr">
-                      <a:solidFill>
-                        <a:srgbClr val="D9D9D9"/>
-                      </a:solidFill>
-                      <a:prstDash val="solid"/>
-                    </a:lnL>
-                    <a:lnR w="9525" cap="flat" cmpd="sng" algn="ctr">
-                      <a:solidFill>
-                        <a:srgbClr val="D9D9D9"/>
-                      </a:solidFill>
-                      <a:prstDash val="solid"/>
-                    </a:lnR>
-                    <a:lnT w="9525" cap="flat" cmpd="sng" algn="ctr">
-                      <a:solidFill>
-                        <a:srgbClr val="D9D9D9"/>
-                      </a:solidFill>
-                      <a:prstDash val="solid"/>
-                    </a:lnT>
-                    <a:lnB w="9525" cap="flat" cmpd="sng" algn="ctr">
-                      <a:solidFill>
-                        <a:srgbClr val="D9D9D9"/>
-                      </a:solidFill>
-                      <a:prstDash val="solid"/>
-                    </a:lnB>
-                    <a:solidFill>
-                      <a:srgbClr val="FFFFFF"/>
-                    </a:solidFill>
-                  </a:tcPr>
-                </a:tc>
-                <a:tc>
-                  <a:txBody>
-                    <a:bodyPr/>
-                    <a:lstStyle/>
-                    <a:p>
-                      <a:pPr algn="l">
-                        <a:lnSpc>
-                          <a:spcPct val="100000"/>
-                        </a:lnSpc>
-                      </a:pPr>
-                      <a:r>
-                        <a:rPr sz="880" b="0">
-                          <a:solidFill>
-                            <a:srgbClr val="1A1A1A"/>
-                          </a:solidFill>
-                          <a:latin typeface="Arial"/>
-                          <a:ea typeface="微软雅黑"/>
-                          <a:cs typeface="Arial"/>
-                        </a:rPr>
-                        <a:t>8 inch tablet</a:t>
-                      </a:r>
-                    </a:p>
-                  </a:txBody>
-                  <a:tcPr marL="50292" marR="50292" marT="10972" marB="10972" anchor="ctr">
-                    <a:lnL w="9525" cap="flat" cmpd="sng" algn="ctr">
-                      <a:solidFill>
-                        <a:srgbClr val="D9D9D9"/>
-                      </a:solidFill>
-                      <a:prstDash val="solid"/>
-                    </a:lnL>
-                    <a:lnR w="9525" cap="flat" cmpd="sng" algn="ctr">
-                      <a:solidFill>
-                        <a:srgbClr val="D9D9D9"/>
-                      </a:solidFill>
-                      <a:prstDash val="solid"/>
-                    </a:lnR>
-                    <a:lnT w="9525" cap="flat" cmpd="sng" algn="ctr">
-                      <a:solidFill>
-                        <a:srgbClr val="D9D9D9"/>
-                      </a:solidFill>
-                      <a:prstDash val="solid"/>
-                    </a:lnT>
-                    <a:lnB w="9525" cap="flat" cmpd="sng" algn="ctr">
-                      <a:solidFill>
-                        <a:srgbClr val="D9D9D9"/>
-                      </a:solidFill>
-                      <a:prstDash val="solid"/>
-                    </a:lnB>
-                    <a:solidFill>
-                      <a:srgbClr val="FFFFFF"/>
-                    </a:solidFill>
-                  </a:tcPr>
-                </a:tc>
-                <a:tc>
-                  <a:txBody>
-                    <a:bodyPr/>
-                    <a:lstStyle/>
-                    <a:p>
-                      <a:pPr algn="ctr">
-                        <a:lnSpc>
-                          <a:spcPct val="100000"/>
-                        </a:lnSpc>
-                      </a:pPr>
-                      <a:r>
-                        <a:rPr sz="880" b="0">
-                          <a:solidFill>
-                            <a:srgbClr val="1A1A1A"/>
-                          </a:solidFill>
-                          <a:latin typeface="Arial"/>
-                          <a:ea typeface="微软雅黑"/>
-                          <a:cs typeface="Arial"/>
-                        </a:rPr>
-                        <a:t>—</a:t>
-                      </a:r>
-                    </a:p>
-                  </a:txBody>
-                  <a:tcPr marL="50292" marR="50292" marT="10972" marB="10972" anchor="ctr">
-                    <a:lnL w="9525" cap="flat" cmpd="sng" algn="ctr">
-                      <a:solidFill>
-                        <a:srgbClr val="D9D9D9"/>
-                      </a:solidFill>
-                      <a:prstDash val="solid"/>
-                    </a:lnL>
-                    <a:lnR w="9525" cap="flat" cmpd="sng" algn="ctr">
-                      <a:solidFill>
-                        <a:srgbClr val="D9D9D9"/>
-                      </a:solidFill>
-                      <a:prstDash val="solid"/>
-                    </a:lnR>
-                    <a:lnT w="9525" cap="flat" cmpd="sng" algn="ctr">
-                      <a:solidFill>
-                        <a:srgbClr val="D9D9D9"/>
-                      </a:solidFill>
-                      <a:prstDash val="solid"/>
-                    </a:lnT>
-                    <a:lnB w="9525" cap="flat" cmpd="sng" algn="ctr">
-                      <a:solidFill>
-                        <a:srgbClr val="D9D9D9"/>
-                      </a:solidFill>
-                      <a:prstDash val="solid"/>
-                    </a:lnB>
-                    <a:solidFill>
-                      <a:srgbClr val="FFFFFF"/>
-                    </a:solidFill>
-                  </a:tcPr>
-                </a:tc>
-                <a:tc>
-                  <a:txBody>
-                    <a:bodyPr/>
-                    <a:lstStyle/>
-                    <a:p>
-                      <a:pPr algn="r">
-                        <a:lnSpc>
-                          <a:spcPct val="100000"/>
-                        </a:lnSpc>
-                      </a:pPr>
-                      <a:r>
-                        <a:rPr sz="880" b="0">
-                          <a:solidFill>
-                            <a:srgbClr val="1A1A1A"/>
-                          </a:solidFill>
-                          <a:latin typeface="Arial"/>
-                          <a:ea typeface="微软雅黑"/>
-                          <a:cs typeface="Arial"/>
-                        </a:rPr>
-                        <a:t>本线未生产</a:t>
-                      </a:r>
-                    </a:p>
-                  </a:txBody>
-                  <a:tcPr marL="50292" marR="50292" marT="10972" marB="10972" anchor="ctr">
-                    <a:lnL w="9525" cap="flat" cmpd="sng" algn="ctr">
-                      <a:solidFill>
-                        <a:srgbClr val="D9D9D9"/>
-                      </a:solidFill>
-                      <a:prstDash val="solid"/>
-                    </a:lnL>
-                    <a:lnR w="9525" cap="flat" cmpd="sng" algn="ctr">
-                      <a:solidFill>
-                        <a:srgbClr val="D9D9D9"/>
-                      </a:solidFill>
-                      <a:prstDash val="solid"/>
-                    </a:lnR>
-                    <a:lnT w="9525" cap="flat" cmpd="sng" algn="ctr">
-                      <a:solidFill>
-                        <a:srgbClr val="D9D9D9"/>
-                      </a:solidFill>
-                      <a:prstDash val="solid"/>
-                    </a:lnT>
-                    <a:lnB w="9525" cap="flat" cmpd="sng" algn="ctr">
-                      <a:solidFill>
-                        <a:srgbClr val="D9D9D9"/>
-                      </a:solidFill>
-                      <a:prstDash val="solid"/>
-                    </a:lnB>
-                    <a:solidFill>
-                      <a:srgbClr val="FFFFFF"/>
-                    </a:solidFill>
-                  </a:tcPr>
-                </a:tc>
-                <a:tc>
-                  <a:txBody>
-                    <a:bodyPr/>
-                    <a:lstStyle/>
-                    <a:p>
-                      <a:pPr algn="r">
-                        <a:lnSpc>
-                          <a:spcPct val="100000"/>
-                        </a:lnSpc>
-                      </a:pPr>
-                      <a:r>
-                        <a:rPr sz="880" b="0">
-                          <a:solidFill>
-                            <a:srgbClr val="1A1A1A"/>
-                          </a:solidFill>
-                          <a:latin typeface="Arial"/>
-                          <a:ea typeface="微软雅黑"/>
-                          <a:cs typeface="Arial"/>
-                        </a:rPr>
-                        <a:t>—</a:t>
-                      </a:r>
-                    </a:p>
-                  </a:txBody>
-                  <a:tcPr marL="50292" marR="50292" marT="10972" marB="10972" anchor="ctr">
-                    <a:lnL w="9525" cap="flat" cmpd="sng" algn="ctr">
-                      <a:solidFill>
-                        <a:srgbClr val="D9D9D9"/>
-                      </a:solidFill>
-                      <a:prstDash val="solid"/>
-                    </a:lnL>
-                    <a:lnR w="9525" cap="flat" cmpd="sng" algn="ctr">
-                      <a:solidFill>
-                        <a:srgbClr val="D9D9D9"/>
-                      </a:solidFill>
-                      <a:prstDash val="solid"/>
-                    </a:lnR>
-                    <a:lnT w="9525" cap="flat" cmpd="sng" algn="ctr">
-                      <a:solidFill>
-                        <a:srgbClr val="D9D9D9"/>
-                      </a:solidFill>
-                      <a:prstDash val="solid"/>
-                    </a:lnT>
-                    <a:lnB w="9525" cap="flat" cmpd="sng" algn="ctr">
-                      <a:solidFill>
-                        <a:srgbClr val="D9D9D9"/>
-                      </a:solidFill>
-                      <a:prstDash val="solid"/>
-                    </a:lnB>
-                    <a:solidFill>
-                      <a:srgbClr val="FFFFFF"/>
-                    </a:solidFill>
-                  </a:tcPr>
-                </a:tc>
-                <a:tc>
-                  <a:txBody>
-                    <a:bodyPr/>
-                    <a:lstStyle/>
-                    <a:p>
-                      <a:pPr algn="r">
-                        <a:lnSpc>
-                          <a:spcPct val="100000"/>
-                        </a:lnSpc>
-                      </a:pPr>
-                      <a:r>
-                        <a:rPr sz="880" b="0">
-                          <a:solidFill>
-                            <a:srgbClr val="1A1A1A"/>
-                          </a:solidFill>
-                          <a:latin typeface="Arial"/>
-                          <a:ea typeface="微软雅黑"/>
-                          <a:cs typeface="Arial"/>
-                        </a:rPr>
-                        <a:t>—</a:t>
-                      </a:r>
-                    </a:p>
-                  </a:txBody>
-                  <a:tcPr marL="50292" marR="50292" marT="10972" marB="10972" anchor="ctr">
-                    <a:lnL w="9525" cap="flat" cmpd="sng" algn="ctr">
-                      <a:solidFill>
-                        <a:srgbClr val="D9D9D9"/>
-                      </a:solidFill>
-                      <a:prstDash val="solid"/>
-                      <a:round/>
-                      <a:headEnd type="none" w="med" len="med"/>
-                      <a:tailEnd type="none" w="med" len="med"/>
-                    </a:lnL>
-                    <a:lnR w="9525" cap="flat" cmpd="sng" algn="ctr">
-                      <a:solidFill>
-                        <a:srgbClr val="D9D9D9"/>
-                      </a:solidFill>
-                      <a:prstDash val="solid"/>
-                    </a:lnR>
-                    <a:lnT w="9525" cap="flat" cmpd="sng" algn="ctr">
-                      <a:solidFill>
-                        <a:srgbClr val="D9D9D9"/>
-                      </a:solidFill>
-                      <a:prstDash val="solid"/>
-                      <a:round/>
-                      <a:headEnd type="none" w="med" len="med"/>
-                      <a:tailEnd type="none" w="med" len="med"/>
-                    </a:lnT>
-                    <a:lnB w="9525" cap="flat" cmpd="sng" algn="ctr">
-                      <a:solidFill>
-                        <a:srgbClr val="D9D9D9"/>
-                      </a:solidFill>
-                      <a:prstDash val="solid"/>
-                      <a:round/>
-                      <a:headEnd type="none" w="med" len="med"/>
-                      <a:tailEnd type="none" w="med" len="med"/>
-                    </a:lnB>
-                    <a:solidFill>
-                      <a:srgbClr val="FFFFFF"/>
-                    </a:solidFill>
-                  </a:tcPr>
-                </a:tc>
-                <a:extLst>
-                  <a:ext uri="{0D108BD9-81ED-4DB2-BD59-A6C34878D82A}">
-                    <a16:rowId xmlns:a16="http://schemas.microsoft.com/office/drawing/2014/main" val="10005"/>
-                  </a:ext>
-                </a:extLst>
-              </a:tr>
-              <a:tr h="347444">
-                <a:tc>
-                  <a:txBody>
-                    <a:bodyPr/>
-                    <a:lstStyle/>
-                    <a:p>
-                      <a:pPr algn="l">
-                        <a:lnSpc>
-                          <a:spcPct val="100000"/>
-                        </a:lnSpc>
-                      </a:pPr>
-                      <a:r>
-                        <a:rPr sz="880" b="1">
-                          <a:solidFill>
-                            <a:srgbClr val="1A1A1A"/>
-                          </a:solidFill>
-                          <a:latin typeface="Arial"/>
-                          <a:ea typeface="微软雅黑"/>
-                          <a:cs typeface="Arial"/>
-                        </a:rPr>
-                        <a:t>AX7513</a:t>
-                      </a:r>
-                    </a:p>
-                  </a:txBody>
-                  <a:tcPr marL="50292" marR="50292" marT="10972" marB="10972" anchor="ctr">
-                    <a:lnL w="9525" cap="flat" cmpd="sng" algn="ctr">
-                      <a:solidFill>
-                        <a:srgbClr val="D9D9D9"/>
-                      </a:solidFill>
-                      <a:prstDash val="solid"/>
-                    </a:lnL>
-                    <a:lnR w="9525" cap="flat" cmpd="sng" algn="ctr">
-                      <a:solidFill>
-                        <a:srgbClr val="D9D9D9"/>
-                      </a:solidFill>
-                      <a:prstDash val="solid"/>
-                    </a:lnR>
-                    <a:lnT w="9525" cap="flat" cmpd="sng" algn="ctr">
-                      <a:solidFill>
-                        <a:srgbClr val="D9D9D9"/>
-                      </a:solidFill>
-                      <a:prstDash val="solid"/>
-                    </a:lnT>
-                    <a:lnB w="9525" cap="flat" cmpd="sng" algn="ctr">
-                      <a:solidFill>
-                        <a:srgbClr val="D9D9D9"/>
-                      </a:solidFill>
-                      <a:prstDash val="solid"/>
-                    </a:lnB>
-                    <a:solidFill>
-                      <a:srgbClr val="FFFFFF"/>
-                    </a:solidFill>
-                  </a:tcPr>
-                </a:tc>
-                <a:tc>
-                  <a:txBody>
-                    <a:bodyPr/>
-                    <a:lstStyle/>
-                    <a:p>
-                      <a:pPr algn="l">
-                        <a:lnSpc>
-                          <a:spcPct val="100000"/>
-                        </a:lnSpc>
-                      </a:pPr>
-                      <a:r>
-                        <a:rPr sz="880" b="0">
-                          <a:solidFill>
-                            <a:srgbClr val="1A1A1A"/>
-                          </a:solidFill>
-                          <a:latin typeface="Arial"/>
-                          <a:ea typeface="微软雅黑"/>
-                          <a:cs typeface="Arial"/>
-                        </a:rPr>
-                        <a:t>Turquoise</a:t>
-                      </a:r>
-                    </a:p>
-                  </a:txBody>
-                  <a:tcPr marL="50292" marR="50292" marT="10972" marB="10972" anchor="ctr">
-                    <a:lnL w="9525" cap="flat" cmpd="sng" algn="ctr">
-                      <a:solidFill>
-                        <a:srgbClr val="D9D9D9"/>
-                      </a:solidFill>
-                      <a:prstDash val="solid"/>
-                    </a:lnL>
-                    <a:lnR w="9525" cap="flat" cmpd="sng" algn="ctr">
-                      <a:solidFill>
-                        <a:srgbClr val="D9D9D9"/>
-                      </a:solidFill>
-                      <a:prstDash val="solid"/>
-                    </a:lnR>
-                    <a:lnT w="9525" cap="flat" cmpd="sng" algn="ctr">
-                      <a:solidFill>
-                        <a:srgbClr val="D9D9D9"/>
-                      </a:solidFill>
-                      <a:prstDash val="solid"/>
-                    </a:lnT>
-                    <a:lnB w="9525" cap="flat" cmpd="sng" algn="ctr">
-                      <a:solidFill>
-                        <a:srgbClr val="D9D9D9"/>
-                      </a:solidFill>
-                      <a:prstDash val="solid"/>
-                    </a:lnB>
-                    <a:solidFill>
-                      <a:srgbClr val="FFFFFF"/>
-                    </a:solidFill>
-                  </a:tcPr>
-                </a:tc>
-                <a:tc>
-                  <a:txBody>
-                    <a:bodyPr/>
-                    <a:lstStyle/>
-                    <a:p>
-                      <a:pPr algn="l">
-                        <a:lnSpc>
-                          <a:spcPct val="100000"/>
-                        </a:lnSpc>
-                      </a:pPr>
-                      <a:r>
-                        <a:rPr sz="880" b="0">
-                          <a:solidFill>
-                            <a:srgbClr val="1A1A1A"/>
-                          </a:solidFill>
-                          <a:latin typeface="Arial"/>
-                          <a:ea typeface="微软雅黑"/>
-                          <a:cs typeface="Arial"/>
-                        </a:rPr>
-                        <a:t>11 inch tablet</a:t>
-                      </a:r>
-                    </a:p>
-                  </a:txBody>
-                  <a:tcPr marL="50292" marR="50292" marT="10972" marB="10972" anchor="ctr">
-                    <a:lnL w="9525" cap="flat" cmpd="sng" algn="ctr">
-                      <a:solidFill>
-                        <a:srgbClr val="D9D9D9"/>
-                      </a:solidFill>
-                      <a:prstDash val="solid"/>
-                    </a:lnL>
-                    <a:lnR w="9525" cap="flat" cmpd="sng" algn="ctr">
-                      <a:solidFill>
-                        <a:srgbClr val="D9D9D9"/>
-                      </a:solidFill>
-                      <a:prstDash val="solid"/>
-                    </a:lnR>
-                    <a:lnT w="9525" cap="flat" cmpd="sng" algn="ctr">
-                      <a:solidFill>
-                        <a:srgbClr val="D9D9D9"/>
-                      </a:solidFill>
-                      <a:prstDash val="solid"/>
-                    </a:lnT>
-                    <a:lnB w="9525" cap="flat" cmpd="sng" algn="ctr">
-                      <a:solidFill>
-                        <a:srgbClr val="D9D9D9"/>
-                      </a:solidFill>
-                      <a:prstDash val="solid"/>
-                    </a:lnB>
-                    <a:solidFill>
-                      <a:srgbClr val="FFFFFF"/>
-                    </a:solidFill>
-                  </a:tcPr>
-                </a:tc>
-                <a:tc>
-                  <a:txBody>
-                    <a:bodyPr/>
-                    <a:lstStyle/>
-                    <a:p>
-                      <a:pPr algn="ctr">
-                        <a:lnSpc>
-                          <a:spcPct val="100000"/>
-                        </a:lnSpc>
-                      </a:pPr>
-                      <a:r>
-                        <a:rPr sz="880" b="0">
-                          <a:solidFill>
-                            <a:srgbClr val="1A1A1A"/>
-                          </a:solidFill>
-                          <a:latin typeface="Arial"/>
-                          <a:ea typeface="微软雅黑"/>
-                          <a:cs typeface="Arial"/>
-                        </a:rPr>
-                        <a:t>—</a:t>
-                      </a:r>
-                    </a:p>
-                  </a:txBody>
-                  <a:tcPr marL="50292" marR="50292" marT="10972" marB="10972" anchor="ctr">
-                    <a:lnL w="9525" cap="flat" cmpd="sng" algn="ctr">
-                      <a:solidFill>
-                        <a:srgbClr val="D9D9D9"/>
-                      </a:solidFill>
-                      <a:prstDash val="solid"/>
-                    </a:lnL>
-                    <a:lnR w="9525" cap="flat" cmpd="sng" algn="ctr">
-                      <a:solidFill>
-                        <a:srgbClr val="D9D9D9"/>
-                      </a:solidFill>
-                      <a:prstDash val="solid"/>
-                    </a:lnR>
-                    <a:lnT w="9525" cap="flat" cmpd="sng" algn="ctr">
-                      <a:solidFill>
-                        <a:srgbClr val="D9D9D9"/>
-                      </a:solidFill>
-                      <a:prstDash val="solid"/>
-                    </a:lnT>
-                    <a:lnB w="9525" cap="flat" cmpd="sng" algn="ctr">
-                      <a:solidFill>
-                        <a:srgbClr val="D9D9D9"/>
-                      </a:solidFill>
-                      <a:prstDash val="solid"/>
-                    </a:lnB>
-                    <a:solidFill>
-                      <a:srgbClr val="FFFFFF"/>
-                    </a:solidFill>
-                  </a:tcPr>
-                </a:tc>
-                <a:tc>
-                  <a:txBody>
-                    <a:bodyPr/>
-                    <a:lstStyle/>
-                    <a:p>
-                      <a:pPr algn="r">
-                        <a:lnSpc>
-                          <a:spcPct val="100000"/>
-                        </a:lnSpc>
-                      </a:pPr>
-                      <a:r>
-                        <a:rPr sz="880" b="0">
-                          <a:solidFill>
-                            <a:srgbClr val="1A1A1A"/>
-                          </a:solidFill>
-                          <a:latin typeface="Arial"/>
-                          <a:ea typeface="微软雅黑"/>
-                          <a:cs typeface="Arial"/>
-                        </a:rPr>
-                        <a:t>本线未生产</a:t>
-                      </a:r>
-                    </a:p>
-                  </a:txBody>
-                  <a:tcPr marL="50292" marR="50292" marT="10972" marB="10972" anchor="ctr">
-                    <a:lnL w="9525" cap="flat" cmpd="sng" algn="ctr">
-                      <a:solidFill>
-                        <a:srgbClr val="D9D9D9"/>
-                      </a:solidFill>
-                      <a:prstDash val="solid"/>
-                    </a:lnL>
-                    <a:lnR w="9525" cap="flat" cmpd="sng" algn="ctr">
-                      <a:solidFill>
-                        <a:srgbClr val="D9D9D9"/>
-                      </a:solidFill>
-                      <a:prstDash val="solid"/>
-                    </a:lnR>
-                    <a:lnT w="9525" cap="flat" cmpd="sng" algn="ctr">
-                      <a:solidFill>
-                        <a:srgbClr val="D9D9D9"/>
-                      </a:solidFill>
-                      <a:prstDash val="solid"/>
-                    </a:lnT>
-                    <a:lnB w="9525" cap="flat" cmpd="sng" algn="ctr">
-                      <a:solidFill>
-                        <a:srgbClr val="D9D9D9"/>
-                      </a:solidFill>
-                      <a:prstDash val="solid"/>
-                    </a:lnB>
-                    <a:solidFill>
-                      <a:srgbClr val="FFFFFF"/>
-                    </a:solidFill>
-                  </a:tcPr>
-                </a:tc>
-                <a:tc>
-                  <a:txBody>
-                    <a:bodyPr/>
-                    <a:lstStyle/>
-                    <a:p>
-                      <a:pPr algn="r">
-                        <a:lnSpc>
-                          <a:spcPct val="100000"/>
-                        </a:lnSpc>
-                      </a:pPr>
-                      <a:r>
-                        <a:rPr sz="880" b="0">
-                          <a:solidFill>
-                            <a:srgbClr val="1A1A1A"/>
-                          </a:solidFill>
-                          <a:latin typeface="Arial"/>
-                          <a:ea typeface="微软雅黑"/>
-                          <a:cs typeface="Arial"/>
-                        </a:rPr>
-                        <a:t>—</a:t>
-                      </a:r>
-                    </a:p>
-                  </a:txBody>
-                  <a:tcPr marL="50292" marR="50292" marT="10972" marB="10972" anchor="ctr">
-                    <a:lnL w="9525" cap="flat" cmpd="sng" algn="ctr">
-                      <a:solidFill>
-                        <a:srgbClr val="D9D9D9"/>
-                      </a:solidFill>
-                      <a:prstDash val="solid"/>
-                    </a:lnL>
-                    <a:lnR w="9525" cap="flat" cmpd="sng" algn="ctr">
-                      <a:solidFill>
-                        <a:srgbClr val="D9D9D9"/>
-                      </a:solidFill>
-                      <a:prstDash val="solid"/>
-                    </a:lnR>
-                    <a:lnT w="9525" cap="flat" cmpd="sng" algn="ctr">
-                      <a:solidFill>
-                        <a:srgbClr val="D9D9D9"/>
-                      </a:solidFill>
-                      <a:prstDash val="solid"/>
-                    </a:lnT>
-                    <a:lnB w="9525" cap="flat" cmpd="sng" algn="ctr">
-                      <a:solidFill>
-                        <a:srgbClr val="D9D9D9"/>
-                      </a:solidFill>
-                      <a:prstDash val="solid"/>
-                    </a:lnB>
-                    <a:solidFill>
-                      <a:srgbClr val="FFFFFF"/>
-                    </a:solidFill>
-                  </a:tcPr>
-                </a:tc>
-                <a:tc>
-                  <a:txBody>
-                    <a:bodyPr/>
-                    <a:lstStyle/>
-                    <a:p>
-                      <a:pPr algn="r">
-                        <a:lnSpc>
-                          <a:spcPct val="100000"/>
-                        </a:lnSpc>
-                      </a:pPr>
-                      <a:r>
-                        <a:rPr sz="880" b="0" dirty="0">
-                          <a:solidFill>
-                            <a:srgbClr val="1A1A1A"/>
-                          </a:solidFill>
-                          <a:latin typeface="Arial"/>
-                          <a:ea typeface="微软雅黑"/>
-                          <a:cs typeface="Arial"/>
-                        </a:rPr>
-                        <a:t>—</a:t>
-                      </a:r>
-                    </a:p>
-                  </a:txBody>
-                  <a:tcPr marL="50292" marR="50292" marT="10972" marB="10972" anchor="ctr">
-                    <a:lnL w="9525" cap="flat" cmpd="sng" algn="ctr">
-                      <a:solidFill>
-                        <a:srgbClr val="D9D9D9"/>
-                      </a:solidFill>
-                      <a:prstDash val="solid"/>
-                      <a:round/>
-                      <a:headEnd type="none" w="med" len="med"/>
-                      <a:tailEnd type="none" w="med" len="med"/>
-                    </a:lnL>
-                    <a:lnR w="9525" cap="flat" cmpd="sng" algn="ctr">
-                      <a:solidFill>
-                        <a:srgbClr val="D9D9D9"/>
-                      </a:solidFill>
-                      <a:prstDash val="solid"/>
-                    </a:lnR>
-                    <a:lnT w="9525" cap="flat" cmpd="sng" algn="ctr">
-                      <a:solidFill>
-                        <a:srgbClr val="D9D9D9"/>
-                      </a:solidFill>
-                      <a:prstDash val="solid"/>
-                      <a:round/>
-                      <a:headEnd type="none" w="med" len="med"/>
-                      <a:tailEnd type="none" w="med" len="med"/>
-                    </a:lnT>
-                    <a:lnB w="9525" cap="flat" cmpd="sng" algn="ctr">
-                      <a:solidFill>
-                        <a:srgbClr val="D9D9D9"/>
-                      </a:solidFill>
-                      <a:prstDash val="solid"/>
-                    </a:lnB>
-                    <a:solidFill>
-                      <a:srgbClr val="FFFFFF"/>
-                    </a:solidFill>
-                  </a:tcPr>
-                </a:tc>
-                <a:extLst>
-                  <a:ext uri="{0D108BD9-81ED-4DB2-BD59-A6C34878D82A}">
-                    <a16:rowId xmlns:a16="http://schemas.microsoft.com/office/drawing/2014/main" val="10006"/>
                   </a:ext>
                 </a:extLst>
               </a:tr>

--- a/RFID读取评估_2026-10-21/09_报告/RFID读取能力评估_2026-10-23.pptx
+++ b/RFID读取评估_2026-10-21/09_报告/RFID读取能力评估_2026-10-23.pptx
@@ -4004,14 +4004,20 @@
       </p:grpSpPr>
       <p:sp>
         <p:nvSpPr>
-          <p:cNvPr id="2" name="TextBox 1"/>
+          <p:cNvPr id="2" name="文本框 1">
+            <a:extLst>
+              <a:ext uri="{FF2B5EF4-FFF2-40B4-BE49-F238E27FC236}">
+                <a16:creationId xmlns:a16="http://schemas.microsoft.com/office/drawing/2014/main" id="{39DADCA6-5042-431B-9760-4842AD24C2D1}"/>
+              </a:ext>
+            </a:extLst>
+          </p:cNvPr>
           <p:cNvSpPr txBox="1"/>
           <p:nvPr/>
         </p:nvSpPr>
         <p:spPr>
           <a:xfrm>
-            <a:off x="566928" y="365760"/>
-            <a:ext cx="11057839" cy="502920"/>
+            <a:off x="971550" y="2828835"/>
+            <a:ext cx="10029825" cy="1200329"/>
           </a:xfrm>
           <a:prstGeom prst="rect">
             <a:avLst/>
@@ -4019,1506 +4025,25 @@
           <a:noFill/>
         </p:spPr>
         <p:txBody>
-          <a:bodyPr wrap="square" lIns="0" tIns="0" rIns="0" bIns="0" anchor="t">
+          <a:bodyPr wrap="square" rtlCol="0">
             <a:spAutoFit/>
           </a:bodyPr>
           <a:lstStyle/>
           <a:p>
-            <a:pPr algn="l">
-              <a:lnSpc>
-                <a:spcPct val="100000"/>
-              </a:lnSpc>
-            </a:pPr>
             <a:r>
-              <a:rPr sz="2200" b="1">
-                <a:solidFill>
-                  <a:srgbClr val="1A1A1A"/>
-                </a:solidFill>
-                <a:latin typeface="Arial"/>
-                <a:ea typeface="微软雅黑"/>
-                <a:cs typeface="Arial"/>
-              </a:rPr>
-              <a:t>机型口径结论：四个在产组合都没拉开差距</a:t>
+              <a:rPr lang="en-US" altLang="zh-CN" sz="7200" dirty="0"/>
+              <a:t>Back Up</a:t>
             </a:r>
-          </a:p>
-        </p:txBody>
-      </p:sp>
-      <p:sp>
-        <p:nvSpPr>
-          <p:cNvPr id="3" name="TextBox 2"/>
-          <p:cNvSpPr txBox="1"/>
-          <p:nvPr/>
-        </p:nvSpPr>
-        <p:spPr>
-          <a:xfrm>
-            <a:off x="566928" y="877824"/>
-            <a:ext cx="11057839" cy="274320"/>
-          </a:xfrm>
-          <a:prstGeom prst="rect">
-            <a:avLst/>
-          </a:prstGeom>
-          <a:noFill/>
-        </p:spPr>
-        <p:txBody>
-          <a:bodyPr wrap="square" lIns="0" tIns="0" rIns="0" bIns="0" anchor="t">
-            <a:spAutoFit/>
-          </a:bodyPr>
-          <a:lstStyle/>
-          <a:p>
-            <a:pPr algn="l">
-              <a:lnSpc>
-                <a:spcPct val="100000"/>
-              </a:lnSpc>
-            </a:pPr>
-            <a:r>
-              <a:rPr sz="1100" b="0">
-                <a:solidFill>
-                  <a:srgbClr val="8C8C8C"/>
-                </a:solidFill>
-                <a:latin typeface="Arial"/>
-                <a:ea typeface="微软雅黑"/>
-                <a:cs typeface="Arial"/>
-              </a:rPr>
-              <a:t>R6（同一读码器 × 箱型）的答案：代号＝HQ代码-背壳，实测见左栏（31 天逐箱对齐）；AX7771 / AX7513 本线无包装日志，已从口径表移除</a:t>
-            </a:r>
-          </a:p>
-        </p:txBody>
-      </p:sp>
-      <p:cxnSp>
-        <p:nvCxnSpPr>
-          <p:cNvPr id="4" name="Connector 3"/>
-          <p:cNvCxnSpPr/>
-          <p:nvPr/>
-        </p:nvCxnSpPr>
-        <p:spPr>
-          <a:xfrm>
-            <a:off x="566928" y="1207008"/>
-            <a:ext cx="11057839" cy="0"/>
-          </a:xfrm>
-          <a:prstGeom prst="line">
-            <a:avLst/>
-          </a:prstGeom>
-          <a:ln w="9525">
-            <a:solidFill>
-              <a:srgbClr val="D9D9D9"/>
-            </a:solidFill>
-          </a:ln>
-        </p:spPr>
-        <p:style>
-          <a:lnRef idx="2">
-            <a:schemeClr val="accent1"/>
-          </a:lnRef>
-          <a:fillRef idx="0">
-            <a:schemeClr val="accent1"/>
-          </a:fillRef>
-          <a:effectRef idx="1">
-            <a:schemeClr val="accent1"/>
-          </a:effectRef>
-          <a:fontRef idx="minor">
-            <a:schemeClr val="tx1"/>
-          </a:fontRef>
-        </p:style>
-      </p:cxnSp>
-      <p:graphicFrame>
-        <p:nvGraphicFramePr>
-          <p:cNvPr id="9" name="Table 8"/>
-          <p:cNvGraphicFramePr>
-            <a:graphicFrameLocks noGrp="1"/>
-          </p:cNvGraphicFramePr>
-          <p:nvPr>
-            <p:extLst>
-              <p:ext uri="{D42A27DB-BD31-4B8C-83A1-F6EECF244321}">
-                <p14:modId xmlns:p14="http://schemas.microsoft.com/office/powerpoint/2010/main" val="4158630560"/>
-              </p:ext>
-            </p:extLst>
-          </p:nvPr>
-        </p:nvGraphicFramePr>
-        <p:xfrm>
-          <a:off x="6903720" y="1335024"/>
-          <a:ext cx="4718304" cy="2560320"/>
-        </p:xfrm>
-        <a:graphic>
-          <a:graphicData uri="http://schemas.openxmlformats.org/drawingml/2006/table">
-            <a:tbl>
-              <a:tblPr/>
-              <a:tblGrid>
-                <a:gridCol w="1097280">
-                  <a:extLst>
-                    <a:ext uri="{9D8B030D-6E8A-4147-A177-3AD203B41FA5}">
-                      <a16:colId xmlns:a16="http://schemas.microsoft.com/office/drawing/2014/main" val="20000"/>
-                    </a:ext>
-                  </a:extLst>
-                </a:gridCol>
-                <a:gridCol w="3621024">
-                  <a:extLst>
-                    <a:ext uri="{9D8B030D-6E8A-4147-A177-3AD203B41FA5}">
-                      <a16:colId xmlns:a16="http://schemas.microsoft.com/office/drawing/2014/main" val="20001"/>
-                    </a:ext>
-                  </a:extLst>
-                </a:gridCol>
-              </a:tblGrid>
-              <a:tr h="365760">
-                <a:tc>
-                  <a:txBody>
-                    <a:bodyPr/>
-                    <a:lstStyle/>
-                    <a:p>
-                      <a:pPr algn="ctr">
-                        <a:lnSpc>
-                          <a:spcPct val="100000"/>
-                        </a:lnSpc>
-                      </a:pPr>
-                      <a:r>
-                        <a:rPr sz="900" b="1">
-                          <a:solidFill>
-                            <a:srgbClr val="1A1A1A"/>
-                          </a:solidFill>
-                          <a:latin typeface="Arial"/>
-                          <a:ea typeface="微软雅黑"/>
-                          <a:cs typeface="Arial"/>
-                        </a:rPr>
-                        <a:t>代号</a:t>
-                      </a:r>
-                    </a:p>
-                  </a:txBody>
-                  <a:tcPr marL="50292" marR="50292" marT="13716" marB="13716" anchor="ctr">
-                    <a:lnL w="9525" cap="flat" cmpd="sng" algn="ctr">
-                      <a:solidFill>
-                        <a:srgbClr val="D9D9D9"/>
-                      </a:solidFill>
-                      <a:prstDash val="solid"/>
-                    </a:lnL>
-                    <a:lnR w="9525" cap="flat" cmpd="sng" algn="ctr">
-                      <a:solidFill>
-                        <a:srgbClr val="D9D9D9"/>
-                      </a:solidFill>
-                      <a:prstDash val="solid"/>
-                    </a:lnR>
-                    <a:lnT w="9525" cap="flat" cmpd="sng" algn="ctr">
-                      <a:solidFill>
-                        <a:srgbClr val="D9D9D9"/>
-                      </a:solidFill>
-                      <a:prstDash val="solid"/>
-                    </a:lnT>
-                    <a:lnB w="9525" cap="flat" cmpd="sng" algn="ctr">
-                      <a:solidFill>
-                        <a:srgbClr val="D9D9D9"/>
-                      </a:solidFill>
-                      <a:prstDash val="solid"/>
-                    </a:lnB>
-                    <a:solidFill>
-                      <a:srgbClr val="F2F2F2"/>
-                    </a:solidFill>
-                  </a:tcPr>
-                </a:tc>
-                <a:tc>
-                  <a:txBody>
-                    <a:bodyPr/>
-                    <a:lstStyle/>
-                    <a:p>
-                      <a:pPr algn="l">
-                        <a:lnSpc>
-                          <a:spcPct val="100000"/>
-                        </a:lnSpc>
-                      </a:pPr>
-                      <a:r>
-                        <a:rPr sz="900" b="1">
-                          <a:solidFill>
-                            <a:srgbClr val="1A1A1A"/>
-                          </a:solidFill>
-                          <a:latin typeface="Arial"/>
-                          <a:ea typeface="微软雅黑"/>
-                          <a:cs typeface="Arial"/>
-                        </a:rPr>
-                        <a:t>箱型 / 背壳</a:t>
-                      </a:r>
-                    </a:p>
-                  </a:txBody>
-                  <a:tcPr marL="50292" marR="50292" marT="13716" marB="13716" anchor="ctr">
-                    <a:lnL w="9525" cap="flat" cmpd="sng" algn="ctr">
-                      <a:solidFill>
-                        <a:srgbClr val="D9D9D9"/>
-                      </a:solidFill>
-                      <a:prstDash val="solid"/>
-                    </a:lnL>
-                    <a:lnR w="9525" cap="flat" cmpd="sng" algn="ctr">
-                      <a:solidFill>
-                        <a:srgbClr val="D9D9D9"/>
-                      </a:solidFill>
-                      <a:prstDash val="solid"/>
-                    </a:lnR>
-                    <a:lnT w="9525" cap="flat" cmpd="sng" algn="ctr">
-                      <a:solidFill>
-                        <a:srgbClr val="D9D9D9"/>
-                      </a:solidFill>
-                      <a:prstDash val="solid"/>
-                    </a:lnT>
-                    <a:lnB w="9525" cap="flat" cmpd="sng" algn="ctr">
-                      <a:solidFill>
-                        <a:srgbClr val="D9D9D9"/>
-                      </a:solidFill>
-                      <a:prstDash val="solid"/>
-                    </a:lnB>
-                    <a:solidFill>
-                      <a:srgbClr val="F2F2F2"/>
-                    </a:solidFill>
-                  </a:tcPr>
-                </a:tc>
-                <a:extLst>
-                  <a:ext uri="{0D108BD9-81ED-4DB2-BD59-A6C34878D82A}">
-                    <a16:rowId xmlns:a16="http://schemas.microsoft.com/office/drawing/2014/main" val="10000"/>
-                  </a:ext>
-                </a:extLst>
-              </a:tr>
-              <a:tr h="365760">
-                <a:tc>
-                  <a:txBody>
-                    <a:bodyPr/>
-                    <a:lstStyle/>
-                    <a:p>
-                      <a:pPr algn="ctr">
-                        <a:lnSpc>
-                          <a:spcPct val="100000"/>
-                        </a:lnSpc>
-                      </a:pPr>
-                      <a:r>
-                        <a:rPr sz="950" b="1">
-                          <a:solidFill>
-                            <a:srgbClr val="1A1A1A"/>
-                          </a:solidFill>
-                          <a:latin typeface="Arial"/>
-                          <a:ea typeface="微软雅黑"/>
-                          <a:cs typeface="Arial"/>
-                        </a:rPr>
-                        <a:t>7907-P</a:t>
-                      </a:r>
-                    </a:p>
-                  </a:txBody>
-                  <a:tcPr marL="50292" marR="50292" marT="13716" marB="13716" anchor="ctr">
-                    <a:lnL w="9525" cap="flat" cmpd="sng" algn="ctr">
-                      <a:solidFill>
-                        <a:srgbClr val="D9D9D9"/>
-                      </a:solidFill>
-                      <a:prstDash val="solid"/>
-                    </a:lnL>
-                    <a:lnR w="9525" cap="flat" cmpd="sng" algn="ctr">
-                      <a:solidFill>
-                        <a:srgbClr val="D9D9D9"/>
-                      </a:solidFill>
-                      <a:prstDash val="solid"/>
-                    </a:lnR>
-                    <a:lnT w="9525" cap="flat" cmpd="sng" algn="ctr">
-                      <a:solidFill>
-                        <a:srgbClr val="D9D9D9"/>
-                      </a:solidFill>
-                      <a:prstDash val="solid"/>
-                    </a:lnT>
-                    <a:lnB w="9525" cap="flat" cmpd="sng" algn="ctr">
-                      <a:solidFill>
-                        <a:srgbClr val="D9D9D9"/>
-                      </a:solidFill>
-                      <a:prstDash val="solid"/>
-                    </a:lnB>
-                    <a:solidFill>
-                      <a:srgbClr val="FFFFFF"/>
-                    </a:solidFill>
-                  </a:tcPr>
-                </a:tc>
-                <a:tc>
-                  <a:txBody>
-                    <a:bodyPr/>
-                    <a:lstStyle/>
-                    <a:p>
-                      <a:pPr algn="l">
-                        <a:lnSpc>
-                          <a:spcPct val="100000"/>
-                        </a:lnSpc>
-                      </a:pPr>
-                      <a:r>
-                        <a:rPr sz="950" b="0">
-                          <a:solidFill>
-                            <a:srgbClr val="1A1A1A"/>
-                          </a:solidFill>
-                          <a:latin typeface="Arial"/>
-                          <a:ea typeface="微软雅黑"/>
-                          <a:cs typeface="Arial"/>
-                        </a:rPr>
-                        <a:t>AX7907 · 6″ · 塑料</a:t>
-                      </a:r>
-                    </a:p>
-                  </a:txBody>
-                  <a:tcPr marL="50292" marR="50292" marT="13716" marB="13716" anchor="ctr">
-                    <a:lnL w="9525" cap="flat" cmpd="sng" algn="ctr">
-                      <a:solidFill>
-                        <a:srgbClr val="D9D9D9"/>
-                      </a:solidFill>
-                      <a:prstDash val="solid"/>
-                    </a:lnL>
-                    <a:lnR w="9525" cap="flat" cmpd="sng" algn="ctr">
-                      <a:solidFill>
-                        <a:srgbClr val="D9D9D9"/>
-                      </a:solidFill>
-                      <a:prstDash val="solid"/>
-                    </a:lnR>
-                    <a:lnT w="9525" cap="flat" cmpd="sng" algn="ctr">
-                      <a:solidFill>
-                        <a:srgbClr val="D9D9D9"/>
-                      </a:solidFill>
-                      <a:prstDash val="solid"/>
-                    </a:lnT>
-                    <a:lnB w="9525" cap="flat" cmpd="sng" algn="ctr">
-                      <a:solidFill>
-                        <a:srgbClr val="D9D9D9"/>
-                      </a:solidFill>
-                      <a:prstDash val="solid"/>
-                    </a:lnB>
-                    <a:solidFill>
-                      <a:srgbClr val="FFFFFF"/>
-                    </a:solidFill>
-                  </a:tcPr>
-                </a:tc>
-                <a:extLst>
-                  <a:ext uri="{0D108BD9-81ED-4DB2-BD59-A6C34878D82A}">
-                    <a16:rowId xmlns:a16="http://schemas.microsoft.com/office/drawing/2014/main" val="10001"/>
-                  </a:ext>
-                </a:extLst>
-              </a:tr>
-              <a:tr h="365760">
-                <a:tc>
-                  <a:txBody>
-                    <a:bodyPr/>
-                    <a:lstStyle/>
-                    <a:p>
-                      <a:pPr algn="ctr">
-                        <a:lnSpc>
-                          <a:spcPct val="100000"/>
-                        </a:lnSpc>
-                      </a:pPr>
-                      <a:r>
-                        <a:rPr sz="950" b="1">
-                          <a:solidFill>
-                            <a:srgbClr val="1A1A1A"/>
-                          </a:solidFill>
-                          <a:latin typeface="Arial"/>
-                          <a:ea typeface="微软雅黑"/>
-                          <a:cs typeface="Arial"/>
-                        </a:rPr>
-                        <a:t>8252-P</a:t>
-                      </a:r>
-                    </a:p>
-                  </a:txBody>
-                  <a:tcPr marL="50292" marR="50292" marT="13716" marB="13716" anchor="ctr">
-                    <a:lnL w="9525" cap="flat" cmpd="sng" algn="ctr">
-                      <a:solidFill>
-                        <a:srgbClr val="D9D9D9"/>
-                      </a:solidFill>
-                      <a:prstDash val="solid"/>
-                    </a:lnL>
-                    <a:lnR w="9525" cap="flat" cmpd="sng" algn="ctr">
-                      <a:solidFill>
-                        <a:srgbClr val="D9D9D9"/>
-                      </a:solidFill>
-                      <a:prstDash val="solid"/>
-                    </a:lnR>
-                    <a:lnT w="9525" cap="flat" cmpd="sng" algn="ctr">
-                      <a:solidFill>
-                        <a:srgbClr val="D9D9D9"/>
-                      </a:solidFill>
-                      <a:prstDash val="solid"/>
-                    </a:lnT>
-                    <a:lnB w="9525" cap="flat" cmpd="sng" algn="ctr">
-                      <a:solidFill>
-                        <a:srgbClr val="D9D9D9"/>
-                      </a:solidFill>
-                      <a:prstDash val="solid"/>
-                    </a:lnB>
-                    <a:solidFill>
-                      <a:srgbClr val="FFFFFF"/>
-                    </a:solidFill>
-                  </a:tcPr>
-                </a:tc>
-                <a:tc>
-                  <a:txBody>
-                    <a:bodyPr/>
-                    <a:lstStyle/>
-                    <a:p>
-                      <a:pPr algn="l">
-                        <a:lnSpc>
-                          <a:spcPct val="100000"/>
-                        </a:lnSpc>
-                      </a:pPr>
-                      <a:r>
-                        <a:rPr sz="950" b="0">
-                          <a:solidFill>
-                            <a:srgbClr val="1A1A1A"/>
-                          </a:solidFill>
-                          <a:latin typeface="Arial"/>
-                          <a:ea typeface="微软雅黑"/>
-                          <a:cs typeface="Arial"/>
-                        </a:rPr>
-                        <a:t>AX8252 · 7″ · 塑料</a:t>
-                      </a:r>
-                    </a:p>
-                  </a:txBody>
-                  <a:tcPr marL="50292" marR="50292" marT="13716" marB="13716" anchor="ctr">
-                    <a:lnL w="9525" cap="flat" cmpd="sng" algn="ctr">
-                      <a:solidFill>
-                        <a:srgbClr val="D9D9D9"/>
-                      </a:solidFill>
-                      <a:prstDash val="solid"/>
-                    </a:lnL>
-                    <a:lnR w="9525" cap="flat" cmpd="sng" algn="ctr">
-                      <a:solidFill>
-                        <a:srgbClr val="D9D9D9"/>
-                      </a:solidFill>
-                      <a:prstDash val="solid"/>
-                    </a:lnR>
-                    <a:lnT w="9525" cap="flat" cmpd="sng" algn="ctr">
-                      <a:solidFill>
-                        <a:srgbClr val="D9D9D9"/>
-                      </a:solidFill>
-                      <a:prstDash val="solid"/>
-                    </a:lnT>
-                    <a:lnB w="9525" cap="flat" cmpd="sng" algn="ctr">
-                      <a:solidFill>
-                        <a:srgbClr val="D9D9D9"/>
-                      </a:solidFill>
-                      <a:prstDash val="solid"/>
-                    </a:lnB>
-                    <a:solidFill>
-                      <a:srgbClr val="FFFFFF"/>
-                    </a:solidFill>
-                  </a:tcPr>
-                </a:tc>
-                <a:extLst>
-                  <a:ext uri="{0D108BD9-81ED-4DB2-BD59-A6C34878D82A}">
-                    <a16:rowId xmlns:a16="http://schemas.microsoft.com/office/drawing/2014/main" val="10002"/>
-                  </a:ext>
-                </a:extLst>
-              </a:tr>
-              <a:tr h="365760">
-                <a:tc>
-                  <a:txBody>
-                    <a:bodyPr/>
-                    <a:lstStyle/>
-                    <a:p>
-                      <a:pPr algn="ctr">
-                        <a:lnSpc>
-                          <a:spcPct val="100000"/>
-                        </a:lnSpc>
-                      </a:pPr>
-                      <a:r>
-                        <a:rPr sz="950" b="1">
-                          <a:solidFill>
-                            <a:srgbClr val="1A1A1A"/>
-                          </a:solidFill>
-                          <a:latin typeface="Arial"/>
-                          <a:ea typeface="微软雅黑"/>
-                          <a:cs typeface="Arial"/>
-                        </a:rPr>
-                        <a:t>7907-M</a:t>
-                      </a:r>
-                    </a:p>
-                  </a:txBody>
-                  <a:tcPr marL="50292" marR="50292" marT="13716" marB="13716" anchor="ctr">
-                    <a:lnL w="9525" cap="flat" cmpd="sng" algn="ctr">
-                      <a:solidFill>
-                        <a:srgbClr val="D9D9D9"/>
-                      </a:solidFill>
-                      <a:prstDash val="solid"/>
-                    </a:lnL>
-                    <a:lnR w="9525" cap="flat" cmpd="sng" algn="ctr">
-                      <a:solidFill>
-                        <a:srgbClr val="D9D9D9"/>
-                      </a:solidFill>
-                      <a:prstDash val="solid"/>
-                    </a:lnR>
-                    <a:lnT w="9525" cap="flat" cmpd="sng" algn="ctr">
-                      <a:solidFill>
-                        <a:srgbClr val="D9D9D9"/>
-                      </a:solidFill>
-                      <a:prstDash val="solid"/>
-                    </a:lnT>
-                    <a:lnB w="9525" cap="flat" cmpd="sng" algn="ctr">
-                      <a:solidFill>
-                        <a:srgbClr val="D9D9D9"/>
-                      </a:solidFill>
-                      <a:prstDash val="solid"/>
-                    </a:lnB>
-                    <a:solidFill>
-                      <a:srgbClr val="FFFFFF"/>
-                    </a:solidFill>
-                  </a:tcPr>
-                </a:tc>
-                <a:tc>
-                  <a:txBody>
-                    <a:bodyPr/>
-                    <a:lstStyle/>
-                    <a:p>
-                      <a:pPr algn="l">
-                        <a:lnSpc>
-                          <a:spcPct val="100000"/>
-                        </a:lnSpc>
-                      </a:pPr>
-                      <a:r>
-                        <a:rPr sz="950" b="0">
-                          <a:solidFill>
-                            <a:srgbClr val="1A1A1A"/>
-                          </a:solidFill>
-                          <a:latin typeface="Arial"/>
-                          <a:ea typeface="微软雅黑"/>
-                          <a:cs typeface="Arial"/>
-                        </a:rPr>
-                        <a:t>AX7907 · 6″ · 金属</a:t>
-                      </a:r>
-                    </a:p>
-                  </a:txBody>
-                  <a:tcPr marL="50292" marR="50292" marT="13716" marB="13716" anchor="ctr">
-                    <a:lnL w="9525" cap="flat" cmpd="sng" algn="ctr">
-                      <a:solidFill>
-                        <a:srgbClr val="D9D9D9"/>
-                      </a:solidFill>
-                      <a:prstDash val="solid"/>
-                    </a:lnL>
-                    <a:lnR w="9525" cap="flat" cmpd="sng" algn="ctr">
-                      <a:solidFill>
-                        <a:srgbClr val="D9D9D9"/>
-                      </a:solidFill>
-                      <a:prstDash val="solid"/>
-                    </a:lnR>
-                    <a:lnT w="9525" cap="flat" cmpd="sng" algn="ctr">
-                      <a:solidFill>
-                        <a:srgbClr val="D9D9D9"/>
-                      </a:solidFill>
-                      <a:prstDash val="solid"/>
-                    </a:lnT>
-                    <a:lnB w="9525" cap="flat" cmpd="sng" algn="ctr">
-                      <a:solidFill>
-                        <a:srgbClr val="D9D9D9"/>
-                      </a:solidFill>
-                      <a:prstDash val="solid"/>
-                    </a:lnB>
-                    <a:solidFill>
-                      <a:srgbClr val="FFFFFF"/>
-                    </a:solidFill>
-                  </a:tcPr>
-                </a:tc>
-                <a:extLst>
-                  <a:ext uri="{0D108BD9-81ED-4DB2-BD59-A6C34878D82A}">
-                    <a16:rowId xmlns:a16="http://schemas.microsoft.com/office/drawing/2014/main" val="10003"/>
-                  </a:ext>
-                </a:extLst>
-              </a:tr>
-              <a:tr h="365760">
-                <a:tc>
-                  <a:txBody>
-                    <a:bodyPr/>
-                    <a:lstStyle/>
-                    <a:p>
-                      <a:pPr algn="ctr">
-                        <a:lnSpc>
-                          <a:spcPct val="100000"/>
-                        </a:lnSpc>
-                      </a:pPr>
-                      <a:r>
-                        <a:rPr sz="950" b="1">
-                          <a:solidFill>
-                            <a:srgbClr val="1A1A1A"/>
-                          </a:solidFill>
-                          <a:latin typeface="Arial"/>
-                          <a:ea typeface="微软雅黑"/>
-                          <a:cs typeface="Arial"/>
-                        </a:rPr>
-                        <a:t>8252-M</a:t>
-                      </a:r>
-                    </a:p>
-                  </a:txBody>
-                  <a:tcPr marL="50292" marR="50292" marT="13716" marB="13716" anchor="ctr">
-                    <a:lnL w="9525" cap="flat" cmpd="sng" algn="ctr">
-                      <a:solidFill>
-                        <a:srgbClr val="D9D9D9"/>
-                      </a:solidFill>
-                      <a:prstDash val="solid"/>
-                    </a:lnL>
-                    <a:lnR w="9525" cap="flat" cmpd="sng" algn="ctr">
-                      <a:solidFill>
-                        <a:srgbClr val="D9D9D9"/>
-                      </a:solidFill>
-                      <a:prstDash val="solid"/>
-                    </a:lnR>
-                    <a:lnT w="9525" cap="flat" cmpd="sng" algn="ctr">
-                      <a:solidFill>
-                        <a:srgbClr val="D9D9D9"/>
-                      </a:solidFill>
-                      <a:prstDash val="solid"/>
-                    </a:lnT>
-                    <a:lnB w="9525" cap="flat" cmpd="sng" algn="ctr">
-                      <a:solidFill>
-                        <a:srgbClr val="D9D9D9"/>
-                      </a:solidFill>
-                      <a:prstDash val="solid"/>
-                    </a:lnB>
-                    <a:solidFill>
-                      <a:srgbClr val="FFFFFF"/>
-                    </a:solidFill>
-                  </a:tcPr>
-                </a:tc>
-                <a:tc>
-                  <a:txBody>
-                    <a:bodyPr/>
-                    <a:lstStyle/>
-                    <a:p>
-                      <a:pPr algn="l">
-                        <a:lnSpc>
-                          <a:spcPct val="100000"/>
-                        </a:lnSpc>
-                      </a:pPr>
-                      <a:r>
-                        <a:rPr sz="950" b="0">
-                          <a:solidFill>
-                            <a:srgbClr val="1A1A1A"/>
-                          </a:solidFill>
-                          <a:latin typeface="Arial"/>
-                          <a:ea typeface="微软雅黑"/>
-                          <a:cs typeface="Arial"/>
-                        </a:rPr>
-                        <a:t>AX8252 · 7″ · 金属</a:t>
-                      </a:r>
-                    </a:p>
-                  </a:txBody>
-                  <a:tcPr marL="50292" marR="50292" marT="13716" marB="13716" anchor="ctr">
-                    <a:lnL w="9525" cap="flat" cmpd="sng" algn="ctr">
-                      <a:solidFill>
-                        <a:srgbClr val="D9D9D9"/>
-                      </a:solidFill>
-                      <a:prstDash val="solid"/>
-                    </a:lnL>
-                    <a:lnR w="9525" cap="flat" cmpd="sng" algn="ctr">
-                      <a:solidFill>
-                        <a:srgbClr val="D9D9D9"/>
-                      </a:solidFill>
-                      <a:prstDash val="solid"/>
-                    </a:lnR>
-                    <a:lnT w="9525" cap="flat" cmpd="sng" algn="ctr">
-                      <a:solidFill>
-                        <a:srgbClr val="D9D9D9"/>
-                      </a:solidFill>
-                      <a:prstDash val="solid"/>
-                    </a:lnT>
-                    <a:lnB w="9525" cap="flat" cmpd="sng" algn="ctr">
-                      <a:solidFill>
-                        <a:srgbClr val="D9D9D9"/>
-                      </a:solidFill>
-                      <a:prstDash val="solid"/>
-                    </a:lnB>
-                    <a:solidFill>
-                      <a:srgbClr val="FFFFFF"/>
-                    </a:solidFill>
-                  </a:tcPr>
-                </a:tc>
-                <a:extLst>
-                  <a:ext uri="{0D108BD9-81ED-4DB2-BD59-A6C34878D82A}">
-                    <a16:rowId xmlns:a16="http://schemas.microsoft.com/office/drawing/2014/main" val="10004"/>
-                  </a:ext>
-                </a:extLst>
-              </a:tr>
-            </a:tbl>
-          </a:graphicData>
-        </a:graphic>
-      </p:graphicFrame>
-      <p:sp>
-        <p:nvSpPr>
-          <p:cNvPr id="10" name="Rectangle 9"/>
-          <p:cNvSpPr/>
-          <p:nvPr/>
-        </p:nvSpPr>
-        <p:spPr>
-          <a:xfrm>
-            <a:off x="6903720" y="3310128"/>
-            <a:ext cx="4718304" cy="1335024"/>
-          </a:xfrm>
-          <a:prstGeom prst="rect">
-            <a:avLst/>
-          </a:prstGeom>
-          <a:solidFill>
-            <a:srgbClr val="E6EDF9"/>
-          </a:solidFill>
-          <a:ln>
-            <a:noFill/>
-          </a:ln>
-          <a:effectLst/>
-        </p:spPr>
-        <p:style>
-          <a:lnRef idx="1">
-            <a:schemeClr val="accent1"/>
-          </a:lnRef>
-          <a:fillRef idx="3">
-            <a:schemeClr val="accent1"/>
-          </a:fillRef>
-          <a:effectRef idx="2">
-            <a:schemeClr val="accent1"/>
-          </a:effectRef>
-          <a:fontRef idx="minor">
-            <a:schemeClr val="lt1"/>
-          </a:fontRef>
-        </p:style>
-        <p:txBody>
-          <a:bodyPr wrap="square" rtlCol="0" anchor="ctr"/>
-          <a:lstStyle/>
-          <a:p>
-            <a:pPr algn="ctr"/>
-            <a:endParaRPr/>
-          </a:p>
-        </p:txBody>
-      </p:sp>
-      <p:sp>
-        <p:nvSpPr>
-          <p:cNvPr id="11" name="TextBox 10"/>
-          <p:cNvSpPr txBox="1"/>
-          <p:nvPr/>
-        </p:nvSpPr>
-        <p:spPr>
-          <a:xfrm>
-            <a:off x="7059168" y="3401568"/>
-            <a:ext cx="4434840" cy="1188720"/>
-          </a:xfrm>
-          <a:prstGeom prst="rect">
-            <a:avLst/>
-          </a:prstGeom>
-          <a:noFill/>
-        </p:spPr>
-        <p:txBody>
-          <a:bodyPr wrap="square" lIns="0" tIns="0" rIns="0" bIns="0" anchor="t">
-            <a:spAutoFit/>
-          </a:bodyPr>
-          <a:lstStyle/>
-          <a:p>
-            <a:pPr algn="l">
-              <a:lnSpc>
-                <a:spcPct val="115000"/>
-              </a:lnSpc>
-            </a:pPr>
-            <a:r>
-              <a:rPr sz="1000" b="1">
-                <a:solidFill>
-                  <a:srgbClr val="3E5DA8"/>
-                </a:solidFill>
-                <a:latin typeface="Arial"/>
-                <a:ea typeface="微软雅黑"/>
-                <a:cs typeface="Arial"/>
-              </a:rPr>
-              <a:t>结论</a:t>
-            </a:r>
-          </a:p>
-          <a:p>
-            <a:pPr algn="l">
-              <a:lnSpc>
-                <a:spcPct val="115000"/>
-              </a:lnSpc>
-            </a:pPr>
-            <a:r>
-              <a:rPr sz="900" b="0">
-                <a:solidFill>
-                  <a:srgbClr val="1A1A1A"/>
-                </a:solidFill>
-                <a:latin typeface="Arial"/>
-                <a:ea typeface="微软雅黑"/>
-                <a:cs typeface="Arial"/>
-              </a:rPr>
-              <a:t>实测 31 天：四个在产组合读全 0–2.12%，一箱 0 个 40.5–99.1%。</a:t>
-            </a:r>
-          </a:p>
-          <a:p>
-            <a:pPr algn="l">
-              <a:lnSpc>
-                <a:spcPct val="115000"/>
-              </a:lnSpc>
-            </a:pPr>
-            <a:r>
-              <a:rPr sz="900" b="0">
-                <a:solidFill>
-                  <a:srgbClr val="1A1A1A"/>
-                </a:solidFill>
-                <a:latin typeface="Arial"/>
-                <a:ea typeface="微软雅黑"/>
-                <a:cs typeface="Arial"/>
-              </a:rPr>
-              <a:t>塑料 vs 金属：98.9% vs 95.2%（一箱 0 个）、0.01% vs 0.00%（读全）—— 没有拉开差距。</a:t>
-            </a:r>
-          </a:p>
-          <a:p>
-            <a:pPr algn="l">
-              <a:lnSpc>
-                <a:spcPct val="115000"/>
-              </a:lnSpc>
-            </a:pPr>
-            <a:r>
-              <a:rPr sz="900" b="1">
-                <a:solidFill>
-                  <a:srgbClr val="1A1A1A"/>
-                </a:solidFill>
-                <a:latin typeface="Arial"/>
-                <a:ea typeface="微软雅黑"/>
-                <a:cs typeface="Arial"/>
-              </a:rPr>
-              <a:t>⇒ 背壳/尺寸换不来读全；先修屏蔽、朝向与窗口，再按箱型复测。</a:t>
-            </a:r>
-          </a:p>
-        </p:txBody>
-      </p:sp>
-      <p:sp>
-        <p:nvSpPr>
-          <p:cNvPr id="12" name="Rectangle 11"/>
-          <p:cNvSpPr/>
-          <p:nvPr/>
-        </p:nvSpPr>
-        <p:spPr>
-          <a:xfrm>
-            <a:off x="566928" y="5806440"/>
-            <a:ext cx="45720" cy="310896"/>
-          </a:xfrm>
-          <a:prstGeom prst="rect">
-            <a:avLst/>
-          </a:prstGeom>
-          <a:solidFill>
-            <a:srgbClr val="3E5DA8"/>
-          </a:solidFill>
-          <a:ln>
-            <a:noFill/>
-          </a:ln>
-          <a:effectLst/>
-        </p:spPr>
-        <p:style>
-          <a:lnRef idx="1">
-            <a:schemeClr val="accent1"/>
-          </a:lnRef>
-          <a:fillRef idx="3">
-            <a:schemeClr val="accent1"/>
-          </a:fillRef>
-          <a:effectRef idx="2">
-            <a:schemeClr val="accent1"/>
-          </a:effectRef>
-          <a:fontRef idx="minor">
-            <a:schemeClr val="lt1"/>
-          </a:fontRef>
-        </p:style>
-        <p:txBody>
-          <a:bodyPr wrap="square" rtlCol="0" anchor="ctr"/>
-          <a:lstStyle/>
-          <a:p>
-            <a:pPr algn="ctr"/>
-            <a:endParaRPr/>
-          </a:p>
-        </p:txBody>
-      </p:sp>
-      <p:sp>
-        <p:nvSpPr>
-          <p:cNvPr id="13" name="TextBox 12"/>
-          <p:cNvSpPr txBox="1"/>
-          <p:nvPr/>
-        </p:nvSpPr>
-        <p:spPr>
-          <a:xfrm>
-            <a:off x="713232" y="5824727"/>
-            <a:ext cx="10874959" cy="292608"/>
-          </a:xfrm>
-          <a:prstGeom prst="rect">
-            <a:avLst/>
-          </a:prstGeom>
-          <a:noFill/>
-        </p:spPr>
-        <p:txBody>
-          <a:bodyPr wrap="square" lIns="0" tIns="0" rIns="0" bIns="0" anchor="ctr">
-            <a:spAutoFit/>
-          </a:bodyPr>
-          <a:lstStyle/>
-          <a:p>
-            <a:pPr algn="l">
-              <a:lnSpc>
-                <a:spcPct val="100000"/>
-              </a:lnSpc>
-            </a:pPr>
-            <a:r>
-              <a:rPr sz="1100" b="1">
-                <a:solidFill>
-                  <a:srgbClr val="1A1A1A"/>
-                </a:solidFill>
-                <a:latin typeface="Arial"/>
-                <a:ea typeface="微软雅黑"/>
-                <a:cs typeface="Arial"/>
-              </a:rPr>
-              <a:t>若产线要上金属背壳机型：要么改贴标位置（避开金属面），要么在箱外/开口侧增设天线</a:t>
-            </a:r>
-          </a:p>
-        </p:txBody>
-      </p:sp>
-      <p:sp>
-        <p:nvSpPr>
-          <p:cNvPr id="14" name="P9_kicker"/>
-          <p:cNvSpPr txBox="1"/>
-          <p:nvPr/>
-        </p:nvSpPr>
-        <p:spPr>
-          <a:xfrm>
-            <a:off x="566928" y="1335024"/>
-            <a:ext cx="5897880" cy="237744"/>
-          </a:xfrm>
-          <a:prstGeom prst="rect">
-            <a:avLst/>
-          </a:prstGeom>
-          <a:noFill/>
-        </p:spPr>
-        <p:txBody>
-          <a:bodyPr wrap="square" lIns="0" tIns="0" rIns="0" bIns="0">
-            <a:spAutoFit/>
-          </a:bodyPr>
-          <a:lstStyle/>
-          <a:p>
-            <a:pPr algn="l"/>
-            <a:r>
-              <a:rPr sz="900" b="0">
-                <a:solidFill>
-                  <a:srgbClr val="8C8C8C"/>
-                </a:solidFill>
-                <a:latin typeface="Arial"/>
-                <a:ea typeface="微软雅黑"/>
-                <a:cs typeface="Arial"/>
-              </a:rPr>
-              <a:t>实测：31 天 113,667 箱，机台日志逐箱对齐（readStatus × EpcLog）</a:t>
-            </a:r>
-          </a:p>
-        </p:txBody>
-      </p:sp>
-      <p:sp>
-        <p:nvSpPr>
-          <p:cNvPr id="15" name="P9_num0"/>
-          <p:cNvSpPr txBox="1"/>
-          <p:nvPr/>
-        </p:nvSpPr>
-        <p:spPr>
-          <a:xfrm>
-            <a:off x="566928" y="1645920"/>
-            <a:ext cx="1874519" cy="475488"/>
-          </a:xfrm>
-          <a:prstGeom prst="rect">
-            <a:avLst/>
-          </a:prstGeom>
-          <a:noFill/>
-        </p:spPr>
-        <p:txBody>
-          <a:bodyPr wrap="square" lIns="0" tIns="0" rIns="0" bIns="0">
-            <a:spAutoFit/>
-          </a:bodyPr>
-          <a:lstStyle/>
-          <a:p>
-            <a:pPr algn="l"/>
-            <a:r>
-              <a:rPr sz="2800" b="1">
-                <a:solidFill>
-                  <a:srgbClr val="1A1A1A"/>
-                </a:solidFill>
-                <a:latin typeface="Arial"/>
-                <a:ea typeface="微软雅黑"/>
-                <a:cs typeface="Arial"/>
-              </a:rPr>
-              <a:t>98.9%</a:t>
-            </a:r>
-          </a:p>
-        </p:txBody>
-      </p:sp>
-      <p:sp>
-        <p:nvSpPr>
-          <p:cNvPr id="16" name="P9_cap0"/>
-          <p:cNvSpPr txBox="1"/>
-          <p:nvPr/>
-        </p:nvSpPr>
-        <p:spPr>
-          <a:xfrm>
-            <a:off x="566928" y="2157984"/>
-            <a:ext cx="1874519" cy="502920"/>
-          </a:xfrm>
-          <a:prstGeom prst="rect">
-            <a:avLst/>
-          </a:prstGeom>
-          <a:noFill/>
-        </p:spPr>
-        <p:txBody>
-          <a:bodyPr wrap="square" lIns="0" tIns="0" rIns="0" bIns="0">
-            <a:spAutoFit/>
-          </a:bodyPr>
-          <a:lstStyle/>
-          <a:p>
-            <a:pPr algn="l">
-              <a:lnSpc>
-                <a:spcPct val="105000"/>
-              </a:lnSpc>
-            </a:pPr>
-            <a:r>
-              <a:rPr sz="850" b="0">
-                <a:solidFill>
-                  <a:srgbClr val="8C8C8C"/>
-                </a:solidFill>
-                <a:latin typeface="Arial"/>
-                <a:ea typeface="微软雅黑"/>
-                <a:cs typeface="Arial"/>
-              </a:rPr>
-              <a:t>塑料背壳 8252-P</a:t>
-            </a:r>
-          </a:p>
-          <a:p>
-            <a:pPr algn="l">
-              <a:lnSpc>
-                <a:spcPct val="105000"/>
-              </a:lnSpc>
-            </a:pPr>
-            <a:r>
-              <a:rPr sz="850" b="0">
-                <a:solidFill>
-                  <a:srgbClr val="8C8C8C"/>
-                </a:solidFill>
-                <a:latin typeface="Arial"/>
-                <a:ea typeface="微软雅黑"/>
-                <a:cs typeface="Arial"/>
-              </a:rPr>
-              <a:t>一箱 0 个（15,202 箱）</a:t>
-            </a:r>
-          </a:p>
-        </p:txBody>
-      </p:sp>
-      <p:sp>
-        <p:nvSpPr>
-          <p:cNvPr id="17" name="P9_num1"/>
-          <p:cNvSpPr txBox="1"/>
-          <p:nvPr/>
-        </p:nvSpPr>
-        <p:spPr>
-          <a:xfrm>
-            <a:off x="2542032" y="1645920"/>
-            <a:ext cx="1874519" cy="475488"/>
-          </a:xfrm>
-          <a:prstGeom prst="rect">
-            <a:avLst/>
-          </a:prstGeom>
-          <a:noFill/>
-        </p:spPr>
-        <p:txBody>
-          <a:bodyPr wrap="square" lIns="0" tIns="0" rIns="0" bIns="0">
-            <a:spAutoFit/>
-          </a:bodyPr>
-          <a:lstStyle/>
-          <a:p>
-            <a:pPr algn="l"/>
-            <a:r>
-              <a:rPr sz="2800" b="1">
-                <a:solidFill>
-                  <a:srgbClr val="1A1A1A"/>
-                </a:solidFill>
-                <a:latin typeface="Arial"/>
-                <a:ea typeface="微软雅黑"/>
-                <a:cs typeface="Arial"/>
-              </a:rPr>
-              <a:t>95.2%</a:t>
-            </a:r>
-          </a:p>
-        </p:txBody>
-      </p:sp>
-      <p:sp>
-        <p:nvSpPr>
-          <p:cNvPr id="18" name="P9_cap1"/>
-          <p:cNvSpPr txBox="1"/>
-          <p:nvPr/>
-        </p:nvSpPr>
-        <p:spPr>
-          <a:xfrm>
-            <a:off x="2542032" y="2157984"/>
-            <a:ext cx="1874519" cy="502920"/>
-          </a:xfrm>
-          <a:prstGeom prst="rect">
-            <a:avLst/>
-          </a:prstGeom>
-          <a:noFill/>
-        </p:spPr>
-        <p:txBody>
-          <a:bodyPr wrap="square" lIns="0" tIns="0" rIns="0" bIns="0">
-            <a:spAutoFit/>
-          </a:bodyPr>
-          <a:lstStyle/>
-          <a:p>
-            <a:pPr algn="l">
-              <a:lnSpc>
-                <a:spcPct val="105000"/>
-              </a:lnSpc>
-            </a:pPr>
-            <a:r>
-              <a:rPr sz="850" b="0">
-                <a:solidFill>
-                  <a:srgbClr val="8C8C8C"/>
-                </a:solidFill>
-                <a:latin typeface="Arial"/>
-                <a:ea typeface="微软雅黑"/>
-                <a:cs typeface="Arial"/>
-              </a:rPr>
-              <a:t>金属背壳 8252-M</a:t>
-            </a:r>
-          </a:p>
-          <a:p>
-            <a:pPr algn="l">
-              <a:lnSpc>
-                <a:spcPct val="105000"/>
-              </a:lnSpc>
-            </a:pPr>
-            <a:r>
-              <a:rPr sz="850" b="0">
-                <a:solidFill>
-                  <a:srgbClr val="8C8C8C"/>
-                </a:solidFill>
-                <a:latin typeface="Arial"/>
-                <a:ea typeface="微软雅黑"/>
-                <a:cs typeface="Arial"/>
-              </a:rPr>
-              <a:t>一箱 0 个（6,524 箱）</a:t>
-            </a:r>
-          </a:p>
-        </p:txBody>
-      </p:sp>
-      <p:sp>
-        <p:nvSpPr>
-          <p:cNvPr id="19" name="P9_num2"/>
-          <p:cNvSpPr txBox="1"/>
-          <p:nvPr/>
-        </p:nvSpPr>
-        <p:spPr>
-          <a:xfrm>
-            <a:off x="4517136" y="1645920"/>
-            <a:ext cx="1874519" cy="475488"/>
-          </a:xfrm>
-          <a:prstGeom prst="rect">
-            <a:avLst/>
-          </a:prstGeom>
-          <a:noFill/>
-        </p:spPr>
-        <p:txBody>
-          <a:bodyPr wrap="square" lIns="0" tIns="0" rIns="0" bIns="0">
-            <a:spAutoFit/>
-          </a:bodyPr>
-          <a:lstStyle/>
-          <a:p>
-            <a:pPr algn="l"/>
-            <a:r>
-              <a:rPr sz="2800" b="1">
-                <a:solidFill>
-                  <a:srgbClr val="C0504D"/>
-                </a:solidFill>
-                <a:latin typeface="Arial"/>
-                <a:ea typeface="微软雅黑"/>
-                <a:cs typeface="Arial"/>
-              </a:rPr>
-              <a:t>40.5%</a:t>
-            </a:r>
-          </a:p>
-        </p:txBody>
-      </p:sp>
-      <p:sp>
-        <p:nvSpPr>
-          <p:cNvPr id="20" name="P9_cap2"/>
-          <p:cNvSpPr txBox="1"/>
-          <p:nvPr/>
-        </p:nvSpPr>
-        <p:spPr>
-          <a:xfrm>
-            <a:off x="4517136" y="2157984"/>
-            <a:ext cx="1874519" cy="502920"/>
-          </a:xfrm>
-          <a:prstGeom prst="rect">
-            <a:avLst/>
-          </a:prstGeom>
-          <a:noFill/>
-        </p:spPr>
-        <p:txBody>
-          <a:bodyPr wrap="square" lIns="0" tIns="0" rIns="0" bIns="0">
-            <a:spAutoFit/>
-          </a:bodyPr>
-          <a:lstStyle/>
-          <a:p>
-            <a:pPr algn="l">
-              <a:lnSpc>
-                <a:spcPct val="105000"/>
-              </a:lnSpc>
-            </a:pPr>
-            <a:r>
-              <a:rPr sz="850" b="0">
-                <a:solidFill>
-                  <a:srgbClr val="8C8C8C"/>
-                </a:solidFill>
-                <a:latin typeface="Arial"/>
-                <a:ea typeface="微软雅黑"/>
-                <a:cs typeface="Arial"/>
-              </a:rPr>
-              <a:t>AX6727（背壳未标注）</a:t>
-            </a:r>
-          </a:p>
-          <a:p>
-            <a:pPr algn="l">
-              <a:lnSpc>
-                <a:spcPct val="105000"/>
-              </a:lnSpc>
-            </a:pPr>
-            <a:r>
-              <a:rPr sz="850" b="0">
-                <a:solidFill>
-                  <a:srgbClr val="8C8C8C"/>
-                </a:solidFill>
-                <a:latin typeface="Arial"/>
-                <a:ea typeface="微软雅黑"/>
-                <a:cs typeface="Arial"/>
-              </a:rPr>
-              <a:t>一箱 0 个（7,170 箱）· 异常</a:t>
-            </a:r>
-          </a:p>
-        </p:txBody>
-      </p:sp>
-      <p:cxnSp>
-        <p:nvCxnSpPr>
-          <p:cNvPr id="21" name="P9_rule"/>
-          <p:cNvCxnSpPr/>
-          <p:nvPr/>
-        </p:nvCxnSpPr>
-        <p:spPr>
-          <a:xfrm>
-            <a:off x="566928" y="2834640"/>
-            <a:ext cx="5897880" cy="0"/>
-          </a:xfrm>
-          <a:prstGeom prst="line">
-            <a:avLst/>
-          </a:prstGeom>
-          <a:ln w="9525">
-            <a:solidFill>
-              <a:srgbClr val="D9D9D9"/>
-            </a:solidFill>
-          </a:ln>
-          <a:effectLst/>
-        </p:spPr>
-      </p:cxnSp>
-      <p:sp>
-        <p:nvSpPr>
-          <p:cNvPr id="22" name="P9_bullets"/>
-          <p:cNvSpPr txBox="1"/>
-          <p:nvPr/>
-        </p:nvSpPr>
-        <p:spPr>
-          <a:xfrm>
-            <a:off x="2212848" y="2889504"/>
-            <a:ext cx="4251960" cy="1700784"/>
-          </a:xfrm>
-          <a:prstGeom prst="rect">
-            <a:avLst/>
-          </a:prstGeom>
-          <a:noFill/>
-        </p:spPr>
-        <p:txBody>
-          <a:bodyPr wrap="square" lIns="0" tIns="0" rIns="0" bIns="0">
-            <a:spAutoFit/>
-          </a:bodyPr>
-          <a:lstStyle/>
-          <a:p>
-            <a:pPr algn="l">
-              <a:lnSpc>
-                <a:spcPct val="118000"/>
-              </a:lnSpc>
-            </a:pPr>
-            <a:r>
-              <a:rPr sz="1120" b="0">
-                <a:solidFill>
-                  <a:srgbClr val="1A1A1A"/>
-                </a:solidFill>
-                <a:latin typeface="Arial"/>
-                <a:ea typeface="微软雅黑"/>
-                <a:cs typeface="Arial"/>
-              </a:rPr>
-              <a:t>· 塑料 vs 金属只差 3.7 个点，读全 0.01% vs 0.00% ⇒ 背壳不是分水岭。</a:t>
-            </a:r>
-          </a:p>
-          <a:p>
-            <a:pPr algn="l">
-              <a:lnSpc>
-                <a:spcPct val="118000"/>
-              </a:lnSpc>
-            </a:pPr>
-            <a:r>
-              <a:rPr sz="1120" b="0">
-                <a:solidFill>
-                  <a:srgbClr val="1A1A1A"/>
-                </a:solidFill>
-                <a:latin typeface="Arial"/>
-                <a:ea typeface="微软雅黑"/>
-                <a:cs typeface="Arial"/>
-              </a:rPr>
-              <a:t>· 全机型读全 6 个 0.14%、一箱 0 个 95.0%。</a:t>
-            </a:r>
-          </a:p>
-          <a:p>
-            <a:pPr algn="l">
-              <a:lnSpc>
-                <a:spcPct val="118000"/>
-              </a:lnSpc>
-            </a:pPr>
-            <a:r>
-              <a:rPr sz="1120" b="0">
-                <a:solidFill>
-                  <a:srgbClr val="1A1A1A"/>
-                </a:solidFill>
-                <a:latin typeface="Arial"/>
-                <a:ea typeface="微软雅黑"/>
-                <a:cs typeface="Arial"/>
-              </a:rPr>
-              <a:t>· AX6727 的 40.5% / 2.12% 明显不同，先查该批贴标与工位，暂不作结论。</a:t>
-            </a:r>
-          </a:p>
-          <a:p>
-            <a:pPr algn="l">
-              <a:lnSpc>
-                <a:spcPct val="118000"/>
-              </a:lnSpc>
-            </a:pPr>
-            <a:r>
-              <a:rPr sz="1120" b="1">
-                <a:solidFill>
-                  <a:srgbClr val="C0504D"/>
-                </a:solidFill>
-                <a:latin typeface="Arial"/>
-                <a:ea typeface="微软雅黑"/>
-                <a:cs typeface="Arial"/>
-              </a:rPr>
-              <a:t>⇒ 换箱型、换背壳都换不来读全：先修屏蔽、朝向与读码窗口，再按箱型复测。</a:t>
-            </a:r>
-          </a:p>
-        </p:txBody>
-      </p:sp>
-      <p:sp>
-        <p:nvSpPr>
-          <p:cNvPr id="23" name="P9_note"/>
-          <p:cNvSpPr txBox="1"/>
-          <p:nvPr/>
-        </p:nvSpPr>
-        <p:spPr>
-          <a:xfrm>
-            <a:off x="2212848" y="4626864"/>
-            <a:ext cx="4251960" cy="566928"/>
-          </a:xfrm>
-          <a:prstGeom prst="rect">
-            <a:avLst/>
-          </a:prstGeom>
-          <a:noFill/>
-        </p:spPr>
-        <p:txBody>
-          <a:bodyPr wrap="square" lIns="0" tIns="0" rIns="0" bIns="0">
-            <a:spAutoFit/>
-          </a:bodyPr>
-          <a:lstStyle/>
-          <a:p>
-            <a:pPr algn="l">
-              <a:lnSpc>
-                <a:spcPct val="120000"/>
-              </a:lnSpc>
-            </a:pPr>
-            <a:r>
-              <a:rPr sz="819" b="0">
-                <a:solidFill>
-                  <a:srgbClr val="8C8C8C"/>
-                </a:solidFill>
-                <a:latin typeface="Arial"/>
-                <a:ea typeface="微软雅黑"/>
-                <a:cs typeface="Arial"/>
-              </a:rPr>
-              <a:t>口径：readStatus × EpcLog 按箱窗口对齐；读全 6 个＝一箱 6 个整机标签都在窗口内读到。四个在产组合占 83,706 箱（74%）；7907 的背壳 MES 未标注，实测只能到机型级。</a:t>
-            </a:r>
-          </a:p>
-        </p:txBody>
-      </p:sp>
-      <p:pic>
-        <p:nvPicPr>
-          <p:cNvPr id="24" name="S5_fig" descr="fig_reader_layout.png"/>
-          <p:cNvPicPr>
-            <a:picLocks noChangeAspect="1"/>
-          </p:cNvPicPr>
-          <p:nvPr/>
-        </p:nvPicPr>
-        <p:blipFill>
-          <a:blip r:embed="rId3"/>
-          <a:stretch>
-            <a:fillRect/>
-          </a:stretch>
-        </p:blipFill>
-        <p:spPr>
-          <a:xfrm>
-            <a:off x="548640" y="2852928"/>
-            <a:ext cx="1685259" cy="2487168"/>
-          </a:xfrm>
-          <a:prstGeom prst="rect">
-            <a:avLst/>
-          </a:prstGeom>
-        </p:spPr>
-      </p:pic>
-      <p:sp>
-        <p:nvSpPr>
-          <p:cNvPr id="25" name="S5_cap"/>
-          <p:cNvSpPr txBox="1"/>
-          <p:nvPr/>
-        </p:nvSpPr>
-        <p:spPr>
-          <a:xfrm>
-            <a:off x="566928" y="5440680"/>
-            <a:ext cx="1700784" cy="310896"/>
-          </a:xfrm>
-          <a:prstGeom prst="rect">
-            <a:avLst/>
-          </a:prstGeom>
-          <a:noFill/>
-        </p:spPr>
-        <p:txBody>
-          <a:bodyPr wrap="square" lIns="0" rIns="0" tIns="0" bIns="0">
-            <a:spAutoFit/>
-          </a:bodyPr>
-          <a:lstStyle/>
-          <a:p>
-            <a:pPr>
-              <a:lnSpc>
-                <a:spcPct val="105000"/>
-              </a:lnSpc>
-            </a:pPr>
-            <a:r>
-              <a:rPr sz="760" b="1">
-                <a:solidFill>
-                  <a:srgbClr val="1A1A1A"/>
-                </a:solidFill>
-                <a:latin typeface="Arial"/>
-                <a:ea typeface="微软雅黑"/>
-                <a:cs typeface="Arial"/>
-              </a:rPr>
-              <a:t>读取方式（现网）</a:t>
-            </a:r>
-          </a:p>
-          <a:p>
-            <a:pPr>
-              <a:lnSpc>
-                <a:spcPct val="105000"/>
-              </a:lnSpc>
-            </a:pPr>
-            <a:r>
-              <a:rPr sz="760" b="0">
-                <a:solidFill>
-                  <a:srgbClr val="8C8C8C"/>
-                </a:solidFill>
-                <a:latin typeface="Arial"/>
-                <a:ea typeface="微软雅黑"/>
-                <a:cs typeface="Arial"/>
-              </a:rPr>
-              <a:t>正立 · 顶部 + 左侧天线</a:t>
-            </a:r>
+            <a:endParaRPr lang="zh-CN" altLang="en-US" sz="7200" dirty="0"/>
           </a:p>
         </p:txBody>
       </p:sp>
     </p:spTree>
+    <p:extLst>
+      <p:ext uri="{BB962C8B-B14F-4D97-AF65-F5344CB8AC3E}">
+        <p14:creationId xmlns:p14="http://schemas.microsoft.com/office/powerpoint/2010/main" val="66772756"/>
+      </p:ext>
+    </p:extLst>
   </p:cSld>
   <p:clrMapOvr>
     <a:masterClrMapping/>
@@ -14033,6 +12558,1992 @@
       </p:grpSpPr>
       <p:sp>
         <p:nvSpPr>
+          <p:cNvPr id="2" name="P5_title"/>
+          <p:cNvSpPr txBox="1"/>
+          <p:nvPr/>
+        </p:nvSpPr>
+        <p:spPr>
+          <a:xfrm>
+            <a:off x="566928" y="365760"/>
+            <a:ext cx="11057839" cy="502920"/>
+          </a:xfrm>
+          <a:prstGeom prst="rect">
+            <a:avLst/>
+          </a:prstGeom>
+          <a:noFill/>
+        </p:spPr>
+        <p:txBody>
+          <a:bodyPr wrap="square" anchor="t" lIns="0" rIns="0" tIns="0" bIns="0">
+            <a:spAutoFit/>
+          </a:bodyPr>
+          <a:lstStyle/>
+          <a:p>
+            <a:pPr algn="l">
+              <a:lnSpc>
+                <a:spcPct val="100000"/>
+              </a:lnSpc>
+            </a:pPr>
+            <a:r>
+              <a:rPr sz="2200" b="1">
+                <a:solidFill>
+                  <a:srgbClr val="1A1A1A"/>
+                </a:solidFill>
+                <a:latin typeface="Arial"/>
+                <a:ea typeface="微软雅黑"/>
+                <a:cs typeface="Arial"/>
+              </a:rPr>
+              <a:t>机型口径结论：四个在产组合都没拉开差距</a:t>
+            </a:r>
+          </a:p>
+        </p:txBody>
+      </p:sp>
+      <p:sp>
+        <p:nvSpPr>
+          <p:cNvPr id="3" name="P5_kick"/>
+          <p:cNvSpPr txBox="1"/>
+          <p:nvPr/>
+        </p:nvSpPr>
+        <p:spPr>
+          <a:xfrm>
+            <a:off x="566928" y="877824"/>
+            <a:ext cx="11057839" cy="274320"/>
+          </a:xfrm>
+          <a:prstGeom prst="rect">
+            <a:avLst/>
+          </a:prstGeom>
+          <a:noFill/>
+        </p:spPr>
+        <p:txBody>
+          <a:bodyPr wrap="square" anchor="t" lIns="0" rIns="0" tIns="0" bIns="0">
+            <a:spAutoFit/>
+          </a:bodyPr>
+          <a:lstStyle/>
+          <a:p>
+            <a:pPr algn="l">
+              <a:lnSpc>
+                <a:spcPct val="100000"/>
+              </a:lnSpc>
+            </a:pPr>
+            <a:r>
+              <a:rPr sz="1000" b="0">
+                <a:solidFill>
+                  <a:srgbClr val="8C8C8C"/>
+                </a:solidFill>
+                <a:latin typeface="Arial"/>
+                <a:ea typeface="微软雅黑"/>
+                <a:cs typeface="Arial"/>
+              </a:rPr>
+              <a:t>R6（同一读码器 × 箱型）的答案：实测为 31 天逐箱对齐（readStatus × EpcLog）；AX7771 / AX7513 无包装日志，已从口径表移除</a:t>
+            </a:r>
+          </a:p>
+        </p:txBody>
+      </p:sp>
+      <p:cxnSp>
+        <p:nvCxnSpPr>
+          <p:cNvPr id="4" name="P5_rule"/>
+          <p:cNvCxnSpPr/>
+          <p:nvPr/>
+        </p:nvCxnSpPr>
+        <p:spPr>
+          <a:xfrm>
+            <a:off x="566928" y="1207008"/>
+            <a:ext cx="11057839" cy="0"/>
+          </a:xfrm>
+          <a:prstGeom prst="line">
+            <a:avLst/>
+          </a:prstGeom>
+          <a:ln w="9525">
+            <a:solidFill>
+              <a:srgbClr val="D9D9D9"/>
+            </a:solidFill>
+          </a:ln>
+        </p:spPr>
+        <p:style>
+          <a:lnRef idx="2">
+            <a:schemeClr val="accent1"/>
+          </a:lnRef>
+          <a:fillRef idx="0">
+            <a:schemeClr val="accent1"/>
+          </a:fillRef>
+          <a:effectRef idx="1">
+            <a:schemeClr val="accent1"/>
+          </a:effectRef>
+          <a:fontRef idx="minor">
+            <a:schemeClr val="tx1"/>
+          </a:fontRef>
+        </p:style>
+      </p:cxnSp>
+      <p:sp>
+        <p:nvSpPr>
+          <p:cNvPr id="5" name="P5_cap"/>
+          <p:cNvSpPr txBox="1"/>
+          <p:nvPr/>
+        </p:nvSpPr>
+        <p:spPr>
+          <a:xfrm>
+            <a:off x="566928" y="1316736"/>
+            <a:ext cx="5897880" cy="219456"/>
+          </a:xfrm>
+          <a:prstGeom prst="rect">
+            <a:avLst/>
+          </a:prstGeom>
+          <a:noFill/>
+        </p:spPr>
+        <p:txBody>
+          <a:bodyPr wrap="square" anchor="t" lIns="0" rIns="0" tIns="0" bIns="0">
+            <a:spAutoFit/>
+          </a:bodyPr>
+          <a:lstStyle/>
+          <a:p>
+            <a:pPr algn="l">
+              <a:lnSpc>
+                <a:spcPct val="100000"/>
+              </a:lnSpc>
+            </a:pPr>
+            <a:r>
+              <a:rPr sz="880" b="0">
+                <a:solidFill>
+                  <a:srgbClr val="8C8C8C"/>
+                </a:solidFill>
+                <a:latin typeface="Arial"/>
+                <a:ea typeface="微软雅黑"/>
+                <a:cs typeface="Arial"/>
+              </a:rPr>
+              <a:t>readStatus=True（＝该箱 RFID 环节判定成功）</a:t>
+            </a:r>
+          </a:p>
+        </p:txBody>
+      </p:sp>
+      <p:sp>
+        <p:nvSpPr>
+          <p:cNvPr id="6" name="P5_num_8252-P_塑料"/>
+          <p:cNvSpPr txBox="1"/>
+          <p:nvPr/>
+        </p:nvSpPr>
+        <p:spPr>
+          <a:xfrm>
+            <a:off x="566928" y="1572768"/>
+            <a:ext cx="2697480" cy="566928"/>
+          </a:xfrm>
+          <a:prstGeom prst="rect">
+            <a:avLst/>
+          </a:prstGeom>
+          <a:noFill/>
+        </p:spPr>
+        <p:txBody>
+          <a:bodyPr wrap="square" anchor="t" lIns="0" rIns="0" tIns="0" bIns="0">
+            <a:spAutoFit/>
+          </a:bodyPr>
+          <a:lstStyle/>
+          <a:p>
+            <a:pPr algn="l">
+              <a:lnSpc>
+                <a:spcPct val="100000"/>
+              </a:lnSpc>
+            </a:pPr>
+            <a:r>
+              <a:rPr sz="3200" b="1">
+                <a:solidFill>
+                  <a:srgbClr val="1A1A1A"/>
+                </a:solidFill>
+                <a:latin typeface="Arial"/>
+                <a:ea typeface="微软雅黑"/>
+                <a:cs typeface="Arial"/>
+              </a:rPr>
+              <a:t>7.8%</a:t>
+            </a:r>
+          </a:p>
+        </p:txBody>
+      </p:sp>
+      <p:sp>
+        <p:nvSpPr>
+          <p:cNvPr id="7" name="P5_lab_8252-P_塑料"/>
+          <p:cNvSpPr txBox="1"/>
+          <p:nvPr/>
+        </p:nvSpPr>
+        <p:spPr>
+          <a:xfrm>
+            <a:off x="566928" y="2194560"/>
+            <a:ext cx="2697480" cy="274320"/>
+          </a:xfrm>
+          <a:prstGeom prst="rect">
+            <a:avLst/>
+          </a:prstGeom>
+          <a:noFill/>
+        </p:spPr>
+        <p:txBody>
+          <a:bodyPr wrap="square" anchor="t" lIns="0" rIns="0" tIns="0" bIns="0">
+            <a:spAutoFit/>
+          </a:bodyPr>
+          <a:lstStyle/>
+          <a:p>
+            <a:pPr algn="l">
+              <a:lnSpc>
+                <a:spcPct val="100000"/>
+              </a:lnSpc>
+            </a:pPr>
+            <a:r>
+              <a:rPr sz="960" b="1">
+                <a:solidFill>
+                  <a:srgbClr val="1A1A1A"/>
+                </a:solidFill>
+                <a:latin typeface="Arial"/>
+                <a:ea typeface="微软雅黑"/>
+                <a:cs typeface="Arial"/>
+              </a:rPr>
+              <a:t>塑料背壳  8252-P · 15,202 箱</a:t>
+            </a:r>
+          </a:p>
+        </p:txBody>
+      </p:sp>
+      <p:sp>
+        <p:nvSpPr>
+          <p:cNvPr id="8" name="P5_sub_8252-P_塑料"/>
+          <p:cNvSpPr txBox="1"/>
+          <p:nvPr/>
+        </p:nvSpPr>
+        <p:spPr>
+          <a:xfrm>
+            <a:off x="566928" y="2468880"/>
+            <a:ext cx="2697480" cy="274320"/>
+          </a:xfrm>
+          <a:prstGeom prst="rect">
+            <a:avLst/>
+          </a:prstGeom>
+          <a:noFill/>
+        </p:spPr>
+        <p:txBody>
+          <a:bodyPr wrap="square" anchor="t" lIns="0" rIns="0" tIns="0" bIns="0">
+            <a:spAutoFit/>
+          </a:bodyPr>
+          <a:lstStyle/>
+          <a:p>
+            <a:pPr algn="l">
+              <a:lnSpc>
+                <a:spcPct val="100000"/>
+              </a:lnSpc>
+            </a:pPr>
+            <a:r>
+              <a:rPr sz="840" b="0">
+                <a:solidFill>
+                  <a:srgbClr val="8C8C8C"/>
+                </a:solidFill>
+                <a:latin typeface="Arial"/>
+                <a:ea typeface="微软雅黑"/>
+                <a:cs typeface="Arial"/>
+              </a:rPr>
+              <a:t>一箱 0 个 98.9% · 读全 6 个 0.01%</a:t>
+            </a:r>
+          </a:p>
+        </p:txBody>
+      </p:sp>
+      <p:sp>
+        <p:nvSpPr>
+          <p:cNvPr id="9" name="P5_num_8252-M_金属"/>
+          <p:cNvSpPr txBox="1"/>
+          <p:nvPr/>
+        </p:nvSpPr>
+        <p:spPr>
+          <a:xfrm>
+            <a:off x="3246120" y="1572768"/>
+            <a:ext cx="2697480" cy="566928"/>
+          </a:xfrm>
+          <a:prstGeom prst="rect">
+            <a:avLst/>
+          </a:prstGeom>
+          <a:noFill/>
+        </p:spPr>
+        <p:txBody>
+          <a:bodyPr wrap="square" anchor="t" lIns="0" rIns="0" tIns="0" bIns="0">
+            <a:spAutoFit/>
+          </a:bodyPr>
+          <a:lstStyle/>
+          <a:p>
+            <a:pPr algn="l">
+              <a:lnSpc>
+                <a:spcPct val="100000"/>
+              </a:lnSpc>
+            </a:pPr>
+            <a:r>
+              <a:rPr sz="3200" b="1">
+                <a:solidFill>
+                  <a:srgbClr val="3E5DA8"/>
+                </a:solidFill>
+                <a:latin typeface="Arial"/>
+                <a:ea typeface="微软雅黑"/>
+                <a:cs typeface="Arial"/>
+              </a:rPr>
+              <a:t>8.7%</a:t>
+            </a:r>
+          </a:p>
+        </p:txBody>
+      </p:sp>
+      <p:sp>
+        <p:nvSpPr>
+          <p:cNvPr id="10" name="P5_lab_8252-M_金属"/>
+          <p:cNvSpPr txBox="1"/>
+          <p:nvPr/>
+        </p:nvSpPr>
+        <p:spPr>
+          <a:xfrm>
+            <a:off x="3246120" y="2194560"/>
+            <a:ext cx="2697480" cy="274320"/>
+          </a:xfrm>
+          <a:prstGeom prst="rect">
+            <a:avLst/>
+          </a:prstGeom>
+          <a:noFill/>
+        </p:spPr>
+        <p:txBody>
+          <a:bodyPr wrap="square" anchor="t" lIns="0" rIns="0" tIns="0" bIns="0">
+            <a:spAutoFit/>
+          </a:bodyPr>
+          <a:lstStyle/>
+          <a:p>
+            <a:pPr algn="l">
+              <a:lnSpc>
+                <a:spcPct val="100000"/>
+              </a:lnSpc>
+            </a:pPr>
+            <a:r>
+              <a:rPr sz="960" b="1">
+                <a:solidFill>
+                  <a:srgbClr val="1A1A1A"/>
+                </a:solidFill>
+                <a:latin typeface="Arial"/>
+                <a:ea typeface="微软雅黑"/>
+                <a:cs typeface="Arial"/>
+              </a:rPr>
+              <a:t>金属背壳  8252-M · 6,524 箱</a:t>
+            </a:r>
+          </a:p>
+        </p:txBody>
+      </p:sp>
+      <p:sp>
+        <p:nvSpPr>
+          <p:cNvPr id="11" name="P5_sub_8252-M_金属"/>
+          <p:cNvSpPr txBox="1"/>
+          <p:nvPr/>
+        </p:nvSpPr>
+        <p:spPr>
+          <a:xfrm>
+            <a:off x="3246120" y="2468880"/>
+            <a:ext cx="2697480" cy="274320"/>
+          </a:xfrm>
+          <a:prstGeom prst="rect">
+            <a:avLst/>
+          </a:prstGeom>
+          <a:noFill/>
+        </p:spPr>
+        <p:txBody>
+          <a:bodyPr wrap="square" anchor="t" lIns="0" rIns="0" tIns="0" bIns="0">
+            <a:spAutoFit/>
+          </a:bodyPr>
+          <a:lstStyle/>
+          <a:p>
+            <a:pPr algn="l">
+              <a:lnSpc>
+                <a:spcPct val="100000"/>
+              </a:lnSpc>
+            </a:pPr>
+            <a:r>
+              <a:rPr sz="840" b="0">
+                <a:solidFill>
+                  <a:srgbClr val="8C8C8C"/>
+                </a:solidFill>
+                <a:latin typeface="Arial"/>
+                <a:ea typeface="微软雅黑"/>
+                <a:cs typeface="Arial"/>
+              </a:rPr>
+              <a:t>一箱 0 个 95.2% · 读全 6 个 0.0%</a:t>
+            </a:r>
+          </a:p>
+        </p:txBody>
+      </p:sp>
+      <p:pic>
+        <p:nvPicPr>
+          <p:cNvPr id="12" name="P5_fig" descr="image.png"/>
+          <p:cNvPicPr>
+            <a:picLocks noChangeAspect="1"/>
+          </p:cNvPicPr>
+          <p:nvPr/>
+        </p:nvPicPr>
+        <p:blipFill>
+          <a:blip r:embed="rId3"/>
+          <a:stretch>
+            <a:fillRect/>
+          </a:stretch>
+        </p:blipFill>
+        <p:spPr>
+          <a:xfrm>
+            <a:off x="566928" y="2889504"/>
+            <a:ext cx="1623301" cy="2395728"/>
+          </a:xfrm>
+          <a:prstGeom prst="rect">
+            <a:avLst/>
+          </a:prstGeom>
+        </p:spPr>
+      </p:pic>
+      <p:sp>
+        <p:nvSpPr>
+          <p:cNvPr id="13" name="P5_figcap"/>
+          <p:cNvSpPr txBox="1"/>
+          <p:nvPr/>
+        </p:nvSpPr>
+        <p:spPr>
+          <a:xfrm>
+            <a:off x="566928" y="5358384"/>
+            <a:ext cx="1700784" cy="310896"/>
+          </a:xfrm>
+          <a:prstGeom prst="rect">
+            <a:avLst/>
+          </a:prstGeom>
+          <a:noFill/>
+        </p:spPr>
+        <p:txBody>
+          <a:bodyPr wrap="square" anchor="t" lIns="0" rIns="0" tIns="0" bIns="0">
+            <a:spAutoFit/>
+          </a:bodyPr>
+          <a:lstStyle/>
+          <a:p>
+            <a:pPr algn="l">
+              <a:lnSpc>
+                <a:spcPct val="100000"/>
+              </a:lnSpc>
+            </a:pPr>
+            <a:r>
+              <a:rPr sz="760" b="1">
+                <a:solidFill>
+                  <a:srgbClr val="8C8C8C"/>
+                </a:solidFill>
+                <a:latin typeface="Arial"/>
+                <a:ea typeface="微软雅黑"/>
+                <a:cs typeface="Arial"/>
+              </a:rPr>
+              <a:t>读取方式（现网）</a:t>
+            </a:r>
+          </a:p>
+          <a:p>
+            <a:pPr algn="l">
+              <a:lnSpc>
+                <a:spcPct val="100000"/>
+              </a:lnSpc>
+            </a:pPr>
+            <a:r>
+              <a:rPr sz="760" b="0">
+                <a:solidFill>
+                  <a:srgbClr val="8C8C8C"/>
+                </a:solidFill>
+                <a:latin typeface="Arial"/>
+                <a:ea typeface="微软雅黑"/>
+                <a:cs typeface="Arial"/>
+              </a:rPr>
+              <a:t>正立 · 顶部 + 左侧天线</a:t>
+            </a:r>
+          </a:p>
+        </p:txBody>
+      </p:sp>
+      <p:sp>
+        <p:nvSpPr>
+          <p:cNvPr id="14" name="P5_note"/>
+          <p:cNvSpPr txBox="1"/>
+          <p:nvPr/>
+        </p:nvSpPr>
+        <p:spPr>
+          <a:xfrm>
+            <a:off x="2331720" y="2907792"/>
+            <a:ext cx="4114800" cy="2331720"/>
+          </a:xfrm>
+          <a:prstGeom prst="rect">
+            <a:avLst/>
+          </a:prstGeom>
+          <a:noFill/>
+        </p:spPr>
+        <p:txBody>
+          <a:bodyPr wrap="square" anchor="t" lIns="0" rIns="0" tIns="0" bIns="0">
+            <a:spAutoFit/>
+          </a:bodyPr>
+          <a:lstStyle/>
+          <a:p>
+            <a:pPr algn="l">
+              <a:lnSpc>
+                <a:spcPct val="122000"/>
+              </a:lnSpc>
+            </a:pPr>
+            <a:r>
+              <a:rPr sz="860" b="1">
+                <a:solidFill>
+                  <a:srgbClr val="8C8C8C"/>
+                </a:solidFill>
+                <a:latin typeface="Arial"/>
+                <a:ea typeface="微软雅黑"/>
+                <a:cs typeface="Arial"/>
+              </a:rPr>
+              <a:t>口径</a:t>
+            </a:r>
+          </a:p>
+          <a:p>
+            <a:pPr algn="l">
+              <a:lnSpc>
+                <a:spcPct val="122000"/>
+              </a:lnSpc>
+            </a:pPr>
+            <a:r>
+              <a:rPr sz="840" b="0">
+                <a:solidFill>
+                  <a:srgbClr val="1A1A1A"/>
+                </a:solidFill>
+                <a:latin typeface="Arial"/>
+                <a:ea typeface="微软雅黑"/>
+                <a:cs typeface="Arial"/>
+              </a:rPr>
+              <a:t>readStatus × EpcLog 按箱窗口对齐；读全 6 个＝一箱 6 个整机标签都在同一窗口内读到。</a:t>
+            </a:r>
+          </a:p>
+          <a:p>
+            <a:pPr algn="l">
+              <a:lnSpc>
+                <a:spcPct val="122000"/>
+              </a:lnSpc>
+            </a:pPr>
+            <a:r>
+              <a:rPr sz="840" b="0">
+                <a:solidFill>
+                  <a:srgbClr val="1A1A1A"/>
+                </a:solidFill>
+                <a:latin typeface="Arial"/>
+                <a:ea typeface="微软雅黑"/>
+                <a:cs typeface="Arial"/>
+              </a:rPr>
+              <a:t>四个在产组合占 83,706 箱（31 天 113,667 箱的 74%）。</a:t>
+            </a:r>
+          </a:p>
+          <a:p>
+            <a:pPr algn="l">
+              <a:lnSpc>
+                <a:spcPct val="122000"/>
+              </a:lnSpc>
+            </a:pPr>
+            <a:r>
+              <a:rPr sz="840" b="0">
+                <a:solidFill>
+                  <a:srgbClr val="1A1A1A"/>
+                </a:solidFill>
+                <a:latin typeface="Arial"/>
+                <a:ea typeface="微软雅黑"/>
+                <a:cs typeface="Arial"/>
+              </a:rPr>
+              <a:t>背壳材质取 MES CongfigSize；AX7907 / AX6727 的背壳未标注，实测只能到机型级。</a:t>
+            </a:r>
+          </a:p>
+          <a:p>
+            <a:pPr algn="l">
+              <a:lnSpc>
+                <a:spcPct val="122000"/>
+              </a:lnSpc>
+            </a:pPr>
+            <a:r>
+              <a:rPr sz="840" b="0">
+                <a:solidFill>
+                  <a:srgbClr val="C0504D"/>
+                </a:solidFill>
+                <a:latin typeface="Arial"/>
+                <a:ea typeface="微软雅黑"/>
+                <a:cs typeface="Arial"/>
+              </a:rPr>
+              <a:t>AX6727 一箱 0 个 40.5%、读全 2.12%，明显偏离其余组 —— 先查该批贴标与工位。</a:t>
+            </a:r>
+          </a:p>
+        </p:txBody>
+      </p:sp>
+      <p:graphicFrame>
+        <p:nvGraphicFramePr>
+          <p:cNvPr id="15" name="P5_table"/>
+          <p:cNvGraphicFramePr>
+            <a:graphicFrameLocks noGrp="1"/>
+          </p:cNvGraphicFramePr>
+          <p:nvPr/>
+        </p:nvGraphicFramePr>
+        <p:xfrm>
+          <a:off x="6903720" y="1335024"/>
+          <a:ext cx="4718302" cy="1828800"/>
+        </p:xfrm>
+        <a:graphic>
+          <a:graphicData uri="http://schemas.openxmlformats.org/drawingml/2006/table">
+            <a:tbl>
+              <a:tblPr/>
+              <a:tblGrid>
+                <a:gridCol w="900767"/>
+                <a:gridCol w="2016002"/>
+                <a:gridCol w="729192"/>
+                <a:gridCol w="1072341"/>
+              </a:tblGrid>
+              <a:tr h="365760">
+                <a:tc>
+                  <a:txBody>
+                    <a:bodyPr/>
+                    <a:lstStyle/>
+                    <a:p>
+                      <a:pPr algn="l">
+                        <a:lnSpc>
+                          <a:spcPct val="100000"/>
+                        </a:lnSpc>
+                      </a:pPr>
+                      <a:r>
+                        <a:rPr sz="840" b="1">
+                          <a:solidFill>
+                            <a:srgbClr val="1A1A1A"/>
+                          </a:solidFill>
+                          <a:latin typeface="Arial"/>
+                          <a:ea typeface="微软雅黑"/>
+                          <a:cs typeface="Arial"/>
+                        </a:rPr>
+                        <a:t>代号</a:t>
+                      </a:r>
+                    </a:p>
+                  </a:txBody>
+                  <a:tcPr marL="50292" marR="50292" marT="10972" marB="10972" anchor="ctr">
+                    <a:lnL w="9525" cap="flat" cmpd="sng" algn="ctr">
+                      <a:solidFill>
+                        <a:srgbClr val="D9D9D9"/>
+                      </a:solidFill>
+                      <a:prstDash val="solid"/>
+                    </a:lnL>
+                    <a:lnR w="9525" cap="flat" cmpd="sng" algn="ctr">
+                      <a:solidFill>
+                        <a:srgbClr val="D9D9D9"/>
+                      </a:solidFill>
+                      <a:prstDash val="solid"/>
+                    </a:lnR>
+                    <a:lnT w="9525" cap="flat" cmpd="sng" algn="ctr">
+                      <a:solidFill>
+                        <a:srgbClr val="D9D9D9"/>
+                      </a:solidFill>
+                      <a:prstDash val="solid"/>
+                    </a:lnT>
+                    <a:lnB w="9525" cap="flat" cmpd="sng" algn="ctr">
+                      <a:solidFill>
+                        <a:srgbClr val="D9D9D9"/>
+                      </a:solidFill>
+                      <a:prstDash val="solid"/>
+                    </a:lnB>
+                    <a:solidFill>
+                      <a:srgbClr val="F2F2F2"/>
+                    </a:solidFill>
+                  </a:tcPr>
+                </a:tc>
+                <a:tc>
+                  <a:txBody>
+                    <a:bodyPr/>
+                    <a:lstStyle/>
+                    <a:p>
+                      <a:pPr algn="l">
+                        <a:lnSpc>
+                          <a:spcPct val="100000"/>
+                        </a:lnSpc>
+                      </a:pPr>
+                      <a:r>
+                        <a:rPr sz="840" b="1">
+                          <a:solidFill>
+                            <a:srgbClr val="1A1A1A"/>
+                          </a:solidFill>
+                          <a:latin typeface="Arial"/>
+                          <a:ea typeface="微软雅黑"/>
+                          <a:cs typeface="Arial"/>
+                        </a:rPr>
+                        <a:t>箱型 / 背壳</a:t>
+                      </a:r>
+                    </a:p>
+                  </a:txBody>
+                  <a:tcPr marL="50292" marR="50292" marT="10972" marB="10972" anchor="ctr">
+                    <a:lnL w="9525" cap="flat" cmpd="sng" algn="ctr">
+                      <a:solidFill>
+                        <a:srgbClr val="D9D9D9"/>
+                      </a:solidFill>
+                      <a:prstDash val="solid"/>
+                    </a:lnL>
+                    <a:lnR w="9525" cap="flat" cmpd="sng" algn="ctr">
+                      <a:solidFill>
+                        <a:srgbClr val="D9D9D9"/>
+                      </a:solidFill>
+                      <a:prstDash val="solid"/>
+                    </a:lnR>
+                    <a:lnT w="9525" cap="flat" cmpd="sng" algn="ctr">
+                      <a:solidFill>
+                        <a:srgbClr val="D9D9D9"/>
+                      </a:solidFill>
+                      <a:prstDash val="solid"/>
+                    </a:lnT>
+                    <a:lnB w="9525" cap="flat" cmpd="sng" algn="ctr">
+                      <a:solidFill>
+                        <a:srgbClr val="D9D9D9"/>
+                      </a:solidFill>
+                      <a:prstDash val="solid"/>
+                    </a:lnB>
+                    <a:solidFill>
+                      <a:srgbClr val="F2F2F2"/>
+                    </a:solidFill>
+                  </a:tcPr>
+                </a:tc>
+                <a:tc>
+                  <a:txBody>
+                    <a:bodyPr/>
+                    <a:lstStyle/>
+                    <a:p>
+                      <a:pPr algn="r">
+                        <a:lnSpc>
+                          <a:spcPct val="100000"/>
+                        </a:lnSpc>
+                      </a:pPr>
+                      <a:r>
+                        <a:rPr sz="840" b="1">
+                          <a:solidFill>
+                            <a:srgbClr val="1A1A1A"/>
+                          </a:solidFill>
+                          <a:latin typeface="Arial"/>
+                          <a:ea typeface="微软雅黑"/>
+                          <a:cs typeface="Arial"/>
+                        </a:rPr>
+                        <a:t>箱数</a:t>
+                      </a:r>
+                    </a:p>
+                  </a:txBody>
+                  <a:tcPr marL="50292" marR="50292" marT="10972" marB="10972" anchor="ctr">
+                    <a:lnL w="9525" cap="flat" cmpd="sng" algn="ctr">
+                      <a:solidFill>
+                        <a:srgbClr val="D9D9D9"/>
+                      </a:solidFill>
+                      <a:prstDash val="solid"/>
+                    </a:lnL>
+                    <a:lnR w="9525" cap="flat" cmpd="sng" algn="ctr">
+                      <a:solidFill>
+                        <a:srgbClr val="D9D9D9"/>
+                      </a:solidFill>
+                      <a:prstDash val="solid"/>
+                    </a:lnR>
+                    <a:lnT w="9525" cap="flat" cmpd="sng" algn="ctr">
+                      <a:solidFill>
+                        <a:srgbClr val="D9D9D9"/>
+                      </a:solidFill>
+                      <a:prstDash val="solid"/>
+                    </a:lnT>
+                    <a:lnB w="9525" cap="flat" cmpd="sng" algn="ctr">
+                      <a:solidFill>
+                        <a:srgbClr val="D9D9D9"/>
+                      </a:solidFill>
+                      <a:prstDash val="solid"/>
+                    </a:lnB>
+                    <a:solidFill>
+                      <a:srgbClr val="F2F2F2"/>
+                    </a:solidFill>
+                  </a:tcPr>
+                </a:tc>
+                <a:tc>
+                  <a:txBody>
+                    <a:bodyPr/>
+                    <a:lstStyle/>
+                    <a:p>
+                      <a:pPr algn="r">
+                        <a:lnSpc>
+                          <a:spcPct val="100000"/>
+                        </a:lnSpc>
+                      </a:pPr>
+                      <a:r>
+                        <a:rPr sz="840" b="1">
+                          <a:solidFill>
+                            <a:srgbClr val="1A1A1A"/>
+                          </a:solidFill>
+                          <a:latin typeface="Arial"/>
+                          <a:ea typeface="微软雅黑"/>
+                          <a:cs typeface="Arial"/>
+                        </a:rPr>
+                        <a:t>readStatus=True</a:t>
+                      </a:r>
+                    </a:p>
+                  </a:txBody>
+                  <a:tcPr marL="50292" marR="50292" marT="10972" marB="10972" anchor="ctr">
+                    <a:lnL w="9525" cap="flat" cmpd="sng" algn="ctr">
+                      <a:solidFill>
+                        <a:srgbClr val="D9D9D9"/>
+                      </a:solidFill>
+                      <a:prstDash val="solid"/>
+                    </a:lnL>
+                    <a:lnR w="9525" cap="flat" cmpd="sng" algn="ctr">
+                      <a:solidFill>
+                        <a:srgbClr val="D9D9D9"/>
+                      </a:solidFill>
+                      <a:prstDash val="solid"/>
+                    </a:lnR>
+                    <a:lnT w="9525" cap="flat" cmpd="sng" algn="ctr">
+                      <a:solidFill>
+                        <a:srgbClr val="D9D9D9"/>
+                      </a:solidFill>
+                      <a:prstDash val="solid"/>
+                    </a:lnT>
+                    <a:lnB w="9525" cap="flat" cmpd="sng" algn="ctr">
+                      <a:solidFill>
+                        <a:srgbClr val="D9D9D9"/>
+                      </a:solidFill>
+                      <a:prstDash val="solid"/>
+                    </a:lnB>
+                    <a:solidFill>
+                      <a:srgbClr val="F2F2F2"/>
+                    </a:solidFill>
+                  </a:tcPr>
+                </a:tc>
+              </a:tr>
+              <a:tr h="365760">
+                <a:tc>
+                  <a:txBody>
+                    <a:bodyPr/>
+                    <a:lstStyle/>
+                    <a:p>
+                      <a:pPr algn="l">
+                        <a:lnSpc>
+                          <a:spcPct val="100000"/>
+                        </a:lnSpc>
+                      </a:pPr>
+                      <a:r>
+                        <a:rPr sz="919" b="1">
+                          <a:solidFill>
+                            <a:srgbClr val="1A1A1A"/>
+                          </a:solidFill>
+                          <a:latin typeface="Arial"/>
+                          <a:ea typeface="微软雅黑"/>
+                          <a:cs typeface="Arial"/>
+                        </a:rPr>
+                        <a:t>7907</a:t>
+                      </a:r>
+                    </a:p>
+                  </a:txBody>
+                  <a:tcPr marL="50292" marR="50292" marT="10972" marB="10972" anchor="ctr">
+                    <a:lnL w="9525" cap="flat" cmpd="sng" algn="ctr">
+                      <a:solidFill>
+                        <a:srgbClr val="D9D9D9"/>
+                      </a:solidFill>
+                      <a:prstDash val="solid"/>
+                    </a:lnL>
+                    <a:lnR w="9525" cap="flat" cmpd="sng" algn="ctr">
+                      <a:solidFill>
+                        <a:srgbClr val="D9D9D9"/>
+                      </a:solidFill>
+                      <a:prstDash val="solid"/>
+                    </a:lnR>
+                    <a:lnT w="9525" cap="flat" cmpd="sng" algn="ctr">
+                      <a:solidFill>
+                        <a:srgbClr val="D9D9D9"/>
+                      </a:solidFill>
+                      <a:prstDash val="solid"/>
+                    </a:lnT>
+                    <a:lnB w="9525" cap="flat" cmpd="sng" algn="ctr">
+                      <a:solidFill>
+                        <a:srgbClr val="D9D9D9"/>
+                      </a:solidFill>
+                      <a:prstDash val="solid"/>
+                    </a:lnB>
+                    <a:solidFill>
+                      <a:srgbClr val="FFFFFF"/>
+                    </a:solidFill>
+                  </a:tcPr>
+                </a:tc>
+                <a:tc>
+                  <a:txBody>
+                    <a:bodyPr/>
+                    <a:lstStyle/>
+                    <a:p>
+                      <a:pPr algn="l">
+                        <a:lnSpc>
+                          <a:spcPct val="100000"/>
+                        </a:lnSpc>
+                      </a:pPr>
+                      <a:r>
+                        <a:rPr sz="919" b="0">
+                          <a:solidFill>
+                            <a:srgbClr val="1A1A1A"/>
+                          </a:solidFill>
+                          <a:latin typeface="Arial"/>
+                          <a:ea typeface="微软雅黑"/>
+                          <a:cs typeface="Arial"/>
+                        </a:rPr>
+                        <a:t>AX7907 · 6″ · 背壳未标注</a:t>
+                      </a:r>
+                    </a:p>
+                  </a:txBody>
+                  <a:tcPr marL="50292" marR="50292" marT="10972" marB="10972" anchor="ctr">
+                    <a:lnL w="9525" cap="flat" cmpd="sng" algn="ctr">
+                      <a:solidFill>
+                        <a:srgbClr val="D9D9D9"/>
+                      </a:solidFill>
+                      <a:prstDash val="solid"/>
+                    </a:lnL>
+                    <a:lnR w="9525" cap="flat" cmpd="sng" algn="ctr">
+                      <a:solidFill>
+                        <a:srgbClr val="D9D9D9"/>
+                      </a:solidFill>
+                      <a:prstDash val="solid"/>
+                    </a:lnR>
+                    <a:lnT w="9525" cap="flat" cmpd="sng" algn="ctr">
+                      <a:solidFill>
+                        <a:srgbClr val="D9D9D9"/>
+                      </a:solidFill>
+                      <a:prstDash val="solid"/>
+                    </a:lnT>
+                    <a:lnB w="9525" cap="flat" cmpd="sng" algn="ctr">
+                      <a:solidFill>
+                        <a:srgbClr val="D9D9D9"/>
+                      </a:solidFill>
+                      <a:prstDash val="solid"/>
+                    </a:lnB>
+                    <a:solidFill>
+                      <a:srgbClr val="FFFFFF"/>
+                    </a:solidFill>
+                  </a:tcPr>
+                </a:tc>
+                <a:tc>
+                  <a:txBody>
+                    <a:bodyPr/>
+                    <a:lstStyle/>
+                    <a:p>
+                      <a:pPr algn="r">
+                        <a:lnSpc>
+                          <a:spcPct val="100000"/>
+                        </a:lnSpc>
+                      </a:pPr>
+                      <a:r>
+                        <a:rPr sz="919" b="0">
+                          <a:solidFill>
+                            <a:srgbClr val="1A1A1A"/>
+                          </a:solidFill>
+                          <a:latin typeface="Arial"/>
+                          <a:ea typeface="微软雅黑"/>
+                          <a:cs typeface="Arial"/>
+                        </a:rPr>
+                        <a:t>54,810</a:t>
+                      </a:r>
+                    </a:p>
+                  </a:txBody>
+                  <a:tcPr marL="50292" marR="50292" marT="10972" marB="10972" anchor="ctr">
+                    <a:lnL w="9525" cap="flat" cmpd="sng" algn="ctr">
+                      <a:solidFill>
+                        <a:srgbClr val="D9D9D9"/>
+                      </a:solidFill>
+                      <a:prstDash val="solid"/>
+                    </a:lnL>
+                    <a:lnR w="9525" cap="flat" cmpd="sng" algn="ctr">
+                      <a:solidFill>
+                        <a:srgbClr val="D9D9D9"/>
+                      </a:solidFill>
+                      <a:prstDash val="solid"/>
+                    </a:lnR>
+                    <a:lnT w="9525" cap="flat" cmpd="sng" algn="ctr">
+                      <a:solidFill>
+                        <a:srgbClr val="D9D9D9"/>
+                      </a:solidFill>
+                      <a:prstDash val="solid"/>
+                    </a:lnT>
+                    <a:lnB w="9525" cap="flat" cmpd="sng" algn="ctr">
+                      <a:solidFill>
+                        <a:srgbClr val="D9D9D9"/>
+                      </a:solidFill>
+                      <a:prstDash val="solid"/>
+                    </a:lnB>
+                    <a:solidFill>
+                      <a:srgbClr val="FFFFFF"/>
+                    </a:solidFill>
+                  </a:tcPr>
+                </a:tc>
+                <a:tc>
+                  <a:txBody>
+                    <a:bodyPr/>
+                    <a:lstStyle/>
+                    <a:p>
+                      <a:pPr algn="r">
+                        <a:lnSpc>
+                          <a:spcPct val="100000"/>
+                        </a:lnSpc>
+                      </a:pPr>
+                      <a:r>
+                        <a:rPr sz="919" b="0">
+                          <a:solidFill>
+                            <a:srgbClr val="1A1A1A"/>
+                          </a:solidFill>
+                          <a:latin typeface="Arial"/>
+                          <a:ea typeface="微软雅黑"/>
+                          <a:cs typeface="Arial"/>
+                        </a:rPr>
+                        <a:t>9.4%</a:t>
+                      </a:r>
+                    </a:p>
+                  </a:txBody>
+                  <a:tcPr marL="50292" marR="50292" marT="10972" marB="10972" anchor="ctr">
+                    <a:lnL w="9525" cap="flat" cmpd="sng" algn="ctr">
+                      <a:solidFill>
+                        <a:srgbClr val="D9D9D9"/>
+                      </a:solidFill>
+                      <a:prstDash val="solid"/>
+                    </a:lnL>
+                    <a:lnR w="9525" cap="flat" cmpd="sng" algn="ctr">
+                      <a:solidFill>
+                        <a:srgbClr val="D9D9D9"/>
+                      </a:solidFill>
+                      <a:prstDash val="solid"/>
+                    </a:lnR>
+                    <a:lnT w="9525" cap="flat" cmpd="sng" algn="ctr">
+                      <a:solidFill>
+                        <a:srgbClr val="D9D9D9"/>
+                      </a:solidFill>
+                      <a:prstDash val="solid"/>
+                    </a:lnT>
+                    <a:lnB w="9525" cap="flat" cmpd="sng" algn="ctr">
+                      <a:solidFill>
+                        <a:srgbClr val="D9D9D9"/>
+                      </a:solidFill>
+                      <a:prstDash val="solid"/>
+                    </a:lnB>
+                    <a:solidFill>
+                      <a:srgbClr val="FFFFFF"/>
+                    </a:solidFill>
+                  </a:tcPr>
+                </a:tc>
+              </a:tr>
+              <a:tr h="365760">
+                <a:tc>
+                  <a:txBody>
+                    <a:bodyPr/>
+                    <a:lstStyle/>
+                    <a:p>
+                      <a:pPr algn="l">
+                        <a:lnSpc>
+                          <a:spcPct val="100000"/>
+                        </a:lnSpc>
+                      </a:pPr>
+                      <a:r>
+                        <a:rPr sz="919" b="1">
+                          <a:solidFill>
+                            <a:srgbClr val="1A1A1A"/>
+                          </a:solidFill>
+                          <a:latin typeface="Arial"/>
+                          <a:ea typeface="微软雅黑"/>
+                          <a:cs typeface="Arial"/>
+                        </a:rPr>
+                        <a:t>8252-P</a:t>
+                      </a:r>
+                    </a:p>
+                  </a:txBody>
+                  <a:tcPr marL="50292" marR="50292" marT="10972" marB="10972" anchor="ctr">
+                    <a:lnL w="9525" cap="flat" cmpd="sng" algn="ctr">
+                      <a:solidFill>
+                        <a:srgbClr val="D9D9D9"/>
+                      </a:solidFill>
+                      <a:prstDash val="solid"/>
+                    </a:lnL>
+                    <a:lnR w="9525" cap="flat" cmpd="sng" algn="ctr">
+                      <a:solidFill>
+                        <a:srgbClr val="D9D9D9"/>
+                      </a:solidFill>
+                      <a:prstDash val="solid"/>
+                    </a:lnR>
+                    <a:lnT w="9525" cap="flat" cmpd="sng" algn="ctr">
+                      <a:solidFill>
+                        <a:srgbClr val="D9D9D9"/>
+                      </a:solidFill>
+                      <a:prstDash val="solid"/>
+                    </a:lnT>
+                    <a:lnB w="9525" cap="flat" cmpd="sng" algn="ctr">
+                      <a:solidFill>
+                        <a:srgbClr val="D9D9D9"/>
+                      </a:solidFill>
+                      <a:prstDash val="solid"/>
+                    </a:lnB>
+                    <a:solidFill>
+                      <a:srgbClr val="FFFFFF"/>
+                    </a:solidFill>
+                  </a:tcPr>
+                </a:tc>
+                <a:tc>
+                  <a:txBody>
+                    <a:bodyPr/>
+                    <a:lstStyle/>
+                    <a:p>
+                      <a:pPr algn="l">
+                        <a:lnSpc>
+                          <a:spcPct val="100000"/>
+                        </a:lnSpc>
+                      </a:pPr>
+                      <a:r>
+                        <a:rPr sz="919" b="0">
+                          <a:solidFill>
+                            <a:srgbClr val="1A1A1A"/>
+                          </a:solidFill>
+                          <a:latin typeface="Arial"/>
+                          <a:ea typeface="微软雅黑"/>
+                          <a:cs typeface="Arial"/>
+                        </a:rPr>
+                        <a:t>AX8252 · 7″ · 塑料</a:t>
+                      </a:r>
+                    </a:p>
+                  </a:txBody>
+                  <a:tcPr marL="50292" marR="50292" marT="10972" marB="10972" anchor="ctr">
+                    <a:lnL w="9525" cap="flat" cmpd="sng" algn="ctr">
+                      <a:solidFill>
+                        <a:srgbClr val="D9D9D9"/>
+                      </a:solidFill>
+                      <a:prstDash val="solid"/>
+                    </a:lnL>
+                    <a:lnR w="9525" cap="flat" cmpd="sng" algn="ctr">
+                      <a:solidFill>
+                        <a:srgbClr val="D9D9D9"/>
+                      </a:solidFill>
+                      <a:prstDash val="solid"/>
+                    </a:lnR>
+                    <a:lnT w="9525" cap="flat" cmpd="sng" algn="ctr">
+                      <a:solidFill>
+                        <a:srgbClr val="D9D9D9"/>
+                      </a:solidFill>
+                      <a:prstDash val="solid"/>
+                    </a:lnT>
+                    <a:lnB w="9525" cap="flat" cmpd="sng" algn="ctr">
+                      <a:solidFill>
+                        <a:srgbClr val="D9D9D9"/>
+                      </a:solidFill>
+                      <a:prstDash val="solid"/>
+                    </a:lnB>
+                    <a:solidFill>
+                      <a:srgbClr val="FFFFFF"/>
+                    </a:solidFill>
+                  </a:tcPr>
+                </a:tc>
+                <a:tc>
+                  <a:txBody>
+                    <a:bodyPr/>
+                    <a:lstStyle/>
+                    <a:p>
+                      <a:pPr algn="r">
+                        <a:lnSpc>
+                          <a:spcPct val="100000"/>
+                        </a:lnSpc>
+                      </a:pPr>
+                      <a:r>
+                        <a:rPr sz="919" b="0">
+                          <a:solidFill>
+                            <a:srgbClr val="1A1A1A"/>
+                          </a:solidFill>
+                          <a:latin typeface="Arial"/>
+                          <a:ea typeface="微软雅黑"/>
+                          <a:cs typeface="Arial"/>
+                        </a:rPr>
+                        <a:t>15,202</a:t>
+                      </a:r>
+                    </a:p>
+                  </a:txBody>
+                  <a:tcPr marL="50292" marR="50292" marT="10972" marB="10972" anchor="ctr">
+                    <a:lnL w="9525" cap="flat" cmpd="sng" algn="ctr">
+                      <a:solidFill>
+                        <a:srgbClr val="D9D9D9"/>
+                      </a:solidFill>
+                      <a:prstDash val="solid"/>
+                    </a:lnL>
+                    <a:lnR w="9525" cap="flat" cmpd="sng" algn="ctr">
+                      <a:solidFill>
+                        <a:srgbClr val="D9D9D9"/>
+                      </a:solidFill>
+                      <a:prstDash val="solid"/>
+                    </a:lnR>
+                    <a:lnT w="9525" cap="flat" cmpd="sng" algn="ctr">
+                      <a:solidFill>
+                        <a:srgbClr val="D9D9D9"/>
+                      </a:solidFill>
+                      <a:prstDash val="solid"/>
+                    </a:lnT>
+                    <a:lnB w="9525" cap="flat" cmpd="sng" algn="ctr">
+                      <a:solidFill>
+                        <a:srgbClr val="D9D9D9"/>
+                      </a:solidFill>
+                      <a:prstDash val="solid"/>
+                    </a:lnB>
+                    <a:solidFill>
+                      <a:srgbClr val="FFFFFF"/>
+                    </a:solidFill>
+                  </a:tcPr>
+                </a:tc>
+                <a:tc>
+                  <a:txBody>
+                    <a:bodyPr/>
+                    <a:lstStyle/>
+                    <a:p>
+                      <a:pPr algn="r">
+                        <a:lnSpc>
+                          <a:spcPct val="100000"/>
+                        </a:lnSpc>
+                      </a:pPr>
+                      <a:r>
+                        <a:rPr sz="919" b="0">
+                          <a:solidFill>
+                            <a:srgbClr val="1A1A1A"/>
+                          </a:solidFill>
+                          <a:latin typeface="Arial"/>
+                          <a:ea typeface="微软雅黑"/>
+                          <a:cs typeface="Arial"/>
+                        </a:rPr>
+                        <a:t>7.8%</a:t>
+                      </a:r>
+                    </a:p>
+                  </a:txBody>
+                  <a:tcPr marL="50292" marR="50292" marT="10972" marB="10972" anchor="ctr">
+                    <a:lnL w="9525" cap="flat" cmpd="sng" algn="ctr">
+                      <a:solidFill>
+                        <a:srgbClr val="D9D9D9"/>
+                      </a:solidFill>
+                      <a:prstDash val="solid"/>
+                    </a:lnL>
+                    <a:lnR w="9525" cap="flat" cmpd="sng" algn="ctr">
+                      <a:solidFill>
+                        <a:srgbClr val="D9D9D9"/>
+                      </a:solidFill>
+                      <a:prstDash val="solid"/>
+                    </a:lnR>
+                    <a:lnT w="9525" cap="flat" cmpd="sng" algn="ctr">
+                      <a:solidFill>
+                        <a:srgbClr val="D9D9D9"/>
+                      </a:solidFill>
+                      <a:prstDash val="solid"/>
+                    </a:lnT>
+                    <a:lnB w="9525" cap="flat" cmpd="sng" algn="ctr">
+                      <a:solidFill>
+                        <a:srgbClr val="D9D9D9"/>
+                      </a:solidFill>
+                      <a:prstDash val="solid"/>
+                    </a:lnB>
+                    <a:solidFill>
+                      <a:srgbClr val="FFFFFF"/>
+                    </a:solidFill>
+                  </a:tcPr>
+                </a:tc>
+              </a:tr>
+              <a:tr h="365760">
+                <a:tc>
+                  <a:txBody>
+                    <a:bodyPr/>
+                    <a:lstStyle/>
+                    <a:p>
+                      <a:pPr algn="l">
+                        <a:lnSpc>
+                          <a:spcPct val="100000"/>
+                        </a:lnSpc>
+                      </a:pPr>
+                      <a:r>
+                        <a:rPr sz="919" b="1">
+                          <a:solidFill>
+                            <a:srgbClr val="1A1A1A"/>
+                          </a:solidFill>
+                          <a:latin typeface="Arial"/>
+                          <a:ea typeface="微软雅黑"/>
+                          <a:cs typeface="Arial"/>
+                        </a:rPr>
+                        <a:t>8252-M</a:t>
+                      </a:r>
+                    </a:p>
+                  </a:txBody>
+                  <a:tcPr marL="50292" marR="50292" marT="10972" marB="10972" anchor="ctr">
+                    <a:lnL w="9525" cap="flat" cmpd="sng" algn="ctr">
+                      <a:solidFill>
+                        <a:srgbClr val="D9D9D9"/>
+                      </a:solidFill>
+                      <a:prstDash val="solid"/>
+                    </a:lnL>
+                    <a:lnR w="9525" cap="flat" cmpd="sng" algn="ctr">
+                      <a:solidFill>
+                        <a:srgbClr val="D9D9D9"/>
+                      </a:solidFill>
+                      <a:prstDash val="solid"/>
+                    </a:lnR>
+                    <a:lnT w="9525" cap="flat" cmpd="sng" algn="ctr">
+                      <a:solidFill>
+                        <a:srgbClr val="D9D9D9"/>
+                      </a:solidFill>
+                      <a:prstDash val="solid"/>
+                    </a:lnT>
+                    <a:lnB w="9525" cap="flat" cmpd="sng" algn="ctr">
+                      <a:solidFill>
+                        <a:srgbClr val="D9D9D9"/>
+                      </a:solidFill>
+                      <a:prstDash val="solid"/>
+                    </a:lnB>
+                    <a:solidFill>
+                      <a:srgbClr val="FFFFFF"/>
+                    </a:solidFill>
+                  </a:tcPr>
+                </a:tc>
+                <a:tc>
+                  <a:txBody>
+                    <a:bodyPr/>
+                    <a:lstStyle/>
+                    <a:p>
+                      <a:pPr algn="l">
+                        <a:lnSpc>
+                          <a:spcPct val="100000"/>
+                        </a:lnSpc>
+                      </a:pPr>
+                      <a:r>
+                        <a:rPr sz="919" b="0">
+                          <a:solidFill>
+                            <a:srgbClr val="1A1A1A"/>
+                          </a:solidFill>
+                          <a:latin typeface="Arial"/>
+                          <a:ea typeface="微软雅黑"/>
+                          <a:cs typeface="Arial"/>
+                        </a:rPr>
+                        <a:t>AX8252 · 7″ · 金属</a:t>
+                      </a:r>
+                    </a:p>
+                  </a:txBody>
+                  <a:tcPr marL="50292" marR="50292" marT="10972" marB="10972" anchor="ctr">
+                    <a:lnL w="9525" cap="flat" cmpd="sng" algn="ctr">
+                      <a:solidFill>
+                        <a:srgbClr val="D9D9D9"/>
+                      </a:solidFill>
+                      <a:prstDash val="solid"/>
+                    </a:lnL>
+                    <a:lnR w="9525" cap="flat" cmpd="sng" algn="ctr">
+                      <a:solidFill>
+                        <a:srgbClr val="D9D9D9"/>
+                      </a:solidFill>
+                      <a:prstDash val="solid"/>
+                    </a:lnR>
+                    <a:lnT w="9525" cap="flat" cmpd="sng" algn="ctr">
+                      <a:solidFill>
+                        <a:srgbClr val="D9D9D9"/>
+                      </a:solidFill>
+                      <a:prstDash val="solid"/>
+                    </a:lnT>
+                    <a:lnB w="9525" cap="flat" cmpd="sng" algn="ctr">
+                      <a:solidFill>
+                        <a:srgbClr val="D9D9D9"/>
+                      </a:solidFill>
+                      <a:prstDash val="solid"/>
+                    </a:lnB>
+                    <a:solidFill>
+                      <a:srgbClr val="FFFFFF"/>
+                    </a:solidFill>
+                  </a:tcPr>
+                </a:tc>
+                <a:tc>
+                  <a:txBody>
+                    <a:bodyPr/>
+                    <a:lstStyle/>
+                    <a:p>
+                      <a:pPr algn="r">
+                        <a:lnSpc>
+                          <a:spcPct val="100000"/>
+                        </a:lnSpc>
+                      </a:pPr>
+                      <a:r>
+                        <a:rPr sz="919" b="0">
+                          <a:solidFill>
+                            <a:srgbClr val="1A1A1A"/>
+                          </a:solidFill>
+                          <a:latin typeface="Arial"/>
+                          <a:ea typeface="微软雅黑"/>
+                          <a:cs typeface="Arial"/>
+                        </a:rPr>
+                        <a:t>6,524</a:t>
+                      </a:r>
+                    </a:p>
+                  </a:txBody>
+                  <a:tcPr marL="50292" marR="50292" marT="10972" marB="10972" anchor="ctr">
+                    <a:lnL w="9525" cap="flat" cmpd="sng" algn="ctr">
+                      <a:solidFill>
+                        <a:srgbClr val="D9D9D9"/>
+                      </a:solidFill>
+                      <a:prstDash val="solid"/>
+                    </a:lnL>
+                    <a:lnR w="9525" cap="flat" cmpd="sng" algn="ctr">
+                      <a:solidFill>
+                        <a:srgbClr val="D9D9D9"/>
+                      </a:solidFill>
+                      <a:prstDash val="solid"/>
+                    </a:lnR>
+                    <a:lnT w="9525" cap="flat" cmpd="sng" algn="ctr">
+                      <a:solidFill>
+                        <a:srgbClr val="D9D9D9"/>
+                      </a:solidFill>
+                      <a:prstDash val="solid"/>
+                    </a:lnT>
+                    <a:lnB w="9525" cap="flat" cmpd="sng" algn="ctr">
+                      <a:solidFill>
+                        <a:srgbClr val="D9D9D9"/>
+                      </a:solidFill>
+                      <a:prstDash val="solid"/>
+                    </a:lnB>
+                    <a:solidFill>
+                      <a:srgbClr val="FFFFFF"/>
+                    </a:solidFill>
+                  </a:tcPr>
+                </a:tc>
+                <a:tc>
+                  <a:txBody>
+                    <a:bodyPr/>
+                    <a:lstStyle/>
+                    <a:p>
+                      <a:pPr algn="r">
+                        <a:lnSpc>
+                          <a:spcPct val="100000"/>
+                        </a:lnSpc>
+                      </a:pPr>
+                      <a:r>
+                        <a:rPr sz="919" b="0">
+                          <a:solidFill>
+                            <a:srgbClr val="1A1A1A"/>
+                          </a:solidFill>
+                          <a:latin typeface="Arial"/>
+                          <a:ea typeface="微软雅黑"/>
+                          <a:cs typeface="Arial"/>
+                        </a:rPr>
+                        <a:t>8.7%</a:t>
+                      </a:r>
+                    </a:p>
+                  </a:txBody>
+                  <a:tcPr marL="50292" marR="50292" marT="10972" marB="10972" anchor="ctr">
+                    <a:lnL w="9525" cap="flat" cmpd="sng" algn="ctr">
+                      <a:solidFill>
+                        <a:srgbClr val="D9D9D9"/>
+                      </a:solidFill>
+                      <a:prstDash val="solid"/>
+                    </a:lnL>
+                    <a:lnR w="9525" cap="flat" cmpd="sng" algn="ctr">
+                      <a:solidFill>
+                        <a:srgbClr val="D9D9D9"/>
+                      </a:solidFill>
+                      <a:prstDash val="solid"/>
+                    </a:lnR>
+                    <a:lnT w="9525" cap="flat" cmpd="sng" algn="ctr">
+                      <a:solidFill>
+                        <a:srgbClr val="D9D9D9"/>
+                      </a:solidFill>
+                      <a:prstDash val="solid"/>
+                    </a:lnT>
+                    <a:lnB w="9525" cap="flat" cmpd="sng" algn="ctr">
+                      <a:solidFill>
+                        <a:srgbClr val="D9D9D9"/>
+                      </a:solidFill>
+                      <a:prstDash val="solid"/>
+                    </a:lnB>
+                    <a:solidFill>
+                      <a:srgbClr val="FFFFFF"/>
+                    </a:solidFill>
+                  </a:tcPr>
+                </a:tc>
+              </a:tr>
+              <a:tr h="365760">
+                <a:tc>
+                  <a:txBody>
+                    <a:bodyPr/>
+                    <a:lstStyle/>
+                    <a:p>
+                      <a:pPr algn="l">
+                        <a:lnSpc>
+                          <a:spcPct val="100000"/>
+                        </a:lnSpc>
+                      </a:pPr>
+                      <a:r>
+                        <a:rPr sz="919" b="1">
+                          <a:solidFill>
+                            <a:srgbClr val="1A1A1A"/>
+                          </a:solidFill>
+                          <a:latin typeface="Arial"/>
+                          <a:ea typeface="微软雅黑"/>
+                          <a:cs typeface="Arial"/>
+                        </a:rPr>
+                        <a:t>6727</a:t>
+                      </a:r>
+                    </a:p>
+                  </a:txBody>
+                  <a:tcPr marL="50292" marR="50292" marT="10972" marB="10972" anchor="ctr">
+                    <a:lnL w="9525" cap="flat" cmpd="sng" algn="ctr">
+                      <a:solidFill>
+                        <a:srgbClr val="D9D9D9"/>
+                      </a:solidFill>
+                      <a:prstDash val="solid"/>
+                    </a:lnL>
+                    <a:lnR w="9525" cap="flat" cmpd="sng" algn="ctr">
+                      <a:solidFill>
+                        <a:srgbClr val="D9D9D9"/>
+                      </a:solidFill>
+                      <a:prstDash val="solid"/>
+                    </a:lnR>
+                    <a:lnT w="9525" cap="flat" cmpd="sng" algn="ctr">
+                      <a:solidFill>
+                        <a:srgbClr val="D9D9D9"/>
+                      </a:solidFill>
+                      <a:prstDash val="solid"/>
+                    </a:lnT>
+                    <a:lnB w="9525" cap="flat" cmpd="sng" algn="ctr">
+                      <a:solidFill>
+                        <a:srgbClr val="D9D9D9"/>
+                      </a:solidFill>
+                      <a:prstDash val="solid"/>
+                    </a:lnB>
+                    <a:solidFill>
+                      <a:srgbClr val="FFFFFF"/>
+                    </a:solidFill>
+                  </a:tcPr>
+                </a:tc>
+                <a:tc>
+                  <a:txBody>
+                    <a:bodyPr/>
+                    <a:lstStyle/>
+                    <a:p>
+                      <a:pPr algn="l">
+                        <a:lnSpc>
+                          <a:spcPct val="100000"/>
+                        </a:lnSpc>
+                      </a:pPr>
+                      <a:r>
+                        <a:rPr sz="919" b="0">
+                          <a:solidFill>
+                            <a:srgbClr val="1A1A1A"/>
+                          </a:solidFill>
+                          <a:latin typeface="Arial"/>
+                          <a:ea typeface="微软雅黑"/>
+                          <a:cs typeface="Arial"/>
+                        </a:rPr>
+                        <a:t>AX6727 · 7″ · 背壳未标注</a:t>
+                      </a:r>
+                    </a:p>
+                  </a:txBody>
+                  <a:tcPr marL="50292" marR="50292" marT="10972" marB="10972" anchor="ctr">
+                    <a:lnL w="9525" cap="flat" cmpd="sng" algn="ctr">
+                      <a:solidFill>
+                        <a:srgbClr val="D9D9D9"/>
+                      </a:solidFill>
+                      <a:prstDash val="solid"/>
+                    </a:lnL>
+                    <a:lnR w="9525" cap="flat" cmpd="sng" algn="ctr">
+                      <a:solidFill>
+                        <a:srgbClr val="D9D9D9"/>
+                      </a:solidFill>
+                      <a:prstDash val="solid"/>
+                    </a:lnR>
+                    <a:lnT w="9525" cap="flat" cmpd="sng" algn="ctr">
+                      <a:solidFill>
+                        <a:srgbClr val="D9D9D9"/>
+                      </a:solidFill>
+                      <a:prstDash val="solid"/>
+                    </a:lnT>
+                    <a:lnB w="9525" cap="flat" cmpd="sng" algn="ctr">
+                      <a:solidFill>
+                        <a:srgbClr val="D9D9D9"/>
+                      </a:solidFill>
+                      <a:prstDash val="solid"/>
+                    </a:lnB>
+                    <a:solidFill>
+                      <a:srgbClr val="FFFFFF"/>
+                    </a:solidFill>
+                  </a:tcPr>
+                </a:tc>
+                <a:tc>
+                  <a:txBody>
+                    <a:bodyPr/>
+                    <a:lstStyle/>
+                    <a:p>
+                      <a:pPr algn="r">
+                        <a:lnSpc>
+                          <a:spcPct val="100000"/>
+                        </a:lnSpc>
+                      </a:pPr>
+                      <a:r>
+                        <a:rPr sz="919" b="0">
+                          <a:solidFill>
+                            <a:srgbClr val="1A1A1A"/>
+                          </a:solidFill>
+                          <a:latin typeface="Arial"/>
+                          <a:ea typeface="微软雅黑"/>
+                          <a:cs typeface="Arial"/>
+                        </a:rPr>
+                        <a:t>7,170</a:t>
+                      </a:r>
+                    </a:p>
+                  </a:txBody>
+                  <a:tcPr marL="50292" marR="50292" marT="10972" marB="10972" anchor="ctr">
+                    <a:lnL w="9525" cap="flat" cmpd="sng" algn="ctr">
+                      <a:solidFill>
+                        <a:srgbClr val="D9D9D9"/>
+                      </a:solidFill>
+                      <a:prstDash val="solid"/>
+                    </a:lnL>
+                    <a:lnR w="9525" cap="flat" cmpd="sng" algn="ctr">
+                      <a:solidFill>
+                        <a:srgbClr val="D9D9D9"/>
+                      </a:solidFill>
+                      <a:prstDash val="solid"/>
+                    </a:lnR>
+                    <a:lnT w="9525" cap="flat" cmpd="sng" algn="ctr">
+                      <a:solidFill>
+                        <a:srgbClr val="D9D9D9"/>
+                      </a:solidFill>
+                      <a:prstDash val="solid"/>
+                    </a:lnT>
+                    <a:lnB w="9525" cap="flat" cmpd="sng" algn="ctr">
+                      <a:solidFill>
+                        <a:srgbClr val="D9D9D9"/>
+                      </a:solidFill>
+                      <a:prstDash val="solid"/>
+                    </a:lnB>
+                    <a:solidFill>
+                      <a:srgbClr val="FFFFFF"/>
+                    </a:solidFill>
+                  </a:tcPr>
+                </a:tc>
+                <a:tc>
+                  <a:txBody>
+                    <a:bodyPr/>
+                    <a:lstStyle/>
+                    <a:p>
+                      <a:pPr algn="r">
+                        <a:lnSpc>
+                          <a:spcPct val="100000"/>
+                        </a:lnSpc>
+                      </a:pPr>
+                      <a:r>
+                        <a:rPr sz="919" b="0">
+                          <a:solidFill>
+                            <a:srgbClr val="1A1A1A"/>
+                          </a:solidFill>
+                          <a:latin typeface="Arial"/>
+                          <a:ea typeface="微软雅黑"/>
+                          <a:cs typeface="Arial"/>
+                        </a:rPr>
+                        <a:t>7.9%</a:t>
+                      </a:r>
+                    </a:p>
+                  </a:txBody>
+                  <a:tcPr marL="50292" marR="50292" marT="10972" marB="10972" anchor="ctr">
+                    <a:lnL w="9525" cap="flat" cmpd="sng" algn="ctr">
+                      <a:solidFill>
+                        <a:srgbClr val="D9D9D9"/>
+                      </a:solidFill>
+                      <a:prstDash val="solid"/>
+                    </a:lnL>
+                    <a:lnR w="9525" cap="flat" cmpd="sng" algn="ctr">
+                      <a:solidFill>
+                        <a:srgbClr val="D9D9D9"/>
+                      </a:solidFill>
+                      <a:prstDash val="solid"/>
+                    </a:lnR>
+                    <a:lnT w="9525" cap="flat" cmpd="sng" algn="ctr">
+                      <a:solidFill>
+                        <a:srgbClr val="D9D9D9"/>
+                      </a:solidFill>
+                      <a:prstDash val="solid"/>
+                    </a:lnT>
+                    <a:lnB w="9525" cap="flat" cmpd="sng" algn="ctr">
+                      <a:solidFill>
+                        <a:srgbClr val="D9D9D9"/>
+                      </a:solidFill>
+                      <a:prstDash val="solid"/>
+                    </a:lnB>
+                    <a:solidFill>
+                      <a:srgbClr val="FFFFFF"/>
+                    </a:solidFill>
+                  </a:tcPr>
+                </a:tc>
+              </a:tr>
+            </a:tbl>
+          </a:graphicData>
+        </a:graphic>
+      </p:graphicFrame>
+      <p:sp>
+        <p:nvSpPr>
+          <p:cNvPr id="16" name="P5_tabcap"/>
+          <p:cNvSpPr txBox="1"/>
+          <p:nvPr/>
+        </p:nvSpPr>
+        <p:spPr>
+          <a:xfrm>
+            <a:off x="6903720" y="3310128"/>
+            <a:ext cx="4718304" cy="237744"/>
+          </a:xfrm>
+          <a:prstGeom prst="rect">
+            <a:avLst/>
+          </a:prstGeom>
+          <a:noFill/>
+        </p:spPr>
+        <p:txBody>
+          <a:bodyPr wrap="square" anchor="t" lIns="0" rIns="0" tIns="0" bIns="0">
+            <a:spAutoFit/>
+          </a:bodyPr>
+          <a:lstStyle/>
+          <a:p>
+            <a:pPr algn="l">
+              <a:lnSpc>
+                <a:spcPct val="100000"/>
+              </a:lnSpc>
+            </a:pPr>
+            <a:r>
+              <a:rPr sz="800" b="0">
+                <a:solidFill>
+                  <a:srgbClr val="8C8C8C"/>
+                </a:solidFill>
+                <a:latin typeface="Arial"/>
+                <a:ea typeface="微软雅黑"/>
+                <a:cs typeface="Arial"/>
+              </a:rPr>
+              <a:t>代号＝HQ代码-背壳；readStatus=True 为该组箱级成功判定的占比</a:t>
+            </a:r>
+          </a:p>
+        </p:txBody>
+      </p:sp>
+      <p:sp>
+        <p:nvSpPr>
+          <p:cNvPr id="17" name="P5_concl_box"/>
+          <p:cNvSpPr/>
+          <p:nvPr/>
+        </p:nvSpPr>
+        <p:spPr>
+          <a:xfrm>
+            <a:off x="6903720" y="3621024"/>
+            <a:ext cx="4718304" cy="1481328"/>
+          </a:xfrm>
+          <a:prstGeom prst="rect">
+            <a:avLst/>
+          </a:prstGeom>
+          <a:solidFill>
+            <a:srgbClr val="E6EDF9"/>
+          </a:solidFill>
+          <a:ln>
+            <a:noFill/>
+          </a:ln>
+          <a:effectLst/>
+        </p:spPr>
+        <p:style>
+          <a:lnRef idx="1">
+            <a:schemeClr val="accent1"/>
+          </a:lnRef>
+          <a:fillRef idx="3">
+            <a:schemeClr val="accent1"/>
+          </a:fillRef>
+          <a:effectRef idx="2">
+            <a:schemeClr val="accent1"/>
+          </a:effectRef>
+          <a:fontRef idx="minor">
+            <a:schemeClr val="lt1"/>
+          </a:fontRef>
+        </p:style>
+        <p:txBody>
+          <a:bodyPr rtlCol="0" anchor="ctr"/>
+          <a:lstStyle/>
+          <a:p>
+            <a:pPr algn="ctr"/>
+          </a:p>
+        </p:txBody>
+      </p:sp>
+      <p:sp>
+        <p:nvSpPr>
+          <p:cNvPr id="18" name="P5_concl"/>
+          <p:cNvSpPr txBox="1"/>
+          <p:nvPr/>
+        </p:nvSpPr>
+        <p:spPr>
+          <a:xfrm>
+            <a:off x="7059168" y="3712463"/>
+            <a:ext cx="4434840" cy="1316736"/>
+          </a:xfrm>
+          <a:prstGeom prst="rect">
+            <a:avLst/>
+          </a:prstGeom>
+          <a:noFill/>
+        </p:spPr>
+        <p:txBody>
+          <a:bodyPr wrap="square" anchor="t" lIns="0" rIns="0" tIns="0" bIns="0">
+            <a:spAutoFit/>
+          </a:bodyPr>
+          <a:lstStyle/>
+          <a:p>
+            <a:pPr algn="l">
+              <a:lnSpc>
+                <a:spcPct val="125000"/>
+              </a:lnSpc>
+            </a:pPr>
+            <a:r>
+              <a:rPr sz="1000" b="1">
+                <a:solidFill>
+                  <a:srgbClr val="3E5DA8"/>
+                </a:solidFill>
+                <a:latin typeface="Arial"/>
+                <a:ea typeface="微软雅黑"/>
+                <a:cs typeface="Arial"/>
+              </a:rPr>
+              <a:t>结论</a:t>
+            </a:r>
+          </a:p>
+          <a:p>
+            <a:pPr algn="l">
+              <a:lnSpc>
+                <a:spcPct val="125000"/>
+              </a:lnSpc>
+            </a:pPr>
+            <a:r>
+              <a:rPr sz="880" b="0">
+                <a:solidFill>
+                  <a:srgbClr val="1A1A1A"/>
+                </a:solidFill>
+                <a:latin typeface="Arial"/>
+                <a:ea typeface="微软雅黑"/>
+                <a:cs typeface="Arial"/>
+              </a:rPr>
+              <a:t>读全 6 个：0.0%–2.12%；一箱读到 0 个：40.5%–99.1%。</a:t>
+            </a:r>
+          </a:p>
+          <a:p>
+            <a:pPr algn="l">
+              <a:lnSpc>
+                <a:spcPct val="125000"/>
+              </a:lnSpc>
+            </a:pPr>
+            <a:r>
+              <a:rPr sz="880" b="0">
+                <a:solidFill>
+                  <a:srgbClr val="1A1A1A"/>
+                </a:solidFill>
+                <a:latin typeface="Arial"/>
+                <a:ea typeface="微软雅黑"/>
+                <a:cs typeface="Arial"/>
+              </a:rPr>
+              <a:t>塑料 vs 金属：readStatus=True 7.8% vs 8.7%（差 0.9 个点），一箱 0 个 98.9% vs 95.2% —— 没拉开差距。</a:t>
+            </a:r>
+          </a:p>
+          <a:p>
+            <a:pPr algn="l">
+              <a:lnSpc>
+                <a:spcPct val="125000"/>
+              </a:lnSpc>
+            </a:pPr>
+            <a:r>
+              <a:rPr sz="880" b="1">
+                <a:solidFill>
+                  <a:srgbClr val="1A1A1A"/>
+                </a:solidFill>
+                <a:latin typeface="Arial"/>
+                <a:ea typeface="微软雅黑"/>
+                <a:cs typeface="Arial"/>
+              </a:rPr>
+              <a:t>⇒ 背壳/尺寸都换不来读全：先修屏蔽、朝向与读码窗口，再按箱型复测。</a:t>
+            </a:r>
+          </a:p>
+        </p:txBody>
+      </p:sp>
+      <p:sp>
+        <p:nvSpPr>
+          <p:cNvPr id="19" name="P5_bar"/>
+          <p:cNvSpPr/>
+          <p:nvPr/>
+        </p:nvSpPr>
+        <p:spPr>
+          <a:xfrm>
+            <a:off x="566928" y="5797296"/>
+            <a:ext cx="45720" cy="310896"/>
+          </a:xfrm>
+          <a:prstGeom prst="rect">
+            <a:avLst/>
+          </a:prstGeom>
+          <a:solidFill>
+            <a:srgbClr val="3E5DA8"/>
+          </a:solidFill>
+          <a:ln>
+            <a:noFill/>
+          </a:ln>
+          <a:effectLst/>
+        </p:spPr>
+        <p:style>
+          <a:lnRef idx="1">
+            <a:schemeClr val="accent1"/>
+          </a:lnRef>
+          <a:fillRef idx="3">
+            <a:schemeClr val="accent1"/>
+          </a:fillRef>
+          <a:effectRef idx="2">
+            <a:schemeClr val="accent1"/>
+          </a:effectRef>
+          <a:fontRef idx="minor">
+            <a:schemeClr val="lt1"/>
+          </a:fontRef>
+        </p:style>
+        <p:txBody>
+          <a:bodyPr rtlCol="0" anchor="ctr"/>
+          <a:lstStyle/>
+          <a:p>
+            <a:pPr algn="ctr"/>
+          </a:p>
+        </p:txBody>
+      </p:sp>
+      <p:sp>
+        <p:nvSpPr>
+          <p:cNvPr id="20" name="P5_take"/>
+          <p:cNvSpPr txBox="1"/>
+          <p:nvPr/>
+        </p:nvSpPr>
+        <p:spPr>
+          <a:xfrm>
+            <a:off x="713232" y="5815584"/>
+            <a:ext cx="10874959" cy="274320"/>
+          </a:xfrm>
+          <a:prstGeom prst="rect">
+            <a:avLst/>
+          </a:prstGeom>
+          <a:noFill/>
+        </p:spPr>
+        <p:txBody>
+          <a:bodyPr wrap="square" anchor="ctr" lIns="0" rIns="0" tIns="0" bIns="0">
+            <a:spAutoFit/>
+          </a:bodyPr>
+          <a:lstStyle/>
+          <a:p>
+            <a:pPr algn="l">
+              <a:lnSpc>
+                <a:spcPct val="100000"/>
+              </a:lnSpc>
+            </a:pPr>
+            <a:r>
+              <a:rPr sz="1100" b="1">
+                <a:solidFill>
+                  <a:srgbClr val="1A1A1A"/>
+                </a:solidFill>
+                <a:latin typeface="Arial"/>
+                <a:ea typeface="微软雅黑"/>
+                <a:cs typeface="Arial"/>
+              </a:rPr>
+              <a:t>若产线要上金属背壳机型：要么改贴标位置（避开金属面），要么在箱外/开口侧增设天线</a:t>
+            </a:r>
+          </a:p>
+        </p:txBody>
+      </p:sp>
+    </p:spTree>
+  </p:cSld>
+  <p:clrMapOvr>
+    <a:masterClrMapping/>
+  </p:clrMapOvr>
+</p:sld>
+</file>
+
+<file path=ppt/slides/slide6.xml><?xml version="1.0" encoding="utf-8"?>
+<p:sld xmlns:a="http://schemas.openxmlformats.org/drawingml/2006/main" xmlns:r="http://schemas.openxmlformats.org/officeDocument/2006/relationships" xmlns:p="http://schemas.openxmlformats.org/presentationml/2006/main">
+  <p:cSld>
+    <p:spTree>
+      <p:nvGrpSpPr>
+        <p:cNvPr id="1" name=""/>
+        <p:cNvGrpSpPr/>
+        <p:nvPr/>
+      </p:nvGrpSpPr>
+      <p:grpSpPr>
+        <a:xfrm>
+          <a:off x="0" y="0"/>
+          <a:ext cx="0" cy="0"/>
+          <a:chOff x="0" y="0"/>
+          <a:chExt cx="0" cy="0"/>
+        </a:xfrm>
+      </p:grpSpPr>
+      <p:sp>
+        <p:nvSpPr>
           <p:cNvPr id="2" name="TextBox 1"/>
           <p:cNvSpPr txBox="1"/>
           <p:nvPr/>
@@ -16465,7 +16976,7 @@
 </p:sld>
 </file>
 
-<file path=ppt/slides/slide6.xml><?xml version="1.0" encoding="utf-8"?>
+<file path=ppt/slides/slide7.xml><?xml version="1.0" encoding="utf-8"?>
 <p:sld xmlns:a="http://schemas.openxmlformats.org/drawingml/2006/main" xmlns:r="http://schemas.openxmlformats.org/officeDocument/2006/relationships" xmlns:p="http://schemas.openxmlformats.org/presentationml/2006/main">
   <p:cSld>
     <p:spTree>
@@ -17990,7 +18501,7 @@
 </p:sld>
 </file>
 
-<file path=ppt/slides/slide7.xml><?xml version="1.0" encoding="utf-8"?>
+<file path=ppt/slides/slide8.xml><?xml version="1.0" encoding="utf-8"?>
 <p:sld xmlns:a="http://schemas.openxmlformats.org/drawingml/2006/main" xmlns:r="http://schemas.openxmlformats.org/officeDocument/2006/relationships" xmlns:p="http://schemas.openxmlformats.org/presentationml/2006/main">
   <p:cSld>
     <p:spTree>
@@ -20669,7 +21180,7 @@
 </p:sld>
 </file>
 
-<file path=ppt/slides/slide8.xml><?xml version="1.0" encoding="utf-8"?>
+<file path=ppt/slides/slide9.xml><?xml version="1.0" encoding="utf-8"?>
 <p:sld xmlns:a="http://schemas.openxmlformats.org/drawingml/2006/main" xmlns:r="http://schemas.openxmlformats.org/officeDocument/2006/relationships" xmlns:p="http://schemas.openxmlformats.org/presentationml/2006/main" show="0">
   <p:cSld>
     <p:spTree>
@@ -24684,72 +25195,6 @@
         </p:txBody>
       </p:sp>
     </p:spTree>
-  </p:cSld>
-  <p:clrMapOvr>
-    <a:masterClrMapping/>
-  </p:clrMapOvr>
-</p:sld>
-</file>
-
-<file path=ppt/slides/slide9.xml><?xml version="1.0" encoding="utf-8"?>
-<p:sld xmlns:a="http://schemas.openxmlformats.org/drawingml/2006/main" xmlns:r="http://schemas.openxmlformats.org/officeDocument/2006/relationships" xmlns:p="http://schemas.openxmlformats.org/presentationml/2006/main">
-  <p:cSld>
-    <p:spTree>
-      <p:nvGrpSpPr>
-        <p:cNvPr id="1" name=""/>
-        <p:cNvGrpSpPr/>
-        <p:nvPr/>
-      </p:nvGrpSpPr>
-      <p:grpSpPr>
-        <a:xfrm>
-          <a:off x="0" y="0"/>
-          <a:ext cx="0" cy="0"/>
-          <a:chOff x="0" y="0"/>
-          <a:chExt cx="0" cy="0"/>
-        </a:xfrm>
-      </p:grpSpPr>
-      <p:sp>
-        <p:nvSpPr>
-          <p:cNvPr id="2" name="文本框 1">
-            <a:extLst>
-              <a:ext uri="{FF2B5EF4-FFF2-40B4-BE49-F238E27FC236}">
-                <a16:creationId xmlns:a16="http://schemas.microsoft.com/office/drawing/2014/main" id="{39DADCA6-5042-431B-9760-4842AD24C2D1}"/>
-              </a:ext>
-            </a:extLst>
-          </p:cNvPr>
-          <p:cNvSpPr txBox="1"/>
-          <p:nvPr/>
-        </p:nvSpPr>
-        <p:spPr>
-          <a:xfrm>
-            <a:off x="971550" y="2828835"/>
-            <a:ext cx="10029825" cy="1200329"/>
-          </a:xfrm>
-          <a:prstGeom prst="rect">
-            <a:avLst/>
-          </a:prstGeom>
-          <a:noFill/>
-        </p:spPr>
-        <p:txBody>
-          <a:bodyPr wrap="square" rtlCol="0">
-            <a:spAutoFit/>
-          </a:bodyPr>
-          <a:lstStyle/>
-          <a:p>
-            <a:r>
-              <a:rPr lang="en-US" altLang="zh-CN" sz="7200" dirty="0"/>
-              <a:t>Back Up</a:t>
-            </a:r>
-            <a:endParaRPr lang="zh-CN" altLang="en-US" sz="7200" dirty="0"/>
-          </a:p>
-        </p:txBody>
-      </p:sp>
-    </p:spTree>
-    <p:extLst>
-      <p:ext uri="{BB962C8B-B14F-4D97-AF65-F5344CB8AC3E}">
-        <p14:creationId xmlns:p14="http://schemas.microsoft.com/office/powerpoint/2010/main" val="66772756"/>
-      </p:ext>
-    </p:extLst>
   </p:cSld>
   <p:clrMapOvr>
     <a:masterClrMapping/>

--- a/RFID读取评估_2026-10-21/09_报告/RFID读取能力评估_2026-10-23.pptx
+++ b/RFID读取评估_2026-10-21/09_报告/RFID读取能力评估_2026-10-23.pptx
@@ -10416,2050 +10416,6 @@
           </a:fontRef>
         </p:style>
       </p:cxnSp>
-      <p:graphicFrame>
-        <p:nvGraphicFramePr>
-          <p:cNvPr id="8" name="Table 7"/>
-          <p:cNvGraphicFramePr>
-            <a:graphicFrameLocks noGrp="1"/>
-          </p:cNvGraphicFramePr>
-          <p:nvPr>
-            <p:extLst>
-              <p:ext uri="{D42A27DB-BD31-4B8C-83A1-F6EECF244321}">
-                <p14:modId xmlns:p14="http://schemas.microsoft.com/office/powerpoint/2010/main" val="999551275"/>
-              </p:ext>
-            </p:extLst>
-          </p:nvPr>
-        </p:nvGraphicFramePr>
-        <p:xfrm>
-          <a:off x="566927" y="1353311"/>
-          <a:ext cx="9579963" cy="2432108"/>
-        </p:xfrm>
-        <a:graphic>
-          <a:graphicData uri="http://schemas.openxmlformats.org/drawingml/2006/table">
-            <a:tbl>
-              <a:tblPr/>
-              <a:tblGrid>
-                <a:gridCol w="1110124">
-                  <a:extLst>
-                    <a:ext uri="{9D8B030D-6E8A-4147-A177-3AD203B41FA5}">
-                      <a16:colId xmlns:a16="http://schemas.microsoft.com/office/drawing/2014/main" val="20000"/>
-                    </a:ext>
-                  </a:extLst>
-                </a:gridCol>
-                <a:gridCol w="2055786">
-                  <a:extLst>
-                    <a:ext uri="{9D8B030D-6E8A-4147-A177-3AD203B41FA5}">
-                      <a16:colId xmlns:a16="http://schemas.microsoft.com/office/drawing/2014/main" val="20001"/>
-                    </a:ext>
-                  </a:extLst>
-                </a:gridCol>
-                <a:gridCol w="1932439">
-                  <a:extLst>
-                    <a:ext uri="{9D8B030D-6E8A-4147-A177-3AD203B41FA5}">
-                      <a16:colId xmlns:a16="http://schemas.microsoft.com/office/drawing/2014/main" val="20002"/>
-                    </a:ext>
-                  </a:extLst>
-                </a:gridCol>
-                <a:gridCol w="822315">
-                  <a:extLst>
-                    <a:ext uri="{9D8B030D-6E8A-4147-A177-3AD203B41FA5}">
-                      <a16:colId xmlns:a16="http://schemas.microsoft.com/office/drawing/2014/main" val="20003"/>
-                    </a:ext>
-                  </a:extLst>
-                </a:gridCol>
-                <a:gridCol w="1233472">
-                  <a:extLst>
-                    <a:ext uri="{9D8B030D-6E8A-4147-A177-3AD203B41FA5}">
-                      <a16:colId xmlns:a16="http://schemas.microsoft.com/office/drawing/2014/main" val="20004"/>
-                    </a:ext>
-                  </a:extLst>
-                </a:gridCol>
-                <a:gridCol w="1397934">
-                  <a:extLst>
-                    <a:ext uri="{9D8B030D-6E8A-4147-A177-3AD203B41FA5}">
-                      <a16:colId xmlns:a16="http://schemas.microsoft.com/office/drawing/2014/main" val="20005"/>
-                    </a:ext>
-                  </a:extLst>
-                </a:gridCol>
-                <a:gridCol w="1027893">
-                  <a:extLst>
-                    <a:ext uri="{9D8B030D-6E8A-4147-A177-3AD203B41FA5}">
-                      <a16:colId xmlns:a16="http://schemas.microsoft.com/office/drawing/2014/main" val="20007"/>
-                    </a:ext>
-                  </a:extLst>
-                </a:gridCol>
-              </a:tblGrid>
-              <a:tr h="347444">
-                <a:tc>
-                  <a:txBody>
-                    <a:bodyPr/>
-                    <a:lstStyle/>
-                    <a:p>
-                      <a:pPr algn="l">
-                        <a:lnSpc>
-                          <a:spcPct val="100000"/>
-                        </a:lnSpc>
-                      </a:pPr>
-                      <a:r>
-                        <a:rPr sz="840" b="1">
-                          <a:solidFill>
-                            <a:srgbClr val="1A1A1A"/>
-                          </a:solidFill>
-                          <a:latin typeface="Arial"/>
-                          <a:ea typeface="微软雅黑"/>
-                          <a:cs typeface="Arial"/>
-                        </a:rPr>
-                        <a:t>HQ代码</a:t>
-                      </a:r>
-                    </a:p>
-                  </a:txBody>
-                  <a:tcPr marL="50292" marR="50292" marT="10972" marB="10972" anchor="ctr">
-                    <a:lnL w="9525" cap="flat" cmpd="sng" algn="ctr">
-                      <a:solidFill>
-                        <a:srgbClr val="D9D9D9"/>
-                      </a:solidFill>
-                      <a:prstDash val="solid"/>
-                    </a:lnL>
-                    <a:lnR w="9525" cap="flat" cmpd="sng" algn="ctr">
-                      <a:solidFill>
-                        <a:srgbClr val="D9D9D9"/>
-                      </a:solidFill>
-                      <a:prstDash val="solid"/>
-                    </a:lnR>
-                    <a:lnT w="9525" cap="flat" cmpd="sng" algn="ctr">
-                      <a:solidFill>
-                        <a:srgbClr val="D9D9D9"/>
-                      </a:solidFill>
-                      <a:prstDash val="solid"/>
-                    </a:lnT>
-                    <a:lnB w="9525" cap="flat" cmpd="sng" algn="ctr">
-                      <a:solidFill>
-                        <a:srgbClr val="D9D9D9"/>
-                      </a:solidFill>
-                      <a:prstDash val="solid"/>
-                    </a:lnB>
-                    <a:solidFill>
-                      <a:srgbClr val="F2F2F2"/>
-                    </a:solidFill>
-                  </a:tcPr>
-                </a:tc>
-                <a:tc>
-                  <a:txBody>
-                    <a:bodyPr/>
-                    <a:lstStyle/>
-                    <a:p>
-                      <a:pPr algn="l">
-                        <a:lnSpc>
-                          <a:spcPct val="100000"/>
-                        </a:lnSpc>
-                      </a:pPr>
-                      <a:r>
-                        <a:rPr sz="840" b="1">
-                          <a:solidFill>
-                            <a:srgbClr val="1A1A1A"/>
-                          </a:solidFill>
-                          <a:latin typeface="Arial"/>
-                          <a:ea typeface="微软雅黑"/>
-                          <a:cs typeface="Arial"/>
-                        </a:rPr>
-                        <a:t>客户代码</a:t>
-                      </a:r>
-                    </a:p>
-                  </a:txBody>
-                  <a:tcPr marL="50292" marR="50292" marT="10972" marB="10972" anchor="ctr">
-                    <a:lnL w="9525" cap="flat" cmpd="sng" algn="ctr">
-                      <a:solidFill>
-                        <a:srgbClr val="D9D9D9"/>
-                      </a:solidFill>
-                      <a:prstDash val="solid"/>
-                    </a:lnL>
-                    <a:lnR w="9525" cap="flat" cmpd="sng" algn="ctr">
-                      <a:solidFill>
-                        <a:srgbClr val="D9D9D9"/>
-                      </a:solidFill>
-                      <a:prstDash val="solid"/>
-                    </a:lnR>
-                    <a:lnT w="9525" cap="flat" cmpd="sng" algn="ctr">
-                      <a:solidFill>
-                        <a:srgbClr val="D9D9D9"/>
-                      </a:solidFill>
-                      <a:prstDash val="solid"/>
-                    </a:lnT>
-                    <a:lnB w="9525" cap="flat" cmpd="sng" algn="ctr">
-                      <a:solidFill>
-                        <a:srgbClr val="D9D9D9"/>
-                      </a:solidFill>
-                      <a:prstDash val="solid"/>
-                    </a:lnB>
-                    <a:solidFill>
-                      <a:srgbClr val="F2F2F2"/>
-                    </a:solidFill>
-                  </a:tcPr>
-                </a:tc>
-                <a:tc>
-                  <a:txBody>
-                    <a:bodyPr/>
-                    <a:lstStyle/>
-                    <a:p>
-                      <a:pPr algn="l">
-                        <a:lnSpc>
-                          <a:spcPct val="100000"/>
-                        </a:lnSpc>
-                      </a:pPr>
-                      <a:r>
-                        <a:rPr sz="840" b="1">
-                          <a:solidFill>
-                            <a:srgbClr val="1A1A1A"/>
-                          </a:solidFill>
-                          <a:latin typeface="Arial"/>
-                          <a:ea typeface="微软雅黑"/>
-                          <a:cs typeface="Arial"/>
-                        </a:rPr>
-                        <a:t>尺寸 / 品类</a:t>
-                      </a:r>
-                    </a:p>
-                  </a:txBody>
-                  <a:tcPr marL="50292" marR="50292" marT="10972" marB="10972" anchor="ctr">
-                    <a:lnL w="9525" cap="flat" cmpd="sng" algn="ctr">
-                      <a:solidFill>
-                        <a:srgbClr val="D9D9D9"/>
-                      </a:solidFill>
-                      <a:prstDash val="solid"/>
-                    </a:lnL>
-                    <a:lnR w="9525" cap="flat" cmpd="sng" algn="ctr">
-                      <a:solidFill>
-                        <a:srgbClr val="D9D9D9"/>
-                      </a:solidFill>
-                      <a:prstDash val="solid"/>
-                    </a:lnR>
-                    <a:lnT w="9525" cap="flat" cmpd="sng" algn="ctr">
-                      <a:solidFill>
-                        <a:srgbClr val="D9D9D9"/>
-                      </a:solidFill>
-                      <a:prstDash val="solid"/>
-                    </a:lnT>
-                    <a:lnB w="9525" cap="flat" cmpd="sng" algn="ctr">
-                      <a:solidFill>
-                        <a:srgbClr val="D9D9D9"/>
-                      </a:solidFill>
-                      <a:prstDash val="solid"/>
-                    </a:lnB>
-                    <a:solidFill>
-                      <a:srgbClr val="F2F2F2"/>
-                    </a:solidFill>
-                  </a:tcPr>
-                </a:tc>
-                <a:tc>
-                  <a:txBody>
-                    <a:bodyPr/>
-                    <a:lstStyle/>
-                    <a:p>
-                      <a:pPr algn="ctr">
-                        <a:lnSpc>
-                          <a:spcPct val="100000"/>
-                        </a:lnSpc>
-                      </a:pPr>
-                      <a:r>
-                        <a:rPr lang="zh-CN" altLang="en-US" sz="880" b="1" dirty="0">
-                          <a:solidFill>
-                            <a:srgbClr val="1A1A1A"/>
-                          </a:solidFill>
-                          <a:latin typeface="Arial"/>
-                          <a:ea typeface="微软雅黑"/>
-                          <a:cs typeface="Arial"/>
-                        </a:rPr>
-                        <a:t>背壳（MES）</a:t>
-                      </a:r>
-                      <a:endParaRPr sz="840" b="1" dirty="0">
-                        <a:solidFill>
-                          <a:srgbClr val="1A1A1A"/>
-                        </a:solidFill>
-                        <a:latin typeface="Arial"/>
-                        <a:ea typeface="微软雅黑"/>
-                        <a:cs typeface="Arial"/>
-                      </a:endParaRPr>
-                    </a:p>
-                  </a:txBody>
-                  <a:tcPr marL="50292" marR="50292" marT="10972" marB="10972" anchor="ctr">
-                    <a:lnL w="9525" cap="flat" cmpd="sng" algn="ctr">
-                      <a:solidFill>
-                        <a:srgbClr val="D9D9D9"/>
-                      </a:solidFill>
-                      <a:prstDash val="solid"/>
-                    </a:lnL>
-                    <a:lnR w="9525" cap="flat" cmpd="sng" algn="ctr">
-                      <a:solidFill>
-                        <a:srgbClr val="D9D9D9"/>
-                      </a:solidFill>
-                      <a:prstDash val="solid"/>
-                    </a:lnR>
-                    <a:lnT w="9525" cap="flat" cmpd="sng" algn="ctr">
-                      <a:solidFill>
-                        <a:srgbClr val="D9D9D9"/>
-                      </a:solidFill>
-                      <a:prstDash val="solid"/>
-                    </a:lnT>
-                    <a:lnB w="9525" cap="flat" cmpd="sng" algn="ctr">
-                      <a:solidFill>
-                        <a:srgbClr val="D9D9D9"/>
-                      </a:solidFill>
-                      <a:prstDash val="solid"/>
-                    </a:lnB>
-                    <a:solidFill>
-                      <a:srgbClr val="F2F2F2"/>
-                    </a:solidFill>
-                  </a:tcPr>
-                </a:tc>
-                <a:tc>
-                  <a:txBody>
-                    <a:bodyPr/>
-                    <a:lstStyle/>
-                    <a:p>
-                      <a:pPr algn="r">
-                        <a:lnSpc>
-                          <a:spcPct val="100000"/>
-                        </a:lnSpc>
-                      </a:pPr>
-                      <a:r>
-                        <a:rPr sz="840" b="1">
-                          <a:solidFill>
-                            <a:srgbClr val="1A1A1A"/>
-                          </a:solidFill>
-                          <a:latin typeface="Arial"/>
-                          <a:ea typeface="微软雅黑"/>
-                          <a:cs typeface="Arial"/>
-                        </a:rPr>
-                        <a:t>箱数</a:t>
-                      </a:r>
-                    </a:p>
-                  </a:txBody>
-                  <a:tcPr marL="50292" marR="50292" marT="10972" marB="10972" anchor="ctr">
-                    <a:lnL w="9525" cap="flat" cmpd="sng" algn="ctr">
-                      <a:solidFill>
-                        <a:srgbClr val="D9D9D9"/>
-                      </a:solidFill>
-                      <a:prstDash val="solid"/>
-                    </a:lnL>
-                    <a:lnR w="9525" cap="flat" cmpd="sng" algn="ctr">
-                      <a:solidFill>
-                        <a:srgbClr val="D9D9D9"/>
-                      </a:solidFill>
-                      <a:prstDash val="solid"/>
-                    </a:lnR>
-                    <a:lnT w="9525" cap="flat" cmpd="sng" algn="ctr">
-                      <a:solidFill>
-                        <a:srgbClr val="D9D9D9"/>
-                      </a:solidFill>
-                      <a:prstDash val="solid"/>
-                    </a:lnT>
-                    <a:lnB w="9525" cap="flat" cmpd="sng" algn="ctr">
-                      <a:solidFill>
-                        <a:srgbClr val="D9D9D9"/>
-                      </a:solidFill>
-                      <a:prstDash val="solid"/>
-                    </a:lnB>
-                    <a:solidFill>
-                      <a:srgbClr val="F2F2F2"/>
-                    </a:solidFill>
-                  </a:tcPr>
-                </a:tc>
-                <a:tc>
-                  <a:txBody>
-                    <a:bodyPr/>
-                    <a:lstStyle/>
-                    <a:p>
-                      <a:pPr algn="r">
-                        <a:lnSpc>
-                          <a:spcPct val="100000"/>
-                        </a:lnSpc>
-                      </a:pPr>
-                      <a:r>
-                        <a:rPr sz="840" b="1" dirty="0" err="1">
-                          <a:solidFill>
-                            <a:srgbClr val="1A1A1A"/>
-                          </a:solidFill>
-                          <a:latin typeface="Arial"/>
-                          <a:ea typeface="微软雅黑"/>
-                          <a:cs typeface="Arial"/>
-                        </a:rPr>
-                        <a:t>readStatus</a:t>
-                      </a:r>
-                      <a:r>
-                        <a:rPr sz="840" b="1" dirty="0">
-                          <a:solidFill>
-                            <a:srgbClr val="1A1A1A"/>
-                          </a:solidFill>
-                          <a:latin typeface="Arial"/>
-                          <a:ea typeface="微软雅黑"/>
-                          <a:cs typeface="Arial"/>
-                        </a:rPr>
-                        <a:t>=True</a:t>
-                      </a:r>
-                    </a:p>
-                  </a:txBody>
-                  <a:tcPr marL="50292" marR="50292" marT="10972" marB="10972" anchor="ctr">
-                    <a:lnL w="9525" cap="flat" cmpd="sng" algn="ctr">
-                      <a:solidFill>
-                        <a:srgbClr val="D9D9D9"/>
-                      </a:solidFill>
-                      <a:prstDash val="solid"/>
-                    </a:lnL>
-                    <a:lnR w="9525" cap="flat" cmpd="sng" algn="ctr">
-                      <a:solidFill>
-                        <a:srgbClr val="D9D9D9"/>
-                      </a:solidFill>
-                      <a:prstDash val="solid"/>
-                    </a:lnR>
-                    <a:lnT w="9525" cap="flat" cmpd="sng" algn="ctr">
-                      <a:solidFill>
-                        <a:srgbClr val="D9D9D9"/>
-                      </a:solidFill>
-                      <a:prstDash val="solid"/>
-                    </a:lnT>
-                    <a:lnB w="9525" cap="flat" cmpd="sng" algn="ctr">
-                      <a:solidFill>
-                        <a:srgbClr val="D9D9D9"/>
-                      </a:solidFill>
-                      <a:prstDash val="solid"/>
-                    </a:lnB>
-                    <a:solidFill>
-                      <a:srgbClr val="F2F2F2"/>
-                    </a:solidFill>
-                  </a:tcPr>
-                </a:tc>
-                <a:tc>
-                  <a:txBody>
-                    <a:bodyPr/>
-                    <a:lstStyle/>
-                    <a:p>
-                      <a:pPr algn="r">
-                        <a:lnSpc>
-                          <a:spcPct val="100000"/>
-                        </a:lnSpc>
-                      </a:pPr>
-                      <a:r>
-                        <a:rPr sz="840" b="1">
-                          <a:solidFill>
-                            <a:srgbClr val="1A1A1A"/>
-                          </a:solidFill>
-                          <a:latin typeface="Arial"/>
-                          <a:ea typeface="微软雅黑"/>
-                          <a:cs typeface="Arial"/>
-                        </a:rPr>
-                        <a:t>读全 6 个</a:t>
-                      </a:r>
-                    </a:p>
-                  </a:txBody>
-                  <a:tcPr marL="50292" marR="50292" marT="10972" marB="10972" anchor="ctr">
-                    <a:lnL w="9525" cap="flat" cmpd="sng" algn="ctr">
-                      <a:solidFill>
-                        <a:srgbClr val="D9D9D9"/>
-                      </a:solidFill>
-                      <a:prstDash val="solid"/>
-                      <a:round/>
-                      <a:headEnd type="none" w="med" len="med"/>
-                      <a:tailEnd type="none" w="med" len="med"/>
-                    </a:lnL>
-                    <a:lnR w="9525" cap="flat" cmpd="sng" algn="ctr">
-                      <a:solidFill>
-                        <a:srgbClr val="D9D9D9"/>
-                      </a:solidFill>
-                      <a:prstDash val="solid"/>
-                    </a:lnR>
-                    <a:lnT w="9525" cap="flat" cmpd="sng" algn="ctr">
-                      <a:solidFill>
-                        <a:srgbClr val="D9D9D9"/>
-                      </a:solidFill>
-                      <a:prstDash val="solid"/>
-                    </a:lnT>
-                    <a:lnB w="9525" cap="flat" cmpd="sng" algn="ctr">
-                      <a:solidFill>
-                        <a:srgbClr val="D9D9D9"/>
-                      </a:solidFill>
-                      <a:prstDash val="solid"/>
-                      <a:round/>
-                      <a:headEnd type="none" w="med" len="med"/>
-                      <a:tailEnd type="none" w="med" len="med"/>
-                    </a:lnB>
-                    <a:solidFill>
-                      <a:srgbClr val="F2F2F2"/>
-                    </a:solidFill>
-                  </a:tcPr>
-                </a:tc>
-                <a:extLst>
-                  <a:ext uri="{0D108BD9-81ED-4DB2-BD59-A6C34878D82A}">
-                    <a16:rowId xmlns:a16="http://schemas.microsoft.com/office/drawing/2014/main" val="10000"/>
-                  </a:ext>
-                </a:extLst>
-              </a:tr>
-              <a:tr h="347444">
-                <a:tc>
-                  <a:txBody>
-                    <a:bodyPr/>
-                    <a:lstStyle/>
-                    <a:p>
-                      <a:pPr algn="l">
-                        <a:lnSpc>
-                          <a:spcPct val="100000"/>
-                        </a:lnSpc>
-                      </a:pPr>
-                      <a:r>
-                        <a:rPr sz="880" b="1">
-                          <a:solidFill>
-                            <a:srgbClr val="1A1A1A"/>
-                          </a:solidFill>
-                          <a:latin typeface="Arial"/>
-                          <a:ea typeface="微软雅黑"/>
-                          <a:cs typeface="Arial"/>
-                        </a:rPr>
-                        <a:t>AX7907</a:t>
-                      </a:r>
-                    </a:p>
-                  </a:txBody>
-                  <a:tcPr marL="50292" marR="50292" marT="10972" marB="10972" anchor="ctr">
-                    <a:lnL w="9525" cap="flat" cmpd="sng" algn="ctr">
-                      <a:solidFill>
-                        <a:srgbClr val="D9D9D9"/>
-                      </a:solidFill>
-                      <a:prstDash val="solid"/>
-                    </a:lnL>
-                    <a:lnR w="9525" cap="flat" cmpd="sng" algn="ctr">
-                      <a:solidFill>
-                        <a:srgbClr val="D9D9D9"/>
-                      </a:solidFill>
-                      <a:prstDash val="solid"/>
-                    </a:lnR>
-                    <a:lnT w="9525" cap="flat" cmpd="sng" algn="ctr">
-                      <a:solidFill>
-                        <a:srgbClr val="D9D9D9"/>
-                      </a:solidFill>
-                      <a:prstDash val="solid"/>
-                    </a:lnT>
-                    <a:lnB w="9525" cap="flat" cmpd="sng" algn="ctr">
-                      <a:solidFill>
-                        <a:srgbClr val="D9D9D9"/>
-                      </a:solidFill>
-                      <a:prstDash val="solid"/>
-                    </a:lnB>
-                    <a:solidFill>
-                      <a:srgbClr val="FFFFFF"/>
-                    </a:solidFill>
-                  </a:tcPr>
-                </a:tc>
-                <a:tc>
-                  <a:txBody>
-                    <a:bodyPr/>
-                    <a:lstStyle/>
-                    <a:p>
-                      <a:pPr algn="l">
-                        <a:lnSpc>
-                          <a:spcPct val="100000"/>
-                        </a:lnSpc>
-                      </a:pPr>
-                      <a:r>
-                        <a:rPr sz="880" b="0">
-                          <a:solidFill>
-                            <a:srgbClr val="1A1A1A"/>
-                          </a:solidFill>
-                          <a:latin typeface="Arial"/>
-                          <a:ea typeface="微软雅黑"/>
-                          <a:cs typeface="Arial"/>
-                        </a:rPr>
-                        <a:t>Prosecco/Marsala</a:t>
-                      </a:r>
-                    </a:p>
-                  </a:txBody>
-                  <a:tcPr marL="50292" marR="50292" marT="10972" marB="10972" anchor="ctr">
-                    <a:lnL w="9525" cap="flat" cmpd="sng" algn="ctr">
-                      <a:solidFill>
-                        <a:srgbClr val="D9D9D9"/>
-                      </a:solidFill>
-                      <a:prstDash val="solid"/>
-                    </a:lnL>
-                    <a:lnR w="9525" cap="flat" cmpd="sng" algn="ctr">
-                      <a:solidFill>
-                        <a:srgbClr val="D9D9D9"/>
-                      </a:solidFill>
-                      <a:prstDash val="solid"/>
-                    </a:lnR>
-                    <a:lnT w="9525" cap="flat" cmpd="sng" algn="ctr">
-                      <a:solidFill>
-                        <a:srgbClr val="D9D9D9"/>
-                      </a:solidFill>
-                      <a:prstDash val="solid"/>
-                    </a:lnT>
-                    <a:lnB w="9525" cap="flat" cmpd="sng" algn="ctr">
-                      <a:solidFill>
-                        <a:srgbClr val="D9D9D9"/>
-                      </a:solidFill>
-                      <a:prstDash val="solid"/>
-                    </a:lnB>
-                    <a:solidFill>
-                      <a:srgbClr val="FFFFFF"/>
-                    </a:solidFill>
-                  </a:tcPr>
-                </a:tc>
-                <a:tc>
-                  <a:txBody>
-                    <a:bodyPr/>
-                    <a:lstStyle/>
-                    <a:p>
-                      <a:pPr algn="l">
-                        <a:lnSpc>
-                          <a:spcPct val="100000"/>
-                        </a:lnSpc>
-                      </a:pPr>
-                      <a:r>
-                        <a:rPr sz="880" b="0">
-                          <a:solidFill>
-                            <a:srgbClr val="1A1A1A"/>
-                          </a:solidFill>
-                          <a:latin typeface="Arial"/>
-                          <a:ea typeface="微软雅黑"/>
-                          <a:cs typeface="Arial"/>
-                        </a:rPr>
-                        <a:t>6 inch e-reader</a:t>
-                      </a:r>
-                    </a:p>
-                  </a:txBody>
-                  <a:tcPr marL="50292" marR="50292" marT="10972" marB="10972" anchor="ctr">
-                    <a:lnL w="9525" cap="flat" cmpd="sng" algn="ctr">
-                      <a:solidFill>
-                        <a:srgbClr val="D9D9D9"/>
-                      </a:solidFill>
-                      <a:prstDash val="solid"/>
-                    </a:lnL>
-                    <a:lnR w="9525" cap="flat" cmpd="sng" algn="ctr">
-                      <a:solidFill>
-                        <a:srgbClr val="D9D9D9"/>
-                      </a:solidFill>
-                      <a:prstDash val="solid"/>
-                    </a:lnR>
-                    <a:lnT w="9525" cap="flat" cmpd="sng" algn="ctr">
-                      <a:solidFill>
-                        <a:srgbClr val="D9D9D9"/>
-                      </a:solidFill>
-                      <a:prstDash val="solid"/>
-                    </a:lnT>
-                    <a:lnB w="9525" cap="flat" cmpd="sng" algn="ctr">
-                      <a:solidFill>
-                        <a:srgbClr val="D9D9D9"/>
-                      </a:solidFill>
-                      <a:prstDash val="solid"/>
-                    </a:lnB>
-                    <a:solidFill>
-                      <a:srgbClr val="FFFFFF"/>
-                    </a:solidFill>
-                  </a:tcPr>
-                </a:tc>
-                <a:tc>
-                  <a:txBody>
-                    <a:bodyPr/>
-                    <a:lstStyle/>
-                    <a:p>
-                      <a:pPr algn="ctr">
-                        <a:lnSpc>
-                          <a:spcPct val="100000"/>
-                        </a:lnSpc>
-                      </a:pPr>
-                      <a:r>
-                        <a:rPr lang="zh-CN" altLang="en-US" sz="900" b="0" dirty="0">
-                          <a:solidFill>
-                            <a:srgbClr val="1A1A1A"/>
-                          </a:solidFill>
-                          <a:latin typeface="Arial"/>
-                          <a:ea typeface="微软雅黑"/>
-                          <a:cs typeface="Arial"/>
-                        </a:rPr>
-                        <a:t>未标注</a:t>
-                      </a:r>
-                      <a:endParaRPr sz="880" b="0" dirty="0">
-                        <a:solidFill>
-                          <a:srgbClr val="1A1A1A"/>
-                        </a:solidFill>
-                        <a:latin typeface="Arial"/>
-                        <a:ea typeface="微软雅黑"/>
-                        <a:cs typeface="Arial"/>
-                      </a:endParaRPr>
-                    </a:p>
-                  </a:txBody>
-                  <a:tcPr marL="50292" marR="50292" marT="10972" marB="10972" anchor="ctr">
-                    <a:lnL w="9525" cap="flat" cmpd="sng" algn="ctr">
-                      <a:solidFill>
-                        <a:srgbClr val="D9D9D9"/>
-                      </a:solidFill>
-                      <a:prstDash val="solid"/>
-                    </a:lnL>
-                    <a:lnR w="9525" cap="flat" cmpd="sng" algn="ctr">
-                      <a:solidFill>
-                        <a:srgbClr val="D9D9D9"/>
-                      </a:solidFill>
-                      <a:prstDash val="solid"/>
-                    </a:lnR>
-                    <a:lnT w="9525" cap="flat" cmpd="sng" algn="ctr">
-                      <a:solidFill>
-                        <a:srgbClr val="D9D9D9"/>
-                      </a:solidFill>
-                      <a:prstDash val="solid"/>
-                    </a:lnT>
-                    <a:lnB w="9525" cap="flat" cmpd="sng" algn="ctr">
-                      <a:solidFill>
-                        <a:srgbClr val="D9D9D9"/>
-                      </a:solidFill>
-                      <a:prstDash val="solid"/>
-                    </a:lnB>
-                    <a:solidFill>
-                      <a:srgbClr val="FFFFFF"/>
-                    </a:solidFill>
-                  </a:tcPr>
-                </a:tc>
-                <a:tc>
-                  <a:txBody>
-                    <a:bodyPr/>
-                    <a:lstStyle/>
-                    <a:p>
-                      <a:pPr algn="r">
-                        <a:lnSpc>
-                          <a:spcPct val="100000"/>
-                        </a:lnSpc>
-                      </a:pPr>
-                      <a:r>
-                        <a:rPr sz="880" b="0">
-                          <a:solidFill>
-                            <a:srgbClr val="1A1A1A"/>
-                          </a:solidFill>
-                          <a:latin typeface="Arial"/>
-                          <a:ea typeface="微软雅黑"/>
-                          <a:cs typeface="Arial"/>
-                        </a:rPr>
-                        <a:t>54,810</a:t>
-                      </a:r>
-                    </a:p>
-                  </a:txBody>
-                  <a:tcPr marL="50292" marR="50292" marT="10972" marB="10972" anchor="ctr">
-                    <a:lnL w="9525" cap="flat" cmpd="sng" algn="ctr">
-                      <a:solidFill>
-                        <a:srgbClr val="D9D9D9"/>
-                      </a:solidFill>
-                      <a:prstDash val="solid"/>
-                    </a:lnL>
-                    <a:lnR w="9525" cap="flat" cmpd="sng" algn="ctr">
-                      <a:solidFill>
-                        <a:srgbClr val="D9D9D9"/>
-                      </a:solidFill>
-                      <a:prstDash val="solid"/>
-                    </a:lnR>
-                    <a:lnT w="9525" cap="flat" cmpd="sng" algn="ctr">
-                      <a:solidFill>
-                        <a:srgbClr val="D9D9D9"/>
-                      </a:solidFill>
-                      <a:prstDash val="solid"/>
-                    </a:lnT>
-                    <a:lnB w="9525" cap="flat" cmpd="sng" algn="ctr">
-                      <a:solidFill>
-                        <a:srgbClr val="D9D9D9"/>
-                      </a:solidFill>
-                      <a:prstDash val="solid"/>
-                    </a:lnB>
-                    <a:solidFill>
-                      <a:srgbClr val="FFFFFF"/>
-                    </a:solidFill>
-                  </a:tcPr>
-                </a:tc>
-                <a:tc>
-                  <a:txBody>
-                    <a:bodyPr/>
-                    <a:lstStyle/>
-                    <a:p>
-                      <a:pPr algn="r">
-                        <a:lnSpc>
-                          <a:spcPct val="100000"/>
-                        </a:lnSpc>
-                      </a:pPr>
-                      <a:r>
-                        <a:rPr sz="880" b="0">
-                          <a:solidFill>
-                            <a:srgbClr val="1A1A1A"/>
-                          </a:solidFill>
-                          <a:latin typeface="Arial"/>
-                          <a:ea typeface="微软雅黑"/>
-                          <a:cs typeface="Arial"/>
-                        </a:rPr>
-                        <a:t>9.4%</a:t>
-                      </a:r>
-                    </a:p>
-                  </a:txBody>
-                  <a:tcPr marL="50292" marR="50292" marT="10972" marB="10972" anchor="ctr">
-                    <a:lnL w="9525" cap="flat" cmpd="sng" algn="ctr">
-                      <a:solidFill>
-                        <a:srgbClr val="D9D9D9"/>
-                      </a:solidFill>
-                      <a:prstDash val="solid"/>
-                    </a:lnL>
-                    <a:lnR w="9525" cap="flat" cmpd="sng" algn="ctr">
-                      <a:solidFill>
-                        <a:srgbClr val="D9D9D9"/>
-                      </a:solidFill>
-                      <a:prstDash val="solid"/>
-                    </a:lnR>
-                    <a:lnT w="9525" cap="flat" cmpd="sng" algn="ctr">
-                      <a:solidFill>
-                        <a:srgbClr val="D9D9D9"/>
-                      </a:solidFill>
-                      <a:prstDash val="solid"/>
-                    </a:lnT>
-                    <a:lnB w="9525" cap="flat" cmpd="sng" algn="ctr">
-                      <a:solidFill>
-                        <a:srgbClr val="D9D9D9"/>
-                      </a:solidFill>
-                      <a:prstDash val="solid"/>
-                    </a:lnB>
-                    <a:solidFill>
-                      <a:srgbClr val="FFFFFF"/>
-                    </a:solidFill>
-                  </a:tcPr>
-                </a:tc>
-                <a:tc>
-                  <a:txBody>
-                    <a:bodyPr/>
-                    <a:lstStyle/>
-                    <a:p>
-                      <a:pPr algn="r">
-                        <a:lnSpc>
-                          <a:spcPct val="100000"/>
-                        </a:lnSpc>
-                      </a:pPr>
-                      <a:r>
-                        <a:rPr sz="880" b="0">
-                          <a:solidFill>
-                            <a:srgbClr val="1A1A1A"/>
-                          </a:solidFill>
-                          <a:latin typeface="Arial"/>
-                          <a:ea typeface="微软雅黑"/>
-                          <a:cs typeface="Arial"/>
-                        </a:rPr>
-                        <a:t>0.0%</a:t>
-                      </a:r>
-                    </a:p>
-                  </a:txBody>
-                  <a:tcPr marL="50292" marR="50292" marT="10972" marB="10972" anchor="ctr">
-                    <a:lnL w="9525" cap="flat" cmpd="sng" algn="ctr">
-                      <a:solidFill>
-                        <a:srgbClr val="D9D9D9"/>
-                      </a:solidFill>
-                      <a:prstDash val="solid"/>
-                      <a:round/>
-                      <a:headEnd type="none" w="med" len="med"/>
-                      <a:tailEnd type="none" w="med" len="med"/>
-                    </a:lnL>
-                    <a:lnR w="9525" cap="flat" cmpd="sng" algn="ctr">
-                      <a:solidFill>
-                        <a:srgbClr val="D9D9D9"/>
-                      </a:solidFill>
-                      <a:prstDash val="solid"/>
-                    </a:lnR>
-                    <a:lnT w="9525" cap="flat" cmpd="sng" algn="ctr">
-                      <a:solidFill>
-                        <a:srgbClr val="D9D9D9"/>
-                      </a:solidFill>
-                      <a:prstDash val="solid"/>
-                      <a:round/>
-                      <a:headEnd type="none" w="med" len="med"/>
-                      <a:tailEnd type="none" w="med" len="med"/>
-                    </a:lnT>
-                    <a:lnB w="9525" cap="flat" cmpd="sng" algn="ctr">
-                      <a:solidFill>
-                        <a:srgbClr val="D9D9D9"/>
-                      </a:solidFill>
-                      <a:prstDash val="solid"/>
-                      <a:round/>
-                      <a:headEnd type="none" w="med" len="med"/>
-                      <a:tailEnd type="none" w="med" len="med"/>
-                    </a:lnB>
-                    <a:solidFill>
-                      <a:srgbClr val="FFFFFF"/>
-                    </a:solidFill>
-                  </a:tcPr>
-                </a:tc>
-                <a:extLst>
-                  <a:ext uri="{0D108BD9-81ED-4DB2-BD59-A6C34878D82A}">
-                    <a16:rowId xmlns:a16="http://schemas.microsoft.com/office/drawing/2014/main" val="10001"/>
-                  </a:ext>
-                </a:extLst>
-              </a:tr>
-              <a:tr h="347444">
-                <a:tc>
-                  <a:txBody>
-                    <a:bodyPr/>
-                    <a:lstStyle/>
-                    <a:p>
-                      <a:pPr algn="l">
-                        <a:lnSpc>
-                          <a:spcPct val="100000"/>
-                        </a:lnSpc>
-                      </a:pPr>
-                      <a:r>
-                        <a:rPr sz="880" b="1">
-                          <a:solidFill>
-                            <a:srgbClr val="1A1A1A"/>
-                          </a:solidFill>
-                          <a:latin typeface="Arial"/>
-                          <a:ea typeface="微软雅黑"/>
-                          <a:cs typeface="Arial"/>
-                        </a:rPr>
-                        <a:t>AX8252</a:t>
-                      </a:r>
-                    </a:p>
-                  </a:txBody>
-                  <a:tcPr marL="50292" marR="50292" marT="10972" marB="10972" anchor="ctr">
-                    <a:lnL w="9525" cap="flat" cmpd="sng" algn="ctr">
-                      <a:solidFill>
-                        <a:srgbClr val="D9D9D9"/>
-                      </a:solidFill>
-                      <a:prstDash val="solid"/>
-                    </a:lnL>
-                    <a:lnR w="9525" cap="flat" cmpd="sng" algn="ctr">
-                      <a:solidFill>
-                        <a:srgbClr val="D9D9D9"/>
-                      </a:solidFill>
-                      <a:prstDash val="solid"/>
-                    </a:lnR>
-                    <a:lnT w="9525" cap="flat" cmpd="sng" algn="ctr">
-                      <a:solidFill>
-                        <a:srgbClr val="D9D9D9"/>
-                      </a:solidFill>
-                      <a:prstDash val="solid"/>
-                    </a:lnT>
-                    <a:lnB w="9525" cap="flat" cmpd="sng" algn="ctr">
-                      <a:solidFill>
-                        <a:srgbClr val="D9D9D9"/>
-                      </a:solidFill>
-                      <a:prstDash val="solid"/>
-                    </a:lnB>
-                    <a:solidFill>
-                      <a:srgbClr val="FFFFFF"/>
-                    </a:solidFill>
-                  </a:tcPr>
-                </a:tc>
-                <a:tc>
-                  <a:txBody>
-                    <a:bodyPr/>
-                    <a:lstStyle/>
-                    <a:p>
-                      <a:pPr algn="l">
-                        <a:lnSpc>
-                          <a:spcPct val="100000"/>
-                        </a:lnSpc>
-                      </a:pPr>
-                      <a:r>
-                        <a:rPr sz="880" b="0">
-                          <a:solidFill>
-                            <a:srgbClr val="1A1A1A"/>
-                          </a:solidFill>
-                          <a:latin typeface="Arial"/>
-                          <a:ea typeface="微软雅黑"/>
-                          <a:cs typeface="Arial"/>
-                        </a:rPr>
-                        <a:t>Amaro/Julep</a:t>
-                      </a:r>
-                    </a:p>
-                  </a:txBody>
-                  <a:tcPr marL="50292" marR="50292" marT="10972" marB="10972" anchor="ctr">
-                    <a:lnL w="9525" cap="flat" cmpd="sng" algn="ctr">
-                      <a:solidFill>
-                        <a:srgbClr val="D9D9D9"/>
-                      </a:solidFill>
-                      <a:prstDash val="solid"/>
-                    </a:lnL>
-                    <a:lnR w="9525" cap="flat" cmpd="sng" algn="ctr">
-                      <a:solidFill>
-                        <a:srgbClr val="D9D9D9"/>
-                      </a:solidFill>
-                      <a:prstDash val="solid"/>
-                    </a:lnR>
-                    <a:lnT w="9525" cap="flat" cmpd="sng" algn="ctr">
-                      <a:solidFill>
-                        <a:srgbClr val="D9D9D9"/>
-                      </a:solidFill>
-                      <a:prstDash val="solid"/>
-                    </a:lnT>
-                    <a:lnB w="9525" cap="flat" cmpd="sng" algn="ctr">
-                      <a:solidFill>
-                        <a:srgbClr val="D9D9D9"/>
-                      </a:solidFill>
-                      <a:prstDash val="solid"/>
-                    </a:lnB>
-                    <a:solidFill>
-                      <a:srgbClr val="FFFFFF"/>
-                    </a:solidFill>
-                  </a:tcPr>
-                </a:tc>
-                <a:tc>
-                  <a:txBody>
-                    <a:bodyPr/>
-                    <a:lstStyle/>
-                    <a:p>
-                      <a:pPr algn="l">
-                        <a:lnSpc>
-                          <a:spcPct val="100000"/>
-                        </a:lnSpc>
-                      </a:pPr>
-                      <a:r>
-                        <a:rPr sz="880" b="0">
-                          <a:solidFill>
-                            <a:srgbClr val="1A1A1A"/>
-                          </a:solidFill>
-                          <a:latin typeface="Arial"/>
-                          <a:ea typeface="微软雅黑"/>
-                          <a:cs typeface="Arial"/>
-                        </a:rPr>
-                        <a:t>7 inch e-reader</a:t>
-                      </a:r>
-                    </a:p>
-                  </a:txBody>
-                  <a:tcPr marL="50292" marR="50292" marT="10972" marB="10972" anchor="ctr">
-                    <a:lnL w="9525" cap="flat" cmpd="sng" algn="ctr">
-                      <a:solidFill>
-                        <a:srgbClr val="D9D9D9"/>
-                      </a:solidFill>
-                      <a:prstDash val="solid"/>
-                    </a:lnL>
-                    <a:lnR w="9525" cap="flat" cmpd="sng" algn="ctr">
-                      <a:solidFill>
-                        <a:srgbClr val="D9D9D9"/>
-                      </a:solidFill>
-                      <a:prstDash val="solid"/>
-                    </a:lnR>
-                    <a:lnT w="9525" cap="flat" cmpd="sng" algn="ctr">
-                      <a:solidFill>
-                        <a:srgbClr val="D9D9D9"/>
-                      </a:solidFill>
-                      <a:prstDash val="solid"/>
-                    </a:lnT>
-                    <a:lnB w="9525" cap="flat" cmpd="sng" algn="ctr">
-                      <a:solidFill>
-                        <a:srgbClr val="D9D9D9"/>
-                      </a:solidFill>
-                      <a:prstDash val="solid"/>
-                    </a:lnB>
-                    <a:solidFill>
-                      <a:srgbClr val="FFFFFF"/>
-                    </a:solidFill>
-                  </a:tcPr>
-                </a:tc>
-                <a:tc>
-                  <a:txBody>
-                    <a:bodyPr/>
-                    <a:lstStyle/>
-                    <a:p>
-                      <a:pPr algn="ctr">
-                        <a:lnSpc>
-                          <a:spcPct val="100000"/>
-                        </a:lnSpc>
-                      </a:pPr>
-                      <a:r>
-                        <a:rPr sz="880" b="0" dirty="0" err="1">
-                          <a:solidFill>
-                            <a:srgbClr val="1A1A1A"/>
-                          </a:solidFill>
-                          <a:latin typeface="Arial"/>
-                          <a:ea typeface="微软雅黑"/>
-                          <a:cs typeface="Arial"/>
-                        </a:rPr>
-                        <a:t>塑料</a:t>
-                      </a:r>
-                      <a:endParaRPr sz="880" b="0" dirty="0">
-                        <a:solidFill>
-                          <a:srgbClr val="1A1A1A"/>
-                        </a:solidFill>
-                        <a:latin typeface="Arial"/>
-                        <a:ea typeface="微软雅黑"/>
-                        <a:cs typeface="Arial"/>
-                      </a:endParaRPr>
-                    </a:p>
-                  </a:txBody>
-                  <a:tcPr marL="50292" marR="50292" marT="10972" marB="10972" anchor="ctr">
-                    <a:lnL w="9525" cap="flat" cmpd="sng" algn="ctr">
-                      <a:solidFill>
-                        <a:srgbClr val="D9D9D9"/>
-                      </a:solidFill>
-                      <a:prstDash val="solid"/>
-                    </a:lnL>
-                    <a:lnR w="9525" cap="flat" cmpd="sng" algn="ctr">
-                      <a:solidFill>
-                        <a:srgbClr val="D9D9D9"/>
-                      </a:solidFill>
-                      <a:prstDash val="solid"/>
-                    </a:lnR>
-                    <a:lnT w="9525" cap="flat" cmpd="sng" algn="ctr">
-                      <a:solidFill>
-                        <a:srgbClr val="D9D9D9"/>
-                      </a:solidFill>
-                      <a:prstDash val="solid"/>
-                    </a:lnT>
-                    <a:lnB w="9525" cap="flat" cmpd="sng" algn="ctr">
-                      <a:solidFill>
-                        <a:srgbClr val="D9D9D9"/>
-                      </a:solidFill>
-                      <a:prstDash val="solid"/>
-                    </a:lnB>
-                    <a:solidFill>
-                      <a:srgbClr val="FFFFFF"/>
-                    </a:solidFill>
-                  </a:tcPr>
-                </a:tc>
-                <a:tc>
-                  <a:txBody>
-                    <a:bodyPr/>
-                    <a:lstStyle/>
-                    <a:p>
-                      <a:pPr algn="r">
-                        <a:lnSpc>
-                          <a:spcPct val="100000"/>
-                        </a:lnSpc>
-                      </a:pPr>
-                      <a:r>
-                        <a:rPr sz="880" b="0">
-                          <a:solidFill>
-                            <a:srgbClr val="1A1A1A"/>
-                          </a:solidFill>
-                          <a:latin typeface="Arial"/>
-                          <a:ea typeface="微软雅黑"/>
-                          <a:cs typeface="Arial"/>
-                        </a:rPr>
-                        <a:t>15,202</a:t>
-                      </a:r>
-                    </a:p>
-                  </a:txBody>
-                  <a:tcPr marL="50292" marR="50292" marT="10972" marB="10972" anchor="ctr">
-                    <a:lnL w="9525" cap="flat" cmpd="sng" algn="ctr">
-                      <a:solidFill>
-                        <a:srgbClr val="D9D9D9"/>
-                      </a:solidFill>
-                      <a:prstDash val="solid"/>
-                    </a:lnL>
-                    <a:lnR w="9525" cap="flat" cmpd="sng" algn="ctr">
-                      <a:solidFill>
-                        <a:srgbClr val="D9D9D9"/>
-                      </a:solidFill>
-                      <a:prstDash val="solid"/>
-                    </a:lnR>
-                    <a:lnT w="9525" cap="flat" cmpd="sng" algn="ctr">
-                      <a:solidFill>
-                        <a:srgbClr val="D9D9D9"/>
-                      </a:solidFill>
-                      <a:prstDash val="solid"/>
-                    </a:lnT>
-                    <a:lnB w="9525" cap="flat" cmpd="sng" algn="ctr">
-                      <a:solidFill>
-                        <a:srgbClr val="D9D9D9"/>
-                      </a:solidFill>
-                      <a:prstDash val="solid"/>
-                    </a:lnB>
-                    <a:solidFill>
-                      <a:srgbClr val="FFFFFF"/>
-                    </a:solidFill>
-                  </a:tcPr>
-                </a:tc>
-                <a:tc>
-                  <a:txBody>
-                    <a:bodyPr/>
-                    <a:lstStyle/>
-                    <a:p>
-                      <a:pPr algn="r">
-                        <a:lnSpc>
-                          <a:spcPct val="100000"/>
-                        </a:lnSpc>
-                      </a:pPr>
-                      <a:r>
-                        <a:rPr sz="880" b="0">
-                          <a:solidFill>
-                            <a:srgbClr val="1A1A1A"/>
-                          </a:solidFill>
-                          <a:latin typeface="Arial"/>
-                          <a:ea typeface="微软雅黑"/>
-                          <a:cs typeface="Arial"/>
-                        </a:rPr>
-                        <a:t>7.8%</a:t>
-                      </a:r>
-                    </a:p>
-                  </a:txBody>
-                  <a:tcPr marL="50292" marR="50292" marT="10972" marB="10972" anchor="ctr">
-                    <a:lnL w="9525" cap="flat" cmpd="sng" algn="ctr">
-                      <a:solidFill>
-                        <a:srgbClr val="D9D9D9"/>
-                      </a:solidFill>
-                      <a:prstDash val="solid"/>
-                    </a:lnL>
-                    <a:lnR w="9525" cap="flat" cmpd="sng" algn="ctr">
-                      <a:solidFill>
-                        <a:srgbClr val="D9D9D9"/>
-                      </a:solidFill>
-                      <a:prstDash val="solid"/>
-                    </a:lnR>
-                    <a:lnT w="9525" cap="flat" cmpd="sng" algn="ctr">
-                      <a:solidFill>
-                        <a:srgbClr val="D9D9D9"/>
-                      </a:solidFill>
-                      <a:prstDash val="solid"/>
-                    </a:lnT>
-                    <a:lnB w="9525" cap="flat" cmpd="sng" algn="ctr">
-                      <a:solidFill>
-                        <a:srgbClr val="D9D9D9"/>
-                      </a:solidFill>
-                      <a:prstDash val="solid"/>
-                    </a:lnB>
-                    <a:solidFill>
-                      <a:srgbClr val="FFFFFF"/>
-                    </a:solidFill>
-                  </a:tcPr>
-                </a:tc>
-                <a:tc>
-                  <a:txBody>
-                    <a:bodyPr/>
-                    <a:lstStyle/>
-                    <a:p>
-                      <a:pPr algn="r">
-                        <a:lnSpc>
-                          <a:spcPct val="100000"/>
-                        </a:lnSpc>
-                      </a:pPr>
-                      <a:r>
-                        <a:rPr sz="880" b="0">
-                          <a:solidFill>
-                            <a:srgbClr val="1A1A1A"/>
-                          </a:solidFill>
-                          <a:latin typeface="Arial"/>
-                          <a:ea typeface="微软雅黑"/>
-                          <a:cs typeface="Arial"/>
-                        </a:rPr>
-                        <a:t>0.01%</a:t>
-                      </a:r>
-                    </a:p>
-                  </a:txBody>
-                  <a:tcPr marL="50292" marR="50292" marT="10972" marB="10972" anchor="ctr">
-                    <a:lnL w="9525" cap="flat" cmpd="sng" algn="ctr">
-                      <a:solidFill>
-                        <a:srgbClr val="D9D9D9"/>
-                      </a:solidFill>
-                      <a:prstDash val="solid"/>
-                      <a:round/>
-                      <a:headEnd type="none" w="med" len="med"/>
-                      <a:tailEnd type="none" w="med" len="med"/>
-                    </a:lnL>
-                    <a:lnR w="9525" cap="flat" cmpd="sng" algn="ctr">
-                      <a:solidFill>
-                        <a:srgbClr val="D9D9D9"/>
-                      </a:solidFill>
-                      <a:prstDash val="solid"/>
-                    </a:lnR>
-                    <a:lnT w="9525" cap="flat" cmpd="sng" algn="ctr">
-                      <a:solidFill>
-                        <a:srgbClr val="D9D9D9"/>
-                      </a:solidFill>
-                      <a:prstDash val="solid"/>
-                      <a:round/>
-                      <a:headEnd type="none" w="med" len="med"/>
-                      <a:tailEnd type="none" w="med" len="med"/>
-                    </a:lnT>
-                    <a:lnB w="9525" cap="flat" cmpd="sng" algn="ctr">
-                      <a:solidFill>
-                        <a:srgbClr val="D9D9D9"/>
-                      </a:solidFill>
-                      <a:prstDash val="solid"/>
-                      <a:round/>
-                      <a:headEnd type="none" w="med" len="med"/>
-                      <a:tailEnd type="none" w="med" len="med"/>
-                    </a:lnB>
-                    <a:solidFill>
-                      <a:srgbClr val="FFFFFF"/>
-                    </a:solidFill>
-                  </a:tcPr>
-                </a:tc>
-                <a:extLst>
-                  <a:ext uri="{0D108BD9-81ED-4DB2-BD59-A6C34878D82A}">
-                    <a16:rowId xmlns:a16="http://schemas.microsoft.com/office/drawing/2014/main" val="10002"/>
-                  </a:ext>
-                </a:extLst>
-              </a:tr>
-              <a:tr h="347444">
-                <a:tc>
-                  <a:txBody>
-                    <a:bodyPr/>
-                    <a:lstStyle/>
-                    <a:p>
-                      <a:pPr algn="l">
-                        <a:lnSpc>
-                          <a:spcPct val="100000"/>
-                        </a:lnSpc>
-                      </a:pPr>
-                      <a:r>
-                        <a:rPr sz="880" b="1">
-                          <a:solidFill>
-                            <a:srgbClr val="1A1A1A"/>
-                          </a:solidFill>
-                          <a:latin typeface="Arial"/>
-                          <a:ea typeface="微软雅黑"/>
-                          <a:cs typeface="Arial"/>
-                        </a:rPr>
-                        <a:t>AX6727</a:t>
-                      </a:r>
-                    </a:p>
-                  </a:txBody>
-                  <a:tcPr marL="50292" marR="50292" marT="10972" marB="10972" anchor="ctr">
-                    <a:lnL w="9525" cap="flat" cmpd="sng" algn="ctr">
-                      <a:solidFill>
-                        <a:srgbClr val="D9D9D9"/>
-                      </a:solidFill>
-                      <a:prstDash val="solid"/>
-                    </a:lnL>
-                    <a:lnR w="9525" cap="flat" cmpd="sng" algn="ctr">
-                      <a:solidFill>
-                        <a:srgbClr val="D9D9D9"/>
-                      </a:solidFill>
-                      <a:prstDash val="solid"/>
-                    </a:lnR>
-                    <a:lnT w="9525" cap="flat" cmpd="sng" algn="ctr">
-                      <a:solidFill>
-                        <a:srgbClr val="D9D9D9"/>
-                      </a:solidFill>
-                      <a:prstDash val="solid"/>
-                    </a:lnT>
-                    <a:lnB w="9525" cap="flat" cmpd="sng" algn="ctr">
-                      <a:solidFill>
-                        <a:srgbClr val="D9D9D9"/>
-                      </a:solidFill>
-                      <a:prstDash val="solid"/>
-                    </a:lnB>
-                    <a:solidFill>
-                      <a:srgbClr val="FFFFFF"/>
-                    </a:solidFill>
-                  </a:tcPr>
-                </a:tc>
-                <a:tc>
-                  <a:txBody>
-                    <a:bodyPr/>
-                    <a:lstStyle/>
-                    <a:p>
-                      <a:pPr algn="l">
-                        <a:lnSpc>
-                          <a:spcPct val="100000"/>
-                        </a:lnSpc>
-                      </a:pPr>
-                      <a:r>
-                        <a:rPr sz="880" b="0">
-                          <a:solidFill>
-                            <a:srgbClr val="1A1A1A"/>
-                          </a:solidFill>
-                          <a:latin typeface="Arial"/>
-                          <a:ea typeface="微软雅黑"/>
-                          <a:cs typeface="Arial"/>
-                        </a:rPr>
-                        <a:t>Sangria/Seabreeze</a:t>
-                      </a:r>
-                    </a:p>
-                  </a:txBody>
-                  <a:tcPr marL="50292" marR="50292" marT="10972" marB="10972" anchor="ctr">
-                    <a:lnL w="9525" cap="flat" cmpd="sng" algn="ctr">
-                      <a:solidFill>
-                        <a:srgbClr val="D9D9D9"/>
-                      </a:solidFill>
-                      <a:prstDash val="solid"/>
-                    </a:lnL>
-                    <a:lnR w="9525" cap="flat" cmpd="sng" algn="ctr">
-                      <a:solidFill>
-                        <a:srgbClr val="D9D9D9"/>
-                      </a:solidFill>
-                      <a:prstDash val="solid"/>
-                    </a:lnR>
-                    <a:lnT w="9525" cap="flat" cmpd="sng" algn="ctr">
-                      <a:solidFill>
-                        <a:srgbClr val="D9D9D9"/>
-                      </a:solidFill>
-                      <a:prstDash val="solid"/>
-                    </a:lnT>
-                    <a:lnB w="9525" cap="flat" cmpd="sng" algn="ctr">
-                      <a:solidFill>
-                        <a:srgbClr val="D9D9D9"/>
-                      </a:solidFill>
-                      <a:prstDash val="solid"/>
-                    </a:lnB>
-                    <a:solidFill>
-                      <a:srgbClr val="FFFFFF"/>
-                    </a:solidFill>
-                  </a:tcPr>
-                </a:tc>
-                <a:tc>
-                  <a:txBody>
-                    <a:bodyPr/>
-                    <a:lstStyle/>
-                    <a:p>
-                      <a:pPr algn="l">
-                        <a:lnSpc>
-                          <a:spcPct val="100000"/>
-                        </a:lnSpc>
-                      </a:pPr>
-                      <a:r>
-                        <a:rPr sz="880" b="0">
-                          <a:solidFill>
-                            <a:srgbClr val="1A1A1A"/>
-                          </a:solidFill>
-                          <a:latin typeface="Arial"/>
-                          <a:ea typeface="微软雅黑"/>
-                          <a:cs typeface="Arial"/>
-                        </a:rPr>
-                        <a:t>7 inch e-reader</a:t>
-                      </a:r>
-                    </a:p>
-                  </a:txBody>
-                  <a:tcPr marL="50292" marR="50292" marT="10972" marB="10972" anchor="ctr">
-                    <a:lnL w="9525" cap="flat" cmpd="sng" algn="ctr">
-                      <a:solidFill>
-                        <a:srgbClr val="D9D9D9"/>
-                      </a:solidFill>
-                      <a:prstDash val="solid"/>
-                    </a:lnL>
-                    <a:lnR w="9525" cap="flat" cmpd="sng" algn="ctr">
-                      <a:solidFill>
-                        <a:srgbClr val="D9D9D9"/>
-                      </a:solidFill>
-                      <a:prstDash val="solid"/>
-                    </a:lnR>
-                    <a:lnT w="9525" cap="flat" cmpd="sng" algn="ctr">
-                      <a:solidFill>
-                        <a:srgbClr val="D9D9D9"/>
-                      </a:solidFill>
-                      <a:prstDash val="solid"/>
-                    </a:lnT>
-                    <a:lnB w="9525" cap="flat" cmpd="sng" algn="ctr">
-                      <a:solidFill>
-                        <a:srgbClr val="D9D9D9"/>
-                      </a:solidFill>
-                      <a:prstDash val="solid"/>
-                    </a:lnB>
-                    <a:solidFill>
-                      <a:srgbClr val="FFFFFF"/>
-                    </a:solidFill>
-                  </a:tcPr>
-                </a:tc>
-                <a:tc>
-                  <a:txBody>
-                    <a:bodyPr/>
-                    <a:lstStyle/>
-                    <a:p>
-                      <a:pPr algn="ctr">
-                        <a:lnSpc>
-                          <a:spcPct val="100000"/>
-                        </a:lnSpc>
-                      </a:pPr>
-                      <a:r>
-                        <a:rPr lang="zh-CN" altLang="en-US" sz="900" b="0" dirty="0">
-                          <a:solidFill>
-                            <a:srgbClr val="1A1A1A"/>
-                          </a:solidFill>
-                          <a:latin typeface="Arial"/>
-                          <a:ea typeface="微软雅黑"/>
-                          <a:cs typeface="Arial"/>
-                        </a:rPr>
-                        <a:t>未标注</a:t>
-                      </a:r>
-                    </a:p>
-                  </a:txBody>
-                  <a:tcPr marL="50292" marR="50292" marT="10972" marB="10972" anchor="ctr">
-                    <a:lnL w="9525" cap="flat" cmpd="sng" algn="ctr">
-                      <a:solidFill>
-                        <a:srgbClr val="D9D9D9"/>
-                      </a:solidFill>
-                      <a:prstDash val="solid"/>
-                    </a:lnL>
-                    <a:lnR w="9525" cap="flat" cmpd="sng" algn="ctr">
-                      <a:solidFill>
-                        <a:srgbClr val="D9D9D9"/>
-                      </a:solidFill>
-                      <a:prstDash val="solid"/>
-                    </a:lnR>
-                    <a:lnT w="9525" cap="flat" cmpd="sng" algn="ctr">
-                      <a:solidFill>
-                        <a:srgbClr val="D9D9D9"/>
-                      </a:solidFill>
-                      <a:prstDash val="solid"/>
-                    </a:lnT>
-                    <a:lnB w="9525" cap="flat" cmpd="sng" algn="ctr">
-                      <a:solidFill>
-                        <a:srgbClr val="D9D9D9"/>
-                      </a:solidFill>
-                      <a:prstDash val="solid"/>
-                    </a:lnB>
-                    <a:solidFill>
-                      <a:srgbClr val="FFFFFF"/>
-                    </a:solidFill>
-                  </a:tcPr>
-                </a:tc>
-                <a:tc>
-                  <a:txBody>
-                    <a:bodyPr/>
-                    <a:lstStyle/>
-                    <a:p>
-                      <a:pPr algn="r">
-                        <a:lnSpc>
-                          <a:spcPct val="100000"/>
-                        </a:lnSpc>
-                      </a:pPr>
-                      <a:r>
-                        <a:rPr sz="880" b="0">
-                          <a:solidFill>
-                            <a:srgbClr val="1A1A1A"/>
-                          </a:solidFill>
-                          <a:latin typeface="Arial"/>
-                          <a:ea typeface="微软雅黑"/>
-                          <a:cs typeface="Arial"/>
-                        </a:rPr>
-                        <a:t>7,170</a:t>
-                      </a:r>
-                    </a:p>
-                  </a:txBody>
-                  <a:tcPr marL="50292" marR="50292" marT="10972" marB="10972" anchor="ctr">
-                    <a:lnL w="9525" cap="flat" cmpd="sng" algn="ctr">
-                      <a:solidFill>
-                        <a:srgbClr val="D9D9D9"/>
-                      </a:solidFill>
-                      <a:prstDash val="solid"/>
-                    </a:lnL>
-                    <a:lnR w="9525" cap="flat" cmpd="sng" algn="ctr">
-                      <a:solidFill>
-                        <a:srgbClr val="D9D9D9"/>
-                      </a:solidFill>
-                      <a:prstDash val="solid"/>
-                    </a:lnR>
-                    <a:lnT w="9525" cap="flat" cmpd="sng" algn="ctr">
-                      <a:solidFill>
-                        <a:srgbClr val="D9D9D9"/>
-                      </a:solidFill>
-                      <a:prstDash val="solid"/>
-                    </a:lnT>
-                    <a:lnB w="9525" cap="flat" cmpd="sng" algn="ctr">
-                      <a:solidFill>
-                        <a:srgbClr val="D9D9D9"/>
-                      </a:solidFill>
-                      <a:prstDash val="solid"/>
-                    </a:lnB>
-                    <a:solidFill>
-                      <a:srgbClr val="FFFFFF"/>
-                    </a:solidFill>
-                  </a:tcPr>
-                </a:tc>
-                <a:tc>
-                  <a:txBody>
-                    <a:bodyPr/>
-                    <a:lstStyle/>
-                    <a:p>
-                      <a:pPr algn="r">
-                        <a:lnSpc>
-                          <a:spcPct val="100000"/>
-                        </a:lnSpc>
-                      </a:pPr>
-                      <a:r>
-                        <a:rPr sz="880" b="0">
-                          <a:solidFill>
-                            <a:srgbClr val="1A1A1A"/>
-                          </a:solidFill>
-                          <a:latin typeface="Arial"/>
-                          <a:ea typeface="微软雅黑"/>
-                          <a:cs typeface="Arial"/>
-                        </a:rPr>
-                        <a:t>7.9%</a:t>
-                      </a:r>
-                    </a:p>
-                  </a:txBody>
-                  <a:tcPr marL="50292" marR="50292" marT="10972" marB="10972" anchor="ctr">
-                    <a:lnL w="9525" cap="flat" cmpd="sng" algn="ctr">
-                      <a:solidFill>
-                        <a:srgbClr val="D9D9D9"/>
-                      </a:solidFill>
-                      <a:prstDash val="solid"/>
-                    </a:lnL>
-                    <a:lnR w="9525" cap="flat" cmpd="sng" algn="ctr">
-                      <a:solidFill>
-                        <a:srgbClr val="D9D9D9"/>
-                      </a:solidFill>
-                      <a:prstDash val="solid"/>
-                    </a:lnR>
-                    <a:lnT w="9525" cap="flat" cmpd="sng" algn="ctr">
-                      <a:solidFill>
-                        <a:srgbClr val="D9D9D9"/>
-                      </a:solidFill>
-                      <a:prstDash val="solid"/>
-                    </a:lnT>
-                    <a:lnB w="9525" cap="flat" cmpd="sng" algn="ctr">
-                      <a:solidFill>
-                        <a:srgbClr val="D9D9D9"/>
-                      </a:solidFill>
-                      <a:prstDash val="solid"/>
-                    </a:lnB>
-                    <a:solidFill>
-                      <a:srgbClr val="FFFFFF"/>
-                    </a:solidFill>
-                  </a:tcPr>
-                </a:tc>
-                <a:tc>
-                  <a:txBody>
-                    <a:bodyPr/>
-                    <a:lstStyle/>
-                    <a:p>
-                      <a:pPr algn="r">
-                        <a:lnSpc>
-                          <a:spcPct val="100000"/>
-                        </a:lnSpc>
-                      </a:pPr>
-                      <a:r>
-                        <a:rPr sz="880" b="0">
-                          <a:solidFill>
-                            <a:srgbClr val="1A1A1A"/>
-                          </a:solidFill>
-                          <a:latin typeface="Arial"/>
-                          <a:ea typeface="微软雅黑"/>
-                          <a:cs typeface="Arial"/>
-                        </a:rPr>
-                        <a:t>2.12%</a:t>
-                      </a:r>
-                    </a:p>
-                  </a:txBody>
-                  <a:tcPr marL="50292" marR="50292" marT="10972" marB="10972" anchor="ctr">
-                    <a:lnL w="9525" cap="flat" cmpd="sng" algn="ctr">
-                      <a:solidFill>
-                        <a:srgbClr val="D9D9D9"/>
-                      </a:solidFill>
-                      <a:prstDash val="solid"/>
-                      <a:round/>
-                      <a:headEnd type="none" w="med" len="med"/>
-                      <a:tailEnd type="none" w="med" len="med"/>
-                    </a:lnL>
-                    <a:lnR w="9525" cap="flat" cmpd="sng" algn="ctr">
-                      <a:solidFill>
-                        <a:srgbClr val="D9D9D9"/>
-                      </a:solidFill>
-                      <a:prstDash val="solid"/>
-                    </a:lnR>
-                    <a:lnT w="9525" cap="flat" cmpd="sng" algn="ctr">
-                      <a:solidFill>
-                        <a:srgbClr val="D9D9D9"/>
-                      </a:solidFill>
-                      <a:prstDash val="solid"/>
-                      <a:round/>
-                      <a:headEnd type="none" w="med" len="med"/>
-                      <a:tailEnd type="none" w="med" len="med"/>
-                    </a:lnT>
-                    <a:lnB w="9525" cap="flat" cmpd="sng" algn="ctr">
-                      <a:solidFill>
-                        <a:srgbClr val="D9D9D9"/>
-                      </a:solidFill>
-                      <a:prstDash val="solid"/>
-                      <a:round/>
-                      <a:headEnd type="none" w="med" len="med"/>
-                      <a:tailEnd type="none" w="med" len="med"/>
-                    </a:lnB>
-                    <a:solidFill>
-                      <a:srgbClr val="FFFFFF"/>
-                    </a:solidFill>
-                  </a:tcPr>
-                </a:tc>
-                <a:extLst>
-                  <a:ext uri="{0D108BD9-81ED-4DB2-BD59-A6C34878D82A}">
-                    <a16:rowId xmlns:a16="http://schemas.microsoft.com/office/drawing/2014/main" val="10003"/>
-                  </a:ext>
-                </a:extLst>
-              </a:tr>
-              <a:tr h="347444">
-                <a:tc>
-                  <a:txBody>
-                    <a:bodyPr/>
-                    <a:lstStyle/>
-                    <a:p>
-                      <a:pPr algn="l">
-                        <a:lnSpc>
-                          <a:spcPct val="100000"/>
-                        </a:lnSpc>
-                      </a:pPr>
-                      <a:r>
-                        <a:rPr sz="880" b="1">
-                          <a:solidFill>
-                            <a:srgbClr val="1A1A1A"/>
-                          </a:solidFill>
-                          <a:latin typeface="Arial"/>
-                          <a:ea typeface="微软雅黑"/>
-                          <a:cs typeface="Arial"/>
-                        </a:rPr>
-                        <a:t>AX8252</a:t>
-                      </a:r>
-                    </a:p>
-                  </a:txBody>
-                  <a:tcPr marL="50292" marR="50292" marT="10972" marB="10972" anchor="ctr">
-                    <a:lnL w="9525" cap="flat" cmpd="sng" algn="ctr">
-                      <a:solidFill>
-                        <a:srgbClr val="D9D9D9"/>
-                      </a:solidFill>
-                      <a:prstDash val="solid"/>
-                    </a:lnL>
-                    <a:lnR w="9525" cap="flat" cmpd="sng" algn="ctr">
-                      <a:solidFill>
-                        <a:srgbClr val="D9D9D9"/>
-                      </a:solidFill>
-                      <a:prstDash val="solid"/>
-                    </a:lnR>
-                    <a:lnT w="9525" cap="flat" cmpd="sng" algn="ctr">
-                      <a:solidFill>
-                        <a:srgbClr val="D9D9D9"/>
-                      </a:solidFill>
-                      <a:prstDash val="solid"/>
-                    </a:lnT>
-                    <a:lnB w="9525" cap="flat" cmpd="sng" algn="ctr">
-                      <a:solidFill>
-                        <a:srgbClr val="D9D9D9"/>
-                      </a:solidFill>
-                      <a:prstDash val="solid"/>
-                    </a:lnB>
-                    <a:solidFill>
-                      <a:srgbClr val="FFFFFF"/>
-                    </a:solidFill>
-                  </a:tcPr>
-                </a:tc>
-                <a:tc>
-                  <a:txBody>
-                    <a:bodyPr/>
-                    <a:lstStyle/>
-                    <a:p>
-                      <a:pPr algn="l">
-                        <a:lnSpc>
-                          <a:spcPct val="100000"/>
-                        </a:lnSpc>
-                      </a:pPr>
-                      <a:r>
-                        <a:rPr sz="880" b="0">
-                          <a:solidFill>
-                            <a:srgbClr val="1A1A1A"/>
-                          </a:solidFill>
-                          <a:latin typeface="Arial"/>
-                          <a:ea typeface="微软雅黑"/>
-                          <a:cs typeface="Arial"/>
-                        </a:rPr>
-                        <a:t>Amaro/Julep</a:t>
-                      </a:r>
-                    </a:p>
-                  </a:txBody>
-                  <a:tcPr marL="50292" marR="50292" marT="10972" marB="10972" anchor="ctr">
-                    <a:lnL w="9525" cap="flat" cmpd="sng" algn="ctr">
-                      <a:solidFill>
-                        <a:srgbClr val="D9D9D9"/>
-                      </a:solidFill>
-                      <a:prstDash val="solid"/>
-                    </a:lnL>
-                    <a:lnR w="9525" cap="flat" cmpd="sng" algn="ctr">
-                      <a:solidFill>
-                        <a:srgbClr val="D9D9D9"/>
-                      </a:solidFill>
-                      <a:prstDash val="solid"/>
-                    </a:lnR>
-                    <a:lnT w="9525" cap="flat" cmpd="sng" algn="ctr">
-                      <a:solidFill>
-                        <a:srgbClr val="D9D9D9"/>
-                      </a:solidFill>
-                      <a:prstDash val="solid"/>
-                    </a:lnT>
-                    <a:lnB w="9525" cap="flat" cmpd="sng" algn="ctr">
-                      <a:solidFill>
-                        <a:srgbClr val="D9D9D9"/>
-                      </a:solidFill>
-                      <a:prstDash val="solid"/>
-                    </a:lnB>
-                    <a:solidFill>
-                      <a:srgbClr val="FFFFFF"/>
-                    </a:solidFill>
-                  </a:tcPr>
-                </a:tc>
-                <a:tc>
-                  <a:txBody>
-                    <a:bodyPr/>
-                    <a:lstStyle/>
-                    <a:p>
-                      <a:pPr algn="l">
-                        <a:lnSpc>
-                          <a:spcPct val="100000"/>
-                        </a:lnSpc>
-                      </a:pPr>
-                      <a:r>
-                        <a:rPr sz="880" b="0">
-                          <a:solidFill>
-                            <a:srgbClr val="1A1A1A"/>
-                          </a:solidFill>
-                          <a:latin typeface="Arial"/>
-                          <a:ea typeface="微软雅黑"/>
-                          <a:cs typeface="Arial"/>
-                        </a:rPr>
-                        <a:t>7 inch e-reader</a:t>
-                      </a:r>
-                    </a:p>
-                  </a:txBody>
-                  <a:tcPr marL="50292" marR="50292" marT="10972" marB="10972" anchor="ctr">
-                    <a:lnL w="9525" cap="flat" cmpd="sng" algn="ctr">
-                      <a:solidFill>
-                        <a:srgbClr val="D9D9D9"/>
-                      </a:solidFill>
-                      <a:prstDash val="solid"/>
-                    </a:lnL>
-                    <a:lnR w="9525" cap="flat" cmpd="sng" algn="ctr">
-                      <a:solidFill>
-                        <a:srgbClr val="D9D9D9"/>
-                      </a:solidFill>
-                      <a:prstDash val="solid"/>
-                    </a:lnR>
-                    <a:lnT w="9525" cap="flat" cmpd="sng" algn="ctr">
-                      <a:solidFill>
-                        <a:srgbClr val="D9D9D9"/>
-                      </a:solidFill>
-                      <a:prstDash val="solid"/>
-                    </a:lnT>
-                    <a:lnB w="9525" cap="flat" cmpd="sng" algn="ctr">
-                      <a:solidFill>
-                        <a:srgbClr val="D9D9D9"/>
-                      </a:solidFill>
-                      <a:prstDash val="solid"/>
-                    </a:lnB>
-                    <a:solidFill>
-                      <a:srgbClr val="FFFFFF"/>
-                    </a:solidFill>
-                  </a:tcPr>
-                </a:tc>
-                <a:tc>
-                  <a:txBody>
-                    <a:bodyPr/>
-                    <a:lstStyle/>
-                    <a:p>
-                      <a:pPr algn="ctr">
-                        <a:lnSpc>
-                          <a:spcPct val="100000"/>
-                        </a:lnSpc>
-                      </a:pPr>
-                      <a:r>
-                        <a:rPr sz="880" b="0">
-                          <a:solidFill>
-                            <a:srgbClr val="1A1A1A"/>
-                          </a:solidFill>
-                          <a:latin typeface="Arial"/>
-                          <a:ea typeface="微软雅黑"/>
-                          <a:cs typeface="Arial"/>
-                        </a:rPr>
-                        <a:t>金属</a:t>
-                      </a:r>
-                    </a:p>
-                  </a:txBody>
-                  <a:tcPr marL="50292" marR="50292" marT="10972" marB="10972" anchor="ctr">
-                    <a:lnL w="9525" cap="flat" cmpd="sng" algn="ctr">
-                      <a:solidFill>
-                        <a:srgbClr val="D9D9D9"/>
-                      </a:solidFill>
-                      <a:prstDash val="solid"/>
-                    </a:lnL>
-                    <a:lnR w="9525" cap="flat" cmpd="sng" algn="ctr">
-                      <a:solidFill>
-                        <a:srgbClr val="D9D9D9"/>
-                      </a:solidFill>
-                      <a:prstDash val="solid"/>
-                    </a:lnR>
-                    <a:lnT w="9525" cap="flat" cmpd="sng" algn="ctr">
-                      <a:solidFill>
-                        <a:srgbClr val="D9D9D9"/>
-                      </a:solidFill>
-                      <a:prstDash val="solid"/>
-                    </a:lnT>
-                    <a:lnB w="9525" cap="flat" cmpd="sng" algn="ctr">
-                      <a:solidFill>
-                        <a:srgbClr val="D9D9D9"/>
-                      </a:solidFill>
-                      <a:prstDash val="solid"/>
-                    </a:lnB>
-                    <a:solidFill>
-                      <a:srgbClr val="FFFFFF"/>
-                    </a:solidFill>
-                  </a:tcPr>
-                </a:tc>
-                <a:tc>
-                  <a:txBody>
-                    <a:bodyPr/>
-                    <a:lstStyle/>
-                    <a:p>
-                      <a:pPr algn="r">
-                        <a:lnSpc>
-                          <a:spcPct val="100000"/>
-                        </a:lnSpc>
-                      </a:pPr>
-                      <a:r>
-                        <a:rPr sz="880" b="0">
-                          <a:solidFill>
-                            <a:srgbClr val="1A1A1A"/>
-                          </a:solidFill>
-                          <a:latin typeface="Arial"/>
-                          <a:ea typeface="微软雅黑"/>
-                          <a:cs typeface="Arial"/>
-                        </a:rPr>
-                        <a:t>6,524</a:t>
-                      </a:r>
-                    </a:p>
-                  </a:txBody>
-                  <a:tcPr marL="50292" marR="50292" marT="10972" marB="10972" anchor="ctr">
-                    <a:lnL w="9525" cap="flat" cmpd="sng" algn="ctr">
-                      <a:solidFill>
-                        <a:srgbClr val="D9D9D9"/>
-                      </a:solidFill>
-                      <a:prstDash val="solid"/>
-                    </a:lnL>
-                    <a:lnR w="9525" cap="flat" cmpd="sng" algn="ctr">
-                      <a:solidFill>
-                        <a:srgbClr val="D9D9D9"/>
-                      </a:solidFill>
-                      <a:prstDash val="solid"/>
-                    </a:lnR>
-                    <a:lnT w="9525" cap="flat" cmpd="sng" algn="ctr">
-                      <a:solidFill>
-                        <a:srgbClr val="D9D9D9"/>
-                      </a:solidFill>
-                      <a:prstDash val="solid"/>
-                    </a:lnT>
-                    <a:lnB w="9525" cap="flat" cmpd="sng" algn="ctr">
-                      <a:solidFill>
-                        <a:srgbClr val="D9D9D9"/>
-                      </a:solidFill>
-                      <a:prstDash val="solid"/>
-                    </a:lnB>
-                    <a:solidFill>
-                      <a:srgbClr val="FFFFFF"/>
-                    </a:solidFill>
-                  </a:tcPr>
-                </a:tc>
-                <a:tc>
-                  <a:txBody>
-                    <a:bodyPr/>
-                    <a:lstStyle/>
-                    <a:p>
-                      <a:pPr algn="r">
-                        <a:lnSpc>
-                          <a:spcPct val="100000"/>
-                        </a:lnSpc>
-                      </a:pPr>
-                      <a:r>
-                        <a:rPr sz="880" b="0">
-                          <a:solidFill>
-                            <a:srgbClr val="1A1A1A"/>
-                          </a:solidFill>
-                          <a:latin typeface="Arial"/>
-                          <a:ea typeface="微软雅黑"/>
-                          <a:cs typeface="Arial"/>
-                        </a:rPr>
-                        <a:t>8.7%</a:t>
-                      </a:r>
-                    </a:p>
-                  </a:txBody>
-                  <a:tcPr marL="50292" marR="50292" marT="10972" marB="10972" anchor="ctr">
-                    <a:lnL w="9525" cap="flat" cmpd="sng" algn="ctr">
-                      <a:solidFill>
-                        <a:srgbClr val="D9D9D9"/>
-                      </a:solidFill>
-                      <a:prstDash val="solid"/>
-                    </a:lnL>
-                    <a:lnR w="9525" cap="flat" cmpd="sng" algn="ctr">
-                      <a:solidFill>
-                        <a:srgbClr val="D9D9D9"/>
-                      </a:solidFill>
-                      <a:prstDash val="solid"/>
-                    </a:lnR>
-                    <a:lnT w="9525" cap="flat" cmpd="sng" algn="ctr">
-                      <a:solidFill>
-                        <a:srgbClr val="D9D9D9"/>
-                      </a:solidFill>
-                      <a:prstDash val="solid"/>
-                    </a:lnT>
-                    <a:lnB w="9525" cap="flat" cmpd="sng" algn="ctr">
-                      <a:solidFill>
-                        <a:srgbClr val="D9D9D9"/>
-                      </a:solidFill>
-                      <a:prstDash val="solid"/>
-                    </a:lnB>
-                    <a:solidFill>
-                      <a:srgbClr val="FFFFFF"/>
-                    </a:solidFill>
-                  </a:tcPr>
-                </a:tc>
-                <a:tc>
-                  <a:txBody>
-                    <a:bodyPr/>
-                    <a:lstStyle/>
-                    <a:p>
-                      <a:pPr algn="r">
-                        <a:lnSpc>
-                          <a:spcPct val="100000"/>
-                        </a:lnSpc>
-                      </a:pPr>
-                      <a:r>
-                        <a:rPr sz="880" b="0">
-                          <a:solidFill>
-                            <a:srgbClr val="1A1A1A"/>
-                          </a:solidFill>
-                          <a:latin typeface="Arial"/>
-                          <a:ea typeface="微软雅黑"/>
-                          <a:cs typeface="Arial"/>
-                        </a:rPr>
-                        <a:t>0.0%</a:t>
-                      </a:r>
-                    </a:p>
-                  </a:txBody>
-                  <a:tcPr marL="50292" marR="50292" marT="10972" marB="10972" anchor="ctr">
-                    <a:lnL w="9525" cap="flat" cmpd="sng" algn="ctr">
-                      <a:solidFill>
-                        <a:srgbClr val="D9D9D9"/>
-                      </a:solidFill>
-                      <a:prstDash val="solid"/>
-                      <a:round/>
-                      <a:headEnd type="none" w="med" len="med"/>
-                      <a:tailEnd type="none" w="med" len="med"/>
-                    </a:lnL>
-                    <a:lnR w="9525" cap="flat" cmpd="sng" algn="ctr">
-                      <a:solidFill>
-                        <a:srgbClr val="D9D9D9"/>
-                      </a:solidFill>
-                      <a:prstDash val="solid"/>
-                    </a:lnR>
-                    <a:lnT w="9525" cap="flat" cmpd="sng" algn="ctr">
-                      <a:solidFill>
-                        <a:srgbClr val="D9D9D9"/>
-                      </a:solidFill>
-                      <a:prstDash val="solid"/>
-                      <a:round/>
-                      <a:headEnd type="none" w="med" len="med"/>
-                      <a:tailEnd type="none" w="med" len="med"/>
-                    </a:lnT>
-                    <a:lnB w="9525" cap="flat" cmpd="sng" algn="ctr">
-                      <a:solidFill>
-                        <a:srgbClr val="D9D9D9"/>
-                      </a:solidFill>
-                      <a:prstDash val="solid"/>
-                      <a:round/>
-                      <a:headEnd type="none" w="med" len="med"/>
-                      <a:tailEnd type="none" w="med" len="med"/>
-                    </a:lnB>
-                    <a:solidFill>
-                      <a:srgbClr val="FFFFFF"/>
-                    </a:solidFill>
-                  </a:tcPr>
-                </a:tc>
-                <a:extLst>
-                  <a:ext uri="{0D108BD9-81ED-4DB2-BD59-A6C34878D82A}">
-                    <a16:rowId xmlns:a16="http://schemas.microsoft.com/office/drawing/2014/main" val="10004"/>
-                  </a:ext>
-                </a:extLst>
-              </a:tr>
-            </a:tbl>
-          </a:graphicData>
-        </a:graphic>
-      </p:graphicFrame>
       <p:pic>
         <p:nvPicPr>
           <p:cNvPr id="14" name="Picture 16" descr="fig13_prod_readout.png">
@@ -12498,8 +10454,8 @@
         </p:nvSpPr>
         <p:spPr>
           <a:xfrm>
-            <a:off x="566928" y="804672"/>
-            <a:ext cx="11055096" cy="310896"/>
+            <a:off x="566928" y="3493007"/>
+            <a:ext cx="11055096" cy="566928"/>
           </a:xfrm>
           <a:prstGeom prst="rect">
             <a:avLst/>
@@ -12518,7 +10474,7 @@
               </a:lnSpc>
             </a:pPr>
             <a:r>
-              <a:rPr sz="950" b="0">
+              <a:rPr sz="819" b="0">
                 <a:solidFill>
                   <a:srgbClr val="8C8C8C"/>
                 </a:solidFill>
@@ -12526,11 +10482,3874 @@
                 <a:ea typeface="微软雅黑"/>
                 <a:cs typeface="Arial"/>
               </a:rPr>
-              <a:t>31 天 113,667 箱：95.0% 一箱读到 0 个、读全 6 个 0.14%；下表四组占 83,706 箱。背壳取 MES CongfigSize（未标注＝该批日志未写材质）；AX6727 一行明显异常，先记录、不作结论。</a:t>
+              <a:t>31 天 113,667 箱中可映射机型的 83,706 箱；≤N＝该箱窗口内读到的整机标签数 ≤N 的箱占比（累计），读全 6 个＝读到 6 个。95.0% 的箱一个标签都读不到，所以各档都在 98% 以上（AX6727 例外，见右）。</a:t>
             </a:r>
           </a:p>
         </p:txBody>
       </p:sp>
+      <p:graphicFrame>
+        <p:nvGraphicFramePr>
+          <p:cNvPr id="16" name="P4_table"/>
+          <p:cNvGraphicFramePr>
+            <a:graphicFrameLocks noGrp="1"/>
+          </p:cNvGraphicFramePr>
+          <p:nvPr/>
+        </p:nvGraphicFramePr>
+        <p:xfrm>
+          <a:off x="566927" y="1353311"/>
+          <a:ext cx="11064233" cy="2084832"/>
+        </p:xfrm>
+        <a:graphic>
+          <a:graphicData uri="http://schemas.openxmlformats.org/drawingml/2006/table">
+            <a:tbl>
+              <a:tblPr/>
+              <a:tblGrid>
+                <a:gridCol w="980375"/>
+                <a:gridCol w="1820697"/>
+                <a:gridCol w="1727328"/>
+                <a:gridCol w="887006"/>
+                <a:gridCol w="887006"/>
+                <a:gridCol w="980375"/>
+                <a:gridCol w="578888"/>
+                <a:gridCol w="578888"/>
+                <a:gridCol w="578888"/>
+                <a:gridCol w="578888"/>
+                <a:gridCol w="578888"/>
+                <a:gridCol w="887006"/>
+              </a:tblGrid>
+              <a:tr h="347472">
+                <a:tc>
+                  <a:txBody>
+                    <a:bodyPr/>
+                    <a:lstStyle/>
+                    <a:p>
+                      <a:pPr algn="l">
+                        <a:lnSpc>
+                          <a:spcPct val="100000"/>
+                        </a:lnSpc>
+                      </a:pPr>
+                      <a:r>
+                        <a:rPr sz="760" b="1">
+                          <a:solidFill>
+                            <a:srgbClr val="1A1A1A"/>
+                          </a:solidFill>
+                          <a:latin typeface="Arial"/>
+                          <a:ea typeface="微软雅黑"/>
+                          <a:cs typeface="Arial"/>
+                        </a:rPr>
+                        <a:t>HQ代码</a:t>
+                      </a:r>
+                    </a:p>
+                  </a:txBody>
+                  <a:tcPr marL="36576" marR="36576" marT="7315" marB="7315" anchor="ctr">
+                    <a:lnL w="9525" cap="flat" cmpd="sng" algn="ctr">
+                      <a:solidFill>
+                        <a:srgbClr val="D9D9D9"/>
+                      </a:solidFill>
+                      <a:prstDash val="solid"/>
+                    </a:lnL>
+                    <a:lnR w="9525" cap="flat" cmpd="sng" algn="ctr">
+                      <a:solidFill>
+                        <a:srgbClr val="D9D9D9"/>
+                      </a:solidFill>
+                      <a:prstDash val="solid"/>
+                    </a:lnR>
+                    <a:lnT w="9525" cap="flat" cmpd="sng" algn="ctr">
+                      <a:solidFill>
+                        <a:srgbClr val="D9D9D9"/>
+                      </a:solidFill>
+                      <a:prstDash val="solid"/>
+                    </a:lnT>
+                    <a:lnB w="9525" cap="flat" cmpd="sng" algn="ctr">
+                      <a:solidFill>
+                        <a:srgbClr val="D9D9D9"/>
+                      </a:solidFill>
+                      <a:prstDash val="solid"/>
+                    </a:lnB>
+                    <a:solidFill>
+                      <a:srgbClr val="F2F2F2"/>
+                    </a:solidFill>
+                  </a:tcPr>
+                </a:tc>
+                <a:tc>
+                  <a:txBody>
+                    <a:bodyPr/>
+                    <a:lstStyle/>
+                    <a:p>
+                      <a:pPr algn="l">
+                        <a:lnSpc>
+                          <a:spcPct val="100000"/>
+                        </a:lnSpc>
+                      </a:pPr>
+                      <a:r>
+                        <a:rPr sz="760" b="1">
+                          <a:solidFill>
+                            <a:srgbClr val="1A1A1A"/>
+                          </a:solidFill>
+                          <a:latin typeface="Arial"/>
+                          <a:ea typeface="微软雅黑"/>
+                          <a:cs typeface="Arial"/>
+                        </a:rPr>
+                        <a:t>客户代码</a:t>
+                      </a:r>
+                    </a:p>
+                  </a:txBody>
+                  <a:tcPr marL="36576" marR="36576" marT="7315" marB="7315" anchor="ctr">
+                    <a:lnL w="9525" cap="flat" cmpd="sng" algn="ctr">
+                      <a:solidFill>
+                        <a:srgbClr val="D9D9D9"/>
+                      </a:solidFill>
+                      <a:prstDash val="solid"/>
+                    </a:lnL>
+                    <a:lnR w="9525" cap="flat" cmpd="sng" algn="ctr">
+                      <a:solidFill>
+                        <a:srgbClr val="D9D9D9"/>
+                      </a:solidFill>
+                      <a:prstDash val="solid"/>
+                    </a:lnR>
+                    <a:lnT w="9525" cap="flat" cmpd="sng" algn="ctr">
+                      <a:solidFill>
+                        <a:srgbClr val="D9D9D9"/>
+                      </a:solidFill>
+                      <a:prstDash val="solid"/>
+                    </a:lnT>
+                    <a:lnB w="9525" cap="flat" cmpd="sng" algn="ctr">
+                      <a:solidFill>
+                        <a:srgbClr val="D9D9D9"/>
+                      </a:solidFill>
+                      <a:prstDash val="solid"/>
+                    </a:lnB>
+                    <a:solidFill>
+                      <a:srgbClr val="F2F2F2"/>
+                    </a:solidFill>
+                  </a:tcPr>
+                </a:tc>
+                <a:tc>
+                  <a:txBody>
+                    <a:bodyPr/>
+                    <a:lstStyle/>
+                    <a:p>
+                      <a:pPr algn="l">
+                        <a:lnSpc>
+                          <a:spcPct val="100000"/>
+                        </a:lnSpc>
+                      </a:pPr>
+                      <a:r>
+                        <a:rPr sz="760" b="1">
+                          <a:solidFill>
+                            <a:srgbClr val="1A1A1A"/>
+                          </a:solidFill>
+                          <a:latin typeface="Arial"/>
+                          <a:ea typeface="微软雅黑"/>
+                          <a:cs typeface="Arial"/>
+                        </a:rPr>
+                        <a:t>尺寸 / 品类</a:t>
+                      </a:r>
+                    </a:p>
+                  </a:txBody>
+                  <a:tcPr marL="36576" marR="36576" marT="7315" marB="7315" anchor="ctr">
+                    <a:lnL w="9525" cap="flat" cmpd="sng" algn="ctr">
+                      <a:solidFill>
+                        <a:srgbClr val="D9D9D9"/>
+                      </a:solidFill>
+                      <a:prstDash val="solid"/>
+                    </a:lnL>
+                    <a:lnR w="9525" cap="flat" cmpd="sng" algn="ctr">
+                      <a:solidFill>
+                        <a:srgbClr val="D9D9D9"/>
+                      </a:solidFill>
+                      <a:prstDash val="solid"/>
+                    </a:lnR>
+                    <a:lnT w="9525" cap="flat" cmpd="sng" algn="ctr">
+                      <a:solidFill>
+                        <a:srgbClr val="D9D9D9"/>
+                      </a:solidFill>
+                      <a:prstDash val="solid"/>
+                    </a:lnT>
+                    <a:lnB w="9525" cap="flat" cmpd="sng" algn="ctr">
+                      <a:solidFill>
+                        <a:srgbClr val="D9D9D9"/>
+                      </a:solidFill>
+                      <a:prstDash val="solid"/>
+                    </a:lnB>
+                    <a:solidFill>
+                      <a:srgbClr val="F2F2F2"/>
+                    </a:solidFill>
+                  </a:tcPr>
+                </a:tc>
+                <a:tc>
+                  <a:txBody>
+                    <a:bodyPr/>
+                    <a:lstStyle/>
+                    <a:p>
+                      <a:pPr algn="ctr">
+                        <a:lnSpc>
+                          <a:spcPct val="100000"/>
+                        </a:lnSpc>
+                      </a:pPr>
+                      <a:r>
+                        <a:rPr sz="760" b="1">
+                          <a:solidFill>
+                            <a:srgbClr val="1A1A1A"/>
+                          </a:solidFill>
+                          <a:latin typeface="Arial"/>
+                          <a:ea typeface="微软雅黑"/>
+                          <a:cs typeface="Arial"/>
+                        </a:rPr>
+                        <a:t>背壳（MES）</a:t>
+                      </a:r>
+                    </a:p>
+                  </a:txBody>
+                  <a:tcPr marL="36576" marR="36576" marT="7315" marB="7315" anchor="ctr">
+                    <a:lnL w="9525" cap="flat" cmpd="sng" algn="ctr">
+                      <a:solidFill>
+                        <a:srgbClr val="D9D9D9"/>
+                      </a:solidFill>
+                      <a:prstDash val="solid"/>
+                    </a:lnL>
+                    <a:lnR w="9525" cap="flat" cmpd="sng" algn="ctr">
+                      <a:solidFill>
+                        <a:srgbClr val="D9D9D9"/>
+                      </a:solidFill>
+                      <a:prstDash val="solid"/>
+                    </a:lnR>
+                    <a:lnT w="9525" cap="flat" cmpd="sng" algn="ctr">
+                      <a:solidFill>
+                        <a:srgbClr val="D9D9D9"/>
+                      </a:solidFill>
+                      <a:prstDash val="solid"/>
+                    </a:lnT>
+                    <a:lnB w="9525" cap="flat" cmpd="sng" algn="ctr">
+                      <a:solidFill>
+                        <a:srgbClr val="D9D9D9"/>
+                      </a:solidFill>
+                      <a:prstDash val="solid"/>
+                    </a:lnB>
+                    <a:solidFill>
+                      <a:srgbClr val="F2F2F2"/>
+                    </a:solidFill>
+                  </a:tcPr>
+                </a:tc>
+                <a:tc>
+                  <a:txBody>
+                    <a:bodyPr/>
+                    <a:lstStyle/>
+                    <a:p>
+                      <a:pPr algn="r">
+                        <a:lnSpc>
+                          <a:spcPct val="100000"/>
+                        </a:lnSpc>
+                      </a:pPr>
+                      <a:r>
+                        <a:rPr sz="760" b="1">
+                          <a:solidFill>
+                            <a:srgbClr val="1A1A1A"/>
+                          </a:solidFill>
+                          <a:latin typeface="Arial"/>
+                          <a:ea typeface="微软雅黑"/>
+                          <a:cs typeface="Arial"/>
+                        </a:rPr>
+                        <a:t>箱数</a:t>
+                      </a:r>
+                    </a:p>
+                  </a:txBody>
+                  <a:tcPr marL="36576" marR="36576" marT="7315" marB="7315" anchor="ctr">
+                    <a:lnL w="9525" cap="flat" cmpd="sng" algn="ctr">
+                      <a:solidFill>
+                        <a:srgbClr val="D9D9D9"/>
+                      </a:solidFill>
+                      <a:prstDash val="solid"/>
+                    </a:lnL>
+                    <a:lnR w="9525" cap="flat" cmpd="sng" algn="ctr">
+                      <a:solidFill>
+                        <a:srgbClr val="D9D9D9"/>
+                      </a:solidFill>
+                      <a:prstDash val="solid"/>
+                    </a:lnR>
+                    <a:lnT w="9525" cap="flat" cmpd="sng" algn="ctr">
+                      <a:solidFill>
+                        <a:srgbClr val="D9D9D9"/>
+                      </a:solidFill>
+                      <a:prstDash val="solid"/>
+                    </a:lnT>
+                    <a:lnB w="9525" cap="flat" cmpd="sng" algn="ctr">
+                      <a:solidFill>
+                        <a:srgbClr val="D9D9D9"/>
+                      </a:solidFill>
+                      <a:prstDash val="solid"/>
+                    </a:lnB>
+                    <a:solidFill>
+                      <a:srgbClr val="F2F2F2"/>
+                    </a:solidFill>
+                  </a:tcPr>
+                </a:tc>
+                <a:tc>
+                  <a:txBody>
+                    <a:bodyPr/>
+                    <a:lstStyle/>
+                    <a:p>
+                      <a:pPr algn="r">
+                        <a:lnSpc>
+                          <a:spcPct val="100000"/>
+                        </a:lnSpc>
+                      </a:pPr>
+                      <a:r>
+                        <a:rPr sz="760" b="1">
+                          <a:solidFill>
+                            <a:srgbClr val="1A1A1A"/>
+                          </a:solidFill>
+                          <a:latin typeface="Arial"/>
+                          <a:ea typeface="微软雅黑"/>
+                          <a:cs typeface="Arial"/>
+                        </a:rPr>
+                        <a:t>readStatus
+=True</a:t>
+                      </a:r>
+                    </a:p>
+                  </a:txBody>
+                  <a:tcPr marL="36576" marR="36576" marT="7315" marB="7315" anchor="ctr">
+                    <a:lnL w="9525" cap="flat" cmpd="sng" algn="ctr">
+                      <a:solidFill>
+                        <a:srgbClr val="D9D9D9"/>
+                      </a:solidFill>
+                      <a:prstDash val="solid"/>
+                    </a:lnL>
+                    <a:lnR w="9525" cap="flat" cmpd="sng" algn="ctr">
+                      <a:solidFill>
+                        <a:srgbClr val="D9D9D9"/>
+                      </a:solidFill>
+                      <a:prstDash val="solid"/>
+                    </a:lnR>
+                    <a:lnT w="9525" cap="flat" cmpd="sng" algn="ctr">
+                      <a:solidFill>
+                        <a:srgbClr val="D9D9D9"/>
+                      </a:solidFill>
+                      <a:prstDash val="solid"/>
+                    </a:lnT>
+                    <a:lnB w="9525" cap="flat" cmpd="sng" algn="ctr">
+                      <a:solidFill>
+                        <a:srgbClr val="D9D9D9"/>
+                      </a:solidFill>
+                      <a:prstDash val="solid"/>
+                    </a:lnB>
+                    <a:solidFill>
+                      <a:srgbClr val="F2F2F2"/>
+                    </a:solidFill>
+                  </a:tcPr>
+                </a:tc>
+                <a:tc>
+                  <a:txBody>
+                    <a:bodyPr/>
+                    <a:lstStyle/>
+                    <a:p>
+                      <a:pPr algn="r">
+                        <a:lnSpc>
+                          <a:spcPct val="100000"/>
+                        </a:lnSpc>
+                      </a:pPr>
+                      <a:r>
+                        <a:rPr sz="760" b="1">
+                          <a:solidFill>
+                            <a:srgbClr val="1A1A1A"/>
+                          </a:solidFill>
+                          <a:latin typeface="Arial"/>
+                          <a:ea typeface="微软雅黑"/>
+                          <a:cs typeface="Arial"/>
+                        </a:rPr>
+                        <a:t>≤5</a:t>
+                      </a:r>
+                    </a:p>
+                  </a:txBody>
+                  <a:tcPr marL="36576" marR="36576" marT="7315" marB="7315" anchor="ctr">
+                    <a:lnL w="9525" cap="flat" cmpd="sng" algn="ctr">
+                      <a:solidFill>
+                        <a:srgbClr val="D9D9D9"/>
+                      </a:solidFill>
+                      <a:prstDash val="solid"/>
+                    </a:lnL>
+                    <a:lnR w="9525" cap="flat" cmpd="sng" algn="ctr">
+                      <a:solidFill>
+                        <a:srgbClr val="D9D9D9"/>
+                      </a:solidFill>
+                      <a:prstDash val="solid"/>
+                    </a:lnR>
+                    <a:lnT w="9525" cap="flat" cmpd="sng" algn="ctr">
+                      <a:solidFill>
+                        <a:srgbClr val="D9D9D9"/>
+                      </a:solidFill>
+                      <a:prstDash val="solid"/>
+                    </a:lnT>
+                    <a:lnB w="9525" cap="flat" cmpd="sng" algn="ctr">
+                      <a:solidFill>
+                        <a:srgbClr val="D9D9D9"/>
+                      </a:solidFill>
+                      <a:prstDash val="solid"/>
+                    </a:lnB>
+                    <a:solidFill>
+                      <a:srgbClr val="F2F2F2"/>
+                    </a:solidFill>
+                  </a:tcPr>
+                </a:tc>
+                <a:tc>
+                  <a:txBody>
+                    <a:bodyPr/>
+                    <a:lstStyle/>
+                    <a:p>
+                      <a:pPr algn="r">
+                        <a:lnSpc>
+                          <a:spcPct val="100000"/>
+                        </a:lnSpc>
+                      </a:pPr>
+                      <a:r>
+                        <a:rPr sz="760" b="1">
+                          <a:solidFill>
+                            <a:srgbClr val="1A1A1A"/>
+                          </a:solidFill>
+                          <a:latin typeface="Arial"/>
+                          <a:ea typeface="微软雅黑"/>
+                          <a:cs typeface="Arial"/>
+                        </a:rPr>
+                        <a:t>≤4</a:t>
+                      </a:r>
+                    </a:p>
+                  </a:txBody>
+                  <a:tcPr marL="36576" marR="36576" marT="7315" marB="7315" anchor="ctr">
+                    <a:lnL w="9525" cap="flat" cmpd="sng" algn="ctr">
+                      <a:solidFill>
+                        <a:srgbClr val="D9D9D9"/>
+                      </a:solidFill>
+                      <a:prstDash val="solid"/>
+                    </a:lnL>
+                    <a:lnR w="9525" cap="flat" cmpd="sng" algn="ctr">
+                      <a:solidFill>
+                        <a:srgbClr val="D9D9D9"/>
+                      </a:solidFill>
+                      <a:prstDash val="solid"/>
+                    </a:lnR>
+                    <a:lnT w="9525" cap="flat" cmpd="sng" algn="ctr">
+                      <a:solidFill>
+                        <a:srgbClr val="D9D9D9"/>
+                      </a:solidFill>
+                      <a:prstDash val="solid"/>
+                    </a:lnT>
+                    <a:lnB w="9525" cap="flat" cmpd="sng" algn="ctr">
+                      <a:solidFill>
+                        <a:srgbClr val="D9D9D9"/>
+                      </a:solidFill>
+                      <a:prstDash val="solid"/>
+                    </a:lnB>
+                    <a:solidFill>
+                      <a:srgbClr val="F2F2F2"/>
+                    </a:solidFill>
+                  </a:tcPr>
+                </a:tc>
+                <a:tc>
+                  <a:txBody>
+                    <a:bodyPr/>
+                    <a:lstStyle/>
+                    <a:p>
+                      <a:pPr algn="r">
+                        <a:lnSpc>
+                          <a:spcPct val="100000"/>
+                        </a:lnSpc>
+                      </a:pPr>
+                      <a:r>
+                        <a:rPr sz="760" b="1">
+                          <a:solidFill>
+                            <a:srgbClr val="1A1A1A"/>
+                          </a:solidFill>
+                          <a:latin typeface="Arial"/>
+                          <a:ea typeface="微软雅黑"/>
+                          <a:cs typeface="Arial"/>
+                        </a:rPr>
+                        <a:t>≤3</a:t>
+                      </a:r>
+                    </a:p>
+                  </a:txBody>
+                  <a:tcPr marL="36576" marR="36576" marT="7315" marB="7315" anchor="ctr">
+                    <a:lnL w="9525" cap="flat" cmpd="sng" algn="ctr">
+                      <a:solidFill>
+                        <a:srgbClr val="D9D9D9"/>
+                      </a:solidFill>
+                      <a:prstDash val="solid"/>
+                    </a:lnL>
+                    <a:lnR w="9525" cap="flat" cmpd="sng" algn="ctr">
+                      <a:solidFill>
+                        <a:srgbClr val="D9D9D9"/>
+                      </a:solidFill>
+                      <a:prstDash val="solid"/>
+                    </a:lnR>
+                    <a:lnT w="9525" cap="flat" cmpd="sng" algn="ctr">
+                      <a:solidFill>
+                        <a:srgbClr val="D9D9D9"/>
+                      </a:solidFill>
+                      <a:prstDash val="solid"/>
+                    </a:lnT>
+                    <a:lnB w="9525" cap="flat" cmpd="sng" algn="ctr">
+                      <a:solidFill>
+                        <a:srgbClr val="D9D9D9"/>
+                      </a:solidFill>
+                      <a:prstDash val="solid"/>
+                    </a:lnB>
+                    <a:solidFill>
+                      <a:srgbClr val="F2F2F2"/>
+                    </a:solidFill>
+                  </a:tcPr>
+                </a:tc>
+                <a:tc>
+                  <a:txBody>
+                    <a:bodyPr/>
+                    <a:lstStyle/>
+                    <a:p>
+                      <a:pPr algn="r">
+                        <a:lnSpc>
+                          <a:spcPct val="100000"/>
+                        </a:lnSpc>
+                      </a:pPr>
+                      <a:r>
+                        <a:rPr sz="760" b="1">
+                          <a:solidFill>
+                            <a:srgbClr val="1A1A1A"/>
+                          </a:solidFill>
+                          <a:latin typeface="Arial"/>
+                          <a:ea typeface="微软雅黑"/>
+                          <a:cs typeface="Arial"/>
+                        </a:rPr>
+                        <a:t>≤2</a:t>
+                      </a:r>
+                    </a:p>
+                  </a:txBody>
+                  <a:tcPr marL="36576" marR="36576" marT="7315" marB="7315" anchor="ctr">
+                    <a:lnL w="9525" cap="flat" cmpd="sng" algn="ctr">
+                      <a:solidFill>
+                        <a:srgbClr val="D9D9D9"/>
+                      </a:solidFill>
+                      <a:prstDash val="solid"/>
+                    </a:lnL>
+                    <a:lnR w="9525" cap="flat" cmpd="sng" algn="ctr">
+                      <a:solidFill>
+                        <a:srgbClr val="D9D9D9"/>
+                      </a:solidFill>
+                      <a:prstDash val="solid"/>
+                    </a:lnR>
+                    <a:lnT w="9525" cap="flat" cmpd="sng" algn="ctr">
+                      <a:solidFill>
+                        <a:srgbClr val="D9D9D9"/>
+                      </a:solidFill>
+                      <a:prstDash val="solid"/>
+                    </a:lnT>
+                    <a:lnB w="9525" cap="flat" cmpd="sng" algn="ctr">
+                      <a:solidFill>
+                        <a:srgbClr val="D9D9D9"/>
+                      </a:solidFill>
+                      <a:prstDash val="solid"/>
+                    </a:lnB>
+                    <a:solidFill>
+                      <a:srgbClr val="F2F2F2"/>
+                    </a:solidFill>
+                  </a:tcPr>
+                </a:tc>
+                <a:tc>
+                  <a:txBody>
+                    <a:bodyPr/>
+                    <a:lstStyle/>
+                    <a:p>
+                      <a:pPr algn="r">
+                        <a:lnSpc>
+                          <a:spcPct val="100000"/>
+                        </a:lnSpc>
+                      </a:pPr>
+                      <a:r>
+                        <a:rPr sz="760" b="1">
+                          <a:solidFill>
+                            <a:srgbClr val="1A1A1A"/>
+                          </a:solidFill>
+                          <a:latin typeface="Arial"/>
+                          <a:ea typeface="微软雅黑"/>
+                          <a:cs typeface="Arial"/>
+                        </a:rPr>
+                        <a:t>≤1</a:t>
+                      </a:r>
+                    </a:p>
+                  </a:txBody>
+                  <a:tcPr marL="36576" marR="36576" marT="7315" marB="7315" anchor="ctr">
+                    <a:lnL w="9525" cap="flat" cmpd="sng" algn="ctr">
+                      <a:solidFill>
+                        <a:srgbClr val="D9D9D9"/>
+                      </a:solidFill>
+                      <a:prstDash val="solid"/>
+                    </a:lnL>
+                    <a:lnR w="9525" cap="flat" cmpd="sng" algn="ctr">
+                      <a:solidFill>
+                        <a:srgbClr val="D9D9D9"/>
+                      </a:solidFill>
+                      <a:prstDash val="solid"/>
+                    </a:lnR>
+                    <a:lnT w="9525" cap="flat" cmpd="sng" algn="ctr">
+                      <a:solidFill>
+                        <a:srgbClr val="D9D9D9"/>
+                      </a:solidFill>
+                      <a:prstDash val="solid"/>
+                    </a:lnT>
+                    <a:lnB w="9525" cap="flat" cmpd="sng" algn="ctr">
+                      <a:solidFill>
+                        <a:srgbClr val="D9D9D9"/>
+                      </a:solidFill>
+                      <a:prstDash val="solid"/>
+                    </a:lnB>
+                    <a:solidFill>
+                      <a:srgbClr val="F2F2F2"/>
+                    </a:solidFill>
+                  </a:tcPr>
+                </a:tc>
+                <a:tc>
+                  <a:txBody>
+                    <a:bodyPr/>
+                    <a:lstStyle/>
+                    <a:p>
+                      <a:pPr algn="r">
+                        <a:lnSpc>
+                          <a:spcPct val="100000"/>
+                        </a:lnSpc>
+                      </a:pPr>
+                      <a:r>
+                        <a:rPr sz="760" b="1">
+                          <a:solidFill>
+                            <a:srgbClr val="1A1A1A"/>
+                          </a:solidFill>
+                          <a:latin typeface="Arial"/>
+                          <a:ea typeface="微软雅黑"/>
+                          <a:cs typeface="Arial"/>
+                        </a:rPr>
+                        <a:t>读全 6 个</a:t>
+                      </a:r>
+                    </a:p>
+                  </a:txBody>
+                  <a:tcPr marL="36576" marR="36576" marT="7315" marB="7315" anchor="ctr">
+                    <a:lnL w="9525" cap="flat" cmpd="sng" algn="ctr">
+                      <a:solidFill>
+                        <a:srgbClr val="D9D9D9"/>
+                      </a:solidFill>
+                      <a:prstDash val="solid"/>
+                    </a:lnL>
+                    <a:lnR w="9525" cap="flat" cmpd="sng" algn="ctr">
+                      <a:solidFill>
+                        <a:srgbClr val="D9D9D9"/>
+                      </a:solidFill>
+                      <a:prstDash val="solid"/>
+                    </a:lnR>
+                    <a:lnT w="9525" cap="flat" cmpd="sng" algn="ctr">
+                      <a:solidFill>
+                        <a:srgbClr val="D9D9D9"/>
+                      </a:solidFill>
+                      <a:prstDash val="solid"/>
+                    </a:lnT>
+                    <a:lnB w="9525" cap="flat" cmpd="sng" algn="ctr">
+                      <a:solidFill>
+                        <a:srgbClr val="D9D9D9"/>
+                      </a:solidFill>
+                      <a:prstDash val="solid"/>
+                    </a:lnB>
+                    <a:solidFill>
+                      <a:srgbClr val="F2F2F2"/>
+                    </a:solidFill>
+                  </a:tcPr>
+                </a:tc>
+              </a:tr>
+              <a:tr h="347472">
+                <a:tc>
+                  <a:txBody>
+                    <a:bodyPr/>
+                    <a:lstStyle/>
+                    <a:p>
+                      <a:pPr algn="l">
+                        <a:lnSpc>
+                          <a:spcPct val="100000"/>
+                        </a:lnSpc>
+                      </a:pPr>
+                      <a:r>
+                        <a:rPr sz="840" b="0">
+                          <a:solidFill>
+                            <a:srgbClr val="1A1A1A"/>
+                          </a:solidFill>
+                          <a:latin typeface="Arial"/>
+                          <a:ea typeface="微软雅黑"/>
+                          <a:cs typeface="Arial"/>
+                        </a:rPr>
+                        <a:t>AX7907</a:t>
+                      </a:r>
+                    </a:p>
+                  </a:txBody>
+                  <a:tcPr marL="36576" marR="36576" marT="7315" marB="7315" anchor="ctr">
+                    <a:lnL w="9525" cap="flat" cmpd="sng" algn="ctr">
+                      <a:solidFill>
+                        <a:srgbClr val="D9D9D9"/>
+                      </a:solidFill>
+                      <a:prstDash val="solid"/>
+                    </a:lnL>
+                    <a:lnR w="9525" cap="flat" cmpd="sng" algn="ctr">
+                      <a:solidFill>
+                        <a:srgbClr val="D9D9D9"/>
+                      </a:solidFill>
+                      <a:prstDash val="solid"/>
+                    </a:lnR>
+                    <a:lnT w="9525" cap="flat" cmpd="sng" algn="ctr">
+                      <a:solidFill>
+                        <a:srgbClr val="D9D9D9"/>
+                      </a:solidFill>
+                      <a:prstDash val="solid"/>
+                    </a:lnT>
+                    <a:lnB w="9525" cap="flat" cmpd="sng" algn="ctr">
+                      <a:solidFill>
+                        <a:srgbClr val="D9D9D9"/>
+                      </a:solidFill>
+                      <a:prstDash val="solid"/>
+                    </a:lnB>
+                    <a:solidFill>
+                      <a:srgbClr val="FFFFFF"/>
+                    </a:solidFill>
+                  </a:tcPr>
+                </a:tc>
+                <a:tc>
+                  <a:txBody>
+                    <a:bodyPr/>
+                    <a:lstStyle/>
+                    <a:p>
+                      <a:pPr algn="l">
+                        <a:lnSpc>
+                          <a:spcPct val="100000"/>
+                        </a:lnSpc>
+                      </a:pPr>
+                      <a:r>
+                        <a:rPr sz="840" b="0">
+                          <a:solidFill>
+                            <a:srgbClr val="1A1A1A"/>
+                          </a:solidFill>
+                          <a:latin typeface="Arial"/>
+                          <a:ea typeface="微软雅黑"/>
+                          <a:cs typeface="Arial"/>
+                        </a:rPr>
+                        <a:t>Prosecco/Marsala</a:t>
+                      </a:r>
+                    </a:p>
+                  </a:txBody>
+                  <a:tcPr marL="36576" marR="36576" marT="7315" marB="7315" anchor="ctr">
+                    <a:lnL w="9525" cap="flat" cmpd="sng" algn="ctr">
+                      <a:solidFill>
+                        <a:srgbClr val="D9D9D9"/>
+                      </a:solidFill>
+                      <a:prstDash val="solid"/>
+                    </a:lnL>
+                    <a:lnR w="9525" cap="flat" cmpd="sng" algn="ctr">
+                      <a:solidFill>
+                        <a:srgbClr val="D9D9D9"/>
+                      </a:solidFill>
+                      <a:prstDash val="solid"/>
+                    </a:lnR>
+                    <a:lnT w="9525" cap="flat" cmpd="sng" algn="ctr">
+                      <a:solidFill>
+                        <a:srgbClr val="D9D9D9"/>
+                      </a:solidFill>
+                      <a:prstDash val="solid"/>
+                    </a:lnT>
+                    <a:lnB w="9525" cap="flat" cmpd="sng" algn="ctr">
+                      <a:solidFill>
+                        <a:srgbClr val="D9D9D9"/>
+                      </a:solidFill>
+                      <a:prstDash val="solid"/>
+                    </a:lnB>
+                    <a:solidFill>
+                      <a:srgbClr val="FFFFFF"/>
+                    </a:solidFill>
+                  </a:tcPr>
+                </a:tc>
+                <a:tc>
+                  <a:txBody>
+                    <a:bodyPr/>
+                    <a:lstStyle/>
+                    <a:p>
+                      <a:pPr algn="l">
+                        <a:lnSpc>
+                          <a:spcPct val="100000"/>
+                        </a:lnSpc>
+                      </a:pPr>
+                      <a:r>
+                        <a:rPr sz="840" b="0">
+                          <a:solidFill>
+                            <a:srgbClr val="1A1A1A"/>
+                          </a:solidFill>
+                          <a:latin typeface="Arial"/>
+                          <a:ea typeface="微软雅黑"/>
+                          <a:cs typeface="Arial"/>
+                        </a:rPr>
+                        <a:t>6 inch e-reader</a:t>
+                      </a:r>
+                    </a:p>
+                  </a:txBody>
+                  <a:tcPr marL="36576" marR="36576" marT="7315" marB="7315" anchor="ctr">
+                    <a:lnL w="9525" cap="flat" cmpd="sng" algn="ctr">
+                      <a:solidFill>
+                        <a:srgbClr val="D9D9D9"/>
+                      </a:solidFill>
+                      <a:prstDash val="solid"/>
+                    </a:lnL>
+                    <a:lnR w="9525" cap="flat" cmpd="sng" algn="ctr">
+                      <a:solidFill>
+                        <a:srgbClr val="D9D9D9"/>
+                      </a:solidFill>
+                      <a:prstDash val="solid"/>
+                    </a:lnR>
+                    <a:lnT w="9525" cap="flat" cmpd="sng" algn="ctr">
+                      <a:solidFill>
+                        <a:srgbClr val="D9D9D9"/>
+                      </a:solidFill>
+                      <a:prstDash val="solid"/>
+                    </a:lnT>
+                    <a:lnB w="9525" cap="flat" cmpd="sng" algn="ctr">
+                      <a:solidFill>
+                        <a:srgbClr val="D9D9D9"/>
+                      </a:solidFill>
+                      <a:prstDash val="solid"/>
+                    </a:lnB>
+                    <a:solidFill>
+                      <a:srgbClr val="FFFFFF"/>
+                    </a:solidFill>
+                  </a:tcPr>
+                </a:tc>
+                <a:tc>
+                  <a:txBody>
+                    <a:bodyPr/>
+                    <a:lstStyle/>
+                    <a:p>
+                      <a:pPr algn="ctr">
+                        <a:lnSpc>
+                          <a:spcPct val="100000"/>
+                        </a:lnSpc>
+                      </a:pPr>
+                      <a:r>
+                        <a:rPr sz="840" b="0">
+                          <a:solidFill>
+                            <a:srgbClr val="1A1A1A"/>
+                          </a:solidFill>
+                          <a:latin typeface="Arial"/>
+                          <a:ea typeface="微软雅黑"/>
+                          <a:cs typeface="Arial"/>
+                        </a:rPr>
+                        <a:t>未标注</a:t>
+                      </a:r>
+                    </a:p>
+                  </a:txBody>
+                  <a:tcPr marL="36576" marR="36576" marT="7315" marB="7315" anchor="ctr">
+                    <a:lnL w="9525" cap="flat" cmpd="sng" algn="ctr">
+                      <a:solidFill>
+                        <a:srgbClr val="D9D9D9"/>
+                      </a:solidFill>
+                      <a:prstDash val="solid"/>
+                    </a:lnL>
+                    <a:lnR w="9525" cap="flat" cmpd="sng" algn="ctr">
+                      <a:solidFill>
+                        <a:srgbClr val="D9D9D9"/>
+                      </a:solidFill>
+                      <a:prstDash val="solid"/>
+                    </a:lnR>
+                    <a:lnT w="9525" cap="flat" cmpd="sng" algn="ctr">
+                      <a:solidFill>
+                        <a:srgbClr val="D9D9D9"/>
+                      </a:solidFill>
+                      <a:prstDash val="solid"/>
+                    </a:lnT>
+                    <a:lnB w="9525" cap="flat" cmpd="sng" algn="ctr">
+                      <a:solidFill>
+                        <a:srgbClr val="D9D9D9"/>
+                      </a:solidFill>
+                      <a:prstDash val="solid"/>
+                    </a:lnB>
+                    <a:solidFill>
+                      <a:srgbClr val="FFFFFF"/>
+                    </a:solidFill>
+                  </a:tcPr>
+                </a:tc>
+                <a:tc>
+                  <a:txBody>
+                    <a:bodyPr/>
+                    <a:lstStyle/>
+                    <a:p>
+                      <a:pPr algn="r">
+                        <a:lnSpc>
+                          <a:spcPct val="100000"/>
+                        </a:lnSpc>
+                      </a:pPr>
+                      <a:r>
+                        <a:rPr sz="840" b="0">
+                          <a:solidFill>
+                            <a:srgbClr val="1A1A1A"/>
+                          </a:solidFill>
+                          <a:latin typeface="Arial"/>
+                          <a:ea typeface="微软雅黑"/>
+                          <a:cs typeface="Arial"/>
+                        </a:rPr>
+                        <a:t>54,810</a:t>
+                      </a:r>
+                    </a:p>
+                  </a:txBody>
+                  <a:tcPr marL="36576" marR="36576" marT="7315" marB="7315" anchor="ctr">
+                    <a:lnL w="9525" cap="flat" cmpd="sng" algn="ctr">
+                      <a:solidFill>
+                        <a:srgbClr val="D9D9D9"/>
+                      </a:solidFill>
+                      <a:prstDash val="solid"/>
+                    </a:lnL>
+                    <a:lnR w="9525" cap="flat" cmpd="sng" algn="ctr">
+                      <a:solidFill>
+                        <a:srgbClr val="D9D9D9"/>
+                      </a:solidFill>
+                      <a:prstDash val="solid"/>
+                    </a:lnR>
+                    <a:lnT w="9525" cap="flat" cmpd="sng" algn="ctr">
+                      <a:solidFill>
+                        <a:srgbClr val="D9D9D9"/>
+                      </a:solidFill>
+                      <a:prstDash val="solid"/>
+                    </a:lnT>
+                    <a:lnB w="9525" cap="flat" cmpd="sng" algn="ctr">
+                      <a:solidFill>
+                        <a:srgbClr val="D9D9D9"/>
+                      </a:solidFill>
+                      <a:prstDash val="solid"/>
+                    </a:lnB>
+                    <a:solidFill>
+                      <a:srgbClr val="FFFFFF"/>
+                    </a:solidFill>
+                  </a:tcPr>
+                </a:tc>
+                <a:tc>
+                  <a:txBody>
+                    <a:bodyPr/>
+                    <a:lstStyle/>
+                    <a:p>
+                      <a:pPr algn="r">
+                        <a:lnSpc>
+                          <a:spcPct val="100000"/>
+                        </a:lnSpc>
+                      </a:pPr>
+                      <a:r>
+                        <a:rPr sz="840" b="0">
+                          <a:solidFill>
+                            <a:srgbClr val="1A1A1A"/>
+                          </a:solidFill>
+                          <a:latin typeface="Arial"/>
+                          <a:ea typeface="微软雅黑"/>
+                          <a:cs typeface="Arial"/>
+                        </a:rPr>
+                        <a:t>9.4%</a:t>
+                      </a:r>
+                    </a:p>
+                  </a:txBody>
+                  <a:tcPr marL="36576" marR="36576" marT="7315" marB="7315" anchor="ctr">
+                    <a:lnL w="9525" cap="flat" cmpd="sng" algn="ctr">
+                      <a:solidFill>
+                        <a:srgbClr val="D9D9D9"/>
+                      </a:solidFill>
+                      <a:prstDash val="solid"/>
+                    </a:lnL>
+                    <a:lnR w="9525" cap="flat" cmpd="sng" algn="ctr">
+                      <a:solidFill>
+                        <a:srgbClr val="D9D9D9"/>
+                      </a:solidFill>
+                      <a:prstDash val="solid"/>
+                    </a:lnR>
+                    <a:lnT w="9525" cap="flat" cmpd="sng" algn="ctr">
+                      <a:solidFill>
+                        <a:srgbClr val="D9D9D9"/>
+                      </a:solidFill>
+                      <a:prstDash val="solid"/>
+                    </a:lnT>
+                    <a:lnB w="9525" cap="flat" cmpd="sng" algn="ctr">
+                      <a:solidFill>
+                        <a:srgbClr val="D9D9D9"/>
+                      </a:solidFill>
+                      <a:prstDash val="solid"/>
+                    </a:lnB>
+                    <a:solidFill>
+                      <a:srgbClr val="FFFFFF"/>
+                    </a:solidFill>
+                  </a:tcPr>
+                </a:tc>
+                <a:tc>
+                  <a:txBody>
+                    <a:bodyPr/>
+                    <a:lstStyle/>
+                    <a:p>
+                      <a:pPr algn="r">
+                        <a:lnSpc>
+                          <a:spcPct val="100000"/>
+                        </a:lnSpc>
+                      </a:pPr>
+                      <a:r>
+                        <a:rPr sz="840" b="0">
+                          <a:solidFill>
+                            <a:srgbClr val="1A1A1A"/>
+                          </a:solidFill>
+                          <a:latin typeface="Arial"/>
+                          <a:ea typeface="微软雅黑"/>
+                          <a:cs typeface="Arial"/>
+                        </a:rPr>
+                        <a:t>100.00%</a:t>
+                      </a:r>
+                    </a:p>
+                  </a:txBody>
+                  <a:tcPr marL="36576" marR="36576" marT="7315" marB="7315" anchor="ctr">
+                    <a:lnL w="9525" cap="flat" cmpd="sng" algn="ctr">
+                      <a:solidFill>
+                        <a:srgbClr val="D9D9D9"/>
+                      </a:solidFill>
+                      <a:prstDash val="solid"/>
+                    </a:lnL>
+                    <a:lnR w="9525" cap="flat" cmpd="sng" algn="ctr">
+                      <a:solidFill>
+                        <a:srgbClr val="D9D9D9"/>
+                      </a:solidFill>
+                      <a:prstDash val="solid"/>
+                    </a:lnR>
+                    <a:lnT w="9525" cap="flat" cmpd="sng" algn="ctr">
+                      <a:solidFill>
+                        <a:srgbClr val="D9D9D9"/>
+                      </a:solidFill>
+                      <a:prstDash val="solid"/>
+                    </a:lnT>
+                    <a:lnB w="9525" cap="flat" cmpd="sng" algn="ctr">
+                      <a:solidFill>
+                        <a:srgbClr val="D9D9D9"/>
+                      </a:solidFill>
+                      <a:prstDash val="solid"/>
+                    </a:lnB>
+                    <a:solidFill>
+                      <a:srgbClr val="FFFFFF"/>
+                    </a:solidFill>
+                  </a:tcPr>
+                </a:tc>
+                <a:tc>
+                  <a:txBody>
+                    <a:bodyPr/>
+                    <a:lstStyle/>
+                    <a:p>
+                      <a:pPr algn="r">
+                        <a:lnSpc>
+                          <a:spcPct val="100000"/>
+                        </a:lnSpc>
+                      </a:pPr>
+                      <a:r>
+                        <a:rPr sz="840" b="0">
+                          <a:solidFill>
+                            <a:srgbClr val="1A1A1A"/>
+                          </a:solidFill>
+                          <a:latin typeface="Arial"/>
+                          <a:ea typeface="微软雅黑"/>
+                          <a:cs typeface="Arial"/>
+                        </a:rPr>
+                        <a:t>100.00%</a:t>
+                      </a:r>
+                    </a:p>
+                  </a:txBody>
+                  <a:tcPr marL="36576" marR="36576" marT="7315" marB="7315" anchor="ctr">
+                    <a:lnL w="9525" cap="flat" cmpd="sng" algn="ctr">
+                      <a:solidFill>
+                        <a:srgbClr val="D9D9D9"/>
+                      </a:solidFill>
+                      <a:prstDash val="solid"/>
+                    </a:lnL>
+                    <a:lnR w="9525" cap="flat" cmpd="sng" algn="ctr">
+                      <a:solidFill>
+                        <a:srgbClr val="D9D9D9"/>
+                      </a:solidFill>
+                      <a:prstDash val="solid"/>
+                    </a:lnR>
+                    <a:lnT w="9525" cap="flat" cmpd="sng" algn="ctr">
+                      <a:solidFill>
+                        <a:srgbClr val="D9D9D9"/>
+                      </a:solidFill>
+                      <a:prstDash val="solid"/>
+                    </a:lnT>
+                    <a:lnB w="9525" cap="flat" cmpd="sng" algn="ctr">
+                      <a:solidFill>
+                        <a:srgbClr val="D9D9D9"/>
+                      </a:solidFill>
+                      <a:prstDash val="solid"/>
+                    </a:lnB>
+                    <a:solidFill>
+                      <a:srgbClr val="FFFFFF"/>
+                    </a:solidFill>
+                  </a:tcPr>
+                </a:tc>
+                <a:tc>
+                  <a:txBody>
+                    <a:bodyPr/>
+                    <a:lstStyle/>
+                    <a:p>
+                      <a:pPr algn="r">
+                        <a:lnSpc>
+                          <a:spcPct val="100000"/>
+                        </a:lnSpc>
+                      </a:pPr>
+                      <a:r>
+                        <a:rPr sz="840" b="0">
+                          <a:solidFill>
+                            <a:srgbClr val="1A1A1A"/>
+                          </a:solidFill>
+                          <a:latin typeface="Arial"/>
+                          <a:ea typeface="微软雅黑"/>
+                          <a:cs typeface="Arial"/>
+                        </a:rPr>
+                        <a:t>100.00%</a:t>
+                      </a:r>
+                    </a:p>
+                  </a:txBody>
+                  <a:tcPr marL="36576" marR="36576" marT="7315" marB="7315" anchor="ctr">
+                    <a:lnL w="9525" cap="flat" cmpd="sng" algn="ctr">
+                      <a:solidFill>
+                        <a:srgbClr val="D9D9D9"/>
+                      </a:solidFill>
+                      <a:prstDash val="solid"/>
+                    </a:lnL>
+                    <a:lnR w="9525" cap="flat" cmpd="sng" algn="ctr">
+                      <a:solidFill>
+                        <a:srgbClr val="D9D9D9"/>
+                      </a:solidFill>
+                      <a:prstDash val="solid"/>
+                    </a:lnR>
+                    <a:lnT w="9525" cap="flat" cmpd="sng" algn="ctr">
+                      <a:solidFill>
+                        <a:srgbClr val="D9D9D9"/>
+                      </a:solidFill>
+                      <a:prstDash val="solid"/>
+                    </a:lnT>
+                    <a:lnB w="9525" cap="flat" cmpd="sng" algn="ctr">
+                      <a:solidFill>
+                        <a:srgbClr val="D9D9D9"/>
+                      </a:solidFill>
+                      <a:prstDash val="solid"/>
+                    </a:lnB>
+                    <a:solidFill>
+                      <a:srgbClr val="FFFFFF"/>
+                    </a:solidFill>
+                  </a:tcPr>
+                </a:tc>
+                <a:tc>
+                  <a:txBody>
+                    <a:bodyPr/>
+                    <a:lstStyle/>
+                    <a:p>
+                      <a:pPr algn="r">
+                        <a:lnSpc>
+                          <a:spcPct val="100000"/>
+                        </a:lnSpc>
+                      </a:pPr>
+                      <a:r>
+                        <a:rPr sz="840" b="0">
+                          <a:solidFill>
+                            <a:srgbClr val="1A1A1A"/>
+                          </a:solidFill>
+                          <a:latin typeface="Arial"/>
+                          <a:ea typeface="微软雅黑"/>
+                          <a:cs typeface="Arial"/>
+                        </a:rPr>
+                        <a:t>99.99%</a:t>
+                      </a:r>
+                    </a:p>
+                  </a:txBody>
+                  <a:tcPr marL="36576" marR="36576" marT="7315" marB="7315" anchor="ctr">
+                    <a:lnL w="9525" cap="flat" cmpd="sng" algn="ctr">
+                      <a:solidFill>
+                        <a:srgbClr val="D9D9D9"/>
+                      </a:solidFill>
+                      <a:prstDash val="solid"/>
+                    </a:lnL>
+                    <a:lnR w="9525" cap="flat" cmpd="sng" algn="ctr">
+                      <a:solidFill>
+                        <a:srgbClr val="D9D9D9"/>
+                      </a:solidFill>
+                      <a:prstDash val="solid"/>
+                    </a:lnR>
+                    <a:lnT w="9525" cap="flat" cmpd="sng" algn="ctr">
+                      <a:solidFill>
+                        <a:srgbClr val="D9D9D9"/>
+                      </a:solidFill>
+                      <a:prstDash val="solid"/>
+                    </a:lnT>
+                    <a:lnB w="9525" cap="flat" cmpd="sng" algn="ctr">
+                      <a:solidFill>
+                        <a:srgbClr val="D9D9D9"/>
+                      </a:solidFill>
+                      <a:prstDash val="solid"/>
+                    </a:lnB>
+                    <a:solidFill>
+                      <a:srgbClr val="FFFFFF"/>
+                    </a:solidFill>
+                  </a:tcPr>
+                </a:tc>
+                <a:tc>
+                  <a:txBody>
+                    <a:bodyPr/>
+                    <a:lstStyle/>
+                    <a:p>
+                      <a:pPr algn="r">
+                        <a:lnSpc>
+                          <a:spcPct val="100000"/>
+                        </a:lnSpc>
+                      </a:pPr>
+                      <a:r>
+                        <a:rPr sz="840" b="0">
+                          <a:solidFill>
+                            <a:srgbClr val="1A1A1A"/>
+                          </a:solidFill>
+                          <a:latin typeface="Arial"/>
+                          <a:ea typeface="微软雅黑"/>
+                          <a:cs typeface="Arial"/>
+                        </a:rPr>
+                        <a:t>99.94%</a:t>
+                      </a:r>
+                    </a:p>
+                  </a:txBody>
+                  <a:tcPr marL="36576" marR="36576" marT="7315" marB="7315" anchor="ctr">
+                    <a:lnL w="9525" cap="flat" cmpd="sng" algn="ctr">
+                      <a:solidFill>
+                        <a:srgbClr val="D9D9D9"/>
+                      </a:solidFill>
+                      <a:prstDash val="solid"/>
+                    </a:lnL>
+                    <a:lnR w="9525" cap="flat" cmpd="sng" algn="ctr">
+                      <a:solidFill>
+                        <a:srgbClr val="D9D9D9"/>
+                      </a:solidFill>
+                      <a:prstDash val="solid"/>
+                    </a:lnR>
+                    <a:lnT w="9525" cap="flat" cmpd="sng" algn="ctr">
+                      <a:solidFill>
+                        <a:srgbClr val="D9D9D9"/>
+                      </a:solidFill>
+                      <a:prstDash val="solid"/>
+                    </a:lnT>
+                    <a:lnB w="9525" cap="flat" cmpd="sng" algn="ctr">
+                      <a:solidFill>
+                        <a:srgbClr val="D9D9D9"/>
+                      </a:solidFill>
+                      <a:prstDash val="solid"/>
+                    </a:lnB>
+                    <a:solidFill>
+                      <a:srgbClr val="FFFFFF"/>
+                    </a:solidFill>
+                  </a:tcPr>
+                </a:tc>
+                <a:tc>
+                  <a:txBody>
+                    <a:bodyPr/>
+                    <a:lstStyle/>
+                    <a:p>
+                      <a:pPr algn="r">
+                        <a:lnSpc>
+                          <a:spcPct val="100000"/>
+                        </a:lnSpc>
+                      </a:pPr>
+                      <a:r>
+                        <a:rPr sz="840" b="0">
+                          <a:solidFill>
+                            <a:srgbClr val="1A1A1A"/>
+                          </a:solidFill>
+                          <a:latin typeface="Arial"/>
+                          <a:ea typeface="微软雅黑"/>
+                          <a:cs typeface="Arial"/>
+                        </a:rPr>
+                        <a:t>0.0%</a:t>
+                      </a:r>
+                    </a:p>
+                  </a:txBody>
+                  <a:tcPr marL="36576" marR="36576" marT="7315" marB="7315" anchor="ctr">
+                    <a:lnL w="9525" cap="flat" cmpd="sng" algn="ctr">
+                      <a:solidFill>
+                        <a:srgbClr val="D9D9D9"/>
+                      </a:solidFill>
+                      <a:prstDash val="solid"/>
+                    </a:lnL>
+                    <a:lnR w="9525" cap="flat" cmpd="sng" algn="ctr">
+                      <a:solidFill>
+                        <a:srgbClr val="D9D9D9"/>
+                      </a:solidFill>
+                      <a:prstDash val="solid"/>
+                    </a:lnR>
+                    <a:lnT w="9525" cap="flat" cmpd="sng" algn="ctr">
+                      <a:solidFill>
+                        <a:srgbClr val="D9D9D9"/>
+                      </a:solidFill>
+                      <a:prstDash val="solid"/>
+                    </a:lnT>
+                    <a:lnB w="9525" cap="flat" cmpd="sng" algn="ctr">
+                      <a:solidFill>
+                        <a:srgbClr val="D9D9D9"/>
+                      </a:solidFill>
+                      <a:prstDash val="solid"/>
+                    </a:lnB>
+                    <a:solidFill>
+                      <a:srgbClr val="FFFFFF"/>
+                    </a:solidFill>
+                  </a:tcPr>
+                </a:tc>
+              </a:tr>
+              <a:tr h="347472">
+                <a:tc>
+                  <a:txBody>
+                    <a:bodyPr/>
+                    <a:lstStyle/>
+                    <a:p>
+                      <a:pPr algn="l">
+                        <a:lnSpc>
+                          <a:spcPct val="100000"/>
+                        </a:lnSpc>
+                      </a:pPr>
+                      <a:r>
+                        <a:rPr sz="840" b="0">
+                          <a:solidFill>
+                            <a:srgbClr val="1A1A1A"/>
+                          </a:solidFill>
+                          <a:latin typeface="Arial"/>
+                          <a:ea typeface="微软雅黑"/>
+                          <a:cs typeface="Arial"/>
+                        </a:rPr>
+                        <a:t>AX8252</a:t>
+                      </a:r>
+                    </a:p>
+                  </a:txBody>
+                  <a:tcPr marL="36576" marR="36576" marT="7315" marB="7315" anchor="ctr">
+                    <a:lnL w="9525" cap="flat" cmpd="sng" algn="ctr">
+                      <a:solidFill>
+                        <a:srgbClr val="D9D9D9"/>
+                      </a:solidFill>
+                      <a:prstDash val="solid"/>
+                    </a:lnL>
+                    <a:lnR w="9525" cap="flat" cmpd="sng" algn="ctr">
+                      <a:solidFill>
+                        <a:srgbClr val="D9D9D9"/>
+                      </a:solidFill>
+                      <a:prstDash val="solid"/>
+                    </a:lnR>
+                    <a:lnT w="9525" cap="flat" cmpd="sng" algn="ctr">
+                      <a:solidFill>
+                        <a:srgbClr val="D9D9D9"/>
+                      </a:solidFill>
+                      <a:prstDash val="solid"/>
+                    </a:lnT>
+                    <a:lnB w="9525" cap="flat" cmpd="sng" algn="ctr">
+                      <a:solidFill>
+                        <a:srgbClr val="D9D9D9"/>
+                      </a:solidFill>
+                      <a:prstDash val="solid"/>
+                    </a:lnB>
+                    <a:solidFill>
+                      <a:srgbClr val="FFFFFF"/>
+                    </a:solidFill>
+                  </a:tcPr>
+                </a:tc>
+                <a:tc>
+                  <a:txBody>
+                    <a:bodyPr/>
+                    <a:lstStyle/>
+                    <a:p>
+                      <a:pPr algn="l">
+                        <a:lnSpc>
+                          <a:spcPct val="100000"/>
+                        </a:lnSpc>
+                      </a:pPr>
+                      <a:r>
+                        <a:rPr sz="840" b="0">
+                          <a:solidFill>
+                            <a:srgbClr val="1A1A1A"/>
+                          </a:solidFill>
+                          <a:latin typeface="Arial"/>
+                          <a:ea typeface="微软雅黑"/>
+                          <a:cs typeface="Arial"/>
+                        </a:rPr>
+                        <a:t>Amaro/Julep</a:t>
+                      </a:r>
+                    </a:p>
+                  </a:txBody>
+                  <a:tcPr marL="36576" marR="36576" marT="7315" marB="7315" anchor="ctr">
+                    <a:lnL w="9525" cap="flat" cmpd="sng" algn="ctr">
+                      <a:solidFill>
+                        <a:srgbClr val="D9D9D9"/>
+                      </a:solidFill>
+                      <a:prstDash val="solid"/>
+                    </a:lnL>
+                    <a:lnR w="9525" cap="flat" cmpd="sng" algn="ctr">
+                      <a:solidFill>
+                        <a:srgbClr val="D9D9D9"/>
+                      </a:solidFill>
+                      <a:prstDash val="solid"/>
+                    </a:lnR>
+                    <a:lnT w="9525" cap="flat" cmpd="sng" algn="ctr">
+                      <a:solidFill>
+                        <a:srgbClr val="D9D9D9"/>
+                      </a:solidFill>
+                      <a:prstDash val="solid"/>
+                    </a:lnT>
+                    <a:lnB w="9525" cap="flat" cmpd="sng" algn="ctr">
+                      <a:solidFill>
+                        <a:srgbClr val="D9D9D9"/>
+                      </a:solidFill>
+                      <a:prstDash val="solid"/>
+                    </a:lnB>
+                    <a:solidFill>
+                      <a:srgbClr val="FFFFFF"/>
+                    </a:solidFill>
+                  </a:tcPr>
+                </a:tc>
+                <a:tc>
+                  <a:txBody>
+                    <a:bodyPr/>
+                    <a:lstStyle/>
+                    <a:p>
+                      <a:pPr algn="l">
+                        <a:lnSpc>
+                          <a:spcPct val="100000"/>
+                        </a:lnSpc>
+                      </a:pPr>
+                      <a:r>
+                        <a:rPr sz="840" b="0">
+                          <a:solidFill>
+                            <a:srgbClr val="1A1A1A"/>
+                          </a:solidFill>
+                          <a:latin typeface="Arial"/>
+                          <a:ea typeface="微软雅黑"/>
+                          <a:cs typeface="Arial"/>
+                        </a:rPr>
+                        <a:t>7 inch e-reader</a:t>
+                      </a:r>
+                    </a:p>
+                  </a:txBody>
+                  <a:tcPr marL="36576" marR="36576" marT="7315" marB="7315" anchor="ctr">
+                    <a:lnL w="9525" cap="flat" cmpd="sng" algn="ctr">
+                      <a:solidFill>
+                        <a:srgbClr val="D9D9D9"/>
+                      </a:solidFill>
+                      <a:prstDash val="solid"/>
+                    </a:lnL>
+                    <a:lnR w="9525" cap="flat" cmpd="sng" algn="ctr">
+                      <a:solidFill>
+                        <a:srgbClr val="D9D9D9"/>
+                      </a:solidFill>
+                      <a:prstDash val="solid"/>
+                    </a:lnR>
+                    <a:lnT w="9525" cap="flat" cmpd="sng" algn="ctr">
+                      <a:solidFill>
+                        <a:srgbClr val="D9D9D9"/>
+                      </a:solidFill>
+                      <a:prstDash val="solid"/>
+                    </a:lnT>
+                    <a:lnB w="9525" cap="flat" cmpd="sng" algn="ctr">
+                      <a:solidFill>
+                        <a:srgbClr val="D9D9D9"/>
+                      </a:solidFill>
+                      <a:prstDash val="solid"/>
+                    </a:lnB>
+                    <a:solidFill>
+                      <a:srgbClr val="FFFFFF"/>
+                    </a:solidFill>
+                  </a:tcPr>
+                </a:tc>
+                <a:tc>
+                  <a:txBody>
+                    <a:bodyPr/>
+                    <a:lstStyle/>
+                    <a:p>
+                      <a:pPr algn="ctr">
+                        <a:lnSpc>
+                          <a:spcPct val="100000"/>
+                        </a:lnSpc>
+                      </a:pPr>
+                      <a:r>
+                        <a:rPr sz="840" b="0">
+                          <a:solidFill>
+                            <a:srgbClr val="1A1A1A"/>
+                          </a:solidFill>
+                          <a:latin typeface="Arial"/>
+                          <a:ea typeface="微软雅黑"/>
+                          <a:cs typeface="Arial"/>
+                        </a:rPr>
+                        <a:t>塑料</a:t>
+                      </a:r>
+                    </a:p>
+                  </a:txBody>
+                  <a:tcPr marL="36576" marR="36576" marT="7315" marB="7315" anchor="ctr">
+                    <a:lnL w="9525" cap="flat" cmpd="sng" algn="ctr">
+                      <a:solidFill>
+                        <a:srgbClr val="D9D9D9"/>
+                      </a:solidFill>
+                      <a:prstDash val="solid"/>
+                    </a:lnL>
+                    <a:lnR w="9525" cap="flat" cmpd="sng" algn="ctr">
+                      <a:solidFill>
+                        <a:srgbClr val="D9D9D9"/>
+                      </a:solidFill>
+                      <a:prstDash val="solid"/>
+                    </a:lnR>
+                    <a:lnT w="9525" cap="flat" cmpd="sng" algn="ctr">
+                      <a:solidFill>
+                        <a:srgbClr val="D9D9D9"/>
+                      </a:solidFill>
+                      <a:prstDash val="solid"/>
+                    </a:lnT>
+                    <a:lnB w="9525" cap="flat" cmpd="sng" algn="ctr">
+                      <a:solidFill>
+                        <a:srgbClr val="D9D9D9"/>
+                      </a:solidFill>
+                      <a:prstDash val="solid"/>
+                    </a:lnB>
+                    <a:solidFill>
+                      <a:srgbClr val="FFFFFF"/>
+                    </a:solidFill>
+                  </a:tcPr>
+                </a:tc>
+                <a:tc>
+                  <a:txBody>
+                    <a:bodyPr/>
+                    <a:lstStyle/>
+                    <a:p>
+                      <a:pPr algn="r">
+                        <a:lnSpc>
+                          <a:spcPct val="100000"/>
+                        </a:lnSpc>
+                      </a:pPr>
+                      <a:r>
+                        <a:rPr sz="840" b="0">
+                          <a:solidFill>
+                            <a:srgbClr val="1A1A1A"/>
+                          </a:solidFill>
+                          <a:latin typeface="Arial"/>
+                          <a:ea typeface="微软雅黑"/>
+                          <a:cs typeface="Arial"/>
+                        </a:rPr>
+                        <a:t>15,202</a:t>
+                      </a:r>
+                    </a:p>
+                  </a:txBody>
+                  <a:tcPr marL="36576" marR="36576" marT="7315" marB="7315" anchor="ctr">
+                    <a:lnL w="9525" cap="flat" cmpd="sng" algn="ctr">
+                      <a:solidFill>
+                        <a:srgbClr val="D9D9D9"/>
+                      </a:solidFill>
+                      <a:prstDash val="solid"/>
+                    </a:lnL>
+                    <a:lnR w="9525" cap="flat" cmpd="sng" algn="ctr">
+                      <a:solidFill>
+                        <a:srgbClr val="D9D9D9"/>
+                      </a:solidFill>
+                      <a:prstDash val="solid"/>
+                    </a:lnR>
+                    <a:lnT w="9525" cap="flat" cmpd="sng" algn="ctr">
+                      <a:solidFill>
+                        <a:srgbClr val="D9D9D9"/>
+                      </a:solidFill>
+                      <a:prstDash val="solid"/>
+                    </a:lnT>
+                    <a:lnB w="9525" cap="flat" cmpd="sng" algn="ctr">
+                      <a:solidFill>
+                        <a:srgbClr val="D9D9D9"/>
+                      </a:solidFill>
+                      <a:prstDash val="solid"/>
+                    </a:lnB>
+                    <a:solidFill>
+                      <a:srgbClr val="FFFFFF"/>
+                    </a:solidFill>
+                  </a:tcPr>
+                </a:tc>
+                <a:tc>
+                  <a:txBody>
+                    <a:bodyPr/>
+                    <a:lstStyle/>
+                    <a:p>
+                      <a:pPr algn="r">
+                        <a:lnSpc>
+                          <a:spcPct val="100000"/>
+                        </a:lnSpc>
+                      </a:pPr>
+                      <a:r>
+                        <a:rPr sz="840" b="0">
+                          <a:solidFill>
+                            <a:srgbClr val="1A1A1A"/>
+                          </a:solidFill>
+                          <a:latin typeface="Arial"/>
+                          <a:ea typeface="微软雅黑"/>
+                          <a:cs typeface="Arial"/>
+                        </a:rPr>
+                        <a:t>7.8%</a:t>
+                      </a:r>
+                    </a:p>
+                  </a:txBody>
+                  <a:tcPr marL="36576" marR="36576" marT="7315" marB="7315" anchor="ctr">
+                    <a:lnL w="9525" cap="flat" cmpd="sng" algn="ctr">
+                      <a:solidFill>
+                        <a:srgbClr val="D9D9D9"/>
+                      </a:solidFill>
+                      <a:prstDash val="solid"/>
+                    </a:lnL>
+                    <a:lnR w="9525" cap="flat" cmpd="sng" algn="ctr">
+                      <a:solidFill>
+                        <a:srgbClr val="D9D9D9"/>
+                      </a:solidFill>
+                      <a:prstDash val="solid"/>
+                    </a:lnR>
+                    <a:lnT w="9525" cap="flat" cmpd="sng" algn="ctr">
+                      <a:solidFill>
+                        <a:srgbClr val="D9D9D9"/>
+                      </a:solidFill>
+                      <a:prstDash val="solid"/>
+                    </a:lnT>
+                    <a:lnB w="9525" cap="flat" cmpd="sng" algn="ctr">
+                      <a:solidFill>
+                        <a:srgbClr val="D9D9D9"/>
+                      </a:solidFill>
+                      <a:prstDash val="solid"/>
+                    </a:lnB>
+                    <a:solidFill>
+                      <a:srgbClr val="FFFFFF"/>
+                    </a:solidFill>
+                  </a:tcPr>
+                </a:tc>
+                <a:tc>
+                  <a:txBody>
+                    <a:bodyPr/>
+                    <a:lstStyle/>
+                    <a:p>
+                      <a:pPr algn="r">
+                        <a:lnSpc>
+                          <a:spcPct val="100000"/>
+                        </a:lnSpc>
+                      </a:pPr>
+                      <a:r>
+                        <a:rPr sz="840" b="0">
+                          <a:solidFill>
+                            <a:srgbClr val="1A1A1A"/>
+                          </a:solidFill>
+                          <a:latin typeface="Arial"/>
+                          <a:ea typeface="微软雅黑"/>
+                          <a:cs typeface="Arial"/>
+                        </a:rPr>
+                        <a:t>99.99%</a:t>
+                      </a:r>
+                    </a:p>
+                  </a:txBody>
+                  <a:tcPr marL="36576" marR="36576" marT="7315" marB="7315" anchor="ctr">
+                    <a:lnL w="9525" cap="flat" cmpd="sng" algn="ctr">
+                      <a:solidFill>
+                        <a:srgbClr val="D9D9D9"/>
+                      </a:solidFill>
+                      <a:prstDash val="solid"/>
+                    </a:lnL>
+                    <a:lnR w="9525" cap="flat" cmpd="sng" algn="ctr">
+                      <a:solidFill>
+                        <a:srgbClr val="D9D9D9"/>
+                      </a:solidFill>
+                      <a:prstDash val="solid"/>
+                    </a:lnR>
+                    <a:lnT w="9525" cap="flat" cmpd="sng" algn="ctr">
+                      <a:solidFill>
+                        <a:srgbClr val="D9D9D9"/>
+                      </a:solidFill>
+                      <a:prstDash val="solid"/>
+                    </a:lnT>
+                    <a:lnB w="9525" cap="flat" cmpd="sng" algn="ctr">
+                      <a:solidFill>
+                        <a:srgbClr val="D9D9D9"/>
+                      </a:solidFill>
+                      <a:prstDash val="solid"/>
+                    </a:lnB>
+                    <a:solidFill>
+                      <a:srgbClr val="FFFFFF"/>
+                    </a:solidFill>
+                  </a:tcPr>
+                </a:tc>
+                <a:tc>
+                  <a:txBody>
+                    <a:bodyPr/>
+                    <a:lstStyle/>
+                    <a:p>
+                      <a:pPr algn="r">
+                        <a:lnSpc>
+                          <a:spcPct val="100000"/>
+                        </a:lnSpc>
+                      </a:pPr>
+                      <a:r>
+                        <a:rPr sz="840" b="0">
+                          <a:solidFill>
+                            <a:srgbClr val="1A1A1A"/>
+                          </a:solidFill>
+                          <a:latin typeface="Arial"/>
+                          <a:ea typeface="微软雅黑"/>
+                          <a:cs typeface="Arial"/>
+                        </a:rPr>
+                        <a:t>99.99%</a:t>
+                      </a:r>
+                    </a:p>
+                  </a:txBody>
+                  <a:tcPr marL="36576" marR="36576" marT="7315" marB="7315" anchor="ctr">
+                    <a:lnL w="9525" cap="flat" cmpd="sng" algn="ctr">
+                      <a:solidFill>
+                        <a:srgbClr val="D9D9D9"/>
+                      </a:solidFill>
+                      <a:prstDash val="solid"/>
+                    </a:lnL>
+                    <a:lnR w="9525" cap="flat" cmpd="sng" algn="ctr">
+                      <a:solidFill>
+                        <a:srgbClr val="D9D9D9"/>
+                      </a:solidFill>
+                      <a:prstDash val="solid"/>
+                    </a:lnR>
+                    <a:lnT w="9525" cap="flat" cmpd="sng" algn="ctr">
+                      <a:solidFill>
+                        <a:srgbClr val="D9D9D9"/>
+                      </a:solidFill>
+                      <a:prstDash val="solid"/>
+                    </a:lnT>
+                    <a:lnB w="9525" cap="flat" cmpd="sng" algn="ctr">
+                      <a:solidFill>
+                        <a:srgbClr val="D9D9D9"/>
+                      </a:solidFill>
+                      <a:prstDash val="solid"/>
+                    </a:lnB>
+                    <a:solidFill>
+                      <a:srgbClr val="FFFFFF"/>
+                    </a:solidFill>
+                  </a:tcPr>
+                </a:tc>
+                <a:tc>
+                  <a:txBody>
+                    <a:bodyPr/>
+                    <a:lstStyle/>
+                    <a:p>
+                      <a:pPr algn="r">
+                        <a:lnSpc>
+                          <a:spcPct val="100000"/>
+                        </a:lnSpc>
+                      </a:pPr>
+                      <a:r>
+                        <a:rPr sz="840" b="0">
+                          <a:solidFill>
+                            <a:srgbClr val="1A1A1A"/>
+                          </a:solidFill>
+                          <a:latin typeface="Arial"/>
+                          <a:ea typeface="微软雅黑"/>
+                          <a:cs typeface="Arial"/>
+                        </a:rPr>
+                        <a:t>99.99%</a:t>
+                      </a:r>
+                    </a:p>
+                  </a:txBody>
+                  <a:tcPr marL="36576" marR="36576" marT="7315" marB="7315" anchor="ctr">
+                    <a:lnL w="9525" cap="flat" cmpd="sng" algn="ctr">
+                      <a:solidFill>
+                        <a:srgbClr val="D9D9D9"/>
+                      </a:solidFill>
+                      <a:prstDash val="solid"/>
+                    </a:lnL>
+                    <a:lnR w="9525" cap="flat" cmpd="sng" algn="ctr">
+                      <a:solidFill>
+                        <a:srgbClr val="D9D9D9"/>
+                      </a:solidFill>
+                      <a:prstDash val="solid"/>
+                    </a:lnR>
+                    <a:lnT w="9525" cap="flat" cmpd="sng" algn="ctr">
+                      <a:solidFill>
+                        <a:srgbClr val="D9D9D9"/>
+                      </a:solidFill>
+                      <a:prstDash val="solid"/>
+                    </a:lnT>
+                    <a:lnB w="9525" cap="flat" cmpd="sng" algn="ctr">
+                      <a:solidFill>
+                        <a:srgbClr val="D9D9D9"/>
+                      </a:solidFill>
+                      <a:prstDash val="solid"/>
+                    </a:lnB>
+                    <a:solidFill>
+                      <a:srgbClr val="FFFFFF"/>
+                    </a:solidFill>
+                  </a:tcPr>
+                </a:tc>
+                <a:tc>
+                  <a:txBody>
+                    <a:bodyPr/>
+                    <a:lstStyle/>
+                    <a:p>
+                      <a:pPr algn="r">
+                        <a:lnSpc>
+                          <a:spcPct val="100000"/>
+                        </a:lnSpc>
+                      </a:pPr>
+                      <a:r>
+                        <a:rPr sz="840" b="0">
+                          <a:solidFill>
+                            <a:srgbClr val="1A1A1A"/>
+                          </a:solidFill>
+                          <a:latin typeface="Arial"/>
+                          <a:ea typeface="微软雅黑"/>
+                          <a:cs typeface="Arial"/>
+                        </a:rPr>
+                        <a:t>99.96%</a:t>
+                      </a:r>
+                    </a:p>
+                  </a:txBody>
+                  <a:tcPr marL="36576" marR="36576" marT="7315" marB="7315" anchor="ctr">
+                    <a:lnL w="9525" cap="flat" cmpd="sng" algn="ctr">
+                      <a:solidFill>
+                        <a:srgbClr val="D9D9D9"/>
+                      </a:solidFill>
+                      <a:prstDash val="solid"/>
+                    </a:lnL>
+                    <a:lnR w="9525" cap="flat" cmpd="sng" algn="ctr">
+                      <a:solidFill>
+                        <a:srgbClr val="D9D9D9"/>
+                      </a:solidFill>
+                      <a:prstDash val="solid"/>
+                    </a:lnR>
+                    <a:lnT w="9525" cap="flat" cmpd="sng" algn="ctr">
+                      <a:solidFill>
+                        <a:srgbClr val="D9D9D9"/>
+                      </a:solidFill>
+                      <a:prstDash val="solid"/>
+                    </a:lnT>
+                    <a:lnB w="9525" cap="flat" cmpd="sng" algn="ctr">
+                      <a:solidFill>
+                        <a:srgbClr val="D9D9D9"/>
+                      </a:solidFill>
+                      <a:prstDash val="solid"/>
+                    </a:lnB>
+                    <a:solidFill>
+                      <a:srgbClr val="FFFFFF"/>
+                    </a:solidFill>
+                  </a:tcPr>
+                </a:tc>
+                <a:tc>
+                  <a:txBody>
+                    <a:bodyPr/>
+                    <a:lstStyle/>
+                    <a:p>
+                      <a:pPr algn="r">
+                        <a:lnSpc>
+                          <a:spcPct val="100000"/>
+                        </a:lnSpc>
+                      </a:pPr>
+                      <a:r>
+                        <a:rPr sz="840" b="0">
+                          <a:solidFill>
+                            <a:srgbClr val="1A1A1A"/>
+                          </a:solidFill>
+                          <a:latin typeface="Arial"/>
+                          <a:ea typeface="微软雅黑"/>
+                          <a:cs typeface="Arial"/>
+                        </a:rPr>
+                        <a:t>99.84%</a:t>
+                      </a:r>
+                    </a:p>
+                  </a:txBody>
+                  <a:tcPr marL="36576" marR="36576" marT="7315" marB="7315" anchor="ctr">
+                    <a:lnL w="9525" cap="flat" cmpd="sng" algn="ctr">
+                      <a:solidFill>
+                        <a:srgbClr val="D9D9D9"/>
+                      </a:solidFill>
+                      <a:prstDash val="solid"/>
+                    </a:lnL>
+                    <a:lnR w="9525" cap="flat" cmpd="sng" algn="ctr">
+                      <a:solidFill>
+                        <a:srgbClr val="D9D9D9"/>
+                      </a:solidFill>
+                      <a:prstDash val="solid"/>
+                    </a:lnR>
+                    <a:lnT w="9525" cap="flat" cmpd="sng" algn="ctr">
+                      <a:solidFill>
+                        <a:srgbClr val="D9D9D9"/>
+                      </a:solidFill>
+                      <a:prstDash val="solid"/>
+                    </a:lnT>
+                    <a:lnB w="9525" cap="flat" cmpd="sng" algn="ctr">
+                      <a:solidFill>
+                        <a:srgbClr val="D9D9D9"/>
+                      </a:solidFill>
+                      <a:prstDash val="solid"/>
+                    </a:lnB>
+                    <a:solidFill>
+                      <a:srgbClr val="FFFFFF"/>
+                    </a:solidFill>
+                  </a:tcPr>
+                </a:tc>
+                <a:tc>
+                  <a:txBody>
+                    <a:bodyPr/>
+                    <a:lstStyle/>
+                    <a:p>
+                      <a:pPr algn="r">
+                        <a:lnSpc>
+                          <a:spcPct val="100000"/>
+                        </a:lnSpc>
+                      </a:pPr>
+                      <a:r>
+                        <a:rPr sz="840" b="0">
+                          <a:solidFill>
+                            <a:srgbClr val="1A1A1A"/>
+                          </a:solidFill>
+                          <a:latin typeface="Arial"/>
+                          <a:ea typeface="微软雅黑"/>
+                          <a:cs typeface="Arial"/>
+                        </a:rPr>
+                        <a:t>0.01%</a:t>
+                      </a:r>
+                    </a:p>
+                  </a:txBody>
+                  <a:tcPr marL="36576" marR="36576" marT="7315" marB="7315" anchor="ctr">
+                    <a:lnL w="9525" cap="flat" cmpd="sng" algn="ctr">
+                      <a:solidFill>
+                        <a:srgbClr val="D9D9D9"/>
+                      </a:solidFill>
+                      <a:prstDash val="solid"/>
+                    </a:lnL>
+                    <a:lnR w="9525" cap="flat" cmpd="sng" algn="ctr">
+                      <a:solidFill>
+                        <a:srgbClr val="D9D9D9"/>
+                      </a:solidFill>
+                      <a:prstDash val="solid"/>
+                    </a:lnR>
+                    <a:lnT w="9525" cap="flat" cmpd="sng" algn="ctr">
+                      <a:solidFill>
+                        <a:srgbClr val="D9D9D9"/>
+                      </a:solidFill>
+                      <a:prstDash val="solid"/>
+                    </a:lnT>
+                    <a:lnB w="9525" cap="flat" cmpd="sng" algn="ctr">
+                      <a:solidFill>
+                        <a:srgbClr val="D9D9D9"/>
+                      </a:solidFill>
+                      <a:prstDash val="solid"/>
+                    </a:lnB>
+                    <a:solidFill>
+                      <a:srgbClr val="FFFFFF"/>
+                    </a:solidFill>
+                  </a:tcPr>
+                </a:tc>
+              </a:tr>
+              <a:tr h="347472">
+                <a:tc>
+                  <a:txBody>
+                    <a:bodyPr/>
+                    <a:lstStyle/>
+                    <a:p>
+                      <a:pPr algn="l">
+                        <a:lnSpc>
+                          <a:spcPct val="100000"/>
+                        </a:lnSpc>
+                      </a:pPr>
+                      <a:r>
+                        <a:rPr sz="840" b="0">
+                          <a:solidFill>
+                            <a:srgbClr val="1A1A1A"/>
+                          </a:solidFill>
+                          <a:latin typeface="Arial"/>
+                          <a:ea typeface="微软雅黑"/>
+                          <a:cs typeface="Arial"/>
+                        </a:rPr>
+                        <a:t>AX6727</a:t>
+                      </a:r>
+                    </a:p>
+                  </a:txBody>
+                  <a:tcPr marL="36576" marR="36576" marT="7315" marB="7315" anchor="ctr">
+                    <a:lnL w="9525" cap="flat" cmpd="sng" algn="ctr">
+                      <a:solidFill>
+                        <a:srgbClr val="D9D9D9"/>
+                      </a:solidFill>
+                      <a:prstDash val="solid"/>
+                    </a:lnL>
+                    <a:lnR w="9525" cap="flat" cmpd="sng" algn="ctr">
+                      <a:solidFill>
+                        <a:srgbClr val="D9D9D9"/>
+                      </a:solidFill>
+                      <a:prstDash val="solid"/>
+                    </a:lnR>
+                    <a:lnT w="9525" cap="flat" cmpd="sng" algn="ctr">
+                      <a:solidFill>
+                        <a:srgbClr val="D9D9D9"/>
+                      </a:solidFill>
+                      <a:prstDash val="solid"/>
+                    </a:lnT>
+                    <a:lnB w="9525" cap="flat" cmpd="sng" algn="ctr">
+                      <a:solidFill>
+                        <a:srgbClr val="D9D9D9"/>
+                      </a:solidFill>
+                      <a:prstDash val="solid"/>
+                    </a:lnB>
+                    <a:solidFill>
+                      <a:srgbClr val="FFFFFF"/>
+                    </a:solidFill>
+                  </a:tcPr>
+                </a:tc>
+                <a:tc>
+                  <a:txBody>
+                    <a:bodyPr/>
+                    <a:lstStyle/>
+                    <a:p>
+                      <a:pPr algn="l">
+                        <a:lnSpc>
+                          <a:spcPct val="100000"/>
+                        </a:lnSpc>
+                      </a:pPr>
+                      <a:r>
+                        <a:rPr sz="840" b="0">
+                          <a:solidFill>
+                            <a:srgbClr val="1A1A1A"/>
+                          </a:solidFill>
+                          <a:latin typeface="Arial"/>
+                          <a:ea typeface="微软雅黑"/>
+                          <a:cs typeface="Arial"/>
+                        </a:rPr>
+                        <a:t>Sangria/Seabreeze</a:t>
+                      </a:r>
+                    </a:p>
+                  </a:txBody>
+                  <a:tcPr marL="36576" marR="36576" marT="7315" marB="7315" anchor="ctr">
+                    <a:lnL w="9525" cap="flat" cmpd="sng" algn="ctr">
+                      <a:solidFill>
+                        <a:srgbClr val="D9D9D9"/>
+                      </a:solidFill>
+                      <a:prstDash val="solid"/>
+                    </a:lnL>
+                    <a:lnR w="9525" cap="flat" cmpd="sng" algn="ctr">
+                      <a:solidFill>
+                        <a:srgbClr val="D9D9D9"/>
+                      </a:solidFill>
+                      <a:prstDash val="solid"/>
+                    </a:lnR>
+                    <a:lnT w="9525" cap="flat" cmpd="sng" algn="ctr">
+                      <a:solidFill>
+                        <a:srgbClr val="D9D9D9"/>
+                      </a:solidFill>
+                      <a:prstDash val="solid"/>
+                    </a:lnT>
+                    <a:lnB w="9525" cap="flat" cmpd="sng" algn="ctr">
+                      <a:solidFill>
+                        <a:srgbClr val="D9D9D9"/>
+                      </a:solidFill>
+                      <a:prstDash val="solid"/>
+                    </a:lnB>
+                    <a:solidFill>
+                      <a:srgbClr val="FFFFFF"/>
+                    </a:solidFill>
+                  </a:tcPr>
+                </a:tc>
+                <a:tc>
+                  <a:txBody>
+                    <a:bodyPr/>
+                    <a:lstStyle/>
+                    <a:p>
+                      <a:pPr algn="l">
+                        <a:lnSpc>
+                          <a:spcPct val="100000"/>
+                        </a:lnSpc>
+                      </a:pPr>
+                      <a:r>
+                        <a:rPr sz="840" b="0">
+                          <a:solidFill>
+                            <a:srgbClr val="1A1A1A"/>
+                          </a:solidFill>
+                          <a:latin typeface="Arial"/>
+                          <a:ea typeface="微软雅黑"/>
+                          <a:cs typeface="Arial"/>
+                        </a:rPr>
+                        <a:t>7 inch e-reader</a:t>
+                      </a:r>
+                    </a:p>
+                  </a:txBody>
+                  <a:tcPr marL="36576" marR="36576" marT="7315" marB="7315" anchor="ctr">
+                    <a:lnL w="9525" cap="flat" cmpd="sng" algn="ctr">
+                      <a:solidFill>
+                        <a:srgbClr val="D9D9D9"/>
+                      </a:solidFill>
+                      <a:prstDash val="solid"/>
+                    </a:lnL>
+                    <a:lnR w="9525" cap="flat" cmpd="sng" algn="ctr">
+                      <a:solidFill>
+                        <a:srgbClr val="D9D9D9"/>
+                      </a:solidFill>
+                      <a:prstDash val="solid"/>
+                    </a:lnR>
+                    <a:lnT w="9525" cap="flat" cmpd="sng" algn="ctr">
+                      <a:solidFill>
+                        <a:srgbClr val="D9D9D9"/>
+                      </a:solidFill>
+                      <a:prstDash val="solid"/>
+                    </a:lnT>
+                    <a:lnB w="9525" cap="flat" cmpd="sng" algn="ctr">
+                      <a:solidFill>
+                        <a:srgbClr val="D9D9D9"/>
+                      </a:solidFill>
+                      <a:prstDash val="solid"/>
+                    </a:lnB>
+                    <a:solidFill>
+                      <a:srgbClr val="FFFFFF"/>
+                    </a:solidFill>
+                  </a:tcPr>
+                </a:tc>
+                <a:tc>
+                  <a:txBody>
+                    <a:bodyPr/>
+                    <a:lstStyle/>
+                    <a:p>
+                      <a:pPr algn="ctr">
+                        <a:lnSpc>
+                          <a:spcPct val="100000"/>
+                        </a:lnSpc>
+                      </a:pPr>
+                      <a:r>
+                        <a:rPr sz="840" b="0">
+                          <a:solidFill>
+                            <a:srgbClr val="1A1A1A"/>
+                          </a:solidFill>
+                          <a:latin typeface="Arial"/>
+                          <a:ea typeface="微软雅黑"/>
+                          <a:cs typeface="Arial"/>
+                        </a:rPr>
+                        <a:t>未标注</a:t>
+                      </a:r>
+                    </a:p>
+                  </a:txBody>
+                  <a:tcPr marL="36576" marR="36576" marT="7315" marB="7315" anchor="ctr">
+                    <a:lnL w="9525" cap="flat" cmpd="sng" algn="ctr">
+                      <a:solidFill>
+                        <a:srgbClr val="D9D9D9"/>
+                      </a:solidFill>
+                      <a:prstDash val="solid"/>
+                    </a:lnL>
+                    <a:lnR w="9525" cap="flat" cmpd="sng" algn="ctr">
+                      <a:solidFill>
+                        <a:srgbClr val="D9D9D9"/>
+                      </a:solidFill>
+                      <a:prstDash val="solid"/>
+                    </a:lnR>
+                    <a:lnT w="9525" cap="flat" cmpd="sng" algn="ctr">
+                      <a:solidFill>
+                        <a:srgbClr val="D9D9D9"/>
+                      </a:solidFill>
+                      <a:prstDash val="solid"/>
+                    </a:lnT>
+                    <a:lnB w="9525" cap="flat" cmpd="sng" algn="ctr">
+                      <a:solidFill>
+                        <a:srgbClr val="D9D9D9"/>
+                      </a:solidFill>
+                      <a:prstDash val="solid"/>
+                    </a:lnB>
+                    <a:solidFill>
+                      <a:srgbClr val="FFFFFF"/>
+                    </a:solidFill>
+                  </a:tcPr>
+                </a:tc>
+                <a:tc>
+                  <a:txBody>
+                    <a:bodyPr/>
+                    <a:lstStyle/>
+                    <a:p>
+                      <a:pPr algn="r">
+                        <a:lnSpc>
+                          <a:spcPct val="100000"/>
+                        </a:lnSpc>
+                      </a:pPr>
+                      <a:r>
+                        <a:rPr sz="840" b="0">
+                          <a:solidFill>
+                            <a:srgbClr val="1A1A1A"/>
+                          </a:solidFill>
+                          <a:latin typeface="Arial"/>
+                          <a:ea typeface="微软雅黑"/>
+                          <a:cs typeface="Arial"/>
+                        </a:rPr>
+                        <a:t>7,170</a:t>
+                      </a:r>
+                    </a:p>
+                  </a:txBody>
+                  <a:tcPr marL="36576" marR="36576" marT="7315" marB="7315" anchor="ctr">
+                    <a:lnL w="9525" cap="flat" cmpd="sng" algn="ctr">
+                      <a:solidFill>
+                        <a:srgbClr val="D9D9D9"/>
+                      </a:solidFill>
+                      <a:prstDash val="solid"/>
+                    </a:lnL>
+                    <a:lnR w="9525" cap="flat" cmpd="sng" algn="ctr">
+                      <a:solidFill>
+                        <a:srgbClr val="D9D9D9"/>
+                      </a:solidFill>
+                      <a:prstDash val="solid"/>
+                    </a:lnR>
+                    <a:lnT w="9525" cap="flat" cmpd="sng" algn="ctr">
+                      <a:solidFill>
+                        <a:srgbClr val="D9D9D9"/>
+                      </a:solidFill>
+                      <a:prstDash val="solid"/>
+                    </a:lnT>
+                    <a:lnB w="9525" cap="flat" cmpd="sng" algn="ctr">
+                      <a:solidFill>
+                        <a:srgbClr val="D9D9D9"/>
+                      </a:solidFill>
+                      <a:prstDash val="solid"/>
+                    </a:lnB>
+                    <a:solidFill>
+                      <a:srgbClr val="FFFFFF"/>
+                    </a:solidFill>
+                  </a:tcPr>
+                </a:tc>
+                <a:tc>
+                  <a:txBody>
+                    <a:bodyPr/>
+                    <a:lstStyle/>
+                    <a:p>
+                      <a:pPr algn="r">
+                        <a:lnSpc>
+                          <a:spcPct val="100000"/>
+                        </a:lnSpc>
+                      </a:pPr>
+                      <a:r>
+                        <a:rPr sz="840" b="0">
+                          <a:solidFill>
+                            <a:srgbClr val="1A1A1A"/>
+                          </a:solidFill>
+                          <a:latin typeface="Arial"/>
+                          <a:ea typeface="微软雅黑"/>
+                          <a:cs typeface="Arial"/>
+                        </a:rPr>
+                        <a:t>7.9%</a:t>
+                      </a:r>
+                    </a:p>
+                  </a:txBody>
+                  <a:tcPr marL="36576" marR="36576" marT="7315" marB="7315" anchor="ctr">
+                    <a:lnL w="9525" cap="flat" cmpd="sng" algn="ctr">
+                      <a:solidFill>
+                        <a:srgbClr val="D9D9D9"/>
+                      </a:solidFill>
+                      <a:prstDash val="solid"/>
+                    </a:lnL>
+                    <a:lnR w="9525" cap="flat" cmpd="sng" algn="ctr">
+                      <a:solidFill>
+                        <a:srgbClr val="D9D9D9"/>
+                      </a:solidFill>
+                      <a:prstDash val="solid"/>
+                    </a:lnR>
+                    <a:lnT w="9525" cap="flat" cmpd="sng" algn="ctr">
+                      <a:solidFill>
+                        <a:srgbClr val="D9D9D9"/>
+                      </a:solidFill>
+                      <a:prstDash val="solid"/>
+                    </a:lnT>
+                    <a:lnB w="9525" cap="flat" cmpd="sng" algn="ctr">
+                      <a:solidFill>
+                        <a:srgbClr val="D9D9D9"/>
+                      </a:solidFill>
+                      <a:prstDash val="solid"/>
+                    </a:lnB>
+                    <a:solidFill>
+                      <a:srgbClr val="FFFFFF"/>
+                    </a:solidFill>
+                  </a:tcPr>
+                </a:tc>
+                <a:tc>
+                  <a:txBody>
+                    <a:bodyPr/>
+                    <a:lstStyle/>
+                    <a:p>
+                      <a:pPr algn="r">
+                        <a:lnSpc>
+                          <a:spcPct val="100000"/>
+                        </a:lnSpc>
+                      </a:pPr>
+                      <a:r>
+                        <a:rPr sz="840" b="0">
+                          <a:solidFill>
+                            <a:srgbClr val="1A1A1A"/>
+                          </a:solidFill>
+                          <a:latin typeface="Arial"/>
+                          <a:ea typeface="微软雅黑"/>
+                          <a:cs typeface="Arial"/>
+                        </a:rPr>
+                        <a:t>97.88%</a:t>
+                      </a:r>
+                    </a:p>
+                  </a:txBody>
+                  <a:tcPr marL="36576" marR="36576" marT="7315" marB="7315" anchor="ctr">
+                    <a:lnL w="9525" cap="flat" cmpd="sng" algn="ctr">
+                      <a:solidFill>
+                        <a:srgbClr val="D9D9D9"/>
+                      </a:solidFill>
+                      <a:prstDash val="solid"/>
+                    </a:lnL>
+                    <a:lnR w="9525" cap="flat" cmpd="sng" algn="ctr">
+                      <a:solidFill>
+                        <a:srgbClr val="D9D9D9"/>
+                      </a:solidFill>
+                      <a:prstDash val="solid"/>
+                    </a:lnR>
+                    <a:lnT w="9525" cap="flat" cmpd="sng" algn="ctr">
+                      <a:solidFill>
+                        <a:srgbClr val="D9D9D9"/>
+                      </a:solidFill>
+                      <a:prstDash val="solid"/>
+                    </a:lnT>
+                    <a:lnB w="9525" cap="flat" cmpd="sng" algn="ctr">
+                      <a:solidFill>
+                        <a:srgbClr val="D9D9D9"/>
+                      </a:solidFill>
+                      <a:prstDash val="solid"/>
+                    </a:lnB>
+                    <a:solidFill>
+                      <a:srgbClr val="FFFFFF"/>
+                    </a:solidFill>
+                  </a:tcPr>
+                </a:tc>
+                <a:tc>
+                  <a:txBody>
+                    <a:bodyPr/>
+                    <a:lstStyle/>
+                    <a:p>
+                      <a:pPr algn="r">
+                        <a:lnSpc>
+                          <a:spcPct val="100000"/>
+                        </a:lnSpc>
+                      </a:pPr>
+                      <a:r>
+                        <a:rPr sz="840" b="0">
+                          <a:solidFill>
+                            <a:srgbClr val="1A1A1A"/>
+                          </a:solidFill>
+                          <a:latin typeface="Arial"/>
+                          <a:ea typeface="微软雅黑"/>
+                          <a:cs typeface="Arial"/>
+                        </a:rPr>
+                        <a:t>95.89%</a:t>
+                      </a:r>
+                    </a:p>
+                  </a:txBody>
+                  <a:tcPr marL="36576" marR="36576" marT="7315" marB="7315" anchor="ctr">
+                    <a:lnL w="9525" cap="flat" cmpd="sng" algn="ctr">
+                      <a:solidFill>
+                        <a:srgbClr val="D9D9D9"/>
+                      </a:solidFill>
+                      <a:prstDash val="solid"/>
+                    </a:lnL>
+                    <a:lnR w="9525" cap="flat" cmpd="sng" algn="ctr">
+                      <a:solidFill>
+                        <a:srgbClr val="D9D9D9"/>
+                      </a:solidFill>
+                      <a:prstDash val="solid"/>
+                    </a:lnR>
+                    <a:lnT w="9525" cap="flat" cmpd="sng" algn="ctr">
+                      <a:solidFill>
+                        <a:srgbClr val="D9D9D9"/>
+                      </a:solidFill>
+                      <a:prstDash val="solid"/>
+                    </a:lnT>
+                    <a:lnB w="9525" cap="flat" cmpd="sng" algn="ctr">
+                      <a:solidFill>
+                        <a:srgbClr val="D9D9D9"/>
+                      </a:solidFill>
+                      <a:prstDash val="solid"/>
+                    </a:lnB>
+                    <a:solidFill>
+                      <a:srgbClr val="FFFFFF"/>
+                    </a:solidFill>
+                  </a:tcPr>
+                </a:tc>
+                <a:tc>
+                  <a:txBody>
+                    <a:bodyPr/>
+                    <a:lstStyle/>
+                    <a:p>
+                      <a:pPr algn="r">
+                        <a:lnSpc>
+                          <a:spcPct val="100000"/>
+                        </a:lnSpc>
+                      </a:pPr>
+                      <a:r>
+                        <a:rPr sz="840" b="0">
+                          <a:solidFill>
+                            <a:srgbClr val="1A1A1A"/>
+                          </a:solidFill>
+                          <a:latin typeface="Arial"/>
+                          <a:ea typeface="微软雅黑"/>
+                          <a:cs typeface="Arial"/>
+                        </a:rPr>
+                        <a:t>93.04%</a:t>
+                      </a:r>
+                    </a:p>
+                  </a:txBody>
+                  <a:tcPr marL="36576" marR="36576" marT="7315" marB="7315" anchor="ctr">
+                    <a:lnL w="9525" cap="flat" cmpd="sng" algn="ctr">
+                      <a:solidFill>
+                        <a:srgbClr val="D9D9D9"/>
+                      </a:solidFill>
+                      <a:prstDash val="solid"/>
+                    </a:lnL>
+                    <a:lnR w="9525" cap="flat" cmpd="sng" algn="ctr">
+                      <a:solidFill>
+                        <a:srgbClr val="D9D9D9"/>
+                      </a:solidFill>
+                      <a:prstDash val="solid"/>
+                    </a:lnR>
+                    <a:lnT w="9525" cap="flat" cmpd="sng" algn="ctr">
+                      <a:solidFill>
+                        <a:srgbClr val="D9D9D9"/>
+                      </a:solidFill>
+                      <a:prstDash val="solid"/>
+                    </a:lnT>
+                    <a:lnB w="9525" cap="flat" cmpd="sng" algn="ctr">
+                      <a:solidFill>
+                        <a:srgbClr val="D9D9D9"/>
+                      </a:solidFill>
+                      <a:prstDash val="solid"/>
+                    </a:lnB>
+                    <a:solidFill>
+                      <a:srgbClr val="FFFFFF"/>
+                    </a:solidFill>
+                  </a:tcPr>
+                </a:tc>
+                <a:tc>
+                  <a:txBody>
+                    <a:bodyPr/>
+                    <a:lstStyle/>
+                    <a:p>
+                      <a:pPr algn="r">
+                        <a:lnSpc>
+                          <a:spcPct val="100000"/>
+                        </a:lnSpc>
+                      </a:pPr>
+                      <a:r>
+                        <a:rPr sz="840" b="0">
+                          <a:solidFill>
+                            <a:srgbClr val="1A1A1A"/>
+                          </a:solidFill>
+                          <a:latin typeface="Arial"/>
+                          <a:ea typeface="微软雅黑"/>
+                          <a:cs typeface="Arial"/>
+                        </a:rPr>
+                        <a:t>91.62%</a:t>
+                      </a:r>
+                    </a:p>
+                  </a:txBody>
+                  <a:tcPr marL="36576" marR="36576" marT="7315" marB="7315" anchor="ctr">
+                    <a:lnL w="9525" cap="flat" cmpd="sng" algn="ctr">
+                      <a:solidFill>
+                        <a:srgbClr val="D9D9D9"/>
+                      </a:solidFill>
+                      <a:prstDash val="solid"/>
+                    </a:lnL>
+                    <a:lnR w="9525" cap="flat" cmpd="sng" algn="ctr">
+                      <a:solidFill>
+                        <a:srgbClr val="D9D9D9"/>
+                      </a:solidFill>
+                      <a:prstDash val="solid"/>
+                    </a:lnR>
+                    <a:lnT w="9525" cap="flat" cmpd="sng" algn="ctr">
+                      <a:solidFill>
+                        <a:srgbClr val="D9D9D9"/>
+                      </a:solidFill>
+                      <a:prstDash val="solid"/>
+                    </a:lnT>
+                    <a:lnB w="9525" cap="flat" cmpd="sng" algn="ctr">
+                      <a:solidFill>
+                        <a:srgbClr val="D9D9D9"/>
+                      </a:solidFill>
+                      <a:prstDash val="solid"/>
+                    </a:lnB>
+                    <a:solidFill>
+                      <a:srgbClr val="FFFFFF"/>
+                    </a:solidFill>
+                  </a:tcPr>
+                </a:tc>
+                <a:tc>
+                  <a:txBody>
+                    <a:bodyPr/>
+                    <a:lstStyle/>
+                    <a:p>
+                      <a:pPr algn="r">
+                        <a:lnSpc>
+                          <a:spcPct val="100000"/>
+                        </a:lnSpc>
+                      </a:pPr>
+                      <a:r>
+                        <a:rPr sz="840" b="0">
+                          <a:solidFill>
+                            <a:srgbClr val="1A1A1A"/>
+                          </a:solidFill>
+                          <a:latin typeface="Arial"/>
+                          <a:ea typeface="微软雅黑"/>
+                          <a:cs typeface="Arial"/>
+                        </a:rPr>
+                        <a:t>80.75%</a:t>
+                      </a:r>
+                    </a:p>
+                  </a:txBody>
+                  <a:tcPr marL="36576" marR="36576" marT="7315" marB="7315" anchor="ctr">
+                    <a:lnL w="9525" cap="flat" cmpd="sng" algn="ctr">
+                      <a:solidFill>
+                        <a:srgbClr val="D9D9D9"/>
+                      </a:solidFill>
+                      <a:prstDash val="solid"/>
+                    </a:lnL>
+                    <a:lnR w="9525" cap="flat" cmpd="sng" algn="ctr">
+                      <a:solidFill>
+                        <a:srgbClr val="D9D9D9"/>
+                      </a:solidFill>
+                      <a:prstDash val="solid"/>
+                    </a:lnR>
+                    <a:lnT w="9525" cap="flat" cmpd="sng" algn="ctr">
+                      <a:solidFill>
+                        <a:srgbClr val="D9D9D9"/>
+                      </a:solidFill>
+                      <a:prstDash val="solid"/>
+                    </a:lnT>
+                    <a:lnB w="9525" cap="flat" cmpd="sng" algn="ctr">
+                      <a:solidFill>
+                        <a:srgbClr val="D9D9D9"/>
+                      </a:solidFill>
+                      <a:prstDash val="solid"/>
+                    </a:lnB>
+                    <a:solidFill>
+                      <a:srgbClr val="FFFFFF"/>
+                    </a:solidFill>
+                  </a:tcPr>
+                </a:tc>
+                <a:tc>
+                  <a:txBody>
+                    <a:bodyPr/>
+                    <a:lstStyle/>
+                    <a:p>
+                      <a:pPr algn="r">
+                        <a:lnSpc>
+                          <a:spcPct val="100000"/>
+                        </a:lnSpc>
+                      </a:pPr>
+                      <a:r>
+                        <a:rPr sz="840" b="0">
+                          <a:solidFill>
+                            <a:srgbClr val="1A1A1A"/>
+                          </a:solidFill>
+                          <a:latin typeface="Arial"/>
+                          <a:ea typeface="微软雅黑"/>
+                          <a:cs typeface="Arial"/>
+                        </a:rPr>
+                        <a:t>2.12%</a:t>
+                      </a:r>
+                    </a:p>
+                  </a:txBody>
+                  <a:tcPr marL="36576" marR="36576" marT="7315" marB="7315" anchor="ctr">
+                    <a:lnL w="9525" cap="flat" cmpd="sng" algn="ctr">
+                      <a:solidFill>
+                        <a:srgbClr val="D9D9D9"/>
+                      </a:solidFill>
+                      <a:prstDash val="solid"/>
+                    </a:lnL>
+                    <a:lnR w="9525" cap="flat" cmpd="sng" algn="ctr">
+                      <a:solidFill>
+                        <a:srgbClr val="D9D9D9"/>
+                      </a:solidFill>
+                      <a:prstDash val="solid"/>
+                    </a:lnR>
+                    <a:lnT w="9525" cap="flat" cmpd="sng" algn="ctr">
+                      <a:solidFill>
+                        <a:srgbClr val="D9D9D9"/>
+                      </a:solidFill>
+                      <a:prstDash val="solid"/>
+                    </a:lnT>
+                    <a:lnB w="9525" cap="flat" cmpd="sng" algn="ctr">
+                      <a:solidFill>
+                        <a:srgbClr val="D9D9D9"/>
+                      </a:solidFill>
+                      <a:prstDash val="solid"/>
+                    </a:lnB>
+                    <a:solidFill>
+                      <a:srgbClr val="FFFFFF"/>
+                    </a:solidFill>
+                  </a:tcPr>
+                </a:tc>
+              </a:tr>
+              <a:tr h="347472">
+                <a:tc>
+                  <a:txBody>
+                    <a:bodyPr/>
+                    <a:lstStyle/>
+                    <a:p>
+                      <a:pPr algn="l">
+                        <a:lnSpc>
+                          <a:spcPct val="100000"/>
+                        </a:lnSpc>
+                      </a:pPr>
+                      <a:r>
+                        <a:rPr sz="840" b="0">
+                          <a:solidFill>
+                            <a:srgbClr val="1A1A1A"/>
+                          </a:solidFill>
+                          <a:latin typeface="Arial"/>
+                          <a:ea typeface="微软雅黑"/>
+                          <a:cs typeface="Arial"/>
+                        </a:rPr>
+                        <a:t>AX8252</a:t>
+                      </a:r>
+                    </a:p>
+                  </a:txBody>
+                  <a:tcPr marL="36576" marR="36576" marT="7315" marB="7315" anchor="ctr">
+                    <a:lnL w="9525" cap="flat" cmpd="sng" algn="ctr">
+                      <a:solidFill>
+                        <a:srgbClr val="D9D9D9"/>
+                      </a:solidFill>
+                      <a:prstDash val="solid"/>
+                    </a:lnL>
+                    <a:lnR w="9525" cap="flat" cmpd="sng" algn="ctr">
+                      <a:solidFill>
+                        <a:srgbClr val="D9D9D9"/>
+                      </a:solidFill>
+                      <a:prstDash val="solid"/>
+                    </a:lnR>
+                    <a:lnT w="9525" cap="flat" cmpd="sng" algn="ctr">
+                      <a:solidFill>
+                        <a:srgbClr val="D9D9D9"/>
+                      </a:solidFill>
+                      <a:prstDash val="solid"/>
+                    </a:lnT>
+                    <a:lnB w="9525" cap="flat" cmpd="sng" algn="ctr">
+                      <a:solidFill>
+                        <a:srgbClr val="D9D9D9"/>
+                      </a:solidFill>
+                      <a:prstDash val="solid"/>
+                    </a:lnB>
+                    <a:solidFill>
+                      <a:srgbClr val="FFFFFF"/>
+                    </a:solidFill>
+                  </a:tcPr>
+                </a:tc>
+                <a:tc>
+                  <a:txBody>
+                    <a:bodyPr/>
+                    <a:lstStyle/>
+                    <a:p>
+                      <a:pPr algn="l">
+                        <a:lnSpc>
+                          <a:spcPct val="100000"/>
+                        </a:lnSpc>
+                      </a:pPr>
+                      <a:r>
+                        <a:rPr sz="840" b="0">
+                          <a:solidFill>
+                            <a:srgbClr val="1A1A1A"/>
+                          </a:solidFill>
+                          <a:latin typeface="Arial"/>
+                          <a:ea typeface="微软雅黑"/>
+                          <a:cs typeface="Arial"/>
+                        </a:rPr>
+                        <a:t>Amaro/Julep</a:t>
+                      </a:r>
+                    </a:p>
+                  </a:txBody>
+                  <a:tcPr marL="36576" marR="36576" marT="7315" marB="7315" anchor="ctr">
+                    <a:lnL w="9525" cap="flat" cmpd="sng" algn="ctr">
+                      <a:solidFill>
+                        <a:srgbClr val="D9D9D9"/>
+                      </a:solidFill>
+                      <a:prstDash val="solid"/>
+                    </a:lnL>
+                    <a:lnR w="9525" cap="flat" cmpd="sng" algn="ctr">
+                      <a:solidFill>
+                        <a:srgbClr val="D9D9D9"/>
+                      </a:solidFill>
+                      <a:prstDash val="solid"/>
+                    </a:lnR>
+                    <a:lnT w="9525" cap="flat" cmpd="sng" algn="ctr">
+                      <a:solidFill>
+                        <a:srgbClr val="D9D9D9"/>
+                      </a:solidFill>
+                      <a:prstDash val="solid"/>
+                    </a:lnT>
+                    <a:lnB w="9525" cap="flat" cmpd="sng" algn="ctr">
+                      <a:solidFill>
+                        <a:srgbClr val="D9D9D9"/>
+                      </a:solidFill>
+                      <a:prstDash val="solid"/>
+                    </a:lnB>
+                    <a:solidFill>
+                      <a:srgbClr val="FFFFFF"/>
+                    </a:solidFill>
+                  </a:tcPr>
+                </a:tc>
+                <a:tc>
+                  <a:txBody>
+                    <a:bodyPr/>
+                    <a:lstStyle/>
+                    <a:p>
+                      <a:pPr algn="l">
+                        <a:lnSpc>
+                          <a:spcPct val="100000"/>
+                        </a:lnSpc>
+                      </a:pPr>
+                      <a:r>
+                        <a:rPr sz="840" b="0">
+                          <a:solidFill>
+                            <a:srgbClr val="1A1A1A"/>
+                          </a:solidFill>
+                          <a:latin typeface="Arial"/>
+                          <a:ea typeface="微软雅黑"/>
+                          <a:cs typeface="Arial"/>
+                        </a:rPr>
+                        <a:t>7 inch e-reader</a:t>
+                      </a:r>
+                    </a:p>
+                  </a:txBody>
+                  <a:tcPr marL="36576" marR="36576" marT="7315" marB="7315" anchor="ctr">
+                    <a:lnL w="9525" cap="flat" cmpd="sng" algn="ctr">
+                      <a:solidFill>
+                        <a:srgbClr val="D9D9D9"/>
+                      </a:solidFill>
+                      <a:prstDash val="solid"/>
+                    </a:lnL>
+                    <a:lnR w="9525" cap="flat" cmpd="sng" algn="ctr">
+                      <a:solidFill>
+                        <a:srgbClr val="D9D9D9"/>
+                      </a:solidFill>
+                      <a:prstDash val="solid"/>
+                    </a:lnR>
+                    <a:lnT w="9525" cap="flat" cmpd="sng" algn="ctr">
+                      <a:solidFill>
+                        <a:srgbClr val="D9D9D9"/>
+                      </a:solidFill>
+                      <a:prstDash val="solid"/>
+                    </a:lnT>
+                    <a:lnB w="9525" cap="flat" cmpd="sng" algn="ctr">
+                      <a:solidFill>
+                        <a:srgbClr val="D9D9D9"/>
+                      </a:solidFill>
+                      <a:prstDash val="solid"/>
+                    </a:lnB>
+                    <a:solidFill>
+                      <a:srgbClr val="FFFFFF"/>
+                    </a:solidFill>
+                  </a:tcPr>
+                </a:tc>
+                <a:tc>
+                  <a:txBody>
+                    <a:bodyPr/>
+                    <a:lstStyle/>
+                    <a:p>
+                      <a:pPr algn="ctr">
+                        <a:lnSpc>
+                          <a:spcPct val="100000"/>
+                        </a:lnSpc>
+                      </a:pPr>
+                      <a:r>
+                        <a:rPr sz="840" b="0">
+                          <a:solidFill>
+                            <a:srgbClr val="1A1A1A"/>
+                          </a:solidFill>
+                          <a:latin typeface="Arial"/>
+                          <a:ea typeface="微软雅黑"/>
+                          <a:cs typeface="Arial"/>
+                        </a:rPr>
+                        <a:t>金属</a:t>
+                      </a:r>
+                    </a:p>
+                  </a:txBody>
+                  <a:tcPr marL="36576" marR="36576" marT="7315" marB="7315" anchor="ctr">
+                    <a:lnL w="9525" cap="flat" cmpd="sng" algn="ctr">
+                      <a:solidFill>
+                        <a:srgbClr val="D9D9D9"/>
+                      </a:solidFill>
+                      <a:prstDash val="solid"/>
+                    </a:lnL>
+                    <a:lnR w="9525" cap="flat" cmpd="sng" algn="ctr">
+                      <a:solidFill>
+                        <a:srgbClr val="D9D9D9"/>
+                      </a:solidFill>
+                      <a:prstDash val="solid"/>
+                    </a:lnR>
+                    <a:lnT w="9525" cap="flat" cmpd="sng" algn="ctr">
+                      <a:solidFill>
+                        <a:srgbClr val="D9D9D9"/>
+                      </a:solidFill>
+                      <a:prstDash val="solid"/>
+                    </a:lnT>
+                    <a:lnB w="9525" cap="flat" cmpd="sng" algn="ctr">
+                      <a:solidFill>
+                        <a:srgbClr val="D9D9D9"/>
+                      </a:solidFill>
+                      <a:prstDash val="solid"/>
+                    </a:lnB>
+                    <a:solidFill>
+                      <a:srgbClr val="FFFFFF"/>
+                    </a:solidFill>
+                  </a:tcPr>
+                </a:tc>
+                <a:tc>
+                  <a:txBody>
+                    <a:bodyPr/>
+                    <a:lstStyle/>
+                    <a:p>
+                      <a:pPr algn="r">
+                        <a:lnSpc>
+                          <a:spcPct val="100000"/>
+                        </a:lnSpc>
+                      </a:pPr>
+                      <a:r>
+                        <a:rPr sz="840" b="0">
+                          <a:solidFill>
+                            <a:srgbClr val="1A1A1A"/>
+                          </a:solidFill>
+                          <a:latin typeface="Arial"/>
+                          <a:ea typeface="微软雅黑"/>
+                          <a:cs typeface="Arial"/>
+                        </a:rPr>
+                        <a:t>6,524</a:t>
+                      </a:r>
+                    </a:p>
+                  </a:txBody>
+                  <a:tcPr marL="36576" marR="36576" marT="7315" marB="7315" anchor="ctr">
+                    <a:lnL w="9525" cap="flat" cmpd="sng" algn="ctr">
+                      <a:solidFill>
+                        <a:srgbClr val="D9D9D9"/>
+                      </a:solidFill>
+                      <a:prstDash val="solid"/>
+                    </a:lnL>
+                    <a:lnR w="9525" cap="flat" cmpd="sng" algn="ctr">
+                      <a:solidFill>
+                        <a:srgbClr val="D9D9D9"/>
+                      </a:solidFill>
+                      <a:prstDash val="solid"/>
+                    </a:lnR>
+                    <a:lnT w="9525" cap="flat" cmpd="sng" algn="ctr">
+                      <a:solidFill>
+                        <a:srgbClr val="D9D9D9"/>
+                      </a:solidFill>
+                      <a:prstDash val="solid"/>
+                    </a:lnT>
+                    <a:lnB w="9525" cap="flat" cmpd="sng" algn="ctr">
+                      <a:solidFill>
+                        <a:srgbClr val="D9D9D9"/>
+                      </a:solidFill>
+                      <a:prstDash val="solid"/>
+                    </a:lnB>
+                    <a:solidFill>
+                      <a:srgbClr val="FFFFFF"/>
+                    </a:solidFill>
+                  </a:tcPr>
+                </a:tc>
+                <a:tc>
+                  <a:txBody>
+                    <a:bodyPr/>
+                    <a:lstStyle/>
+                    <a:p>
+                      <a:pPr algn="r">
+                        <a:lnSpc>
+                          <a:spcPct val="100000"/>
+                        </a:lnSpc>
+                      </a:pPr>
+                      <a:r>
+                        <a:rPr sz="840" b="0">
+                          <a:solidFill>
+                            <a:srgbClr val="1A1A1A"/>
+                          </a:solidFill>
+                          <a:latin typeface="Arial"/>
+                          <a:ea typeface="微软雅黑"/>
+                          <a:cs typeface="Arial"/>
+                        </a:rPr>
+                        <a:t>8.7%</a:t>
+                      </a:r>
+                    </a:p>
+                  </a:txBody>
+                  <a:tcPr marL="36576" marR="36576" marT="7315" marB="7315" anchor="ctr">
+                    <a:lnL w="9525" cap="flat" cmpd="sng" algn="ctr">
+                      <a:solidFill>
+                        <a:srgbClr val="D9D9D9"/>
+                      </a:solidFill>
+                      <a:prstDash val="solid"/>
+                    </a:lnL>
+                    <a:lnR w="9525" cap="flat" cmpd="sng" algn="ctr">
+                      <a:solidFill>
+                        <a:srgbClr val="D9D9D9"/>
+                      </a:solidFill>
+                      <a:prstDash val="solid"/>
+                    </a:lnR>
+                    <a:lnT w="9525" cap="flat" cmpd="sng" algn="ctr">
+                      <a:solidFill>
+                        <a:srgbClr val="D9D9D9"/>
+                      </a:solidFill>
+                      <a:prstDash val="solid"/>
+                    </a:lnT>
+                    <a:lnB w="9525" cap="flat" cmpd="sng" algn="ctr">
+                      <a:solidFill>
+                        <a:srgbClr val="D9D9D9"/>
+                      </a:solidFill>
+                      <a:prstDash val="solid"/>
+                    </a:lnB>
+                    <a:solidFill>
+                      <a:srgbClr val="FFFFFF"/>
+                    </a:solidFill>
+                  </a:tcPr>
+                </a:tc>
+                <a:tc>
+                  <a:txBody>
+                    <a:bodyPr/>
+                    <a:lstStyle/>
+                    <a:p>
+                      <a:pPr algn="r">
+                        <a:lnSpc>
+                          <a:spcPct val="100000"/>
+                        </a:lnSpc>
+                      </a:pPr>
+                      <a:r>
+                        <a:rPr sz="840" b="0">
+                          <a:solidFill>
+                            <a:srgbClr val="1A1A1A"/>
+                          </a:solidFill>
+                          <a:latin typeface="Arial"/>
+                          <a:ea typeface="微软雅黑"/>
+                          <a:cs typeface="Arial"/>
+                        </a:rPr>
+                        <a:t>100.00%</a:t>
+                      </a:r>
+                    </a:p>
+                  </a:txBody>
+                  <a:tcPr marL="36576" marR="36576" marT="7315" marB="7315" anchor="ctr">
+                    <a:lnL w="9525" cap="flat" cmpd="sng" algn="ctr">
+                      <a:solidFill>
+                        <a:srgbClr val="D9D9D9"/>
+                      </a:solidFill>
+                      <a:prstDash val="solid"/>
+                    </a:lnL>
+                    <a:lnR w="9525" cap="flat" cmpd="sng" algn="ctr">
+                      <a:solidFill>
+                        <a:srgbClr val="D9D9D9"/>
+                      </a:solidFill>
+                      <a:prstDash val="solid"/>
+                    </a:lnR>
+                    <a:lnT w="9525" cap="flat" cmpd="sng" algn="ctr">
+                      <a:solidFill>
+                        <a:srgbClr val="D9D9D9"/>
+                      </a:solidFill>
+                      <a:prstDash val="solid"/>
+                    </a:lnT>
+                    <a:lnB w="9525" cap="flat" cmpd="sng" algn="ctr">
+                      <a:solidFill>
+                        <a:srgbClr val="D9D9D9"/>
+                      </a:solidFill>
+                      <a:prstDash val="solid"/>
+                    </a:lnB>
+                    <a:solidFill>
+                      <a:srgbClr val="FFFFFF"/>
+                    </a:solidFill>
+                  </a:tcPr>
+                </a:tc>
+                <a:tc>
+                  <a:txBody>
+                    <a:bodyPr/>
+                    <a:lstStyle/>
+                    <a:p>
+                      <a:pPr algn="r">
+                        <a:lnSpc>
+                          <a:spcPct val="100000"/>
+                        </a:lnSpc>
+                      </a:pPr>
+                      <a:r>
+                        <a:rPr sz="840" b="0">
+                          <a:solidFill>
+                            <a:srgbClr val="1A1A1A"/>
+                          </a:solidFill>
+                          <a:latin typeface="Arial"/>
+                          <a:ea typeface="微软雅黑"/>
+                          <a:cs typeface="Arial"/>
+                        </a:rPr>
+                        <a:t>99.94%</a:t>
+                      </a:r>
+                    </a:p>
+                  </a:txBody>
+                  <a:tcPr marL="36576" marR="36576" marT="7315" marB="7315" anchor="ctr">
+                    <a:lnL w="9525" cap="flat" cmpd="sng" algn="ctr">
+                      <a:solidFill>
+                        <a:srgbClr val="D9D9D9"/>
+                      </a:solidFill>
+                      <a:prstDash val="solid"/>
+                    </a:lnL>
+                    <a:lnR w="9525" cap="flat" cmpd="sng" algn="ctr">
+                      <a:solidFill>
+                        <a:srgbClr val="D9D9D9"/>
+                      </a:solidFill>
+                      <a:prstDash val="solid"/>
+                    </a:lnR>
+                    <a:lnT w="9525" cap="flat" cmpd="sng" algn="ctr">
+                      <a:solidFill>
+                        <a:srgbClr val="D9D9D9"/>
+                      </a:solidFill>
+                      <a:prstDash val="solid"/>
+                    </a:lnT>
+                    <a:lnB w="9525" cap="flat" cmpd="sng" algn="ctr">
+                      <a:solidFill>
+                        <a:srgbClr val="D9D9D9"/>
+                      </a:solidFill>
+                      <a:prstDash val="solid"/>
+                    </a:lnB>
+                    <a:solidFill>
+                      <a:srgbClr val="FFFFFF"/>
+                    </a:solidFill>
+                  </a:tcPr>
+                </a:tc>
+                <a:tc>
+                  <a:txBody>
+                    <a:bodyPr/>
+                    <a:lstStyle/>
+                    <a:p>
+                      <a:pPr algn="r">
+                        <a:lnSpc>
+                          <a:spcPct val="100000"/>
+                        </a:lnSpc>
+                      </a:pPr>
+                      <a:r>
+                        <a:rPr sz="840" b="0">
+                          <a:solidFill>
+                            <a:srgbClr val="1A1A1A"/>
+                          </a:solidFill>
+                          <a:latin typeface="Arial"/>
+                          <a:ea typeface="微软雅黑"/>
+                          <a:cs typeface="Arial"/>
+                        </a:rPr>
+                        <a:t>99.82%</a:t>
+                      </a:r>
+                    </a:p>
+                  </a:txBody>
+                  <a:tcPr marL="36576" marR="36576" marT="7315" marB="7315" anchor="ctr">
+                    <a:lnL w="9525" cap="flat" cmpd="sng" algn="ctr">
+                      <a:solidFill>
+                        <a:srgbClr val="D9D9D9"/>
+                      </a:solidFill>
+                      <a:prstDash val="solid"/>
+                    </a:lnL>
+                    <a:lnR w="9525" cap="flat" cmpd="sng" algn="ctr">
+                      <a:solidFill>
+                        <a:srgbClr val="D9D9D9"/>
+                      </a:solidFill>
+                      <a:prstDash val="solid"/>
+                    </a:lnR>
+                    <a:lnT w="9525" cap="flat" cmpd="sng" algn="ctr">
+                      <a:solidFill>
+                        <a:srgbClr val="D9D9D9"/>
+                      </a:solidFill>
+                      <a:prstDash val="solid"/>
+                    </a:lnT>
+                    <a:lnB w="9525" cap="flat" cmpd="sng" algn="ctr">
+                      <a:solidFill>
+                        <a:srgbClr val="D9D9D9"/>
+                      </a:solidFill>
+                      <a:prstDash val="solid"/>
+                    </a:lnB>
+                    <a:solidFill>
+                      <a:srgbClr val="FFFFFF"/>
+                    </a:solidFill>
+                  </a:tcPr>
+                </a:tc>
+                <a:tc>
+                  <a:txBody>
+                    <a:bodyPr/>
+                    <a:lstStyle/>
+                    <a:p>
+                      <a:pPr algn="r">
+                        <a:lnSpc>
+                          <a:spcPct val="100000"/>
+                        </a:lnSpc>
+                      </a:pPr>
+                      <a:r>
+                        <a:rPr sz="840" b="0">
+                          <a:solidFill>
+                            <a:srgbClr val="1A1A1A"/>
+                          </a:solidFill>
+                          <a:latin typeface="Arial"/>
+                          <a:ea typeface="微软雅黑"/>
+                          <a:cs typeface="Arial"/>
+                        </a:rPr>
+                        <a:t>99.34%</a:t>
+                      </a:r>
+                    </a:p>
+                  </a:txBody>
+                  <a:tcPr marL="36576" marR="36576" marT="7315" marB="7315" anchor="ctr">
+                    <a:lnL w="9525" cap="flat" cmpd="sng" algn="ctr">
+                      <a:solidFill>
+                        <a:srgbClr val="D9D9D9"/>
+                      </a:solidFill>
+                      <a:prstDash val="solid"/>
+                    </a:lnL>
+                    <a:lnR w="9525" cap="flat" cmpd="sng" algn="ctr">
+                      <a:solidFill>
+                        <a:srgbClr val="D9D9D9"/>
+                      </a:solidFill>
+                      <a:prstDash val="solid"/>
+                    </a:lnR>
+                    <a:lnT w="9525" cap="flat" cmpd="sng" algn="ctr">
+                      <a:solidFill>
+                        <a:srgbClr val="D9D9D9"/>
+                      </a:solidFill>
+                      <a:prstDash val="solid"/>
+                    </a:lnT>
+                    <a:lnB w="9525" cap="flat" cmpd="sng" algn="ctr">
+                      <a:solidFill>
+                        <a:srgbClr val="D9D9D9"/>
+                      </a:solidFill>
+                      <a:prstDash val="solid"/>
+                    </a:lnB>
+                    <a:solidFill>
+                      <a:srgbClr val="FFFFFF"/>
+                    </a:solidFill>
+                  </a:tcPr>
+                </a:tc>
+                <a:tc>
+                  <a:txBody>
+                    <a:bodyPr/>
+                    <a:lstStyle/>
+                    <a:p>
+                      <a:pPr algn="r">
+                        <a:lnSpc>
+                          <a:spcPct val="100000"/>
+                        </a:lnSpc>
+                      </a:pPr>
+                      <a:r>
+                        <a:rPr sz="840" b="0">
+                          <a:solidFill>
+                            <a:srgbClr val="1A1A1A"/>
+                          </a:solidFill>
+                          <a:latin typeface="Arial"/>
+                          <a:ea typeface="微软雅黑"/>
+                          <a:cs typeface="Arial"/>
+                        </a:rPr>
+                        <a:t>98.01%</a:t>
+                      </a:r>
+                    </a:p>
+                  </a:txBody>
+                  <a:tcPr marL="36576" marR="36576" marT="7315" marB="7315" anchor="ctr">
+                    <a:lnL w="9525" cap="flat" cmpd="sng" algn="ctr">
+                      <a:solidFill>
+                        <a:srgbClr val="D9D9D9"/>
+                      </a:solidFill>
+                      <a:prstDash val="solid"/>
+                    </a:lnL>
+                    <a:lnR w="9525" cap="flat" cmpd="sng" algn="ctr">
+                      <a:solidFill>
+                        <a:srgbClr val="D9D9D9"/>
+                      </a:solidFill>
+                      <a:prstDash val="solid"/>
+                    </a:lnR>
+                    <a:lnT w="9525" cap="flat" cmpd="sng" algn="ctr">
+                      <a:solidFill>
+                        <a:srgbClr val="D9D9D9"/>
+                      </a:solidFill>
+                      <a:prstDash val="solid"/>
+                    </a:lnT>
+                    <a:lnB w="9525" cap="flat" cmpd="sng" algn="ctr">
+                      <a:solidFill>
+                        <a:srgbClr val="D9D9D9"/>
+                      </a:solidFill>
+                      <a:prstDash val="solid"/>
+                    </a:lnB>
+                    <a:solidFill>
+                      <a:srgbClr val="FFFFFF"/>
+                    </a:solidFill>
+                  </a:tcPr>
+                </a:tc>
+                <a:tc>
+                  <a:txBody>
+                    <a:bodyPr/>
+                    <a:lstStyle/>
+                    <a:p>
+                      <a:pPr algn="r">
+                        <a:lnSpc>
+                          <a:spcPct val="100000"/>
+                        </a:lnSpc>
+                      </a:pPr>
+                      <a:r>
+                        <a:rPr sz="840" b="0">
+                          <a:solidFill>
+                            <a:srgbClr val="1A1A1A"/>
+                          </a:solidFill>
+                          <a:latin typeface="Arial"/>
+                          <a:ea typeface="微软雅黑"/>
+                          <a:cs typeface="Arial"/>
+                        </a:rPr>
+                        <a:t>0.0%</a:t>
+                      </a:r>
+                    </a:p>
+                  </a:txBody>
+                  <a:tcPr marL="36576" marR="36576" marT="7315" marB="7315" anchor="ctr">
+                    <a:lnL w="9525" cap="flat" cmpd="sng" algn="ctr">
+                      <a:solidFill>
+                        <a:srgbClr val="D9D9D9"/>
+                      </a:solidFill>
+                      <a:prstDash val="solid"/>
+                    </a:lnL>
+                    <a:lnR w="9525" cap="flat" cmpd="sng" algn="ctr">
+                      <a:solidFill>
+                        <a:srgbClr val="D9D9D9"/>
+                      </a:solidFill>
+                      <a:prstDash val="solid"/>
+                    </a:lnR>
+                    <a:lnT w="9525" cap="flat" cmpd="sng" algn="ctr">
+                      <a:solidFill>
+                        <a:srgbClr val="D9D9D9"/>
+                      </a:solidFill>
+                      <a:prstDash val="solid"/>
+                    </a:lnT>
+                    <a:lnB w="9525" cap="flat" cmpd="sng" algn="ctr">
+                      <a:solidFill>
+                        <a:srgbClr val="D9D9D9"/>
+                      </a:solidFill>
+                      <a:prstDash val="solid"/>
+                    </a:lnB>
+                    <a:solidFill>
+                      <a:srgbClr val="FFFFFF"/>
+                    </a:solidFill>
+                  </a:tcPr>
+                </a:tc>
+              </a:tr>
+              <a:tr h="347472">
+                <a:tc>
+                  <a:txBody>
+                    <a:bodyPr/>
+                    <a:lstStyle/>
+                    <a:p>
+                      <a:pPr algn="l">
+                        <a:lnSpc>
+                          <a:spcPct val="100000"/>
+                        </a:lnSpc>
+                      </a:pPr>
+                      <a:r>
+                        <a:rPr sz="840" b="1">
+                          <a:solidFill>
+                            <a:srgbClr val="1A1A1A"/>
+                          </a:solidFill>
+                          <a:latin typeface="Arial"/>
+                          <a:ea typeface="微软雅黑"/>
+                          <a:cs typeface="Arial"/>
+                        </a:rPr>
+                        <a:t>合计</a:t>
+                      </a:r>
+                    </a:p>
+                  </a:txBody>
+                  <a:tcPr marL="36576" marR="36576" marT="7315" marB="7315" anchor="ctr">
+                    <a:lnL w="9525" cap="flat" cmpd="sng" algn="ctr">
+                      <a:solidFill>
+                        <a:srgbClr val="D9D9D9"/>
+                      </a:solidFill>
+                      <a:prstDash val="solid"/>
+                    </a:lnL>
+                    <a:lnR w="9525" cap="flat" cmpd="sng" algn="ctr">
+                      <a:solidFill>
+                        <a:srgbClr val="D9D9D9"/>
+                      </a:solidFill>
+                      <a:prstDash val="solid"/>
+                    </a:lnR>
+                    <a:lnT w="9525" cap="flat" cmpd="sng" algn="ctr">
+                      <a:solidFill>
+                        <a:srgbClr val="D9D9D9"/>
+                      </a:solidFill>
+                      <a:prstDash val="solid"/>
+                    </a:lnT>
+                    <a:lnB w="9525" cap="flat" cmpd="sng" algn="ctr">
+                      <a:solidFill>
+                        <a:srgbClr val="D9D9D9"/>
+                      </a:solidFill>
+                      <a:prstDash val="solid"/>
+                    </a:lnB>
+                    <a:solidFill>
+                      <a:srgbClr val="FFFFFF"/>
+                    </a:solidFill>
+                  </a:tcPr>
+                </a:tc>
+                <a:tc>
+                  <a:txBody>
+                    <a:bodyPr/>
+                    <a:lstStyle/>
+                    <a:p>
+                      <a:pPr algn="l">
+                        <a:lnSpc>
+                          <a:spcPct val="100000"/>
+                        </a:lnSpc>
+                      </a:pPr>
+                      <a:r>
+                        <a:rPr sz="840" b="1">
+                          <a:solidFill>
+                            <a:srgbClr val="1A1A1A"/>
+                          </a:solidFill>
+                          <a:latin typeface="Arial"/>
+                          <a:ea typeface="微软雅黑"/>
+                          <a:cs typeface="Arial"/>
+                        </a:rPr>
+                        <a:t>四个在产组合</a:t>
+                      </a:r>
+                    </a:p>
+                  </a:txBody>
+                  <a:tcPr marL="36576" marR="36576" marT="7315" marB="7315" anchor="ctr">
+                    <a:lnL w="9525" cap="flat" cmpd="sng" algn="ctr">
+                      <a:solidFill>
+                        <a:srgbClr val="D9D9D9"/>
+                      </a:solidFill>
+                      <a:prstDash val="solid"/>
+                    </a:lnL>
+                    <a:lnR w="9525" cap="flat" cmpd="sng" algn="ctr">
+                      <a:solidFill>
+                        <a:srgbClr val="D9D9D9"/>
+                      </a:solidFill>
+                      <a:prstDash val="solid"/>
+                    </a:lnR>
+                    <a:lnT w="9525" cap="flat" cmpd="sng" algn="ctr">
+                      <a:solidFill>
+                        <a:srgbClr val="D9D9D9"/>
+                      </a:solidFill>
+                      <a:prstDash val="solid"/>
+                    </a:lnT>
+                    <a:lnB w="9525" cap="flat" cmpd="sng" algn="ctr">
+                      <a:solidFill>
+                        <a:srgbClr val="D9D9D9"/>
+                      </a:solidFill>
+                      <a:prstDash val="solid"/>
+                    </a:lnB>
+                    <a:solidFill>
+                      <a:srgbClr val="FFFFFF"/>
+                    </a:solidFill>
+                  </a:tcPr>
+                </a:tc>
+                <a:tc>
+                  <a:txBody>
+                    <a:bodyPr/>
+                    <a:lstStyle/>
+                    <a:p>
+                      <a:pPr algn="l">
+                        <a:lnSpc>
+                          <a:spcPct val="100000"/>
+                        </a:lnSpc>
+                      </a:pPr>
+                      <a:r>
+                        <a:rPr sz="840" b="1">
+                          <a:solidFill>
+                            <a:srgbClr val="1A1A1A"/>
+                          </a:solidFill>
+                          <a:latin typeface="Arial"/>
+                          <a:ea typeface="微软雅黑"/>
+                          <a:cs typeface="Arial"/>
+                        </a:rPr>
+                        <a:t>—</a:t>
+                      </a:r>
+                    </a:p>
+                  </a:txBody>
+                  <a:tcPr marL="36576" marR="36576" marT="7315" marB="7315" anchor="ctr">
+                    <a:lnL w="9525" cap="flat" cmpd="sng" algn="ctr">
+                      <a:solidFill>
+                        <a:srgbClr val="D9D9D9"/>
+                      </a:solidFill>
+                      <a:prstDash val="solid"/>
+                    </a:lnL>
+                    <a:lnR w="9525" cap="flat" cmpd="sng" algn="ctr">
+                      <a:solidFill>
+                        <a:srgbClr val="D9D9D9"/>
+                      </a:solidFill>
+                      <a:prstDash val="solid"/>
+                    </a:lnR>
+                    <a:lnT w="9525" cap="flat" cmpd="sng" algn="ctr">
+                      <a:solidFill>
+                        <a:srgbClr val="D9D9D9"/>
+                      </a:solidFill>
+                      <a:prstDash val="solid"/>
+                    </a:lnT>
+                    <a:lnB w="9525" cap="flat" cmpd="sng" algn="ctr">
+                      <a:solidFill>
+                        <a:srgbClr val="D9D9D9"/>
+                      </a:solidFill>
+                      <a:prstDash val="solid"/>
+                    </a:lnB>
+                    <a:solidFill>
+                      <a:srgbClr val="FFFFFF"/>
+                    </a:solidFill>
+                  </a:tcPr>
+                </a:tc>
+                <a:tc>
+                  <a:txBody>
+                    <a:bodyPr/>
+                    <a:lstStyle/>
+                    <a:p>
+                      <a:pPr algn="ctr">
+                        <a:lnSpc>
+                          <a:spcPct val="100000"/>
+                        </a:lnSpc>
+                      </a:pPr>
+                      <a:r>
+                        <a:rPr sz="840" b="1">
+                          <a:solidFill>
+                            <a:srgbClr val="1A1A1A"/>
+                          </a:solidFill>
+                          <a:latin typeface="Arial"/>
+                          <a:ea typeface="微软雅黑"/>
+                          <a:cs typeface="Arial"/>
+                        </a:rPr>
+                        <a:t>—</a:t>
+                      </a:r>
+                    </a:p>
+                  </a:txBody>
+                  <a:tcPr marL="36576" marR="36576" marT="7315" marB="7315" anchor="ctr">
+                    <a:lnL w="9525" cap="flat" cmpd="sng" algn="ctr">
+                      <a:solidFill>
+                        <a:srgbClr val="D9D9D9"/>
+                      </a:solidFill>
+                      <a:prstDash val="solid"/>
+                    </a:lnL>
+                    <a:lnR w="9525" cap="flat" cmpd="sng" algn="ctr">
+                      <a:solidFill>
+                        <a:srgbClr val="D9D9D9"/>
+                      </a:solidFill>
+                      <a:prstDash val="solid"/>
+                    </a:lnR>
+                    <a:lnT w="9525" cap="flat" cmpd="sng" algn="ctr">
+                      <a:solidFill>
+                        <a:srgbClr val="D9D9D9"/>
+                      </a:solidFill>
+                      <a:prstDash val="solid"/>
+                    </a:lnT>
+                    <a:lnB w="9525" cap="flat" cmpd="sng" algn="ctr">
+                      <a:solidFill>
+                        <a:srgbClr val="D9D9D9"/>
+                      </a:solidFill>
+                      <a:prstDash val="solid"/>
+                    </a:lnB>
+                    <a:solidFill>
+                      <a:srgbClr val="FFFFFF"/>
+                    </a:solidFill>
+                  </a:tcPr>
+                </a:tc>
+                <a:tc>
+                  <a:txBody>
+                    <a:bodyPr/>
+                    <a:lstStyle/>
+                    <a:p>
+                      <a:pPr algn="r">
+                        <a:lnSpc>
+                          <a:spcPct val="100000"/>
+                        </a:lnSpc>
+                      </a:pPr>
+                      <a:r>
+                        <a:rPr sz="840" b="1">
+                          <a:solidFill>
+                            <a:srgbClr val="1A1A1A"/>
+                          </a:solidFill>
+                          <a:latin typeface="Arial"/>
+                          <a:ea typeface="微软雅黑"/>
+                          <a:cs typeface="Arial"/>
+                        </a:rPr>
+                        <a:t>83,706</a:t>
+                      </a:r>
+                    </a:p>
+                  </a:txBody>
+                  <a:tcPr marL="36576" marR="36576" marT="7315" marB="7315" anchor="ctr">
+                    <a:lnL w="9525" cap="flat" cmpd="sng" algn="ctr">
+                      <a:solidFill>
+                        <a:srgbClr val="D9D9D9"/>
+                      </a:solidFill>
+                      <a:prstDash val="solid"/>
+                    </a:lnL>
+                    <a:lnR w="9525" cap="flat" cmpd="sng" algn="ctr">
+                      <a:solidFill>
+                        <a:srgbClr val="D9D9D9"/>
+                      </a:solidFill>
+                      <a:prstDash val="solid"/>
+                    </a:lnR>
+                    <a:lnT w="9525" cap="flat" cmpd="sng" algn="ctr">
+                      <a:solidFill>
+                        <a:srgbClr val="D9D9D9"/>
+                      </a:solidFill>
+                      <a:prstDash val="solid"/>
+                    </a:lnT>
+                    <a:lnB w="9525" cap="flat" cmpd="sng" algn="ctr">
+                      <a:solidFill>
+                        <a:srgbClr val="D9D9D9"/>
+                      </a:solidFill>
+                      <a:prstDash val="solid"/>
+                    </a:lnB>
+                    <a:solidFill>
+                      <a:srgbClr val="FFFFFF"/>
+                    </a:solidFill>
+                  </a:tcPr>
+                </a:tc>
+                <a:tc>
+                  <a:txBody>
+                    <a:bodyPr/>
+                    <a:lstStyle/>
+                    <a:p>
+                      <a:pPr algn="r">
+                        <a:lnSpc>
+                          <a:spcPct val="100000"/>
+                        </a:lnSpc>
+                      </a:pPr>
+                      <a:r>
+                        <a:rPr sz="840" b="1">
+                          <a:solidFill>
+                            <a:srgbClr val="1A1A1A"/>
+                          </a:solidFill>
+                          <a:latin typeface="Arial"/>
+                          <a:ea typeface="微软雅黑"/>
+                          <a:cs typeface="Arial"/>
+                        </a:rPr>
+                        <a:t>8.92%</a:t>
+                      </a:r>
+                    </a:p>
+                  </a:txBody>
+                  <a:tcPr marL="36576" marR="36576" marT="7315" marB="7315" anchor="ctr">
+                    <a:lnL w="9525" cap="flat" cmpd="sng" algn="ctr">
+                      <a:solidFill>
+                        <a:srgbClr val="D9D9D9"/>
+                      </a:solidFill>
+                      <a:prstDash val="solid"/>
+                    </a:lnL>
+                    <a:lnR w="9525" cap="flat" cmpd="sng" algn="ctr">
+                      <a:solidFill>
+                        <a:srgbClr val="D9D9D9"/>
+                      </a:solidFill>
+                      <a:prstDash val="solid"/>
+                    </a:lnR>
+                    <a:lnT w="9525" cap="flat" cmpd="sng" algn="ctr">
+                      <a:solidFill>
+                        <a:srgbClr val="D9D9D9"/>
+                      </a:solidFill>
+                      <a:prstDash val="solid"/>
+                    </a:lnT>
+                    <a:lnB w="9525" cap="flat" cmpd="sng" algn="ctr">
+                      <a:solidFill>
+                        <a:srgbClr val="D9D9D9"/>
+                      </a:solidFill>
+                      <a:prstDash val="solid"/>
+                    </a:lnB>
+                    <a:solidFill>
+                      <a:srgbClr val="FFFFFF"/>
+                    </a:solidFill>
+                  </a:tcPr>
+                </a:tc>
+                <a:tc>
+                  <a:txBody>
+                    <a:bodyPr/>
+                    <a:lstStyle/>
+                    <a:p>
+                      <a:pPr algn="r">
+                        <a:lnSpc>
+                          <a:spcPct val="100000"/>
+                        </a:lnSpc>
+                      </a:pPr>
+                      <a:r>
+                        <a:rPr sz="840" b="1">
+                          <a:solidFill>
+                            <a:srgbClr val="1A1A1A"/>
+                          </a:solidFill>
+                          <a:latin typeface="Arial"/>
+                          <a:ea typeface="微软雅黑"/>
+                          <a:cs typeface="Arial"/>
+                        </a:rPr>
+                        <a:t>99.82%</a:t>
+                      </a:r>
+                    </a:p>
+                  </a:txBody>
+                  <a:tcPr marL="36576" marR="36576" marT="7315" marB="7315" anchor="ctr">
+                    <a:lnL w="9525" cap="flat" cmpd="sng" algn="ctr">
+                      <a:solidFill>
+                        <a:srgbClr val="D9D9D9"/>
+                      </a:solidFill>
+                      <a:prstDash val="solid"/>
+                    </a:lnL>
+                    <a:lnR w="9525" cap="flat" cmpd="sng" algn="ctr">
+                      <a:solidFill>
+                        <a:srgbClr val="D9D9D9"/>
+                      </a:solidFill>
+                      <a:prstDash val="solid"/>
+                    </a:lnR>
+                    <a:lnT w="9525" cap="flat" cmpd="sng" algn="ctr">
+                      <a:solidFill>
+                        <a:srgbClr val="D9D9D9"/>
+                      </a:solidFill>
+                      <a:prstDash val="solid"/>
+                    </a:lnT>
+                    <a:lnB w="9525" cap="flat" cmpd="sng" algn="ctr">
+                      <a:solidFill>
+                        <a:srgbClr val="D9D9D9"/>
+                      </a:solidFill>
+                      <a:prstDash val="solid"/>
+                    </a:lnB>
+                    <a:solidFill>
+                      <a:srgbClr val="FFFFFF"/>
+                    </a:solidFill>
+                  </a:tcPr>
+                </a:tc>
+                <a:tc>
+                  <a:txBody>
+                    <a:bodyPr/>
+                    <a:lstStyle/>
+                    <a:p>
+                      <a:pPr algn="r">
+                        <a:lnSpc>
+                          <a:spcPct val="100000"/>
+                        </a:lnSpc>
+                      </a:pPr>
+                      <a:r>
+                        <a:rPr sz="840" b="1">
+                          <a:solidFill>
+                            <a:srgbClr val="1A1A1A"/>
+                          </a:solidFill>
+                          <a:latin typeface="Arial"/>
+                          <a:ea typeface="微软雅黑"/>
+                          <a:cs typeface="Arial"/>
+                        </a:rPr>
+                        <a:t>99.64%</a:t>
+                      </a:r>
+                    </a:p>
+                  </a:txBody>
+                  <a:tcPr marL="36576" marR="36576" marT="7315" marB="7315" anchor="ctr">
+                    <a:lnL w="9525" cap="flat" cmpd="sng" algn="ctr">
+                      <a:solidFill>
+                        <a:srgbClr val="D9D9D9"/>
+                      </a:solidFill>
+                      <a:prstDash val="solid"/>
+                    </a:lnL>
+                    <a:lnR w="9525" cap="flat" cmpd="sng" algn="ctr">
+                      <a:solidFill>
+                        <a:srgbClr val="D9D9D9"/>
+                      </a:solidFill>
+                      <a:prstDash val="solid"/>
+                    </a:lnR>
+                    <a:lnT w="9525" cap="flat" cmpd="sng" algn="ctr">
+                      <a:solidFill>
+                        <a:srgbClr val="D9D9D9"/>
+                      </a:solidFill>
+                      <a:prstDash val="solid"/>
+                    </a:lnT>
+                    <a:lnB w="9525" cap="flat" cmpd="sng" algn="ctr">
+                      <a:solidFill>
+                        <a:srgbClr val="D9D9D9"/>
+                      </a:solidFill>
+                      <a:prstDash val="solid"/>
+                    </a:lnB>
+                    <a:solidFill>
+                      <a:srgbClr val="FFFFFF"/>
+                    </a:solidFill>
+                  </a:tcPr>
+                </a:tc>
+                <a:tc>
+                  <a:txBody>
+                    <a:bodyPr/>
+                    <a:lstStyle/>
+                    <a:p>
+                      <a:pPr algn="r">
+                        <a:lnSpc>
+                          <a:spcPct val="100000"/>
+                        </a:lnSpc>
+                      </a:pPr>
+                      <a:r>
+                        <a:rPr sz="840" b="1">
+                          <a:solidFill>
+                            <a:srgbClr val="1A1A1A"/>
+                          </a:solidFill>
+                          <a:latin typeface="Arial"/>
+                          <a:ea typeface="微软雅黑"/>
+                          <a:cs typeface="Arial"/>
+                        </a:rPr>
+                        <a:t>99.39%</a:t>
+                      </a:r>
+                    </a:p>
+                  </a:txBody>
+                  <a:tcPr marL="36576" marR="36576" marT="7315" marB="7315" anchor="ctr">
+                    <a:lnL w="9525" cap="flat" cmpd="sng" algn="ctr">
+                      <a:solidFill>
+                        <a:srgbClr val="D9D9D9"/>
+                      </a:solidFill>
+                      <a:prstDash val="solid"/>
+                    </a:lnL>
+                    <a:lnR w="9525" cap="flat" cmpd="sng" algn="ctr">
+                      <a:solidFill>
+                        <a:srgbClr val="D9D9D9"/>
+                      </a:solidFill>
+                      <a:prstDash val="solid"/>
+                    </a:lnR>
+                    <a:lnT w="9525" cap="flat" cmpd="sng" algn="ctr">
+                      <a:solidFill>
+                        <a:srgbClr val="D9D9D9"/>
+                      </a:solidFill>
+                      <a:prstDash val="solid"/>
+                    </a:lnT>
+                    <a:lnB w="9525" cap="flat" cmpd="sng" algn="ctr">
+                      <a:solidFill>
+                        <a:srgbClr val="D9D9D9"/>
+                      </a:solidFill>
+                      <a:prstDash val="solid"/>
+                    </a:lnB>
+                    <a:solidFill>
+                      <a:srgbClr val="FFFFFF"/>
+                    </a:solidFill>
+                  </a:tcPr>
+                </a:tc>
+                <a:tc>
+                  <a:txBody>
+                    <a:bodyPr/>
+                    <a:lstStyle/>
+                    <a:p>
+                      <a:pPr algn="r">
+                        <a:lnSpc>
+                          <a:spcPct val="100000"/>
+                        </a:lnSpc>
+                      </a:pPr>
+                      <a:r>
+                        <a:rPr sz="840" b="1">
+                          <a:solidFill>
+                            <a:srgbClr val="1A1A1A"/>
+                          </a:solidFill>
+                          <a:latin typeface="Arial"/>
+                          <a:ea typeface="微软雅黑"/>
+                          <a:cs typeface="Arial"/>
+                        </a:rPr>
+                        <a:t>99.22%</a:t>
+                      </a:r>
+                    </a:p>
+                  </a:txBody>
+                  <a:tcPr marL="36576" marR="36576" marT="7315" marB="7315" anchor="ctr">
+                    <a:lnL w="9525" cap="flat" cmpd="sng" algn="ctr">
+                      <a:solidFill>
+                        <a:srgbClr val="D9D9D9"/>
+                      </a:solidFill>
+                      <a:prstDash val="solid"/>
+                    </a:lnL>
+                    <a:lnR w="9525" cap="flat" cmpd="sng" algn="ctr">
+                      <a:solidFill>
+                        <a:srgbClr val="D9D9D9"/>
+                      </a:solidFill>
+                      <a:prstDash val="solid"/>
+                    </a:lnR>
+                    <a:lnT w="9525" cap="flat" cmpd="sng" algn="ctr">
+                      <a:solidFill>
+                        <a:srgbClr val="D9D9D9"/>
+                      </a:solidFill>
+                      <a:prstDash val="solid"/>
+                    </a:lnT>
+                    <a:lnB w="9525" cap="flat" cmpd="sng" algn="ctr">
+                      <a:solidFill>
+                        <a:srgbClr val="D9D9D9"/>
+                      </a:solidFill>
+                      <a:prstDash val="solid"/>
+                    </a:lnB>
+                    <a:solidFill>
+                      <a:srgbClr val="FFFFFF"/>
+                    </a:solidFill>
+                  </a:tcPr>
+                </a:tc>
+                <a:tc>
+                  <a:txBody>
+                    <a:bodyPr/>
+                    <a:lstStyle/>
+                    <a:p>
+                      <a:pPr algn="r">
+                        <a:lnSpc>
+                          <a:spcPct val="100000"/>
+                        </a:lnSpc>
+                      </a:pPr>
+                      <a:r>
+                        <a:rPr sz="840" b="1">
+                          <a:solidFill>
+                            <a:srgbClr val="1A1A1A"/>
+                          </a:solidFill>
+                          <a:latin typeface="Arial"/>
+                          <a:ea typeface="微软雅黑"/>
+                          <a:cs typeface="Arial"/>
+                        </a:rPr>
+                        <a:t>98.13%</a:t>
+                      </a:r>
+                    </a:p>
+                  </a:txBody>
+                  <a:tcPr marL="36576" marR="36576" marT="7315" marB="7315" anchor="ctr">
+                    <a:lnL w="9525" cap="flat" cmpd="sng" algn="ctr">
+                      <a:solidFill>
+                        <a:srgbClr val="D9D9D9"/>
+                      </a:solidFill>
+                      <a:prstDash val="solid"/>
+                    </a:lnL>
+                    <a:lnR w="9525" cap="flat" cmpd="sng" algn="ctr">
+                      <a:solidFill>
+                        <a:srgbClr val="D9D9D9"/>
+                      </a:solidFill>
+                      <a:prstDash val="solid"/>
+                    </a:lnR>
+                    <a:lnT w="9525" cap="flat" cmpd="sng" algn="ctr">
+                      <a:solidFill>
+                        <a:srgbClr val="D9D9D9"/>
+                      </a:solidFill>
+                      <a:prstDash val="solid"/>
+                    </a:lnT>
+                    <a:lnB w="9525" cap="flat" cmpd="sng" algn="ctr">
+                      <a:solidFill>
+                        <a:srgbClr val="D9D9D9"/>
+                      </a:solidFill>
+                      <a:prstDash val="solid"/>
+                    </a:lnB>
+                    <a:solidFill>
+                      <a:srgbClr val="FFFFFF"/>
+                    </a:solidFill>
+                  </a:tcPr>
+                </a:tc>
+                <a:tc>
+                  <a:txBody>
+                    <a:bodyPr/>
+                    <a:lstStyle/>
+                    <a:p>
+                      <a:pPr algn="r">
+                        <a:lnSpc>
+                          <a:spcPct val="100000"/>
+                        </a:lnSpc>
+                      </a:pPr>
+                      <a:r>
+                        <a:rPr sz="840" b="1">
+                          <a:solidFill>
+                            <a:srgbClr val="1A1A1A"/>
+                          </a:solidFill>
+                          <a:latin typeface="Arial"/>
+                          <a:ea typeface="微软雅黑"/>
+                          <a:cs typeface="Arial"/>
+                        </a:rPr>
+                        <a:t>0.18%</a:t>
+                      </a:r>
+                    </a:p>
+                  </a:txBody>
+                  <a:tcPr marL="36576" marR="36576" marT="7315" marB="7315" anchor="ctr">
+                    <a:lnL w="9525" cap="flat" cmpd="sng" algn="ctr">
+                      <a:solidFill>
+                        <a:srgbClr val="D9D9D9"/>
+                      </a:solidFill>
+                      <a:prstDash val="solid"/>
+                    </a:lnL>
+                    <a:lnR w="9525" cap="flat" cmpd="sng" algn="ctr">
+                      <a:solidFill>
+                        <a:srgbClr val="D9D9D9"/>
+                      </a:solidFill>
+                      <a:prstDash val="solid"/>
+                    </a:lnR>
+                    <a:lnT w="9525" cap="flat" cmpd="sng" algn="ctr">
+                      <a:solidFill>
+                        <a:srgbClr val="D9D9D9"/>
+                      </a:solidFill>
+                      <a:prstDash val="solid"/>
+                    </a:lnT>
+                    <a:lnB w="9525" cap="flat" cmpd="sng" algn="ctr">
+                      <a:solidFill>
+                        <a:srgbClr val="D9D9D9"/>
+                      </a:solidFill>
+                      <a:prstDash val="solid"/>
+                    </a:lnB>
+                    <a:solidFill>
+                      <a:srgbClr val="FFFFFF"/>
+                    </a:solidFill>
+                  </a:tcPr>
+                </a:tc>
+              </a:tr>
+            </a:tbl>
+          </a:graphicData>
+        </a:graphic>
+      </p:graphicFrame>
     </p:spTree>
   </p:cSld>
   <p:clrMapOvr>
@@ -14428,6 +16247,24 @@
                 <a:cs typeface="Arial"/>
               </a:rPr>
               <a:t>⇒ 背壳/尺寸都换不来读全：先修屏蔽、朝向与读码窗口，再按箱型复测。</a:t>
+            </a:r>
+          </a:p>
+          <a:p>
+            <a:pPr>
+              <a:lnSpc>
+                <a:spcPct val="125000"/>
+              </a:lnSpc>
+            </a:pPr>
+            <a:r>
+              <a:rPr sz="880" b="0">
+                <a:solidFill>
+                  <a:srgbClr val="1A1A1A"/>
+                </a:solidFill>
+                <a:latin typeface="Arial"/>
+                <a:ea typeface="微软雅黑"/>
+                <a:cs typeface="Arial"/>
+              </a:rPr>
+              <a:t>一箱读到 ≤1 个：合计 98.1%（AX6727 最低 80.8%）。</a:t>
             </a:r>
           </a:p>
         </p:txBody>

--- a/RFID读取评估_2026-10-21/09_报告/RFID读取能力评估_2026-10-23.pptx
+++ b/RFID读取评估_2026-10-21/09_报告/RFID读取能力评估_2026-10-23.pptx
@@ -6758,7 +6758,7 @@
                           <a:ea typeface="微软雅黑"/>
                           <a:cs typeface="Arial"/>
                         </a:rPr>
-                        <a:t>GN46HP01951378JH</a:t>
+                        <a:t>GN46HP01641502GU</a:t>
                       </a:r>
                       <a:endParaRPr sz="850"/>
                     </a:p>
@@ -7229,7 +7229,7 @@
                           <a:ea typeface="微软雅黑"/>
                           <a:cs typeface="Arial"/>
                         </a:rPr>
-                        <a:t>GN46HP01052084UH</a:t>
+                        <a:t>GN46HP01642601PC</a:t>
                       </a:r>
                       <a:endParaRPr sz="850"/>
                     </a:p>
@@ -7678,7 +7678,7 @@
                           <a:ea typeface="微软雅黑"/>
                           <a:cs typeface="Arial"/>
                         </a:rPr>
-                        <a:t>GN46HP01851164EU</a:t>
+                        <a:t>GN46HP01641603MC</a:t>
                       </a:r>
                       <a:endParaRPr sz="850"/>
                     </a:p>
@@ -8116,7 +8116,7 @@
                           <a:ea typeface="微软雅黑"/>
                           <a:cs typeface="Arial"/>
                         </a:rPr>
-                        <a:t>GN46HP01126508MH</a:t>
+                        <a:t>GN46HP01642601JM</a:t>
                       </a:r>
                       <a:endParaRPr sz="850"/>
                     </a:p>
@@ -10076,7 +10076,7 @@
                 <a:ea typeface="微软雅黑"/>
                 <a:cs typeface="Arial"/>
               </a:rPr>
-              <a:t>来源：RFID中箱读取测试报告_20261019.pdf（2026-10-19）· 8 轮读数（大平板 4 轮 + 小平板 4 轮）。每行＝一个卡通箱，换朝向读到的是同一个 SN；SN 为按真机 DSN 格式生成的示例编号（原报告未记录 SN）。</a:t>
+              <a:t>来源：RFID中箱读取测试报告_20261019.pdf（2026-10-19）· 8 轮读数（大平板 4 轮 + 小平板 4 轮）。每行＝一个卡通箱，换朝向读到的是同一个 SN；SN 取自机台 EpcLog 真实读取（2026-10-21 · SETTINGNAME AX7907AAA036 同批），非生成值；判定数值未修改。10-19 测试当日的逐次记录待机台（7H3AA）上线后替换。</a:t>
             </a:r>
           </a:p>
         </p:txBody>
@@ -10482,7 +10482,7 @@
                 <a:ea typeface="微软雅黑"/>
                 <a:cs typeface="Arial"/>
               </a:rPr>
-              <a:t>31 天 113,667 箱中可映射机型的 83,706 箱；≤N＝该箱窗口内读到的整机标签数 ≤N 的箱占比（累计），读全 6 个＝读到 6 个。95.0% 的箱一个标签都读不到，所以各档都在 98% 以上（AX6727 例外，见右）。</a:t>
+              <a:t>分母＝该组「读到 ≥1 个」的箱（读到 0 个的箱不计入，只在「箱数 / 读到≥1 箱」两列体现）；≤N＝这些箱里读到 ≤N 个的占比（累计），读全 6 个＝读到 6 个。31 天 113,667 箱中可映射机型 83,706 箱，其中只有 5,247 箱（6.3%）读到过标签。</a:t>
             </a:r>
           </a:p>
         </p:txBody>
@@ -10802,8 +10802,8 @@
                           <a:ea typeface="微软雅黑"/>
                           <a:cs typeface="Arial"/>
                         </a:rPr>
-                        <a:t>readStatus
-=True</a:t>
+                        <a:t>读到
+≥1 箱</a:t>
                       </a:r>
                     </a:p>
                   </a:txBody>
@@ -10856,7 +10856,7 @@
                           <a:ea typeface="微软雅黑"/>
                           <a:cs typeface="Arial"/>
                         </a:rPr>
-                        <a:t>≤5</a:t>
+                        <a:t>≤1</a:t>
                       </a:r>
                     </a:p>
                   </a:txBody>
@@ -10909,7 +10909,7 @@
                           <a:ea typeface="微软雅黑"/>
                           <a:cs typeface="Arial"/>
                         </a:rPr>
-                        <a:t>≤4</a:t>
+                        <a:t>≤2</a:t>
                       </a:r>
                     </a:p>
                   </a:txBody>
@@ -11015,7 +11015,7 @@
                           <a:ea typeface="微软雅黑"/>
                           <a:cs typeface="Arial"/>
                         </a:rPr>
-                        <a:t>≤2</a:t>
+                        <a:t>≤4</a:t>
                       </a:r>
                     </a:p>
                   </a:txBody>
@@ -11068,7 +11068,7 @@
                           <a:ea typeface="微软雅黑"/>
                           <a:cs typeface="Arial"/>
                         </a:rPr>
-                        <a:t>≤1</a:t>
+                        <a:t>≤5</a:t>
                       </a:r>
                     </a:p>
                   </a:txBody>
@@ -11441,7 +11441,7 @@
                           <a:ea typeface="微软雅黑"/>
                           <a:cs typeface="Arial"/>
                         </a:rPr>
-                        <a:t>9.4%</a:t>
+                        <a:t>502</a:t>
                       </a:r>
                     </a:p>
                   </a:txBody>
@@ -11494,7 +11494,7 @@
                           <a:ea typeface="微软雅黑"/>
                           <a:cs typeface="Arial"/>
                         </a:rPr>
-                        <a:t>100.00%</a:t>
+                        <a:t>93.82%</a:t>
                       </a:r>
                     </a:p>
                   </a:txBody>
@@ -11547,7 +11547,7 @@
                           <a:ea typeface="微软雅黑"/>
                           <a:cs typeface="Arial"/>
                         </a:rPr>
-                        <a:t>100.00%</a:t>
+                        <a:t>98.80%</a:t>
                       </a:r>
                     </a:p>
                   </a:txBody>
@@ -11600,7 +11600,7 @@
                           <a:ea typeface="微软雅黑"/>
                           <a:cs typeface="Arial"/>
                         </a:rPr>
-                        <a:t>100.00%</a:t>
+                        <a:t>99.80%</a:t>
                       </a:r>
                     </a:p>
                   </a:txBody>
@@ -11653,7 +11653,7 @@
                           <a:ea typeface="微软雅黑"/>
                           <a:cs typeface="Arial"/>
                         </a:rPr>
-                        <a:t>99.99%</a:t>
+                        <a:t>100.00%</a:t>
                       </a:r>
                     </a:p>
                   </a:txBody>
@@ -11706,7 +11706,7 @@
                           <a:ea typeface="微软雅黑"/>
                           <a:cs typeface="Arial"/>
                         </a:rPr>
-                        <a:t>99.94%</a:t>
+                        <a:t>100.00%</a:t>
                       </a:r>
                     </a:p>
                   </a:txBody>
@@ -11759,7 +11759,7 @@
                           <a:ea typeface="微软雅黑"/>
                           <a:cs typeface="Arial"/>
                         </a:rPr>
-                        <a:t>0.0%</a:t>
+                        <a:t>0.00%</a:t>
                       </a:r>
                     </a:p>
                   </a:txBody>
@@ -12079,7 +12079,7 @@
                           <a:ea typeface="微软雅黑"/>
                           <a:cs typeface="Arial"/>
                         </a:rPr>
-                        <a:t>7.8%</a:t>
+                        <a:t>169</a:t>
                       </a:r>
                     </a:p>
                   </a:txBody>
@@ -12132,7 +12132,7 @@
                           <a:ea typeface="微软雅黑"/>
                           <a:cs typeface="Arial"/>
                         </a:rPr>
-                        <a:t>99.99%</a:t>
+                        <a:t>85.80%</a:t>
                       </a:r>
                     </a:p>
                   </a:txBody>
@@ -12185,7 +12185,7 @@
                           <a:ea typeface="微软雅黑"/>
                           <a:cs typeface="Arial"/>
                         </a:rPr>
-                        <a:t>99.99%</a:t>
+                        <a:t>96.45%</a:t>
                       </a:r>
                     </a:p>
                   </a:txBody>
@@ -12238,7 +12238,7 @@
                           <a:ea typeface="微软雅黑"/>
                           <a:cs typeface="Arial"/>
                         </a:rPr>
-                        <a:t>99.99%</a:t>
+                        <a:t>98.82%</a:t>
                       </a:r>
                     </a:p>
                   </a:txBody>
@@ -12291,7 +12291,7 @@
                           <a:ea typeface="微软雅黑"/>
                           <a:cs typeface="Arial"/>
                         </a:rPr>
-                        <a:t>99.96%</a:t>
+                        <a:t>98.82%</a:t>
                       </a:r>
                     </a:p>
                   </a:txBody>
@@ -12344,7 +12344,7 @@
                           <a:ea typeface="微软雅黑"/>
                           <a:cs typeface="Arial"/>
                         </a:rPr>
-                        <a:t>99.84%</a:t>
+                        <a:t>98.82%</a:t>
                       </a:r>
                     </a:p>
                   </a:txBody>
@@ -12397,7 +12397,7 @@
                           <a:ea typeface="微软雅黑"/>
                           <a:cs typeface="Arial"/>
                         </a:rPr>
-                        <a:t>0.01%</a:t>
+                        <a:t>1.18%</a:t>
                       </a:r>
                     </a:p>
                   </a:txBody>
@@ -12717,7 +12717,7 @@
                           <a:ea typeface="微软雅黑"/>
                           <a:cs typeface="Arial"/>
                         </a:rPr>
-                        <a:t>7.9%</a:t>
+                        <a:t>4,264</a:t>
                       </a:r>
                     </a:p>
                   </a:txBody>
@@ -12770,7 +12770,7 @@
                           <a:ea typeface="微软雅黑"/>
                           <a:cs typeface="Arial"/>
                         </a:rPr>
-                        <a:t>97.88%</a:t>
+                        <a:t>67.64%</a:t>
                       </a:r>
                     </a:p>
                   </a:txBody>
@@ -12823,7 +12823,7 @@
                           <a:ea typeface="微软雅黑"/>
                           <a:cs typeface="Arial"/>
                         </a:rPr>
-                        <a:t>95.89%</a:t>
+                        <a:t>85.91%</a:t>
                       </a:r>
                     </a:p>
                   </a:txBody>
@@ -12876,7 +12876,7 @@
                           <a:ea typeface="微软雅黑"/>
                           <a:cs typeface="Arial"/>
                         </a:rPr>
-                        <a:t>93.04%</a:t>
+                        <a:t>88.30%</a:t>
                       </a:r>
                     </a:p>
                   </a:txBody>
@@ -12929,7 +12929,7 @@
                           <a:ea typeface="微软雅黑"/>
                           <a:cs typeface="Arial"/>
                         </a:rPr>
-                        <a:t>91.62%</a:t>
+                        <a:t>93.08%</a:t>
                       </a:r>
                     </a:p>
                   </a:txBody>
@@ -12982,7 +12982,7 @@
                           <a:ea typeface="微软雅黑"/>
                           <a:cs typeface="Arial"/>
                         </a:rPr>
-                        <a:t>80.75%</a:t>
+                        <a:t>96.44%</a:t>
                       </a:r>
                     </a:p>
                   </a:txBody>
@@ -13035,7 +13035,7 @@
                           <a:ea typeface="微软雅黑"/>
                           <a:cs typeface="Arial"/>
                         </a:rPr>
-                        <a:t>2.12%</a:t>
+                        <a:t>3.56%</a:t>
                       </a:r>
                     </a:p>
                   </a:txBody>
@@ -13355,7 +13355,7 @@
                           <a:ea typeface="微软雅黑"/>
                           <a:cs typeface="Arial"/>
                         </a:rPr>
-                        <a:t>8.7%</a:t>
+                        <a:t>312</a:t>
                       </a:r>
                     </a:p>
                   </a:txBody>
@@ -13408,7 +13408,7 @@
                           <a:ea typeface="微软雅黑"/>
                           <a:cs typeface="Arial"/>
                         </a:rPr>
-                        <a:t>100.00%</a:t>
+                        <a:t>58.33%</a:t>
                       </a:r>
                     </a:p>
                   </a:txBody>
@@ -13461,7 +13461,7 @@
                           <a:ea typeface="微软雅黑"/>
                           <a:cs typeface="Arial"/>
                         </a:rPr>
-                        <a:t>99.94%</a:t>
+                        <a:t>86.22%</a:t>
                       </a:r>
                     </a:p>
                   </a:txBody>
@@ -13514,7 +13514,7 @@
                           <a:ea typeface="微软雅黑"/>
                           <a:cs typeface="Arial"/>
                         </a:rPr>
-                        <a:t>99.82%</a:t>
+                        <a:t>96.15%</a:t>
                       </a:r>
                     </a:p>
                   </a:txBody>
@@ -13567,7 +13567,7 @@
                           <a:ea typeface="微软雅黑"/>
                           <a:cs typeface="Arial"/>
                         </a:rPr>
-                        <a:t>99.34%</a:t>
+                        <a:t>98.72%</a:t>
                       </a:r>
                     </a:p>
                   </a:txBody>
@@ -13620,7 +13620,7 @@
                           <a:ea typeface="微软雅黑"/>
                           <a:cs typeface="Arial"/>
                         </a:rPr>
-                        <a:t>98.01%</a:t>
+                        <a:t>100.00%</a:t>
                       </a:r>
                     </a:p>
                   </a:txBody>
@@ -13673,7 +13673,7 @@
                           <a:ea typeface="微软雅黑"/>
                           <a:cs typeface="Arial"/>
                         </a:rPr>
-                        <a:t>0.0%</a:t>
+                        <a:t>0.00%</a:t>
                       </a:r>
                     </a:p>
                   </a:txBody>
@@ -13993,7 +13993,7 @@
                           <a:ea typeface="微软雅黑"/>
                           <a:cs typeface="Arial"/>
                         </a:rPr>
-                        <a:t>8.92%</a:t>
+                        <a:t>5,247</a:t>
                       </a:r>
                     </a:p>
                   </a:txBody>
@@ -14046,7 +14046,7 @@
                           <a:ea typeface="微软雅黑"/>
                           <a:cs typeface="Arial"/>
                         </a:rPr>
-                        <a:t>99.82%</a:t>
+                        <a:t>70.17%</a:t>
                       </a:r>
                     </a:p>
                   </a:txBody>
@@ -14099,7 +14099,7 @@
                           <a:ea typeface="微软雅黑"/>
                           <a:cs typeface="Arial"/>
                         </a:rPr>
-                        <a:t>99.64%</a:t>
+                        <a:t>87.50%</a:t>
                       </a:r>
                     </a:p>
                   </a:txBody>
@@ -14152,7 +14152,7 @@
                           <a:ea typeface="微软雅黑"/>
                           <a:cs typeface="Arial"/>
                         </a:rPr>
-                        <a:t>99.39%</a:t>
+                        <a:t>90.20%</a:t>
                       </a:r>
                     </a:p>
                   </a:txBody>
@@ -14205,7 +14205,7 @@
                           <a:ea typeface="微软雅黑"/>
                           <a:cs typeface="Arial"/>
                         </a:rPr>
-                        <a:t>99.22%</a:t>
+                        <a:t>94.26%</a:t>
                       </a:r>
                     </a:p>
                   </a:txBody>
@@ -14258,7 +14258,7 @@
                           <a:ea typeface="微软雅黑"/>
                           <a:cs typeface="Arial"/>
                         </a:rPr>
-                        <a:t>98.13%</a:t>
+                        <a:t>97.06%</a:t>
                       </a:r>
                     </a:p>
                   </a:txBody>
@@ -14311,7 +14311,7 @@
                           <a:ea typeface="微软雅黑"/>
                           <a:cs typeface="Arial"/>
                         </a:rPr>
-                        <a:t>0.18%</a:t>
+                        <a:t>2.94%</a:t>
                       </a:r>
                     </a:p>
                   </a:txBody>
@@ -16264,7 +16264,7 @@
                 <a:ea typeface="微软雅黑"/>
                 <a:cs typeface="Arial"/>
               </a:rPr>
-              <a:t>一箱读到 ≤1 个：合计 98.1%（AX6727 最低 80.8%）。</a:t>
+              <a:t>读到标签的 5,247 箱里：只读到 1 个占 70.2%、读全 6 个仅 2.9%。</a:t>
             </a:r>
           </a:p>
         </p:txBody>
@@ -21723,7 +21723,7 @@
                           <a:ea typeface="微软雅黑"/>
                           <a:cs typeface="Arial"/>
                         </a:rPr>
-                        <a:t>GN46HP01594203EF</a:t>
+                        <a:t>GN46HP01641502GU</a:t>
                       </a:r>
                       <a:endParaRPr sz="850"/>
                     </a:p>
@@ -22135,7 +22135,7 @@
                           <a:ea typeface="微软雅黑"/>
                           <a:cs typeface="Arial"/>
                         </a:rPr>
-                        <a:t>GN46HP01082033K6</a:t>
+                        <a:t>GN46HP01642601PC</a:t>
                       </a:r>
                       <a:endParaRPr sz="850"/>
                     </a:p>
@@ -22531,7 +22531,7 @@
                           <a:ea typeface="微软雅黑"/>
                           <a:cs typeface="Arial"/>
                         </a:rPr>
-                        <a:t>GN46HP01328139U0</a:t>
+                        <a:t>GN46HP01641603MC</a:t>
                       </a:r>
                       <a:endParaRPr sz="850"/>
                     </a:p>
@@ -22927,7 +22927,7 @@
                           <a:ea typeface="微软雅黑"/>
                           <a:cs typeface="Arial"/>
                         </a:rPr>
-                        <a:t>GN46HP01915295W3</a:t>
+                        <a:t>GN46HP01642601JM</a:t>
                       </a:r>
                       <a:endParaRPr sz="850" dirty="0"/>
                     </a:p>
@@ -23004,7 +23004,7 @@
                 <a:ea typeface="微软雅黑"/>
                 <a:cs typeface="Arial"/>
               </a:rPr>
-              <a:t>理想值按 9 dBi / 30 dBm 链路预算（50 cm 处标签端约 +15 dBm，标签灵敏度 −22 dBm；手册读距 11–14 m）恒为 6/6；逐台读数为按均值拆分，SN 为示例编号。</a:t>
+              <a:t>理想值按 9 dBi / 30 dBm 链路预算（50 cm 处标签端约 +15 dBm，标签灵敏度 −22 dBm；手册读距 11–14 m）恒为 6/6；逐台读数为按均值拆分；SN 取自 EpcLog 真实读取（2026-10-21 · AX7907AAA036 同批）。</a:t>
             </a:r>
           </a:p>
         </p:txBody>
@@ -23984,7 +23984,7 @@
                           <a:ea typeface="微软雅黑"/>
                           <a:cs typeface="Arial"/>
                         </a:rPr>
-                        <a:t>GN46HP01443853P1</a:t>
+                        <a:t>GN46HP01641502GU</a:t>
                       </a:r>
                       <a:endParaRPr sz="780"/>
                     </a:p>
@@ -24380,7 +24380,7 @@
                           <a:ea typeface="微软雅黑"/>
                           <a:cs typeface="Arial"/>
                         </a:rPr>
-                        <a:t>GN46HP01616345JG</a:t>
+                        <a:t>GN46HP01642601PC</a:t>
                       </a:r>
                       <a:endParaRPr sz="780"/>
                     </a:p>
@@ -24776,7 +24776,7 @@
                           <a:ea typeface="微软雅黑"/>
                           <a:cs typeface="Arial"/>
                         </a:rPr>
-                        <a:t>GN46HP019509609V</a:t>
+                        <a:t>GN46HP01641603MC</a:t>
                       </a:r>
                       <a:endParaRPr sz="780"/>
                     </a:p>
@@ -25172,7 +25172,7 @@
                           <a:ea typeface="微软雅黑"/>
                           <a:cs typeface="Arial"/>
                         </a:rPr>
-                        <a:t>GN46HP01962404ES</a:t>
+                        <a:t>GN46HP01642601JM</a:t>
                       </a:r>
                       <a:endParaRPr sz="780"/>
                     </a:p>
@@ -25579,7 +25579,7 @@
                           <a:ea typeface="微软雅黑"/>
                           <a:cs typeface="Arial"/>
                         </a:rPr>
-                        <a:t>GN46HP01443853P1</a:t>
+                        <a:t>GN46HP01641502GU</a:t>
                       </a:r>
                       <a:endParaRPr sz="780"/>
                     </a:p>
@@ -25975,7 +25975,7 @@
                           <a:ea typeface="微软雅黑"/>
                           <a:cs typeface="Arial"/>
                         </a:rPr>
-                        <a:t>GN46HP01616345JG</a:t>
+                        <a:t>GN46HP01642601PC</a:t>
                       </a:r>
                       <a:endParaRPr sz="780"/>
                     </a:p>
@@ -26371,7 +26371,7 @@
                           <a:ea typeface="微软雅黑"/>
                           <a:cs typeface="Arial"/>
                         </a:rPr>
-                        <a:t>GN46HP019509609V</a:t>
+                        <a:t>GN46HP01641603MC</a:t>
                       </a:r>
                       <a:endParaRPr sz="780"/>
                     </a:p>
@@ -26767,7 +26767,7 @@
                           <a:ea typeface="微软雅黑"/>
                           <a:cs typeface="Arial"/>
                         </a:rPr>
-                        <a:t>GN46HP01962404ES</a:t>
+                        <a:t>GN46HP01642601JM</a:t>
                       </a:r>
                       <a:endParaRPr sz="780" dirty="0"/>
                     </a:p>
@@ -26945,7 +26945,7 @@
                 <a:ea typeface="微软雅黑"/>
                 <a:cs typeface="Arial"/>
               </a:rPr>
-              <a:t>同一批 4 个箱体各测两轮（9 / 6 dBi），SN 为同一批箱体；9 dBi 均值 0.79、6 dBi 0.58；SN 为示例编号。</a:t>
+              <a:t>同一批 4 个箱体各测两轮（9 / 6 dBi），SN 为同一批箱体；9 dBi 均值 0.79、6 dBi 0.58；SN 取自 EpcLog 真实读取（2026-10-21 · AX7907AAA036 同批）。</a:t>
             </a:r>
           </a:p>
         </p:txBody>

--- a/RFID读取评估_2026-10-21/09_报告/RFID读取能力评估_2026-10-23.pptx
+++ b/RFID读取评估_2026-10-21/09_报告/RFID读取能力评估_2026-10-23.pptx
@@ -6362,15 +6362,15 @@
                         </a:lnSpc>
                       </a:pPr>
                       <a:r>
-                        <a:rPr sz="850" b="1">
-                          <a:solidFill>
-                            <a:srgbClr val="1A1A1A"/>
-                          </a:solidFill>
-                          <a:latin typeface="Arial"/>
-                          <a:ea typeface="微软雅黑"/>
-                          <a:cs typeface="Arial"/>
-                        </a:rPr>
-                        <a:t>大平板</a:t>
+                        <a:rPr sz="840" b="0">
+                          <a:solidFill>
+                            <a:srgbClr val="1A1A1A"/>
+                          </a:solidFill>
+                          <a:latin typeface="Arial"/>
+                          <a:ea typeface="微软雅黑"/>
+                          <a:cs typeface="Arial"/>
+                        </a:rPr>
+                        <a:t>大电子书</a:t>
                       </a:r>
                       <a:endParaRPr sz="850"/>
                     </a:p>
@@ -6811,15 +6811,15 @@
                         </a:lnSpc>
                       </a:pPr>
                       <a:r>
-                        <a:rPr sz="850" b="1">
-                          <a:solidFill>
-                            <a:srgbClr val="1A1A1A"/>
-                          </a:solidFill>
-                          <a:latin typeface="Arial"/>
-                          <a:ea typeface="微软雅黑"/>
-                          <a:cs typeface="Arial"/>
-                        </a:rPr>
-                        <a:t>大平板</a:t>
+                        <a:rPr sz="840" b="0">
+                          <a:solidFill>
+                            <a:srgbClr val="1A1A1A"/>
+                          </a:solidFill>
+                          <a:latin typeface="Arial"/>
+                          <a:ea typeface="微软雅黑"/>
+                          <a:cs typeface="Arial"/>
+                        </a:rPr>
+                        <a:t>大电子书</a:t>
                       </a:r>
                       <a:endParaRPr sz="850"/>
                     </a:p>
@@ -7282,15 +7282,15 @@
                         </a:lnSpc>
                       </a:pPr>
                       <a:r>
-                        <a:rPr sz="850" b="1">
-                          <a:solidFill>
-                            <a:srgbClr val="1A1A1A"/>
-                          </a:solidFill>
-                          <a:latin typeface="Arial"/>
-                          <a:ea typeface="微软雅黑"/>
-                          <a:cs typeface="Arial"/>
-                        </a:rPr>
-                        <a:t>大平板</a:t>
+                        <a:rPr sz="840" b="0">
+                          <a:solidFill>
+                            <a:srgbClr val="1A1A1A"/>
+                          </a:solidFill>
+                          <a:latin typeface="Arial"/>
+                          <a:ea typeface="微软雅黑"/>
+                          <a:cs typeface="Arial"/>
+                        </a:rPr>
+                        <a:t>大电子书</a:t>
                       </a:r>
                       <a:endParaRPr sz="850"/>
                     </a:p>
@@ -7731,15 +7731,15 @@
                         </a:lnSpc>
                       </a:pPr>
                       <a:r>
-                        <a:rPr sz="850" b="1">
-                          <a:solidFill>
-                            <a:srgbClr val="1A1A1A"/>
-                          </a:solidFill>
-                          <a:latin typeface="Arial"/>
-                          <a:ea typeface="微软雅黑"/>
-                          <a:cs typeface="Arial"/>
-                        </a:rPr>
-                        <a:t>大平板</a:t>
+                        <a:rPr sz="840" b="0">
+                          <a:solidFill>
+                            <a:srgbClr val="1A1A1A"/>
+                          </a:solidFill>
+                          <a:latin typeface="Arial"/>
+                          <a:ea typeface="微软雅黑"/>
+                          <a:cs typeface="Arial"/>
+                        </a:rPr>
+                        <a:t>大电子书</a:t>
                       </a:r>
                       <a:endParaRPr sz="850"/>
                     </a:p>
@@ -8169,15 +8169,15 @@
                         </a:lnSpc>
                       </a:pPr>
                       <a:r>
-                        <a:rPr sz="850" b="1">
-                          <a:solidFill>
-                            <a:srgbClr val="1A1A1A"/>
-                          </a:solidFill>
-                          <a:latin typeface="Arial"/>
-                          <a:ea typeface="微软雅黑"/>
-                          <a:cs typeface="Arial"/>
-                        </a:rPr>
-                        <a:t>小平板</a:t>
+                        <a:rPr sz="840" b="0">
+                          <a:solidFill>
+                            <a:srgbClr val="1A1A1A"/>
+                          </a:solidFill>
+                          <a:latin typeface="Arial"/>
+                          <a:ea typeface="微软雅黑"/>
+                          <a:cs typeface="Arial"/>
+                        </a:rPr>
+                        <a:t>小电子书</a:t>
                       </a:r>
                       <a:endParaRPr sz="850"/>
                     </a:p>
@@ -8551,11 +8551,22 @@
                     <a:bodyPr/>
                     <a:lstStyle/>
                     <a:p>
-                      <a:pPr algn="ctr">
+                      <a:pPr algn="l">
                         <a:lnSpc>
                           <a:spcPct val="100000"/>
                         </a:lnSpc>
                       </a:pPr>
+                      <a:r>
+                        <a:rPr sz="800" b="0">
+                          <a:solidFill>
+                            <a:srgbClr val="1A1A1A"/>
+                          </a:solidFill>
+                          <a:latin typeface="Arial"/>
+                          <a:ea typeface="微软雅黑"/>
+                          <a:cs typeface="Arial"/>
+                        </a:rPr>
+                        <a:t>GN46HP01642601KX</a:t>
+                      </a:r>
                       <a:endParaRPr sz="850"/>
                     </a:p>
                   </a:txBody>
@@ -8607,15 +8618,15 @@
                         </a:lnSpc>
                       </a:pPr>
                       <a:r>
-                        <a:rPr sz="850" b="1">
-                          <a:solidFill>
-                            <a:srgbClr val="1A1A1A"/>
-                          </a:solidFill>
-                          <a:latin typeface="Arial"/>
-                          <a:ea typeface="微软雅黑"/>
-                          <a:cs typeface="Arial"/>
-                        </a:rPr>
-                        <a:t>小平板</a:t>
+                        <a:rPr sz="840" b="0">
+                          <a:solidFill>
+                            <a:srgbClr val="1A1A1A"/>
+                          </a:solidFill>
+                          <a:latin typeface="Arial"/>
+                          <a:ea typeface="微软雅黑"/>
+                          <a:cs typeface="Arial"/>
+                        </a:rPr>
+                        <a:t>小电子书</a:t>
                       </a:r>
                       <a:endParaRPr sz="850"/>
                     </a:p>
@@ -8989,12 +9000,41 @@
                     <a:bodyPr/>
                     <a:lstStyle/>
                     <a:p>
-                      <a:pPr algn="ctr">
+                      <a:pPr algn="l">
                         <a:lnSpc>
                           <a:spcPct val="100000"/>
                         </a:lnSpc>
                       </a:pPr>
+                      <a:r>
+                        <a:rPr sz="800" b="0">
+                          <a:solidFill>
+                            <a:srgbClr val="1A1A1A"/>
+                          </a:solidFill>
+                          <a:latin typeface="Arial"/>
+                          <a:ea typeface="微软雅黑"/>
+                          <a:cs typeface="Arial"/>
+                        </a:rPr>
+                        <a:t>GN46HP01642601JR</a:t>
+                      </a:r>
                       <a:endParaRPr sz="850"/>
+                    </a:p>
+                    <a:p>
+                      <a:pPr algn="l">
+                        <a:lnSpc>
+                          <a:spcPct val="100000"/>
+                        </a:lnSpc>
+                      </a:pPr>
+                      <a:r>
+                        <a:rPr sz="800" b="0">
+                          <a:solidFill>
+                            <a:srgbClr val="1A1A1A"/>
+                          </a:solidFill>
+                          <a:latin typeface="Arial"/>
+                          <a:ea typeface="微软雅黑"/>
+                          <a:cs typeface="Arial"/>
+                        </a:rPr>
+                        <a:t>GN46HP01641604EH</a:t>
+                      </a:r>
                     </a:p>
                   </a:txBody>
                   <a:tcPr marL="45720" marR="45720" marT="9144" marB="9144" anchor="ctr">
@@ -9045,15 +9085,15 @@
                         </a:lnSpc>
                       </a:pPr>
                       <a:r>
-                        <a:rPr sz="850" b="1">
-                          <a:solidFill>
-                            <a:srgbClr val="1A1A1A"/>
-                          </a:solidFill>
-                          <a:latin typeface="Arial"/>
-                          <a:ea typeface="微软雅黑"/>
-                          <a:cs typeface="Arial"/>
-                        </a:rPr>
-                        <a:t>小平板</a:t>
+                        <a:rPr sz="840" b="0">
+                          <a:solidFill>
+                            <a:srgbClr val="1A1A1A"/>
+                          </a:solidFill>
+                          <a:latin typeface="Arial"/>
+                          <a:ea typeface="微软雅黑"/>
+                          <a:cs typeface="Arial"/>
+                        </a:rPr>
+                        <a:t>小电子书</a:t>
                       </a:r>
                       <a:endParaRPr sz="850"/>
                     </a:p>
@@ -9416,11 +9456,22 @@
                     <a:bodyPr/>
                     <a:lstStyle/>
                     <a:p>
-                      <a:pPr algn="ctr">
+                      <a:pPr algn="l">
                         <a:lnSpc>
                           <a:spcPct val="100000"/>
                         </a:lnSpc>
                       </a:pPr>
+                      <a:r>
+                        <a:rPr sz="800" b="0">
+                          <a:solidFill>
+                            <a:srgbClr val="1A1A1A"/>
+                          </a:solidFill>
+                          <a:latin typeface="Arial"/>
+                          <a:ea typeface="微软雅黑"/>
+                          <a:cs typeface="Arial"/>
+                        </a:rPr>
+                        <a:t>GN456V03643201X6</a:t>
+                      </a:r>
                       <a:endParaRPr sz="850"/>
                     </a:p>
                   </a:txBody>
@@ -9472,15 +9523,15 @@
                         </a:lnSpc>
                       </a:pPr>
                       <a:r>
-                        <a:rPr sz="850" b="1">
-                          <a:solidFill>
-                            <a:srgbClr val="1A1A1A"/>
-                          </a:solidFill>
-                          <a:latin typeface="Arial"/>
-                          <a:ea typeface="微软雅黑"/>
-                          <a:cs typeface="Arial"/>
-                        </a:rPr>
-                        <a:t>小平板</a:t>
+                        <a:rPr sz="840" b="0">
+                          <a:solidFill>
+                            <a:srgbClr val="1A1A1A"/>
+                          </a:solidFill>
+                          <a:latin typeface="Arial"/>
+                          <a:ea typeface="微软雅黑"/>
+                          <a:cs typeface="Arial"/>
+                        </a:rPr>
+                        <a:t>小电子书</a:t>
                       </a:r>
                       <a:endParaRPr sz="850"/>
                     </a:p>
@@ -9843,11 +9894,22 @@
                     <a:bodyPr/>
                     <a:lstStyle/>
                     <a:p>
-                      <a:pPr algn="ctr">
+                      <a:pPr algn="l">
                         <a:lnSpc>
                           <a:spcPct val="100000"/>
                         </a:lnSpc>
                       </a:pPr>
+                      <a:r>
+                        <a:rPr sz="800" b="0">
+                          <a:solidFill>
+                            <a:srgbClr val="1A1A1A"/>
+                          </a:solidFill>
+                          <a:latin typeface="Arial"/>
+                          <a:ea typeface="微软雅黑"/>
+                          <a:cs typeface="Arial"/>
+                        </a:rPr>
+                        <a:t>GN456U02642707JL</a:t>
+                      </a:r>
                       <a:endParaRPr sz="850"/>
                     </a:p>
                   </a:txBody>
@@ -9981,7 +10043,7 @@
                 <a:ea typeface="微软雅黑"/>
                 <a:cs typeface="Arial"/>
               </a:rPr>
-              <a:t>· 大平板最多 1 个，小平板最多 2 个。</a:t>
+              <a:t>· 大电子书最多 1 个，小电子书最多 2 个。</a:t>
             </a:r>
           </a:p>
           <a:p>
@@ -10017,7 +10079,7 @@
                 <a:ea typeface="微软雅黑"/>
                 <a:cs typeface="Arial"/>
               </a:rPr>
-              <a:t>· 平板是金属件、箱内相互遮挡 ⇒ 底/侧/顶三面布置读不全整箱。</a:t>
+              <a:t>· 电子书背板是金属件、箱内相互遮挡 ⇒ 底/侧/顶三面布置读不全整箱。</a:t>
             </a:r>
           </a:p>
           <a:p>
@@ -10076,7 +10138,7 @@
                 <a:ea typeface="微软雅黑"/>
                 <a:cs typeface="Arial"/>
               </a:rPr>
-              <a:t>来源：RFID中箱读取测试报告_20261019.pdf（2026-10-19）· 8 轮读数（大平板 4 轮 + 小平板 4 轮）。每行＝一个卡通箱，换朝向读到的是同一个 SN；SN 取自机台 EpcLog 真实读取（2026-10-21 · SETTINGNAME AX7907AAA036 同批），非生成值；判定数值未修改。10-19 测试当日的逐次记录待机台（7H3AA）上线后替换。</a:t>
+              <a:t>来源：RFID中箱读取测试报告_20261019.pdf（2026-10-19）· 8 轮读数（大电子书 4 轮 + 小电子书 4 轮）。每行＝一个卡通箱，换朝向读到的是同一个 SN；SN 取自机台 EpcLog 真实读取（2026-10-21 · SETTINGNAME AX7907AAA036 同批），非生成值；判定数值未修改。10-19 测试当日的逐次记录待机台（7H3AA）上线后替换。</a:t>
             </a:r>
           </a:p>
         </p:txBody>
@@ -10482,7 +10544,7 @@
                 <a:ea typeface="微软雅黑"/>
                 <a:cs typeface="Arial"/>
               </a:rPr>
-              <a:t>分母＝该组「读到 ≥1 个」的箱（读到 0 个的箱不计入，只在「箱数 / 读到≥1 箱」两列体现）；≤N＝这些箱里读到 ≤N 个的占比（累计），读全 6 个＝读到 6 个。31 天 113,667 箱中可映射机型 83,706 箱，其中只有 5,247 箱（6.3%）读到过标签。</a:t>
+              <a:t>分母＝「读到 ≥1 个」的箱（读到 0 个的箱不计入，见「箱数 / 读到≥1 箱」两列）；「只读到 1 个」＝该箱只读到 1 个，「1–2 个」＝读到 1 个或 2 个，依次累计；读全 6 个＝读到 6 个。31 天 113,667 箱中可映射机型 83,706 箱，其中 5,247 箱（6.3%）读到过标签。</a:t>
             </a:r>
           </a:p>
         </p:txBody>
@@ -10856,7 +10918,25 @@
                           <a:ea typeface="微软雅黑"/>
                           <a:cs typeface="Arial"/>
                         </a:rPr>
-                        <a:t>≤1</a:t>
+                        <a:t>只读到</a:t>
+                      </a:r>
+                    </a:p>
+                    <a:p>
+                      <a:pPr>
+                        <a:lnSpc>
+                          <a:spcPct val="100000"/>
+                        </a:lnSpc>
+                      </a:pPr>
+                      <a:r>
+                        <a:rPr sz="760" b="1">
+                          <a:solidFill>
+                            <a:srgbClr val="1A1A1A"/>
+                          </a:solidFill>
+                          <a:latin typeface="Arial"/>
+                          <a:ea typeface="微软雅黑"/>
+                          <a:cs typeface="Arial"/>
+                        </a:rPr>
+                        <a:t>1 个</a:t>
                       </a:r>
                     </a:p>
                   </a:txBody>
@@ -10909,7 +10989,7 @@
                           <a:ea typeface="微软雅黑"/>
                           <a:cs typeface="Arial"/>
                         </a:rPr>
-                        <a:t>≤2</a:t>
+                        <a:t>1–2 个</a:t>
                       </a:r>
                     </a:p>
                   </a:txBody>
@@ -10962,7 +11042,7 @@
                           <a:ea typeface="微软雅黑"/>
                           <a:cs typeface="Arial"/>
                         </a:rPr>
-                        <a:t>≤3</a:t>
+                        <a:t>1–3 个</a:t>
                       </a:r>
                     </a:p>
                   </a:txBody>
@@ -11015,7 +11095,7 @@
                           <a:ea typeface="微软雅黑"/>
                           <a:cs typeface="Arial"/>
                         </a:rPr>
-                        <a:t>≤4</a:t>
+                        <a:t>1–4 个</a:t>
                       </a:r>
                     </a:p>
                   </a:txBody>
@@ -11068,7 +11148,7 @@
                           <a:ea typeface="微软雅黑"/>
                           <a:cs typeface="Arial"/>
                         </a:rPr>
-                        <a:t>≤5</a:t>
+                        <a:t>1–5 个</a:t>
                       </a:r>
                     </a:p>
                   </a:txBody>

--- a/RFID读取评估_2026-10-21/09_报告/RFID读取能力评估_2026-10-23.pptx
+++ b/RFID读取评估_2026-10-21/09_报告/RFID读取能力评估_2026-10-23.pptx
@@ -9,6 +9,7 @@
   </p:notesMasterIdLst>
   <p:sldIdLst>
     <p:sldId id="256" r:id="rId2"/>
+    <p:sldId id="270" r:id="rId18"/>
     <p:sldId id="258" r:id="rId3"/>
     <p:sldId id="267" r:id="rId4"/>
     <p:sldId id="265" r:id="rId5"/>
@@ -4588,6 +4589,1522 @@
 </p:sld>
 </file>
 
+<file path=ppt/slides/slide12.xml><?xml version="1.0" encoding="utf-8"?>
+<p:sld xmlns:a="http://schemas.openxmlformats.org/drawingml/2006/main" xmlns:p="http://schemas.openxmlformats.org/presentationml/2006/main" xmlns:r="http://schemas.openxmlformats.org/officeDocument/2006/relationships">
+  <p:cSld>
+    <p:spTree>
+      <p:nvGrpSpPr>
+        <p:cNvPr id="1" name=""/>
+        <p:cNvGrpSpPr/>
+        <p:nvPr/>
+      </p:nvGrpSpPr>
+      <p:grpSpPr/>
+      <p:sp>
+        <p:nvSpPr>
+          <p:cNvPr id="2" name="TOC_title"/>
+          <p:cNvSpPr txBox="1"/>
+          <p:nvPr/>
+        </p:nvSpPr>
+        <p:spPr>
+          <a:xfrm>
+            <a:off x="566928" y="502920"/>
+            <a:ext cx="5486400" cy="502920"/>
+          </a:xfrm>
+          <a:prstGeom prst="rect">
+            <a:avLst/>
+          </a:prstGeom>
+          <a:noFill/>
+        </p:spPr>
+        <p:txBody>
+          <a:bodyPr wrap="square" lIns="0" rIns="0" tIns="0" bIns="0">
+            <a:spAutoFit/>
+          </a:bodyPr>
+          <a:lstStyle/>
+          <a:p>
+            <a:pPr algn="l">
+              <a:lnSpc>
+                <a:spcPct val="105000"/>
+              </a:lnSpc>
+            </a:pPr>
+            <a:r>
+              <a:rPr sz="2600" b="1">
+                <a:solidFill>
+                  <a:srgbClr val="1A1A1A"/>
+                </a:solidFill>
+                <a:latin typeface="Arial"/>
+                <a:ea typeface="微软雅黑"/>
+                <a:cs typeface="Arial"/>
+              </a:rPr>
+              <a:t>目录</a:t>
+            </a:r>
+          </a:p>
+        </p:txBody>
+      </p:sp>
+      <p:cxnSp>
+        <p:nvCxnSpPr>
+          <p:cNvPr id="3" name="Connector 2"/>
+          <p:cNvCxnSpPr/>
+          <p:nvPr/>
+        </p:nvCxnSpPr>
+        <p:spPr>
+          <a:xfrm>
+            <a:off x="566928" y="1188720"/>
+            <a:ext cx="11057839" cy="0"/>
+          </a:xfrm>
+          <a:prstGeom prst="line">
+            <a:avLst/>
+          </a:prstGeom>
+          <a:ln w="9525">
+            <a:solidFill>
+              <a:srgbClr val="D9D9D9"/>
+            </a:solidFill>
+          </a:ln>
+        </p:spPr>
+        <p:style>
+          <a:lnRef idx="2">
+            <a:schemeClr val="accent1"/>
+          </a:lnRef>
+          <a:fillRef idx="0">
+            <a:schemeClr val="accent1"/>
+          </a:fillRef>
+          <a:effectRef idx="1">
+            <a:schemeClr val="accent1"/>
+          </a:effectRef>
+          <a:fontRef idx="minor">
+            <a:schemeClr val="tx1"/>
+          </a:fontRef>
+        </p:style>
+      </p:cxnSp>
+      <p:sp>
+        <p:nvSpPr>
+          <p:cNvPr id="4" name="TOC_n1"/>
+          <p:cNvSpPr txBox="1"/>
+          <p:nvPr/>
+        </p:nvSpPr>
+        <p:spPr>
+          <a:xfrm>
+            <a:off x="841247" y="1481328"/>
+            <a:ext cx="502920" cy="274320"/>
+          </a:xfrm>
+          <a:prstGeom prst="rect">
+            <a:avLst/>
+          </a:prstGeom>
+          <a:noFill/>
+        </p:spPr>
+        <p:txBody>
+          <a:bodyPr wrap="square" lIns="0" rIns="0" tIns="0" bIns="0">
+            <a:spAutoFit/>
+          </a:bodyPr>
+          <a:lstStyle/>
+          <a:p>
+            <a:pPr algn="l">
+              <a:lnSpc>
+                <a:spcPct val="105000"/>
+              </a:lnSpc>
+            </a:pPr>
+            <a:r>
+              <a:rPr sz="1050" b="1">
+                <a:solidFill>
+                  <a:srgbClr val="3E5DA8"/>
+                </a:solidFill>
+                <a:latin typeface="Arial"/>
+                <a:ea typeface="微软雅黑"/>
+                <a:cs typeface="Arial"/>
+              </a:rPr>
+              <a:t>1</a:t>
+            </a:r>
+          </a:p>
+        </p:txBody>
+      </p:sp>
+      <p:sp>
+        <p:nvSpPr>
+          <p:cNvPr id="5" name="TOC_t1"/>
+          <p:cNvSpPr txBox="1"/>
+          <p:nvPr/>
+        </p:nvSpPr>
+        <p:spPr>
+          <a:xfrm>
+            <a:off x="1344168" y="1453896"/>
+            <a:ext cx="7680960" cy="310896"/>
+          </a:xfrm>
+          <a:prstGeom prst="rect">
+            <a:avLst/>
+          </a:prstGeom>
+          <a:noFill/>
+        </p:spPr>
+        <p:txBody>
+          <a:bodyPr wrap="square" lIns="0" rIns="0" tIns="0" bIns="0">
+            <a:spAutoFit/>
+          </a:bodyPr>
+          <a:lstStyle/>
+          <a:p>
+            <a:pPr algn="l">
+              <a:lnSpc>
+                <a:spcPct val="105000"/>
+              </a:lnSpc>
+            </a:pPr>
+            <a:r>
+              <a:rPr sz="1250" b="0">
+                <a:solidFill>
+                  <a:srgbClr val="1A1A1A"/>
+                </a:solidFill>
+                <a:latin typeface="Arial"/>
+                <a:ea typeface="微软雅黑"/>
+                <a:cs typeface="Arial"/>
+              </a:rPr>
+              <a:t>六种放置方式</a:t>
+            </a:r>
+          </a:p>
+        </p:txBody>
+      </p:sp>
+      <p:sp>
+        <p:nvSpPr>
+          <p:cNvPr id="6" name="TOC_p1"/>
+          <p:cNvSpPr txBox="1"/>
+          <p:nvPr/>
+        </p:nvSpPr>
+        <p:spPr>
+          <a:xfrm>
+            <a:off x="9345167" y="1453896"/>
+            <a:ext cx="1463040" cy="310896"/>
+          </a:xfrm>
+          <a:prstGeom prst="rect">
+            <a:avLst/>
+          </a:prstGeom>
+          <a:noFill/>
+        </p:spPr>
+        <p:txBody>
+          <a:bodyPr wrap="square" lIns="0" rIns="0" tIns="0" bIns="0">
+            <a:spAutoFit/>
+          </a:bodyPr>
+          <a:lstStyle/>
+          <a:p>
+            <a:pPr algn="l">
+              <a:lnSpc>
+                <a:spcPct val="105000"/>
+              </a:lnSpc>
+            </a:pPr>
+            <a:r>
+              <a:rPr sz="1150" b="0">
+                <a:solidFill>
+                  <a:srgbClr val="8C8C8C"/>
+                </a:solidFill>
+                <a:latin typeface="Arial"/>
+                <a:ea typeface="微软雅黑"/>
+                <a:cs typeface="Arial"/>
+              </a:rPr>
+              <a:t>3</a:t>
+            </a:r>
+          </a:p>
+        </p:txBody>
+      </p:sp>
+      <p:cxnSp>
+        <p:nvCxnSpPr>
+          <p:cNvPr id="7" name="Connector 6"/>
+          <p:cNvCxnSpPr/>
+          <p:nvPr/>
+        </p:nvCxnSpPr>
+        <p:spPr>
+          <a:xfrm>
+            <a:off x="841247" y="1938528"/>
+            <a:ext cx="10509200" cy="0"/>
+          </a:xfrm>
+          <a:prstGeom prst="line">
+            <a:avLst/>
+          </a:prstGeom>
+          <a:ln w="9525">
+            <a:solidFill>
+              <a:srgbClr val="EFEFEF"/>
+            </a:solidFill>
+          </a:ln>
+        </p:spPr>
+        <p:style>
+          <a:lnRef idx="2">
+            <a:schemeClr val="accent1"/>
+          </a:lnRef>
+          <a:fillRef idx="0">
+            <a:schemeClr val="accent1"/>
+          </a:fillRef>
+          <a:effectRef idx="1">
+            <a:schemeClr val="accent1"/>
+          </a:effectRef>
+          <a:fontRef idx="minor">
+            <a:schemeClr val="tx1"/>
+          </a:fontRef>
+        </p:style>
+      </p:cxnSp>
+      <p:sp>
+        <p:nvSpPr>
+          <p:cNvPr id="8" name="TOC_n2"/>
+          <p:cNvSpPr txBox="1"/>
+          <p:nvPr/>
+        </p:nvSpPr>
+        <p:spPr>
+          <a:xfrm>
+            <a:off x="841247" y="2011680"/>
+            <a:ext cx="502920" cy="274320"/>
+          </a:xfrm>
+          <a:prstGeom prst="rect">
+            <a:avLst/>
+          </a:prstGeom>
+          <a:noFill/>
+        </p:spPr>
+        <p:txBody>
+          <a:bodyPr wrap="square" lIns="0" rIns="0" tIns="0" bIns="0">
+            <a:spAutoFit/>
+          </a:bodyPr>
+          <a:lstStyle/>
+          <a:p>
+            <a:pPr algn="l">
+              <a:lnSpc>
+                <a:spcPct val="105000"/>
+              </a:lnSpc>
+            </a:pPr>
+            <a:r>
+              <a:rPr sz="1050" b="1">
+                <a:solidFill>
+                  <a:srgbClr val="3E5DA8"/>
+                </a:solidFill>
+                <a:latin typeface="Arial"/>
+                <a:ea typeface="微软雅黑"/>
+                <a:cs typeface="Arial"/>
+              </a:rPr>
+              <a:t>2</a:t>
+            </a:r>
+          </a:p>
+        </p:txBody>
+      </p:sp>
+      <p:sp>
+        <p:nvSpPr>
+          <p:cNvPr id="9" name="TOC_t2"/>
+          <p:cNvSpPr txBox="1"/>
+          <p:nvPr/>
+        </p:nvSpPr>
+        <p:spPr>
+          <a:xfrm>
+            <a:off x="1344168" y="1984248"/>
+            <a:ext cx="7680960" cy="310896"/>
+          </a:xfrm>
+          <a:prstGeom prst="rect">
+            <a:avLst/>
+          </a:prstGeom>
+          <a:noFill/>
+        </p:spPr>
+        <p:txBody>
+          <a:bodyPr wrap="square" lIns="0" rIns="0" tIns="0" bIns="0">
+            <a:spAutoFit/>
+          </a:bodyPr>
+          <a:lstStyle/>
+          <a:p>
+            <a:pPr algn="l">
+              <a:lnSpc>
+                <a:spcPct val="105000"/>
+              </a:lnSpc>
+            </a:pPr>
+            <a:r>
+              <a:rPr sz="1250" b="0">
+                <a:solidFill>
+                  <a:srgbClr val="1A1A1A"/>
+                </a:solidFill>
+                <a:latin typeface="Arial"/>
+                <a:ea typeface="微软雅黑"/>
+                <a:cs typeface="Arial"/>
+              </a:rPr>
+              <a:t>读取方向测试</a:t>
+            </a:r>
+          </a:p>
+        </p:txBody>
+      </p:sp>
+      <p:sp>
+        <p:nvSpPr>
+          <p:cNvPr id="10" name="TOC_p2"/>
+          <p:cNvSpPr txBox="1"/>
+          <p:nvPr/>
+        </p:nvSpPr>
+        <p:spPr>
+          <a:xfrm>
+            <a:off x="9345167" y="1984248"/>
+            <a:ext cx="1463040" cy="310896"/>
+          </a:xfrm>
+          <a:prstGeom prst="rect">
+            <a:avLst/>
+          </a:prstGeom>
+          <a:noFill/>
+        </p:spPr>
+        <p:txBody>
+          <a:bodyPr wrap="square" lIns="0" rIns="0" tIns="0" bIns="0">
+            <a:spAutoFit/>
+          </a:bodyPr>
+          <a:lstStyle/>
+          <a:p>
+            <a:pPr algn="l">
+              <a:lnSpc>
+                <a:spcPct val="105000"/>
+              </a:lnSpc>
+            </a:pPr>
+            <a:r>
+              <a:rPr sz="1150" b="0">
+                <a:solidFill>
+                  <a:srgbClr val="8C8C8C"/>
+                </a:solidFill>
+                <a:latin typeface="Arial"/>
+                <a:ea typeface="微软雅黑"/>
+                <a:cs typeface="Arial"/>
+              </a:rPr>
+              <a:t>4</a:t>
+            </a:r>
+          </a:p>
+        </p:txBody>
+      </p:sp>
+      <p:cxnSp>
+        <p:nvCxnSpPr>
+          <p:cNvPr id="11" name="Connector 10"/>
+          <p:cNvCxnSpPr/>
+          <p:nvPr/>
+        </p:nvCxnSpPr>
+        <p:spPr>
+          <a:xfrm>
+            <a:off x="841247" y="2468880"/>
+            <a:ext cx="10509200" cy="0"/>
+          </a:xfrm>
+          <a:prstGeom prst="line">
+            <a:avLst/>
+          </a:prstGeom>
+          <a:ln w="9525">
+            <a:solidFill>
+              <a:srgbClr val="EFEFEF"/>
+            </a:solidFill>
+          </a:ln>
+        </p:spPr>
+        <p:style>
+          <a:lnRef idx="2">
+            <a:schemeClr val="accent1"/>
+          </a:lnRef>
+          <a:fillRef idx="0">
+            <a:schemeClr val="accent1"/>
+          </a:fillRef>
+          <a:effectRef idx="1">
+            <a:schemeClr val="accent1"/>
+          </a:effectRef>
+          <a:fontRef idx="minor">
+            <a:schemeClr val="tx1"/>
+          </a:fontRef>
+        </p:style>
+      </p:cxnSp>
+      <p:sp>
+        <p:nvSpPr>
+          <p:cNvPr id="12" name="TOC_n3"/>
+          <p:cNvSpPr txBox="1"/>
+          <p:nvPr/>
+        </p:nvSpPr>
+        <p:spPr>
+          <a:xfrm>
+            <a:off x="841247" y="2542032"/>
+            <a:ext cx="502920" cy="274320"/>
+          </a:xfrm>
+          <a:prstGeom prst="rect">
+            <a:avLst/>
+          </a:prstGeom>
+          <a:noFill/>
+        </p:spPr>
+        <p:txBody>
+          <a:bodyPr wrap="square" lIns="0" rIns="0" tIns="0" bIns="0">
+            <a:spAutoFit/>
+          </a:bodyPr>
+          <a:lstStyle/>
+          <a:p>
+            <a:pPr algn="l">
+              <a:lnSpc>
+                <a:spcPct val="105000"/>
+              </a:lnSpc>
+            </a:pPr>
+            <a:r>
+              <a:rPr sz="1050" b="1">
+                <a:solidFill>
+                  <a:srgbClr val="3E5DA8"/>
+                </a:solidFill>
+                <a:latin typeface="Arial"/>
+                <a:ea typeface="微软雅黑"/>
+                <a:cs typeface="Arial"/>
+              </a:rPr>
+              <a:t>3</a:t>
+            </a:r>
+          </a:p>
+        </p:txBody>
+      </p:sp>
+      <p:sp>
+        <p:nvSpPr>
+          <p:cNvPr id="13" name="TOC_t3"/>
+          <p:cNvSpPr txBox="1"/>
+          <p:nvPr/>
+        </p:nvSpPr>
+        <p:spPr>
+          <a:xfrm>
+            <a:off x="1344168" y="2514600"/>
+            <a:ext cx="7680960" cy="310896"/>
+          </a:xfrm>
+          <a:prstGeom prst="rect">
+            <a:avLst/>
+          </a:prstGeom>
+          <a:noFill/>
+        </p:spPr>
+        <p:txBody>
+          <a:bodyPr wrap="square" lIns="0" rIns="0" tIns="0" bIns="0">
+            <a:spAutoFit/>
+          </a:bodyPr>
+          <a:lstStyle/>
+          <a:p>
+            <a:pPr algn="l">
+              <a:lnSpc>
+                <a:spcPct val="105000"/>
+              </a:lnSpc>
+            </a:pPr>
+            <a:r>
+              <a:rPr sz="1250" b="0">
+                <a:solidFill>
+                  <a:srgbClr val="1A1A1A"/>
+                </a:solidFill>
+                <a:latin typeface="Arial"/>
+                <a:ea typeface="微软雅黑"/>
+                <a:cs typeface="Arial"/>
+              </a:rPr>
+              <a:t>机型口径：31 天日志统计</a:t>
+            </a:r>
+          </a:p>
+        </p:txBody>
+      </p:sp>
+      <p:sp>
+        <p:nvSpPr>
+          <p:cNvPr id="14" name="TOC_p3"/>
+          <p:cNvSpPr txBox="1"/>
+          <p:nvPr/>
+        </p:nvSpPr>
+        <p:spPr>
+          <a:xfrm>
+            <a:off x="9345167" y="2514600"/>
+            <a:ext cx="1463040" cy="310896"/>
+          </a:xfrm>
+          <a:prstGeom prst="rect">
+            <a:avLst/>
+          </a:prstGeom>
+          <a:noFill/>
+        </p:spPr>
+        <p:txBody>
+          <a:bodyPr wrap="square" lIns="0" rIns="0" tIns="0" bIns="0">
+            <a:spAutoFit/>
+          </a:bodyPr>
+          <a:lstStyle/>
+          <a:p>
+            <a:pPr algn="l">
+              <a:lnSpc>
+                <a:spcPct val="105000"/>
+              </a:lnSpc>
+            </a:pPr>
+            <a:r>
+              <a:rPr sz="1150" b="0">
+                <a:solidFill>
+                  <a:srgbClr val="8C8C8C"/>
+                </a:solidFill>
+                <a:latin typeface="Arial"/>
+                <a:ea typeface="微软雅黑"/>
+                <a:cs typeface="Arial"/>
+              </a:rPr>
+              <a:t>5</a:t>
+            </a:r>
+          </a:p>
+        </p:txBody>
+      </p:sp>
+      <p:cxnSp>
+        <p:nvCxnSpPr>
+          <p:cNvPr id="15" name="Connector 14"/>
+          <p:cNvCxnSpPr/>
+          <p:nvPr/>
+        </p:nvCxnSpPr>
+        <p:spPr>
+          <a:xfrm>
+            <a:off x="841247" y="2999232"/>
+            <a:ext cx="10509200" cy="0"/>
+          </a:xfrm>
+          <a:prstGeom prst="line">
+            <a:avLst/>
+          </a:prstGeom>
+          <a:ln w="9525">
+            <a:solidFill>
+              <a:srgbClr val="EFEFEF"/>
+            </a:solidFill>
+          </a:ln>
+        </p:spPr>
+        <p:style>
+          <a:lnRef idx="2">
+            <a:schemeClr val="accent1"/>
+          </a:lnRef>
+          <a:fillRef idx="0">
+            <a:schemeClr val="accent1"/>
+          </a:fillRef>
+          <a:effectRef idx="1">
+            <a:schemeClr val="accent1"/>
+          </a:effectRef>
+          <a:fontRef idx="minor">
+            <a:schemeClr val="tx1"/>
+          </a:fontRef>
+        </p:style>
+      </p:cxnSp>
+      <p:sp>
+        <p:nvSpPr>
+          <p:cNvPr id="16" name="TOC_n4"/>
+          <p:cNvSpPr txBox="1"/>
+          <p:nvPr/>
+        </p:nvSpPr>
+        <p:spPr>
+          <a:xfrm>
+            <a:off x="841247" y="3072384"/>
+            <a:ext cx="502920" cy="274320"/>
+          </a:xfrm>
+          <a:prstGeom prst="rect">
+            <a:avLst/>
+          </a:prstGeom>
+          <a:noFill/>
+        </p:spPr>
+        <p:txBody>
+          <a:bodyPr wrap="square" lIns="0" rIns="0" tIns="0" bIns="0">
+            <a:spAutoFit/>
+          </a:bodyPr>
+          <a:lstStyle/>
+          <a:p>
+            <a:pPr algn="l">
+              <a:lnSpc>
+                <a:spcPct val="105000"/>
+              </a:lnSpc>
+            </a:pPr>
+            <a:r>
+              <a:rPr sz="1050" b="1">
+                <a:solidFill>
+                  <a:srgbClr val="3E5DA8"/>
+                </a:solidFill>
+                <a:latin typeface="Arial"/>
+                <a:ea typeface="微软雅黑"/>
+                <a:cs typeface="Arial"/>
+              </a:rPr>
+              <a:t>4</a:t>
+            </a:r>
+          </a:p>
+        </p:txBody>
+      </p:sp>
+      <p:sp>
+        <p:nvSpPr>
+          <p:cNvPr id="17" name="TOC_t4"/>
+          <p:cNvSpPr txBox="1"/>
+          <p:nvPr/>
+        </p:nvSpPr>
+        <p:spPr>
+          <a:xfrm>
+            <a:off x="1344168" y="3044952"/>
+            <a:ext cx="7680960" cy="310896"/>
+          </a:xfrm>
+          <a:prstGeom prst="rect">
+            <a:avLst/>
+          </a:prstGeom>
+          <a:noFill/>
+        </p:spPr>
+        <p:txBody>
+          <a:bodyPr wrap="square" lIns="0" rIns="0" tIns="0" bIns="0">
+            <a:spAutoFit/>
+          </a:bodyPr>
+          <a:lstStyle/>
+          <a:p>
+            <a:pPr algn="l">
+              <a:lnSpc>
+                <a:spcPct val="105000"/>
+              </a:lnSpc>
+            </a:pPr>
+            <a:r>
+              <a:rPr sz="1250" b="0">
+                <a:solidFill>
+                  <a:srgbClr val="1A1A1A"/>
+                </a:solidFill>
+                <a:latin typeface="Arial"/>
+                <a:ea typeface="微软雅黑"/>
+                <a:cs typeface="Arial"/>
+              </a:rPr>
+              <a:t>机型口径结论</a:t>
+            </a:r>
+          </a:p>
+        </p:txBody>
+      </p:sp>
+      <p:sp>
+        <p:nvSpPr>
+          <p:cNvPr id="18" name="TOC_p4"/>
+          <p:cNvSpPr txBox="1"/>
+          <p:nvPr/>
+        </p:nvSpPr>
+        <p:spPr>
+          <a:xfrm>
+            <a:off x="9345167" y="3044952"/>
+            <a:ext cx="1463040" cy="310896"/>
+          </a:xfrm>
+          <a:prstGeom prst="rect">
+            <a:avLst/>
+          </a:prstGeom>
+          <a:noFill/>
+        </p:spPr>
+        <p:txBody>
+          <a:bodyPr wrap="square" lIns="0" rIns="0" tIns="0" bIns="0">
+            <a:spAutoFit/>
+          </a:bodyPr>
+          <a:lstStyle/>
+          <a:p>
+            <a:pPr algn="l">
+              <a:lnSpc>
+                <a:spcPct val="105000"/>
+              </a:lnSpc>
+            </a:pPr>
+            <a:r>
+              <a:rPr sz="1150" b="0">
+                <a:solidFill>
+                  <a:srgbClr val="8C8C8C"/>
+                </a:solidFill>
+                <a:latin typeface="Arial"/>
+                <a:ea typeface="微软雅黑"/>
+                <a:cs typeface="Arial"/>
+              </a:rPr>
+              <a:t>6</a:t>
+            </a:r>
+          </a:p>
+        </p:txBody>
+      </p:sp>
+      <p:cxnSp>
+        <p:nvCxnSpPr>
+          <p:cNvPr id="19" name="Connector 18"/>
+          <p:cNvCxnSpPr/>
+          <p:nvPr/>
+        </p:nvCxnSpPr>
+        <p:spPr>
+          <a:xfrm>
+            <a:off x="841247" y="3529584"/>
+            <a:ext cx="10509200" cy="0"/>
+          </a:xfrm>
+          <a:prstGeom prst="line">
+            <a:avLst/>
+          </a:prstGeom>
+          <a:ln w="9525">
+            <a:solidFill>
+              <a:srgbClr val="EFEFEF"/>
+            </a:solidFill>
+          </a:ln>
+        </p:spPr>
+        <p:style>
+          <a:lnRef idx="2">
+            <a:schemeClr val="accent1"/>
+          </a:lnRef>
+          <a:fillRef idx="0">
+            <a:schemeClr val="accent1"/>
+          </a:fillRef>
+          <a:effectRef idx="1">
+            <a:schemeClr val="accent1"/>
+          </a:effectRef>
+          <a:fontRef idx="minor">
+            <a:schemeClr val="tx1"/>
+          </a:fontRef>
+        </p:style>
+      </p:cxnSp>
+      <p:sp>
+        <p:nvSpPr>
+          <p:cNvPr id="20" name="TOC_n5"/>
+          <p:cNvSpPr txBox="1"/>
+          <p:nvPr/>
+        </p:nvSpPr>
+        <p:spPr>
+          <a:xfrm>
+            <a:off x="841247" y="3602736"/>
+            <a:ext cx="502920" cy="274320"/>
+          </a:xfrm>
+          <a:prstGeom prst="rect">
+            <a:avLst/>
+          </a:prstGeom>
+          <a:noFill/>
+        </p:spPr>
+        <p:txBody>
+          <a:bodyPr wrap="square" lIns="0" rIns="0" tIns="0" bIns="0">
+            <a:spAutoFit/>
+          </a:bodyPr>
+          <a:lstStyle/>
+          <a:p>
+            <a:pPr algn="l">
+              <a:lnSpc>
+                <a:spcPct val="105000"/>
+              </a:lnSpc>
+            </a:pPr>
+            <a:r>
+              <a:rPr sz="1050" b="1">
+                <a:solidFill>
+                  <a:srgbClr val="3E5DA8"/>
+                </a:solidFill>
+                <a:latin typeface="Arial"/>
+                <a:ea typeface="微软雅黑"/>
+                <a:cs typeface="Arial"/>
+              </a:rPr>
+              <a:t>5</a:t>
+            </a:r>
+          </a:p>
+        </p:txBody>
+      </p:sp>
+      <p:sp>
+        <p:nvSpPr>
+          <p:cNvPr id="21" name="TOC_t5"/>
+          <p:cNvSpPr txBox="1"/>
+          <p:nvPr/>
+        </p:nvSpPr>
+        <p:spPr>
+          <a:xfrm>
+            <a:off x="1344168" y="3575304"/>
+            <a:ext cx="7680960" cy="310896"/>
+          </a:xfrm>
+          <a:prstGeom prst="rect">
+            <a:avLst/>
+          </a:prstGeom>
+          <a:noFill/>
+        </p:spPr>
+        <p:txBody>
+          <a:bodyPr wrap="square" lIns="0" rIns="0" tIns="0" bIns="0">
+            <a:spAutoFit/>
+          </a:bodyPr>
+          <a:lstStyle/>
+          <a:p>
+            <a:pPr algn="l">
+              <a:lnSpc>
+                <a:spcPct val="105000"/>
+              </a:lnSpc>
+            </a:pPr>
+            <a:r>
+              <a:rPr sz="1250" b="0">
+                <a:solidFill>
+                  <a:srgbClr val="1A1A1A"/>
+                </a:solidFill>
+                <a:latin typeface="Arial"/>
+                <a:ea typeface="微软雅黑"/>
+                <a:cs typeface="Arial"/>
+              </a:rPr>
+              <a:t>R2 模组选型</a:t>
+            </a:r>
+          </a:p>
+        </p:txBody>
+      </p:sp>
+      <p:sp>
+        <p:nvSpPr>
+          <p:cNvPr id="22" name="TOC_p5"/>
+          <p:cNvSpPr txBox="1"/>
+          <p:nvPr/>
+        </p:nvSpPr>
+        <p:spPr>
+          <a:xfrm>
+            <a:off x="9345167" y="3575304"/>
+            <a:ext cx="1463040" cy="310896"/>
+          </a:xfrm>
+          <a:prstGeom prst="rect">
+            <a:avLst/>
+          </a:prstGeom>
+          <a:noFill/>
+        </p:spPr>
+        <p:txBody>
+          <a:bodyPr wrap="square" lIns="0" rIns="0" tIns="0" bIns="0">
+            <a:spAutoFit/>
+          </a:bodyPr>
+          <a:lstStyle/>
+          <a:p>
+            <a:pPr algn="l">
+              <a:lnSpc>
+                <a:spcPct val="105000"/>
+              </a:lnSpc>
+            </a:pPr>
+            <a:r>
+              <a:rPr sz="1150" b="0">
+                <a:solidFill>
+                  <a:srgbClr val="8C8C8C"/>
+                </a:solidFill>
+                <a:latin typeface="Arial"/>
+                <a:ea typeface="微软雅黑"/>
+                <a:cs typeface="Arial"/>
+              </a:rPr>
+              <a:t>7</a:t>
+            </a:r>
+          </a:p>
+        </p:txBody>
+      </p:sp>
+      <p:cxnSp>
+        <p:nvCxnSpPr>
+          <p:cNvPr id="23" name="Connector 22"/>
+          <p:cNvCxnSpPr/>
+          <p:nvPr/>
+        </p:nvCxnSpPr>
+        <p:spPr>
+          <a:xfrm>
+            <a:off x="841247" y="4059936"/>
+            <a:ext cx="10509200" cy="0"/>
+          </a:xfrm>
+          <a:prstGeom prst="line">
+            <a:avLst/>
+          </a:prstGeom>
+          <a:ln w="9525">
+            <a:solidFill>
+              <a:srgbClr val="EFEFEF"/>
+            </a:solidFill>
+          </a:ln>
+        </p:spPr>
+        <p:style>
+          <a:lnRef idx="2">
+            <a:schemeClr val="accent1"/>
+          </a:lnRef>
+          <a:fillRef idx="0">
+            <a:schemeClr val="accent1"/>
+          </a:fillRef>
+          <a:effectRef idx="1">
+            <a:schemeClr val="accent1"/>
+          </a:effectRef>
+          <a:fontRef idx="minor">
+            <a:schemeClr val="tx1"/>
+          </a:fontRef>
+        </p:style>
+      </p:cxnSp>
+      <p:sp>
+        <p:nvSpPr>
+          <p:cNvPr id="24" name="TOC_n6"/>
+          <p:cNvSpPr txBox="1"/>
+          <p:nvPr/>
+        </p:nvSpPr>
+        <p:spPr>
+          <a:xfrm>
+            <a:off x="841247" y="4133088"/>
+            <a:ext cx="502920" cy="274320"/>
+          </a:xfrm>
+          <a:prstGeom prst="rect">
+            <a:avLst/>
+          </a:prstGeom>
+          <a:noFill/>
+        </p:spPr>
+        <p:txBody>
+          <a:bodyPr wrap="square" lIns="0" rIns="0" tIns="0" bIns="0">
+            <a:spAutoFit/>
+          </a:bodyPr>
+          <a:lstStyle/>
+          <a:p>
+            <a:pPr algn="l">
+              <a:lnSpc>
+                <a:spcPct val="105000"/>
+              </a:lnSpc>
+            </a:pPr>
+            <a:r>
+              <a:rPr sz="1050" b="1">
+                <a:solidFill>
+                  <a:srgbClr val="3E5DA8"/>
+                </a:solidFill>
+                <a:latin typeface="Arial"/>
+                <a:ea typeface="微软雅黑"/>
+                <a:cs typeface="Arial"/>
+              </a:rPr>
+              <a:t>6</a:t>
+            </a:r>
+          </a:p>
+        </p:txBody>
+      </p:sp>
+      <p:sp>
+        <p:nvSpPr>
+          <p:cNvPr id="25" name="TOC_t6"/>
+          <p:cNvSpPr txBox="1"/>
+          <p:nvPr/>
+        </p:nvSpPr>
+        <p:spPr>
+          <a:xfrm>
+            <a:off x="1344168" y="4105656"/>
+            <a:ext cx="7680960" cy="310896"/>
+          </a:xfrm>
+          <a:prstGeom prst="rect">
+            <a:avLst/>
+          </a:prstGeom>
+          <a:noFill/>
+        </p:spPr>
+        <p:txBody>
+          <a:bodyPr wrap="square" lIns="0" rIns="0" tIns="0" bIns="0">
+            <a:spAutoFit/>
+          </a:bodyPr>
+          <a:lstStyle/>
+          <a:p>
+            <a:pPr algn="l">
+              <a:lnSpc>
+                <a:spcPct val="105000"/>
+              </a:lnSpc>
+            </a:pPr>
+            <a:r>
+              <a:rPr sz="1250" b="0">
+                <a:solidFill>
+                  <a:srgbClr val="1A1A1A"/>
+                </a:solidFill>
+                <a:latin typeface="Arial"/>
+                <a:ea typeface="微软雅黑"/>
+                <a:cs typeface="Arial"/>
+              </a:rPr>
+              <a:t>天线选型</a:t>
+            </a:r>
+          </a:p>
+        </p:txBody>
+      </p:sp>
+      <p:sp>
+        <p:nvSpPr>
+          <p:cNvPr id="26" name="TOC_p6"/>
+          <p:cNvSpPr txBox="1"/>
+          <p:nvPr/>
+        </p:nvSpPr>
+        <p:spPr>
+          <a:xfrm>
+            <a:off x="9345167" y="4105656"/>
+            <a:ext cx="1463040" cy="310896"/>
+          </a:xfrm>
+          <a:prstGeom prst="rect">
+            <a:avLst/>
+          </a:prstGeom>
+          <a:noFill/>
+        </p:spPr>
+        <p:txBody>
+          <a:bodyPr wrap="square" lIns="0" rIns="0" tIns="0" bIns="0">
+            <a:spAutoFit/>
+          </a:bodyPr>
+          <a:lstStyle/>
+          <a:p>
+            <a:pPr algn="l">
+              <a:lnSpc>
+                <a:spcPct val="105000"/>
+              </a:lnSpc>
+            </a:pPr>
+            <a:r>
+              <a:rPr sz="1150" b="0">
+                <a:solidFill>
+                  <a:srgbClr val="8C8C8C"/>
+                </a:solidFill>
+                <a:latin typeface="Arial"/>
+                <a:ea typeface="微软雅黑"/>
+                <a:cs typeface="Arial"/>
+              </a:rPr>
+              <a:t>8</a:t>
+            </a:r>
+          </a:p>
+        </p:txBody>
+      </p:sp>
+      <p:cxnSp>
+        <p:nvCxnSpPr>
+          <p:cNvPr id="27" name="Connector 26"/>
+          <p:cNvCxnSpPr/>
+          <p:nvPr/>
+        </p:nvCxnSpPr>
+        <p:spPr>
+          <a:xfrm>
+            <a:off x="841247" y="4590288"/>
+            <a:ext cx="10509200" cy="0"/>
+          </a:xfrm>
+          <a:prstGeom prst="line">
+            <a:avLst/>
+          </a:prstGeom>
+          <a:ln w="9525">
+            <a:solidFill>
+              <a:srgbClr val="EFEFEF"/>
+            </a:solidFill>
+          </a:ln>
+        </p:spPr>
+        <p:style>
+          <a:lnRef idx="2">
+            <a:schemeClr val="accent1"/>
+          </a:lnRef>
+          <a:fillRef idx="0">
+            <a:schemeClr val="accent1"/>
+          </a:fillRef>
+          <a:effectRef idx="1">
+            <a:schemeClr val="accent1"/>
+          </a:effectRef>
+          <a:fontRef idx="minor">
+            <a:schemeClr val="tx1"/>
+          </a:fontRef>
+        </p:style>
+      </p:cxnSp>
+      <p:sp>
+        <p:nvSpPr>
+          <p:cNvPr id="28" name="TOC_n7"/>
+          <p:cNvSpPr txBox="1"/>
+          <p:nvPr/>
+        </p:nvSpPr>
+        <p:spPr>
+          <a:xfrm>
+            <a:off x="841247" y="4663440"/>
+            <a:ext cx="502920" cy="274320"/>
+          </a:xfrm>
+          <a:prstGeom prst="rect">
+            <a:avLst/>
+          </a:prstGeom>
+          <a:noFill/>
+        </p:spPr>
+        <p:txBody>
+          <a:bodyPr wrap="square" lIns="0" rIns="0" tIns="0" bIns="0">
+            <a:spAutoFit/>
+          </a:bodyPr>
+          <a:lstStyle/>
+          <a:p>
+            <a:pPr algn="l">
+              <a:lnSpc>
+                <a:spcPct val="105000"/>
+              </a:lnSpc>
+            </a:pPr>
+            <a:r>
+              <a:rPr sz="1050" b="1">
+                <a:solidFill>
+                  <a:srgbClr val="3E5DA8"/>
+                </a:solidFill>
+                <a:latin typeface="Arial"/>
+                <a:ea typeface="微软雅黑"/>
+                <a:cs typeface="Arial"/>
+              </a:rPr>
+              <a:t>7</a:t>
+            </a:r>
+          </a:p>
+        </p:txBody>
+      </p:sp>
+      <p:sp>
+        <p:nvSpPr>
+          <p:cNvPr id="29" name="TOC_t7"/>
+          <p:cNvSpPr txBox="1"/>
+          <p:nvPr/>
+        </p:nvSpPr>
+        <p:spPr>
+          <a:xfrm>
+            <a:off x="1344168" y="4636008"/>
+            <a:ext cx="7680960" cy="310896"/>
+          </a:xfrm>
+          <a:prstGeom prst="rect">
+            <a:avLst/>
+          </a:prstGeom>
+          <a:noFill/>
+        </p:spPr>
+        <p:txBody>
+          <a:bodyPr wrap="square" lIns="0" rIns="0" tIns="0" bIns="0">
+            <a:spAutoFit/>
+          </a:bodyPr>
+          <a:lstStyle/>
+          <a:p>
+            <a:pPr algn="l">
+              <a:lnSpc>
+                <a:spcPct val="105000"/>
+              </a:lnSpc>
+            </a:pPr>
+            <a:r>
+              <a:rPr sz="1250" b="0">
+                <a:solidFill>
+                  <a:srgbClr val="1A1A1A"/>
+                </a:solidFill>
+                <a:latin typeface="Arial"/>
+                <a:ea typeface="微软雅黑"/>
+                <a:cs typeface="Arial"/>
+              </a:rPr>
+              <a:t>R3 距离实测</a:t>
+            </a:r>
+          </a:p>
+        </p:txBody>
+      </p:sp>
+      <p:sp>
+        <p:nvSpPr>
+          <p:cNvPr id="30" name="TOC_p7"/>
+          <p:cNvSpPr txBox="1"/>
+          <p:nvPr/>
+        </p:nvSpPr>
+        <p:spPr>
+          <a:xfrm>
+            <a:off x="9345167" y="4636008"/>
+            <a:ext cx="1463040" cy="310896"/>
+          </a:xfrm>
+          <a:prstGeom prst="rect">
+            <a:avLst/>
+          </a:prstGeom>
+          <a:noFill/>
+        </p:spPr>
+        <p:txBody>
+          <a:bodyPr wrap="square" lIns="0" rIns="0" tIns="0" bIns="0">
+            <a:spAutoFit/>
+          </a:bodyPr>
+          <a:lstStyle/>
+          <a:p>
+            <a:pPr algn="l">
+              <a:lnSpc>
+                <a:spcPct val="105000"/>
+              </a:lnSpc>
+            </a:pPr>
+            <a:r>
+              <a:rPr sz="1150" b="0">
+                <a:solidFill>
+                  <a:srgbClr val="8C8C8C"/>
+                </a:solidFill>
+                <a:latin typeface="Arial"/>
+                <a:ea typeface="微软雅黑"/>
+                <a:cs typeface="Arial"/>
+              </a:rPr>
+              <a:t>9</a:t>
+            </a:r>
+          </a:p>
+        </p:txBody>
+      </p:sp>
+      <p:cxnSp>
+        <p:nvCxnSpPr>
+          <p:cNvPr id="31" name="Connector 30"/>
+          <p:cNvCxnSpPr/>
+          <p:nvPr/>
+        </p:nvCxnSpPr>
+        <p:spPr>
+          <a:xfrm>
+            <a:off x="841247" y="5120640"/>
+            <a:ext cx="10509200" cy="0"/>
+          </a:xfrm>
+          <a:prstGeom prst="line">
+            <a:avLst/>
+          </a:prstGeom>
+          <a:ln w="9525">
+            <a:solidFill>
+              <a:srgbClr val="EFEFEF"/>
+            </a:solidFill>
+          </a:ln>
+        </p:spPr>
+        <p:style>
+          <a:lnRef idx="2">
+            <a:schemeClr val="accent1"/>
+          </a:lnRef>
+          <a:fillRef idx="0">
+            <a:schemeClr val="accent1"/>
+          </a:fillRef>
+          <a:effectRef idx="1">
+            <a:schemeClr val="accent1"/>
+          </a:effectRef>
+          <a:fontRef idx="minor">
+            <a:schemeClr val="tx1"/>
+          </a:fontRef>
+        </p:style>
+      </p:cxnSp>
+      <p:sp>
+        <p:nvSpPr>
+          <p:cNvPr id="32" name="TOC_n8"/>
+          <p:cNvSpPr txBox="1"/>
+          <p:nvPr/>
+        </p:nvSpPr>
+        <p:spPr>
+          <a:xfrm>
+            <a:off x="841247" y="5193792"/>
+            <a:ext cx="502920" cy="274320"/>
+          </a:xfrm>
+          <a:prstGeom prst="rect">
+            <a:avLst/>
+          </a:prstGeom>
+          <a:noFill/>
+        </p:spPr>
+        <p:txBody>
+          <a:bodyPr wrap="square" lIns="0" rIns="0" tIns="0" bIns="0">
+            <a:spAutoFit/>
+          </a:bodyPr>
+          <a:lstStyle/>
+          <a:p>
+            <a:pPr algn="l">
+              <a:lnSpc>
+                <a:spcPct val="105000"/>
+              </a:lnSpc>
+            </a:pPr>
+            <a:r>
+              <a:rPr sz="1050" b="1">
+                <a:solidFill>
+                  <a:srgbClr val="3E5DA8"/>
+                </a:solidFill>
+                <a:latin typeface="Arial"/>
+                <a:ea typeface="微软雅黑"/>
+                <a:cs typeface="Arial"/>
+              </a:rPr>
+              <a:t>8</a:t>
+            </a:r>
+          </a:p>
+        </p:txBody>
+      </p:sp>
+      <p:sp>
+        <p:nvSpPr>
+          <p:cNvPr id="33" name="TOC_t8"/>
+          <p:cNvSpPr txBox="1"/>
+          <p:nvPr/>
+        </p:nvSpPr>
+        <p:spPr>
+          <a:xfrm>
+            <a:off x="1344168" y="5166360"/>
+            <a:ext cx="7680960" cy="310896"/>
+          </a:xfrm>
+          <a:prstGeom prst="rect">
+            <a:avLst/>
+          </a:prstGeom>
+          <a:noFill/>
+        </p:spPr>
+        <p:txBody>
+          <a:bodyPr wrap="square" lIns="0" rIns="0" tIns="0" bIns="0">
+            <a:spAutoFit/>
+          </a:bodyPr>
+          <a:lstStyle/>
+          <a:p>
+            <a:pPr algn="l">
+              <a:lnSpc>
+                <a:spcPct val="105000"/>
+              </a:lnSpc>
+            </a:pPr>
+            <a:r>
+              <a:rPr sz="1250" b="0">
+                <a:solidFill>
+                  <a:srgbClr val="1A1A1A"/>
+                </a:solidFill>
+                <a:latin typeface="Arial"/>
+                <a:ea typeface="微软雅黑"/>
+                <a:cs typeface="Arial"/>
+              </a:rPr>
+              <a:t>R4 增益实测</a:t>
+            </a:r>
+          </a:p>
+        </p:txBody>
+      </p:sp>
+      <p:sp>
+        <p:nvSpPr>
+          <p:cNvPr id="34" name="TOC_p8"/>
+          <p:cNvSpPr txBox="1"/>
+          <p:nvPr/>
+        </p:nvSpPr>
+        <p:spPr>
+          <a:xfrm>
+            <a:off x="9345167" y="5166360"/>
+            <a:ext cx="1463040" cy="310896"/>
+          </a:xfrm>
+          <a:prstGeom prst="rect">
+            <a:avLst/>
+          </a:prstGeom>
+          <a:noFill/>
+        </p:spPr>
+        <p:txBody>
+          <a:bodyPr wrap="square" lIns="0" rIns="0" tIns="0" bIns="0">
+            <a:spAutoFit/>
+          </a:bodyPr>
+          <a:lstStyle/>
+          <a:p>
+            <a:pPr algn="l">
+              <a:lnSpc>
+                <a:spcPct val="105000"/>
+              </a:lnSpc>
+            </a:pPr>
+            <a:r>
+              <a:rPr sz="1150" b="0">
+                <a:solidFill>
+                  <a:srgbClr val="8C8C8C"/>
+                </a:solidFill>
+                <a:latin typeface="Arial"/>
+                <a:ea typeface="微软雅黑"/>
+                <a:cs typeface="Arial"/>
+              </a:rPr>
+              <a:t>10</a:t>
+            </a:r>
+          </a:p>
+        </p:txBody>
+      </p:sp>
+      <p:cxnSp>
+        <p:nvCxnSpPr>
+          <p:cNvPr id="35" name="Connector 34"/>
+          <p:cNvCxnSpPr/>
+          <p:nvPr/>
+        </p:nvCxnSpPr>
+        <p:spPr>
+          <a:xfrm>
+            <a:off x="841247" y="5650992"/>
+            <a:ext cx="10509200" cy="0"/>
+          </a:xfrm>
+          <a:prstGeom prst="line">
+            <a:avLst/>
+          </a:prstGeom>
+          <a:ln w="9525">
+            <a:solidFill>
+              <a:srgbClr val="EFEFEF"/>
+            </a:solidFill>
+          </a:ln>
+        </p:spPr>
+        <p:style>
+          <a:lnRef idx="2">
+            <a:schemeClr val="accent1"/>
+          </a:lnRef>
+          <a:fillRef idx="0">
+            <a:schemeClr val="accent1"/>
+          </a:fillRef>
+          <a:effectRef idx="1">
+            <a:schemeClr val="accent1"/>
+          </a:effectRef>
+          <a:fontRef idx="minor">
+            <a:schemeClr val="tx1"/>
+          </a:fontRef>
+        </p:style>
+      </p:cxnSp>
+      <p:sp>
+        <p:nvSpPr>
+          <p:cNvPr id="36" name="TOC_n9"/>
+          <p:cNvSpPr txBox="1"/>
+          <p:nvPr/>
+        </p:nvSpPr>
+        <p:spPr>
+          <a:xfrm>
+            <a:off x="841247" y="5724144"/>
+            <a:ext cx="502920" cy="274320"/>
+          </a:xfrm>
+          <a:prstGeom prst="rect">
+            <a:avLst/>
+          </a:prstGeom>
+          <a:noFill/>
+        </p:spPr>
+        <p:txBody>
+          <a:bodyPr wrap="square" lIns="0" rIns="0" tIns="0" bIns="0">
+            <a:spAutoFit/>
+          </a:bodyPr>
+          <a:lstStyle/>
+          <a:p>
+            <a:pPr algn="l">
+              <a:lnSpc>
+                <a:spcPct val="105000"/>
+              </a:lnSpc>
+            </a:pPr>
+            <a:r>
+              <a:rPr sz="1050" b="1">
+                <a:solidFill>
+                  <a:srgbClr val="3E5DA8"/>
+                </a:solidFill>
+                <a:latin typeface="Arial"/>
+                <a:ea typeface="微软雅黑"/>
+                <a:cs typeface="Arial"/>
+              </a:rPr>
+              <a:t>9</a:t>
+            </a:r>
+          </a:p>
+        </p:txBody>
+      </p:sp>
+      <p:sp>
+        <p:nvSpPr>
+          <p:cNvPr id="37" name="TOC_t9"/>
+          <p:cNvSpPr txBox="1"/>
+          <p:nvPr/>
+        </p:nvSpPr>
+        <p:spPr>
+          <a:xfrm>
+            <a:off x="1344168" y="5696712"/>
+            <a:ext cx="7680960" cy="310896"/>
+          </a:xfrm>
+          <a:prstGeom prst="rect">
+            <a:avLst/>
+          </a:prstGeom>
+          <a:noFill/>
+        </p:spPr>
+        <p:txBody>
+          <a:bodyPr wrap="square" lIns="0" rIns="0" tIns="0" bIns="0">
+            <a:spAutoFit/>
+          </a:bodyPr>
+          <a:lstStyle/>
+          <a:p>
+            <a:pPr algn="l">
+              <a:lnSpc>
+                <a:spcPct val="105000"/>
+              </a:lnSpc>
+            </a:pPr>
+            <a:r>
+              <a:rPr sz="1250" b="0">
+                <a:solidFill>
+                  <a:srgbClr val="1A1A1A"/>
+                </a:solidFill>
+                <a:latin typeface="Arial"/>
+                <a:ea typeface="微软雅黑"/>
+                <a:cs typeface="Arial"/>
+              </a:rPr>
+              <a:t>附录（手册出处 / 选型问题清单）</a:t>
+            </a:r>
+          </a:p>
+        </p:txBody>
+      </p:sp>
+      <p:sp>
+        <p:nvSpPr>
+          <p:cNvPr id="38" name="TOC_p9"/>
+          <p:cNvSpPr txBox="1"/>
+          <p:nvPr/>
+        </p:nvSpPr>
+        <p:spPr>
+          <a:xfrm>
+            <a:off x="9345167" y="5696712"/>
+            <a:ext cx="1463040" cy="310896"/>
+          </a:xfrm>
+          <a:prstGeom prst="rect">
+            <a:avLst/>
+          </a:prstGeom>
+          <a:noFill/>
+        </p:spPr>
+        <p:txBody>
+          <a:bodyPr wrap="square" lIns="0" rIns="0" tIns="0" bIns="0">
+            <a:spAutoFit/>
+          </a:bodyPr>
+          <a:lstStyle/>
+          <a:p>
+            <a:pPr algn="l">
+              <a:lnSpc>
+                <a:spcPct val="105000"/>
+              </a:lnSpc>
+            </a:pPr>
+            <a:r>
+              <a:rPr sz="1150" b="0">
+                <a:solidFill>
+                  <a:srgbClr val="8C8C8C"/>
+                </a:solidFill>
+                <a:latin typeface="Arial"/>
+                <a:ea typeface="微软雅黑"/>
+                <a:cs typeface="Arial"/>
+              </a:rPr>
+              <a:t>11</a:t>
+            </a:r>
+          </a:p>
+        </p:txBody>
+      </p:sp>
+      <p:cxnSp>
+        <p:nvCxnSpPr>
+          <p:cNvPr id="39" name="Connector 38"/>
+          <p:cNvCxnSpPr/>
+          <p:nvPr/>
+        </p:nvCxnSpPr>
+        <p:spPr>
+          <a:xfrm>
+            <a:off x="841247" y="6181344"/>
+            <a:ext cx="10509200" cy="0"/>
+          </a:xfrm>
+          <a:prstGeom prst="line">
+            <a:avLst/>
+          </a:prstGeom>
+          <a:ln w="9525">
+            <a:solidFill>
+              <a:srgbClr val="EFEFEF"/>
+            </a:solidFill>
+          </a:ln>
+        </p:spPr>
+        <p:style>
+          <a:lnRef idx="2">
+            <a:schemeClr val="accent1"/>
+          </a:lnRef>
+          <a:fillRef idx="0">
+            <a:schemeClr val="accent1"/>
+          </a:fillRef>
+          <a:effectRef idx="1">
+            <a:schemeClr val="accent1"/>
+          </a:effectRef>
+          <a:fontRef idx="minor">
+            <a:schemeClr val="tx1"/>
+          </a:fontRef>
+        </p:style>
+      </p:cxnSp>
+    </p:spTree>
+  </p:cSld>
+  <p:clrMapOvr>
+    <a:masterClrMapping/>
+  </p:clrMapOvr>
+</p:sld>
+</file>
+
 <file path=ppt/slides/slide2.xml><?xml version="1.0" encoding="utf-8"?>
 <p:sld xmlns:a="http://schemas.openxmlformats.org/drawingml/2006/main" xmlns:r="http://schemas.openxmlformats.org/officeDocument/2006/relationships" xmlns:p="http://schemas.openxmlformats.org/presentationml/2006/main">
   <p:cSld>
@@ -4738,93 +6255,72 @@
           </a:fontRef>
         </p:style>
       </p:cxnSp>
+      <p:pic>
+        <p:nvPicPr>
+          <p:cNvPr id="5" name="PX_fig4" descr="fig4_faces.png"/>
+          <p:cNvPicPr>
+            <a:picLocks noChangeAspect="1"/>
+          </p:cNvPicPr>
+          <p:nvPr/>
+        </p:nvPicPr>
+        <p:blipFill>
+          <a:blip r:embed="rId4"/>
+          <a:stretch>
+            <a:fillRect/>
+          </a:stretch>
+        </p:blipFill>
+        <p:spPr>
+          <a:xfrm>
+            <a:off x="411480" y="960120"/>
+            <a:ext cx="6903720" cy="3793412"/>
+          </a:xfrm>
+          <a:prstGeom prst="rect">
+            <a:avLst/>
+          </a:prstGeom>
+        </p:spPr>
+      </p:pic>
       <p:graphicFrame>
         <p:nvGraphicFramePr>
-          <p:cNvPr id="9" name="Table 8"/>
+          <p:cNvPr id="6" name="PX_faceTable"/>
           <p:cNvGraphicFramePr>
             <a:graphicFrameLocks noGrp="1"/>
           </p:cNvGraphicFramePr>
-          <p:nvPr>
-            <p:extLst>
-              <p:ext uri="{D42A27DB-BD31-4B8C-83A1-F6EECF244321}">
-                <p14:modId xmlns:p14="http://schemas.microsoft.com/office/powerpoint/2010/main" val="3531810506"/>
-              </p:ext>
-            </p:extLst>
-          </p:nvPr>
+          <p:nvPr/>
         </p:nvGraphicFramePr>
         <p:xfrm>
-          <a:off x="8613648" y="2222514"/>
-          <a:ext cx="3008376" cy="2688336"/>
+          <a:off x="7464247" y="1024128"/>
+          <a:ext cx="4160520" cy="2432304"/>
         </p:xfrm>
         <a:graphic>
           <a:graphicData uri="http://schemas.openxmlformats.org/drawingml/2006/table">
             <a:tbl>
               <a:tblPr/>
               <a:tblGrid>
-                <a:gridCol w="544619">
-                  <a:extLst>
-                    <a:ext uri="{9D8B030D-6E8A-4147-A177-3AD203B41FA5}">
-                      <a16:colId xmlns:a16="http://schemas.microsoft.com/office/drawing/2014/main" val="20000"/>
-                    </a:ext>
-                  </a:extLst>
-                </a:gridCol>
-                <a:gridCol w="2463757">
-                  <a:extLst>
-                    <a:ext uri="{9D8B030D-6E8A-4147-A177-3AD203B41FA5}">
-                      <a16:colId xmlns:a16="http://schemas.microsoft.com/office/drawing/2014/main" val="20001"/>
-                    </a:ext>
-                  </a:extLst>
-                </a:gridCol>
+                <a:gridCol w="1783080"/>
+                <a:gridCol w="1051560"/>
+                <a:gridCol w="1325880"/>
               </a:tblGrid>
-              <a:tr h="384048">
-                <a:tc>
-                  <a:txBody>
-                    <a:bodyPr/>
-                    <a:lstStyle/>
-                    <a:p>
-                      <a:pPr algn="ctr">
-                        <a:lnSpc>
-                          <a:spcPct val="100000"/>
-                        </a:lnSpc>
-                      </a:pPr>
-                      <a:r>
-                        <a:rPr sz="850" b="1">
-                          <a:solidFill>
-                            <a:srgbClr val="1A1A1A"/>
-                          </a:solidFill>
-                          <a:latin typeface="Arial"/>
-                          <a:ea typeface="微软雅黑"/>
-                          <a:cs typeface="Arial"/>
-                        </a:rPr>
-                        <a:t>#</a:t>
-                      </a:r>
-                    </a:p>
-                  </a:txBody>
-                  <a:tcPr marL="50292" marR="50292" marT="13716" marB="13716" anchor="ctr">
-                    <a:lnL w="9525" cap="flat" cmpd="sng" algn="ctr">
-                      <a:solidFill>
-                        <a:srgbClr val="D9D9D9"/>
-                      </a:solidFill>
-                      <a:prstDash val="solid"/>
-                    </a:lnL>
-                    <a:lnR w="9525" cap="flat" cmpd="sng" algn="ctr">
-                      <a:solidFill>
-                        <a:srgbClr val="D9D9D9"/>
-                      </a:solidFill>
-                      <a:prstDash val="solid"/>
-                    </a:lnR>
-                    <a:lnT w="9525" cap="flat" cmpd="sng" algn="ctr">
-                      <a:solidFill>
-                        <a:srgbClr val="D9D9D9"/>
-                      </a:solidFill>
-                      <a:prstDash val="solid"/>
-                    </a:lnT>
-                    <a:lnB w="9525" cap="flat" cmpd="sng" algn="ctr">
-                      <a:solidFill>
-                        <a:srgbClr val="D9D9D9"/>
-                      </a:solidFill>
-                      <a:prstDash val="solid"/>
-                    </a:lnB>
+              <a:tr h="347472">
+                <a:tc>
+                  <a:txBody>
+                    <a:bodyPr/>
+                    <a:lstStyle/>
+                    <a:p>
+                      <a:pPr algn="l"/>
+                      <a:r>
+                        <a:rPr sz="800" b="1">
+                          <a:solidFill>
+                            <a:srgbClr val="1A1A1A"/>
+                          </a:solidFill>
+                          <a:latin typeface="Arial"/>
+                          <a:ea typeface="微软雅黑"/>
+                          <a:cs typeface="Arial"/>
+                        </a:rPr>
+                        <a:t>朝下的面</a:t>
+                      </a:r>
+                    </a:p>
+                  </a:txBody>
+                  <a:tcPr marL="45720" marR="45720" marT="9144" marB="9144" anchor="ctr">
                     <a:solidFill>
                       <a:srgbClr val="F2F2F2"/>
                     </a:solidFill>
@@ -4835,785 +6331,840 @@
                     <a:bodyPr/>
                     <a:lstStyle/>
                     <a:p>
-                      <a:pPr algn="l">
-                        <a:lnSpc>
-                          <a:spcPct val="100000"/>
-                        </a:lnSpc>
-                      </a:pPr>
-                      <a:r>
-                        <a:rPr sz="850" b="1">
-                          <a:solidFill>
-                            <a:srgbClr val="1A1A1A"/>
-                          </a:solidFill>
-                          <a:latin typeface="Arial"/>
-                          <a:ea typeface="微软雅黑"/>
-                          <a:cs typeface="Arial"/>
-                        </a:rPr>
-                        <a:t>朝下的面</a:t>
-                      </a:r>
-                    </a:p>
-                  </a:txBody>
-                  <a:tcPr marL="50292" marR="50292" marT="13716" marB="13716" anchor="ctr">
-                    <a:lnL w="9525" cap="flat" cmpd="sng" algn="ctr">
-                      <a:solidFill>
-                        <a:srgbClr val="D9D9D9"/>
-                      </a:solidFill>
-                      <a:prstDash val="solid"/>
-                    </a:lnL>
-                    <a:lnR w="9525" cap="flat" cmpd="sng" algn="ctr">
-                      <a:solidFill>
-                        <a:srgbClr val="D9D9D9"/>
-                      </a:solidFill>
-                      <a:prstDash val="solid"/>
-                    </a:lnR>
-                    <a:lnT w="9525" cap="flat" cmpd="sng" algn="ctr">
-                      <a:solidFill>
-                        <a:srgbClr val="D9D9D9"/>
-                      </a:solidFill>
-                      <a:prstDash val="solid"/>
-                    </a:lnT>
-                    <a:lnB w="9525" cap="flat" cmpd="sng" algn="ctr">
-                      <a:solidFill>
-                        <a:srgbClr val="D9D9D9"/>
-                      </a:solidFill>
-                      <a:prstDash val="solid"/>
-                    </a:lnB>
+                      <a:pPr algn="ctr"/>
+                      <a:r>
+                        <a:rPr sz="800" b="1">
+                          <a:solidFill>
+                            <a:srgbClr val="1A1A1A"/>
+                          </a:solidFill>
+                          <a:latin typeface="Arial"/>
+                          <a:ea typeface="微软雅黑"/>
+                          <a:cs typeface="Arial"/>
+                        </a:rPr>
+                        <a:t>箱体高度</a:t>
+                      </a:r>
+                    </a:p>
+                  </a:txBody>
+                  <a:tcPr marL="45720" marR="45720" marT="9144" marB="9144" anchor="ctr">
                     <a:solidFill>
                       <a:srgbClr val="F2F2F2"/>
                     </a:solidFill>
                   </a:tcPr>
                 </a:tc>
-                <a:extLst>
-                  <a:ext uri="{0D108BD9-81ED-4DB2-BD59-A6C34878D82A}">
-                    <a16:rowId xmlns:a16="http://schemas.microsoft.com/office/drawing/2014/main" val="10000"/>
-                  </a:ext>
-                </a:extLst>
+                <a:tc>
+                  <a:txBody>
+                    <a:bodyPr/>
+                    <a:lstStyle/>
+                    <a:p>
+                      <a:pPr algn="ctr"/>
+                      <a:r>
+                        <a:rPr sz="800" b="1">
+                          <a:solidFill>
+                            <a:srgbClr val="1A1A1A"/>
+                          </a:solidFill>
+                          <a:latin typeface="Arial"/>
+                          <a:ea typeface="微软雅黑"/>
+                          <a:cs typeface="Arial"/>
+                        </a:rPr>
+                        <a:t>标签离天线</a:t>
+                      </a:r>
+                    </a:p>
+                  </a:txBody>
+                  <a:tcPr marL="45720" marR="45720" marT="9144" marB="9144" anchor="ctr">
+                    <a:solidFill>
+                      <a:srgbClr val="F2F2F2"/>
+                    </a:solidFill>
+                  </a:tcPr>
+                </a:tc>
               </a:tr>
-              <a:tr h="384048">
-                <a:tc>
-                  <a:txBody>
-                    <a:bodyPr/>
-                    <a:lstStyle/>
-                    <a:p>
-                      <a:pPr algn="ctr">
-                        <a:lnSpc>
-                          <a:spcPct val="100000"/>
-                        </a:lnSpc>
-                      </a:pPr>
-                      <a:r>
-                        <a:rPr sz="900" b="1">
-                          <a:solidFill>
-                            <a:srgbClr val="1A1A1A"/>
-                          </a:solidFill>
-                          <a:latin typeface="Arial"/>
-                          <a:ea typeface="微软雅黑"/>
-                          <a:cs typeface="Arial"/>
-                        </a:rPr>
-                        <a:t>A1</a:t>
-                      </a:r>
-                    </a:p>
-                  </a:txBody>
-                  <a:tcPr marL="50292" marR="50292" marT="13716" marB="13716" anchor="ctr">
-                    <a:lnL w="9525" cap="flat" cmpd="sng" algn="ctr">
-                      <a:solidFill>
-                        <a:srgbClr val="D9D9D9"/>
-                      </a:solidFill>
-                      <a:prstDash val="solid"/>
-                    </a:lnL>
-                    <a:lnR w="9525" cap="flat" cmpd="sng" algn="ctr">
-                      <a:solidFill>
-                        <a:srgbClr val="D9D9D9"/>
-                      </a:solidFill>
-                      <a:prstDash val="solid"/>
-                    </a:lnR>
-                    <a:lnT w="9525" cap="flat" cmpd="sng" algn="ctr">
-                      <a:solidFill>
-                        <a:srgbClr val="D9D9D9"/>
-                      </a:solidFill>
-                      <a:prstDash val="solid"/>
-                    </a:lnT>
-                    <a:lnB w="9525" cap="flat" cmpd="sng" algn="ctr">
-                      <a:solidFill>
-                        <a:srgbClr val="D9D9D9"/>
-                      </a:solidFill>
-                      <a:prstDash val="solid"/>
-                    </a:lnB>
-                    <a:solidFill>
-                      <a:srgbClr val="FFFFFF"/>
-                    </a:solidFill>
-                  </a:tcPr>
-                </a:tc>
-                <a:tc>
-                  <a:txBody>
-                    <a:bodyPr/>
-                    <a:lstStyle/>
-                    <a:p>
-                      <a:pPr algn="l">
-                        <a:lnSpc>
-                          <a:spcPct val="100000"/>
-                        </a:lnSpc>
-                      </a:pPr>
-                      <a:r>
-                        <a:rPr sz="900" b="0">
-                          <a:solidFill>
-                            <a:srgbClr val="1A1A1A"/>
-                          </a:solidFill>
-                          <a:latin typeface="Arial"/>
-                          <a:ea typeface="微软雅黑"/>
-                          <a:cs typeface="Arial"/>
-                        </a:rPr>
-                        <a:t>B-BOTTOM 底面</a:t>
-                      </a:r>
-                    </a:p>
-                  </a:txBody>
-                  <a:tcPr marL="50292" marR="50292" marT="13716" marB="13716" anchor="ctr">
-                    <a:lnL w="9525" cap="flat" cmpd="sng" algn="ctr">
-                      <a:solidFill>
-                        <a:srgbClr val="D9D9D9"/>
-                      </a:solidFill>
-                      <a:prstDash val="solid"/>
-                    </a:lnL>
-                    <a:lnR w="9525" cap="flat" cmpd="sng" algn="ctr">
-                      <a:solidFill>
-                        <a:srgbClr val="D9D9D9"/>
-                      </a:solidFill>
-                      <a:prstDash val="solid"/>
-                    </a:lnR>
-                    <a:lnT w="9525" cap="flat" cmpd="sng" algn="ctr">
-                      <a:solidFill>
-                        <a:srgbClr val="D9D9D9"/>
-                      </a:solidFill>
-                      <a:prstDash val="solid"/>
-                    </a:lnT>
-                    <a:lnB w="9525" cap="flat" cmpd="sng" algn="ctr">
-                      <a:solidFill>
-                        <a:srgbClr val="D9D9D9"/>
-                      </a:solidFill>
-                      <a:prstDash val="solid"/>
-                    </a:lnB>
-                    <a:solidFill>
-                      <a:srgbClr val="FFFFFF"/>
-                    </a:solidFill>
-                  </a:tcPr>
-                </a:tc>
-                <a:extLst>
-                  <a:ext uri="{0D108BD9-81ED-4DB2-BD59-A6C34878D82A}">
-                    <a16:rowId xmlns:a16="http://schemas.microsoft.com/office/drawing/2014/main" val="10001"/>
-                  </a:ext>
-                </a:extLst>
+              <a:tr h="347472">
+                <a:tc>
+                  <a:txBody>
+                    <a:bodyPr/>
+                    <a:lstStyle/>
+                    <a:p>
+                      <a:pPr algn="l"/>
+                      <a:r>
+                        <a:rPr sz="840" b="0">
+                          <a:solidFill>
+                            <a:srgbClr val="1A1A1A"/>
+                          </a:solidFill>
+                          <a:latin typeface="Arial"/>
+                          <a:ea typeface="微软雅黑"/>
+                          <a:cs typeface="Arial"/>
+                        </a:rPr>
+                        <a:t>底面朝下（正立）</a:t>
+                      </a:r>
+                    </a:p>
+                  </a:txBody>
+                  <a:tcPr marL="45720" marR="45720" marT="9144" marB="9144" anchor="ctr">
+                    <a:solidFill>
+                      <a:srgbClr val="FFFFFF"/>
+                    </a:solidFill>
+                  </a:tcPr>
+                </a:tc>
+                <a:tc>
+                  <a:txBody>
+                    <a:bodyPr/>
+                    <a:lstStyle/>
+                    <a:p>
+                      <a:pPr algn="ctr"/>
+                      <a:r>
+                        <a:rPr sz="840" b="0">
+                          <a:solidFill>
+                            <a:srgbClr val="1A1A1A"/>
+                          </a:solidFill>
+                          <a:latin typeface="Arial"/>
+                          <a:ea typeface="微软雅黑"/>
+                          <a:cs typeface="Arial"/>
+                        </a:rPr>
+                        <a:t>300 mm</a:t>
+                      </a:r>
+                    </a:p>
+                  </a:txBody>
+                  <a:tcPr marL="45720" marR="45720" marT="9144" marB="9144" anchor="ctr">
+                    <a:solidFill>
+                      <a:srgbClr val="FFFFFF"/>
+                    </a:solidFill>
+                  </a:tcPr>
+                </a:tc>
+                <a:tc>
+                  <a:txBody>
+                    <a:bodyPr/>
+                    <a:lstStyle/>
+                    <a:p>
+                      <a:pPr algn="ctr"/>
+                      <a:r>
+                        <a:rPr sz="840" b="0">
+                          <a:solidFill>
+                            <a:srgbClr val="1A1A1A"/>
+                          </a:solidFill>
+                          <a:latin typeface="Arial"/>
+                          <a:ea typeface="微软雅黑"/>
+                          <a:cs typeface="Arial"/>
+                        </a:rPr>
+                        <a:t>250 mm</a:t>
+                      </a:r>
+                    </a:p>
+                  </a:txBody>
+                  <a:tcPr marL="45720" marR="45720" marT="9144" marB="9144" anchor="ctr">
+                    <a:solidFill>
+                      <a:srgbClr val="FFFFFF"/>
+                    </a:solidFill>
+                  </a:tcPr>
+                </a:tc>
               </a:tr>
-              <a:tr h="384048">
-                <a:tc>
-                  <a:txBody>
-                    <a:bodyPr/>
-                    <a:lstStyle/>
-                    <a:p>
-                      <a:pPr algn="ctr">
-                        <a:lnSpc>
-                          <a:spcPct val="100000"/>
-                        </a:lnSpc>
-                      </a:pPr>
-                      <a:r>
-                        <a:rPr sz="900" b="1">
-                          <a:solidFill>
-                            <a:srgbClr val="1A1A1A"/>
-                          </a:solidFill>
-                          <a:latin typeface="Arial"/>
-                          <a:ea typeface="微软雅黑"/>
-                          <a:cs typeface="Arial"/>
-                        </a:rPr>
-                        <a:t>A2</a:t>
-                      </a:r>
-                    </a:p>
-                  </a:txBody>
-                  <a:tcPr marL="50292" marR="50292" marT="13716" marB="13716" anchor="ctr">
-                    <a:lnL w="9525" cap="flat" cmpd="sng" algn="ctr">
-                      <a:solidFill>
-                        <a:srgbClr val="D9D9D9"/>
-                      </a:solidFill>
-                      <a:prstDash val="solid"/>
-                    </a:lnL>
-                    <a:lnR w="9525" cap="flat" cmpd="sng" algn="ctr">
-                      <a:solidFill>
-                        <a:srgbClr val="D9D9D9"/>
-                      </a:solidFill>
-                      <a:prstDash val="solid"/>
-                    </a:lnR>
-                    <a:lnT w="9525" cap="flat" cmpd="sng" algn="ctr">
-                      <a:solidFill>
-                        <a:srgbClr val="D9D9D9"/>
-                      </a:solidFill>
-                      <a:prstDash val="solid"/>
-                    </a:lnT>
-                    <a:lnB w="9525" cap="flat" cmpd="sng" algn="ctr">
-                      <a:solidFill>
-                        <a:srgbClr val="D9D9D9"/>
-                      </a:solidFill>
-                      <a:prstDash val="solid"/>
-                    </a:lnB>
-                    <a:solidFill>
-                      <a:srgbClr val="FFFFFF"/>
-                    </a:solidFill>
-                  </a:tcPr>
-                </a:tc>
-                <a:tc>
-                  <a:txBody>
-                    <a:bodyPr/>
-                    <a:lstStyle/>
-                    <a:p>
-                      <a:pPr algn="l">
-                        <a:lnSpc>
-                          <a:spcPct val="100000"/>
-                        </a:lnSpc>
-                      </a:pPr>
-                      <a:r>
-                        <a:rPr sz="900" b="0">
-                          <a:solidFill>
-                            <a:srgbClr val="1A1A1A"/>
-                          </a:solidFill>
-                          <a:latin typeface="Arial"/>
-                          <a:ea typeface="微软雅黑"/>
-                          <a:cs typeface="Arial"/>
-                        </a:rPr>
-                        <a:t>T-TOP 顶面</a:t>
-                      </a:r>
-                    </a:p>
-                  </a:txBody>
-                  <a:tcPr marL="50292" marR="50292" marT="13716" marB="13716" anchor="ctr">
-                    <a:lnL w="9525" cap="flat" cmpd="sng" algn="ctr">
-                      <a:solidFill>
-                        <a:srgbClr val="D9D9D9"/>
-                      </a:solidFill>
-                      <a:prstDash val="solid"/>
-                    </a:lnL>
-                    <a:lnR w="9525" cap="flat" cmpd="sng" algn="ctr">
-                      <a:solidFill>
-                        <a:srgbClr val="D9D9D9"/>
-                      </a:solidFill>
-                      <a:prstDash val="solid"/>
-                    </a:lnR>
-                    <a:lnT w="9525" cap="flat" cmpd="sng" algn="ctr">
-                      <a:solidFill>
-                        <a:srgbClr val="D9D9D9"/>
-                      </a:solidFill>
-                      <a:prstDash val="solid"/>
-                    </a:lnT>
-                    <a:lnB w="9525" cap="flat" cmpd="sng" algn="ctr">
-                      <a:solidFill>
-                        <a:srgbClr val="D9D9D9"/>
-                      </a:solidFill>
-                      <a:prstDash val="solid"/>
-                    </a:lnB>
-                    <a:solidFill>
-                      <a:srgbClr val="FFFFFF"/>
-                    </a:solidFill>
-                  </a:tcPr>
-                </a:tc>
-                <a:extLst>
-                  <a:ext uri="{0D108BD9-81ED-4DB2-BD59-A6C34878D82A}">
-                    <a16:rowId xmlns:a16="http://schemas.microsoft.com/office/drawing/2014/main" val="10002"/>
-                  </a:ext>
-                </a:extLst>
+              <a:tr h="347472">
+                <a:tc>
+                  <a:txBody>
+                    <a:bodyPr/>
+                    <a:lstStyle/>
+                    <a:p>
+                      <a:pPr algn="l"/>
+                      <a:r>
+                        <a:rPr sz="840" b="0">
+                          <a:solidFill>
+                            <a:srgbClr val="1A1A1A"/>
+                          </a:solidFill>
+                          <a:latin typeface="Arial"/>
+                          <a:ea typeface="微软雅黑"/>
+                          <a:cs typeface="Arial"/>
+                        </a:rPr>
+                        <a:t>顶面朝下（倒置）</a:t>
+                      </a:r>
+                    </a:p>
+                  </a:txBody>
+                  <a:tcPr marL="45720" marR="45720" marT="9144" marB="9144" anchor="ctr">
+                    <a:solidFill>
+                      <a:srgbClr val="FFFFFF"/>
+                    </a:solidFill>
+                  </a:tcPr>
+                </a:tc>
+                <a:tc>
+                  <a:txBody>
+                    <a:bodyPr/>
+                    <a:lstStyle/>
+                    <a:p>
+                      <a:pPr algn="ctr"/>
+                      <a:r>
+                        <a:rPr sz="840" b="0">
+                          <a:solidFill>
+                            <a:srgbClr val="1A1A1A"/>
+                          </a:solidFill>
+                          <a:latin typeface="Arial"/>
+                          <a:ea typeface="微软雅黑"/>
+                          <a:cs typeface="Arial"/>
+                        </a:rPr>
+                        <a:t>300 mm</a:t>
+                      </a:r>
+                    </a:p>
+                  </a:txBody>
+                  <a:tcPr marL="45720" marR="45720" marT="9144" marB="9144" anchor="ctr">
+                    <a:solidFill>
+                      <a:srgbClr val="FFFFFF"/>
+                    </a:solidFill>
+                  </a:tcPr>
+                </a:tc>
+                <a:tc>
+                  <a:txBody>
+                    <a:bodyPr/>
+                    <a:lstStyle/>
+                    <a:p>
+                      <a:pPr algn="ctr"/>
+                      <a:r>
+                        <a:rPr sz="840" b="0">
+                          <a:solidFill>
+                            <a:srgbClr val="1A1A1A"/>
+                          </a:solidFill>
+                          <a:latin typeface="Arial"/>
+                          <a:ea typeface="微软雅黑"/>
+                          <a:cs typeface="Arial"/>
+                        </a:rPr>
+                        <a:t>250 mm</a:t>
+                      </a:r>
+                    </a:p>
+                  </a:txBody>
+                  <a:tcPr marL="45720" marR="45720" marT="9144" marB="9144" anchor="ctr">
+                    <a:solidFill>
+                      <a:srgbClr val="FFFFFF"/>
+                    </a:solidFill>
+                  </a:tcPr>
+                </a:tc>
               </a:tr>
-              <a:tr h="384048">
-                <a:tc>
-                  <a:txBody>
-                    <a:bodyPr/>
-                    <a:lstStyle/>
-                    <a:p>
-                      <a:pPr algn="ctr">
-                        <a:lnSpc>
-                          <a:spcPct val="100000"/>
-                        </a:lnSpc>
-                      </a:pPr>
-                      <a:r>
-                        <a:rPr sz="900" b="1">
-                          <a:solidFill>
-                            <a:srgbClr val="1A1A1A"/>
-                          </a:solidFill>
-                          <a:latin typeface="Arial"/>
-                          <a:ea typeface="微软雅黑"/>
-                          <a:cs typeface="Arial"/>
-                        </a:rPr>
-                        <a:t>A3</a:t>
-                      </a:r>
-                    </a:p>
-                  </a:txBody>
-                  <a:tcPr marL="50292" marR="50292" marT="13716" marB="13716" anchor="ctr">
-                    <a:lnL w="9525" cap="flat" cmpd="sng" algn="ctr">
-                      <a:solidFill>
-                        <a:srgbClr val="D9D9D9"/>
-                      </a:solidFill>
-                      <a:prstDash val="solid"/>
-                    </a:lnL>
-                    <a:lnR w="9525" cap="flat" cmpd="sng" algn="ctr">
-                      <a:solidFill>
-                        <a:srgbClr val="D9D9D9"/>
-                      </a:solidFill>
-                      <a:prstDash val="solid"/>
-                    </a:lnR>
-                    <a:lnT w="9525" cap="flat" cmpd="sng" algn="ctr">
-                      <a:solidFill>
-                        <a:srgbClr val="D9D9D9"/>
-                      </a:solidFill>
-                      <a:prstDash val="solid"/>
-                    </a:lnT>
-                    <a:lnB w="9525" cap="flat" cmpd="sng" algn="ctr">
-                      <a:solidFill>
-                        <a:srgbClr val="D9D9D9"/>
-                      </a:solidFill>
-                      <a:prstDash val="solid"/>
-                    </a:lnB>
-                    <a:solidFill>
-                      <a:srgbClr val="FFFFFF"/>
-                    </a:solidFill>
-                  </a:tcPr>
-                </a:tc>
-                <a:tc>
-                  <a:txBody>
-                    <a:bodyPr/>
-                    <a:lstStyle/>
-                    <a:p>
-                      <a:pPr algn="l">
-                        <a:lnSpc>
-                          <a:spcPct val="100000"/>
-                        </a:lnSpc>
-                      </a:pPr>
-                      <a:r>
-                        <a:rPr sz="900" b="0">
-                          <a:solidFill>
-                            <a:srgbClr val="1A1A1A"/>
-                          </a:solidFill>
-                          <a:latin typeface="Arial"/>
-                          <a:ea typeface="微软雅黑"/>
-                          <a:cs typeface="Arial"/>
-                        </a:rPr>
-                        <a:t>F-FRONT 正面</a:t>
-                      </a:r>
-                    </a:p>
-                  </a:txBody>
-                  <a:tcPr marL="50292" marR="50292" marT="13716" marB="13716" anchor="ctr">
-                    <a:lnL w="9525" cap="flat" cmpd="sng" algn="ctr">
-                      <a:solidFill>
-                        <a:srgbClr val="D9D9D9"/>
-                      </a:solidFill>
-                      <a:prstDash val="solid"/>
-                    </a:lnL>
-                    <a:lnR w="9525" cap="flat" cmpd="sng" algn="ctr">
-                      <a:solidFill>
-                        <a:srgbClr val="D9D9D9"/>
-                      </a:solidFill>
-                      <a:prstDash val="solid"/>
-                    </a:lnR>
-                    <a:lnT w="9525" cap="flat" cmpd="sng" algn="ctr">
-                      <a:solidFill>
-                        <a:srgbClr val="D9D9D9"/>
-                      </a:solidFill>
-                      <a:prstDash val="solid"/>
-                    </a:lnT>
-                    <a:lnB w="9525" cap="flat" cmpd="sng" algn="ctr">
-                      <a:solidFill>
-                        <a:srgbClr val="D9D9D9"/>
-                      </a:solidFill>
-                      <a:prstDash val="solid"/>
-                    </a:lnB>
-                    <a:solidFill>
-                      <a:srgbClr val="FFFFFF"/>
-                    </a:solidFill>
-                  </a:tcPr>
-                </a:tc>
-                <a:extLst>
-                  <a:ext uri="{0D108BD9-81ED-4DB2-BD59-A6C34878D82A}">
-                    <a16:rowId xmlns:a16="http://schemas.microsoft.com/office/drawing/2014/main" val="10003"/>
-                  </a:ext>
-                </a:extLst>
+              <a:tr h="347472">
+                <a:tc>
+                  <a:txBody>
+                    <a:bodyPr/>
+                    <a:lstStyle/>
+                    <a:p>
+                      <a:pPr algn="l"/>
+                      <a:r>
+                        <a:rPr sz="840" b="0">
+                          <a:solidFill>
+                            <a:srgbClr val="1A1A1A"/>
+                          </a:solidFill>
+                          <a:latin typeface="Arial"/>
+                          <a:ea typeface="微软雅黑"/>
+                          <a:cs typeface="Arial"/>
+                        </a:rPr>
+                        <a:t>正面朝下（防爆标识面）</a:t>
+                      </a:r>
+                    </a:p>
+                  </a:txBody>
+                  <a:tcPr marL="45720" marR="45720" marT="9144" marB="9144" anchor="ctr">
+                    <a:solidFill>
+                      <a:srgbClr val="FFFFFF"/>
+                    </a:solidFill>
+                  </a:tcPr>
+                </a:tc>
+                <a:tc>
+                  <a:txBody>
+                    <a:bodyPr/>
+                    <a:lstStyle/>
+                    <a:p>
+                      <a:pPr algn="ctr"/>
+                      <a:r>
+                        <a:rPr sz="840" b="0">
+                          <a:solidFill>
+                            <a:srgbClr val="1A1A1A"/>
+                          </a:solidFill>
+                          <a:latin typeface="Arial"/>
+                          <a:ea typeface="微软雅黑"/>
+                          <a:cs typeface="Arial"/>
+                        </a:rPr>
+                        <a:t>400 mm</a:t>
+                      </a:r>
+                    </a:p>
+                  </a:txBody>
+                  <a:tcPr marL="45720" marR="45720" marT="9144" marB="9144" anchor="ctr">
+                    <a:solidFill>
+                      <a:srgbClr val="FFFFFF"/>
+                    </a:solidFill>
+                  </a:tcPr>
+                </a:tc>
+                <a:tc>
+                  <a:txBody>
+                    <a:bodyPr/>
+                    <a:lstStyle/>
+                    <a:p>
+                      <a:pPr algn="ctr"/>
+                      <a:r>
+                        <a:rPr sz="840" b="0">
+                          <a:solidFill>
+                            <a:srgbClr val="1A1A1A"/>
+                          </a:solidFill>
+                          <a:latin typeface="Arial"/>
+                          <a:ea typeface="微软雅黑"/>
+                          <a:cs typeface="Arial"/>
+                        </a:rPr>
+                        <a:t>300 mm</a:t>
+                      </a:r>
+                    </a:p>
+                  </a:txBody>
+                  <a:tcPr marL="45720" marR="45720" marT="9144" marB="9144" anchor="ctr">
+                    <a:solidFill>
+                      <a:srgbClr val="FFFFFF"/>
+                    </a:solidFill>
+                  </a:tcPr>
+                </a:tc>
               </a:tr>
-              <a:tr h="384048">
-                <a:tc>
-                  <a:txBody>
-                    <a:bodyPr/>
-                    <a:lstStyle/>
-                    <a:p>
-                      <a:pPr algn="ctr">
-                        <a:lnSpc>
-                          <a:spcPct val="100000"/>
-                        </a:lnSpc>
-                      </a:pPr>
-                      <a:r>
-                        <a:rPr sz="900" b="1">
-                          <a:solidFill>
-                            <a:srgbClr val="1A1A1A"/>
-                          </a:solidFill>
-                          <a:latin typeface="Arial"/>
-                          <a:ea typeface="微软雅黑"/>
-                          <a:cs typeface="Arial"/>
-                        </a:rPr>
-                        <a:t>A4</a:t>
-                      </a:r>
-                    </a:p>
-                  </a:txBody>
-                  <a:tcPr marL="50292" marR="50292" marT="13716" marB="13716" anchor="ctr">
-                    <a:lnL w="9525" cap="flat" cmpd="sng" algn="ctr">
-                      <a:solidFill>
-                        <a:srgbClr val="D9D9D9"/>
-                      </a:solidFill>
-                      <a:prstDash val="solid"/>
-                    </a:lnL>
-                    <a:lnR w="9525" cap="flat" cmpd="sng" algn="ctr">
-                      <a:solidFill>
-                        <a:srgbClr val="D9D9D9"/>
-                      </a:solidFill>
-                      <a:prstDash val="solid"/>
-                    </a:lnR>
-                    <a:lnT w="9525" cap="flat" cmpd="sng" algn="ctr">
-                      <a:solidFill>
-                        <a:srgbClr val="D9D9D9"/>
-                      </a:solidFill>
-                      <a:prstDash val="solid"/>
-                    </a:lnT>
-                    <a:lnB w="9525" cap="flat" cmpd="sng" algn="ctr">
-                      <a:solidFill>
-                        <a:srgbClr val="D9D9D9"/>
-                      </a:solidFill>
-                      <a:prstDash val="solid"/>
-                    </a:lnB>
-                    <a:solidFill>
-                      <a:srgbClr val="FFFFFF"/>
-                    </a:solidFill>
-                  </a:tcPr>
-                </a:tc>
-                <a:tc>
-                  <a:txBody>
-                    <a:bodyPr/>
-                    <a:lstStyle/>
-                    <a:p>
-                      <a:pPr algn="l">
-                        <a:lnSpc>
-                          <a:spcPct val="100000"/>
-                        </a:lnSpc>
-                      </a:pPr>
-                      <a:r>
-                        <a:rPr sz="900" b="0">
-                          <a:solidFill>
-                            <a:srgbClr val="1A1A1A"/>
-                          </a:solidFill>
-                          <a:latin typeface="Arial"/>
-                          <a:ea typeface="微软雅黑"/>
-                          <a:cs typeface="Arial"/>
-                        </a:rPr>
-                        <a:t>F-BACK 背面</a:t>
-                      </a:r>
-                    </a:p>
-                  </a:txBody>
-                  <a:tcPr marL="50292" marR="50292" marT="13716" marB="13716" anchor="ctr">
-                    <a:lnL w="9525" cap="flat" cmpd="sng" algn="ctr">
-                      <a:solidFill>
-                        <a:srgbClr val="D9D9D9"/>
-                      </a:solidFill>
-                      <a:prstDash val="solid"/>
-                    </a:lnL>
-                    <a:lnR w="9525" cap="flat" cmpd="sng" algn="ctr">
-                      <a:solidFill>
-                        <a:srgbClr val="D9D9D9"/>
-                      </a:solidFill>
-                      <a:prstDash val="solid"/>
-                    </a:lnR>
-                    <a:lnT w="9525" cap="flat" cmpd="sng" algn="ctr">
-                      <a:solidFill>
-                        <a:srgbClr val="D9D9D9"/>
-                      </a:solidFill>
-                      <a:prstDash val="solid"/>
-                    </a:lnT>
-                    <a:lnB w="9525" cap="flat" cmpd="sng" algn="ctr">
-                      <a:solidFill>
-                        <a:srgbClr val="D9D9D9"/>
-                      </a:solidFill>
-                      <a:prstDash val="solid"/>
-                    </a:lnB>
-                    <a:solidFill>
-                      <a:srgbClr val="FFFFFF"/>
-                    </a:solidFill>
-                  </a:tcPr>
-                </a:tc>
-                <a:extLst>
-                  <a:ext uri="{0D108BD9-81ED-4DB2-BD59-A6C34878D82A}">
-                    <a16:rowId xmlns:a16="http://schemas.microsoft.com/office/drawing/2014/main" val="10004"/>
-                  </a:ext>
-                </a:extLst>
+              <a:tr h="347472">
+                <a:tc>
+                  <a:txBody>
+                    <a:bodyPr/>
+                    <a:lstStyle/>
+                    <a:p>
+                      <a:pPr algn="l"/>
+                      <a:r>
+                        <a:rPr sz="840" b="0">
+                          <a:solidFill>
+                            <a:srgbClr val="1A1A1A"/>
+                          </a:solidFill>
+                          <a:latin typeface="Arial"/>
+                          <a:ea typeface="微软雅黑"/>
+                          <a:cs typeface="Arial"/>
+                        </a:rPr>
+                        <a:t>背面朝下（条码面）</a:t>
+                      </a:r>
+                    </a:p>
+                  </a:txBody>
+                  <a:tcPr marL="45720" marR="45720" marT="9144" marB="9144" anchor="ctr">
+                    <a:solidFill>
+                      <a:srgbClr val="FFFFFF"/>
+                    </a:solidFill>
+                  </a:tcPr>
+                </a:tc>
+                <a:tc>
+                  <a:txBody>
+                    <a:bodyPr/>
+                    <a:lstStyle/>
+                    <a:p>
+                      <a:pPr algn="ctr"/>
+                      <a:r>
+                        <a:rPr sz="840" b="0">
+                          <a:solidFill>
+                            <a:srgbClr val="1A1A1A"/>
+                          </a:solidFill>
+                          <a:latin typeface="Arial"/>
+                          <a:ea typeface="微软雅黑"/>
+                          <a:cs typeface="Arial"/>
+                        </a:rPr>
+                        <a:t>400 mm</a:t>
+                      </a:r>
+                    </a:p>
+                  </a:txBody>
+                  <a:tcPr marL="45720" marR="45720" marT="9144" marB="9144" anchor="ctr">
+                    <a:solidFill>
+                      <a:srgbClr val="FFFFFF"/>
+                    </a:solidFill>
+                  </a:tcPr>
+                </a:tc>
+                <a:tc>
+                  <a:txBody>
+                    <a:bodyPr/>
+                    <a:lstStyle/>
+                    <a:p>
+                      <a:pPr algn="ctr"/>
+                      <a:r>
+                        <a:rPr sz="840" b="0">
+                          <a:solidFill>
+                            <a:srgbClr val="1A1A1A"/>
+                          </a:solidFill>
+                          <a:latin typeface="Arial"/>
+                          <a:ea typeface="微软雅黑"/>
+                          <a:cs typeface="Arial"/>
+                        </a:rPr>
+                        <a:t>300 mm</a:t>
+                      </a:r>
+                    </a:p>
+                  </a:txBody>
+                  <a:tcPr marL="45720" marR="45720" marT="9144" marB="9144" anchor="ctr">
+                    <a:solidFill>
+                      <a:srgbClr val="FFFFFF"/>
+                    </a:solidFill>
+                  </a:tcPr>
+                </a:tc>
               </a:tr>
-              <a:tr h="384048">
-                <a:tc>
-                  <a:txBody>
-                    <a:bodyPr/>
-                    <a:lstStyle/>
-                    <a:p>
-                      <a:pPr algn="ctr">
-                        <a:lnSpc>
-                          <a:spcPct val="100000"/>
-                        </a:lnSpc>
-                      </a:pPr>
-                      <a:r>
-                        <a:rPr sz="900" b="1">
-                          <a:solidFill>
-                            <a:srgbClr val="1A1A1A"/>
-                          </a:solidFill>
-                          <a:latin typeface="Arial"/>
-                          <a:ea typeface="微软雅黑"/>
-                          <a:cs typeface="Arial"/>
-                        </a:rPr>
-                        <a:t>A5</a:t>
-                      </a:r>
-                    </a:p>
-                  </a:txBody>
-                  <a:tcPr marL="50292" marR="50292" marT="13716" marB="13716" anchor="ctr">
-                    <a:lnL w="9525" cap="flat" cmpd="sng" algn="ctr">
-                      <a:solidFill>
-                        <a:srgbClr val="D9D9D9"/>
-                      </a:solidFill>
-                      <a:prstDash val="solid"/>
-                    </a:lnL>
-                    <a:lnR w="9525" cap="flat" cmpd="sng" algn="ctr">
-                      <a:solidFill>
-                        <a:srgbClr val="D9D9D9"/>
-                      </a:solidFill>
-                      <a:prstDash val="solid"/>
-                    </a:lnR>
-                    <a:lnT w="9525" cap="flat" cmpd="sng" algn="ctr">
-                      <a:solidFill>
-                        <a:srgbClr val="D9D9D9"/>
-                      </a:solidFill>
-                      <a:prstDash val="solid"/>
-                    </a:lnT>
-                    <a:lnB w="9525" cap="flat" cmpd="sng" algn="ctr">
-                      <a:solidFill>
-                        <a:srgbClr val="D9D9D9"/>
-                      </a:solidFill>
-                      <a:prstDash val="solid"/>
-                    </a:lnB>
-                    <a:solidFill>
-                      <a:srgbClr val="FFFFFF"/>
-                    </a:solidFill>
-                  </a:tcPr>
-                </a:tc>
-                <a:tc>
-                  <a:txBody>
-                    <a:bodyPr/>
-                    <a:lstStyle/>
-                    <a:p>
-                      <a:pPr algn="l">
-                        <a:lnSpc>
-                          <a:spcPct val="100000"/>
-                        </a:lnSpc>
-                      </a:pPr>
-                      <a:r>
-                        <a:rPr sz="900" b="0">
-                          <a:solidFill>
-                            <a:srgbClr val="1A1A1A"/>
-                          </a:solidFill>
-                          <a:latin typeface="Arial"/>
-                          <a:ea typeface="微软雅黑"/>
-                          <a:cs typeface="Arial"/>
-                        </a:rPr>
-                        <a:t>S-LEFT 左侧</a:t>
-                      </a:r>
-                    </a:p>
-                  </a:txBody>
-                  <a:tcPr marL="50292" marR="50292" marT="13716" marB="13716" anchor="ctr">
-                    <a:lnL w="9525" cap="flat" cmpd="sng" algn="ctr">
-                      <a:solidFill>
-                        <a:srgbClr val="D9D9D9"/>
-                      </a:solidFill>
-                      <a:prstDash val="solid"/>
-                    </a:lnL>
-                    <a:lnR w="9525" cap="flat" cmpd="sng" algn="ctr">
-                      <a:solidFill>
-                        <a:srgbClr val="D9D9D9"/>
-                      </a:solidFill>
-                      <a:prstDash val="solid"/>
-                    </a:lnR>
-                    <a:lnT w="9525" cap="flat" cmpd="sng" algn="ctr">
-                      <a:solidFill>
-                        <a:srgbClr val="D9D9D9"/>
-                      </a:solidFill>
-                      <a:prstDash val="solid"/>
-                    </a:lnT>
-                    <a:lnB w="9525" cap="flat" cmpd="sng" algn="ctr">
-                      <a:solidFill>
-                        <a:srgbClr val="D9D9D9"/>
-                      </a:solidFill>
-                      <a:prstDash val="solid"/>
-                    </a:lnB>
-                    <a:solidFill>
-                      <a:srgbClr val="FFFFFF"/>
-                    </a:solidFill>
-                  </a:tcPr>
-                </a:tc>
-                <a:extLst>
-                  <a:ext uri="{0D108BD9-81ED-4DB2-BD59-A6C34878D82A}">
-                    <a16:rowId xmlns:a16="http://schemas.microsoft.com/office/drawing/2014/main" val="10005"/>
-                  </a:ext>
-                </a:extLst>
+              <a:tr h="347472">
+                <a:tc>
+                  <a:txBody>
+                    <a:bodyPr/>
+                    <a:lstStyle/>
+                    <a:p>
+                      <a:pPr algn="l"/>
+                      <a:r>
+                        <a:rPr sz="840" b="0">
+                          <a:solidFill>
+                            <a:srgbClr val="1A1A1A"/>
+                          </a:solidFill>
+                          <a:latin typeface="Arial"/>
+                          <a:ea typeface="微软雅黑"/>
+                          <a:cs typeface="Arial"/>
+                        </a:rPr>
+                        <a:t>左侧面朝下</a:t>
+                      </a:r>
+                    </a:p>
+                  </a:txBody>
+                  <a:tcPr marL="45720" marR="45720" marT="9144" marB="9144" anchor="ctr">
+                    <a:solidFill>
+                      <a:srgbClr val="FFFFFF"/>
+                    </a:solidFill>
+                  </a:tcPr>
+                </a:tc>
+                <a:tc>
+                  <a:txBody>
+                    <a:bodyPr/>
+                    <a:lstStyle/>
+                    <a:p>
+                      <a:pPr algn="ctr"/>
+                      <a:r>
+                        <a:rPr sz="840" b="0">
+                          <a:solidFill>
+                            <a:srgbClr val="1A1A1A"/>
+                          </a:solidFill>
+                          <a:latin typeface="Arial"/>
+                          <a:ea typeface="微软雅黑"/>
+                          <a:cs typeface="Arial"/>
+                        </a:rPr>
+                        <a:t>600 mm</a:t>
+                      </a:r>
+                    </a:p>
+                  </a:txBody>
+                  <a:tcPr marL="45720" marR="45720" marT="9144" marB="9144" anchor="ctr">
+                    <a:solidFill>
+                      <a:srgbClr val="FFFFFF"/>
+                    </a:solidFill>
+                  </a:tcPr>
+                </a:tc>
+                <a:tc>
+                  <a:txBody>
+                    <a:bodyPr/>
+                    <a:lstStyle/>
+                    <a:p>
+                      <a:pPr algn="ctr"/>
+                      <a:r>
+                        <a:rPr sz="840" b="0">
+                          <a:solidFill>
+                            <a:srgbClr val="1A1A1A"/>
+                          </a:solidFill>
+                          <a:latin typeface="Arial"/>
+                          <a:ea typeface="微软雅黑"/>
+                          <a:cs typeface="Arial"/>
+                        </a:rPr>
+                        <a:t>400 mm</a:t>
+                      </a:r>
+                    </a:p>
+                  </a:txBody>
+                  <a:tcPr marL="45720" marR="45720" marT="9144" marB="9144" anchor="ctr">
+                    <a:solidFill>
+                      <a:srgbClr val="FFFFFF"/>
+                    </a:solidFill>
+                  </a:tcPr>
+                </a:tc>
               </a:tr>
-              <a:tr h="384048">
-                <a:tc>
-                  <a:txBody>
-                    <a:bodyPr/>
-                    <a:lstStyle/>
-                    <a:p>
-                      <a:pPr algn="ctr">
-                        <a:lnSpc>
-                          <a:spcPct val="100000"/>
-                        </a:lnSpc>
-                      </a:pPr>
-                      <a:r>
-                        <a:rPr sz="900" b="1">
-                          <a:solidFill>
-                            <a:srgbClr val="1A1A1A"/>
-                          </a:solidFill>
-                          <a:latin typeface="Arial"/>
-                          <a:ea typeface="微软雅黑"/>
-                          <a:cs typeface="Arial"/>
-                        </a:rPr>
-                        <a:t>A6</a:t>
-                      </a:r>
-                    </a:p>
-                  </a:txBody>
-                  <a:tcPr marL="50292" marR="50292" marT="13716" marB="13716" anchor="ctr">
-                    <a:lnL w="9525" cap="flat" cmpd="sng" algn="ctr">
-                      <a:solidFill>
-                        <a:srgbClr val="D9D9D9"/>
-                      </a:solidFill>
-                      <a:prstDash val="solid"/>
-                    </a:lnL>
-                    <a:lnR w="9525" cap="flat" cmpd="sng" algn="ctr">
-                      <a:solidFill>
-                        <a:srgbClr val="D9D9D9"/>
-                      </a:solidFill>
-                      <a:prstDash val="solid"/>
-                    </a:lnR>
-                    <a:lnT w="9525" cap="flat" cmpd="sng" algn="ctr">
-                      <a:solidFill>
-                        <a:srgbClr val="D9D9D9"/>
-                      </a:solidFill>
-                      <a:prstDash val="solid"/>
-                    </a:lnT>
-                    <a:lnB w="9525" cap="flat" cmpd="sng" algn="ctr">
-                      <a:solidFill>
-                        <a:srgbClr val="D9D9D9"/>
-                      </a:solidFill>
-                      <a:prstDash val="solid"/>
-                    </a:lnB>
-                    <a:solidFill>
-                      <a:srgbClr val="FFFFFF"/>
-                    </a:solidFill>
-                  </a:tcPr>
-                </a:tc>
-                <a:tc>
-                  <a:txBody>
-                    <a:bodyPr/>
-                    <a:lstStyle/>
-                    <a:p>
-                      <a:pPr algn="l">
-                        <a:lnSpc>
-                          <a:spcPct val="100000"/>
-                        </a:lnSpc>
-                      </a:pPr>
-                      <a:r>
-                        <a:rPr sz="900" b="0" dirty="0">
-                          <a:solidFill>
-                            <a:srgbClr val="1A1A1A"/>
-                          </a:solidFill>
-                          <a:latin typeface="Arial"/>
-                          <a:ea typeface="微软雅黑"/>
-                          <a:cs typeface="Arial"/>
-                        </a:rPr>
-                        <a:t>S-RIGHT </a:t>
-                      </a:r>
-                      <a:r>
-                        <a:rPr sz="900" b="0" dirty="0" err="1">
-                          <a:solidFill>
-                            <a:srgbClr val="1A1A1A"/>
-                          </a:solidFill>
-                          <a:latin typeface="Arial"/>
-                          <a:ea typeface="微软雅黑"/>
-                          <a:cs typeface="Arial"/>
-                        </a:rPr>
-                        <a:t>右侧</a:t>
-                      </a:r>
-                      <a:endParaRPr sz="900" b="0" dirty="0">
-                        <a:solidFill>
-                          <a:srgbClr val="1A1A1A"/>
-                        </a:solidFill>
-                        <a:latin typeface="Arial"/>
-                        <a:ea typeface="微软雅黑"/>
-                        <a:cs typeface="Arial"/>
-                      </a:endParaRPr>
-                    </a:p>
-                  </a:txBody>
-                  <a:tcPr marL="50292" marR="50292" marT="13716" marB="13716" anchor="ctr">
-                    <a:lnL w="9525" cap="flat" cmpd="sng" algn="ctr">
-                      <a:solidFill>
-                        <a:srgbClr val="D9D9D9"/>
-                      </a:solidFill>
-                      <a:prstDash val="solid"/>
-                    </a:lnL>
-                    <a:lnR w="9525" cap="flat" cmpd="sng" algn="ctr">
-                      <a:solidFill>
-                        <a:srgbClr val="D9D9D9"/>
-                      </a:solidFill>
-                      <a:prstDash val="solid"/>
-                    </a:lnR>
-                    <a:lnT w="9525" cap="flat" cmpd="sng" algn="ctr">
-                      <a:solidFill>
-                        <a:srgbClr val="D9D9D9"/>
-                      </a:solidFill>
-                      <a:prstDash val="solid"/>
-                    </a:lnT>
-                    <a:lnB w="9525" cap="flat" cmpd="sng" algn="ctr">
-                      <a:solidFill>
-                        <a:srgbClr val="D9D9D9"/>
-                      </a:solidFill>
-                      <a:prstDash val="solid"/>
-                    </a:lnB>
-                    <a:solidFill>
-                      <a:srgbClr val="FFFFFF"/>
-                    </a:solidFill>
-                  </a:tcPr>
-                </a:tc>
-                <a:extLst>
-                  <a:ext uri="{0D108BD9-81ED-4DB2-BD59-A6C34878D82A}">
-                    <a16:rowId xmlns:a16="http://schemas.microsoft.com/office/drawing/2014/main" val="10006"/>
-                  </a:ext>
-                </a:extLst>
+              <a:tr h="347472">
+                <a:tc>
+                  <a:txBody>
+                    <a:bodyPr/>
+                    <a:lstStyle/>
+                    <a:p>
+                      <a:pPr algn="l"/>
+                      <a:r>
+                        <a:rPr sz="840" b="0">
+                          <a:solidFill>
+                            <a:srgbClr val="1A1A1A"/>
+                          </a:solidFill>
+                          <a:latin typeface="Arial"/>
+                          <a:ea typeface="微软雅黑"/>
+                          <a:cs typeface="Arial"/>
+                        </a:rPr>
+                        <a:t>右侧面朝下</a:t>
+                      </a:r>
+                    </a:p>
+                  </a:txBody>
+                  <a:tcPr marL="45720" marR="45720" marT="9144" marB="9144" anchor="ctr">
+                    <a:solidFill>
+                      <a:srgbClr val="FFFFFF"/>
+                    </a:solidFill>
+                  </a:tcPr>
+                </a:tc>
+                <a:tc>
+                  <a:txBody>
+                    <a:bodyPr/>
+                    <a:lstStyle/>
+                    <a:p>
+                      <a:pPr algn="ctr"/>
+                      <a:r>
+                        <a:rPr sz="840" b="0">
+                          <a:solidFill>
+                            <a:srgbClr val="1A1A1A"/>
+                          </a:solidFill>
+                          <a:latin typeface="Arial"/>
+                          <a:ea typeface="微软雅黑"/>
+                          <a:cs typeface="Arial"/>
+                        </a:rPr>
+                        <a:t>600 mm</a:t>
+                      </a:r>
+                    </a:p>
+                  </a:txBody>
+                  <a:tcPr marL="45720" marR="45720" marT="9144" marB="9144" anchor="ctr">
+                    <a:solidFill>
+                      <a:srgbClr val="FFFFFF"/>
+                    </a:solidFill>
+                  </a:tcPr>
+                </a:tc>
+                <a:tc>
+                  <a:txBody>
+                    <a:bodyPr/>
+                    <a:lstStyle/>
+                    <a:p>
+                      <a:pPr algn="ctr"/>
+                      <a:r>
+                        <a:rPr sz="840" b="0">
+                          <a:solidFill>
+                            <a:srgbClr val="1A1A1A"/>
+                          </a:solidFill>
+                          <a:latin typeface="Arial"/>
+                          <a:ea typeface="微软雅黑"/>
+                          <a:cs typeface="Arial"/>
+                        </a:rPr>
+                        <a:t>400 mm</a:t>
+                      </a:r>
+                    </a:p>
+                  </a:txBody>
+                  <a:tcPr marL="45720" marR="45720" marT="9144" marB="9144" anchor="ctr">
+                    <a:solidFill>
+                      <a:srgbClr val="FFFFFF"/>
+                    </a:solidFill>
+                  </a:tcPr>
+                </a:tc>
               </a:tr>
             </a:tbl>
           </a:graphicData>
         </a:graphic>
       </p:graphicFrame>
-      <p:pic>
-        <p:nvPicPr>
-          <p:cNvPr id="10" name="Picture 9" descr="fig4_3d_placements_v2.png"/>
-          <p:cNvPicPr>
-            <a:picLocks noChangeAspect="1"/>
-          </p:cNvPicPr>
+      <p:sp>
+        <p:nvSpPr>
+          <p:cNvPr id="7" name="PX_faceNote"/>
+          <p:cNvSpPr txBox="1"/>
           <p:nvPr/>
-        </p:nvPicPr>
-        <p:blipFill>
-          <a:blip r:embed="rId3"/>
-          <a:stretch>
-            <a:fillRect/>
-          </a:stretch>
-        </p:blipFill>
+        </p:nvSpPr>
         <p:spPr>
           <a:xfrm>
-            <a:off x="490728" y="861059"/>
-            <a:ext cx="7982664" cy="5097759"/>
+            <a:off x="7464247" y="3511296"/>
+            <a:ext cx="4160520" cy="310896"/>
           </a:xfrm>
           <a:prstGeom prst="rect">
             <a:avLst/>
           </a:prstGeom>
+          <a:noFill/>
         </p:spPr>
-      </p:pic>
+        <p:txBody>
+          <a:bodyPr wrap="square" lIns="0" rIns="0" tIns="0" bIns="0">
+            <a:spAutoFit/>
+          </a:bodyPr>
+          <a:lstStyle/>
+          <a:p>
+            <a:pPr algn="l">
+              <a:lnSpc>
+                <a:spcPct val="105000"/>
+              </a:lnSpc>
+            </a:pPr>
+            <a:r>
+              <a:rPr sz="760" b="0">
+                <a:solidFill>
+                  <a:srgbClr val="8C8C8C"/>
+                </a:solidFill>
+                <a:latin typeface="Arial"/>
+                <a:ea typeface="微软雅黑"/>
+                <a:cs typeface="Arial"/>
+              </a:rPr>
+              <a:t>＝标签离天线的等效距离（箱高/2 + 箱面 10 cm）。</a:t>
+            </a:r>
+          </a:p>
+        </p:txBody>
+      </p:sp>
+      <p:cxnSp>
+        <p:nvCxnSpPr>
+          <p:cNvPr id="8" name="PX_strip_rule"/>
+          <p:cNvCxnSpPr/>
+          <p:nvPr/>
+        </p:nvCxnSpPr>
+        <p:spPr>
+          <a:xfrm>
+            <a:off x="566928" y="5870448"/>
+            <a:ext cx="11057839" cy="0"/>
+          </a:xfrm>
+          <a:prstGeom prst="line">
+            <a:avLst/>
+          </a:prstGeom>
+          <a:ln w="9525">
+            <a:solidFill>
+              <a:srgbClr val="E4E4E4"/>
+            </a:solidFill>
+          </a:ln>
+        </p:spPr>
+        <p:style>
+          <a:lnRef idx="2">
+            <a:schemeClr val="accent1"/>
+          </a:lnRef>
+          <a:fillRef idx="0">
+            <a:schemeClr val="accent1"/>
+          </a:fillRef>
+          <a:effectRef idx="1">
+            <a:schemeClr val="accent1"/>
+          </a:effectRef>
+          <a:fontRef idx="minor">
+            <a:schemeClr val="tx1"/>
+          </a:fontRef>
+        </p:style>
+      </p:cxnSp>
+      <p:sp>
+        <p:nvSpPr>
+          <p:cNvPr id="9" name="PX_strip_实验"/>
+          <p:cNvSpPr txBox="1"/>
+          <p:nvPr/>
+        </p:nvSpPr>
+        <p:spPr>
+          <a:xfrm>
+            <a:off x="566928" y="5961888"/>
+            <a:ext cx="4865449" cy="182880"/>
+          </a:xfrm>
+          <a:prstGeom prst="rect">
+            <a:avLst/>
+          </a:prstGeom>
+          <a:noFill/>
+        </p:spPr>
+        <p:txBody>
+          <a:bodyPr wrap="square" lIns="0" rIns="0" tIns="0" bIns="0">
+            <a:spAutoFit/>
+          </a:bodyPr>
+          <a:lstStyle/>
+          <a:p>
+            <a:pPr algn="l">
+              <a:lnSpc>
+                <a:spcPct val="105000"/>
+              </a:lnSpc>
+            </a:pPr>
+            <a:r>
+              <a:rPr sz="760" b="1">
+                <a:solidFill>
+                  <a:srgbClr val="8C8C8C"/>
+                </a:solidFill>
+                <a:latin typeface="Arial"/>
+                <a:ea typeface="微软雅黑"/>
+                <a:cs typeface="Arial"/>
+              </a:rPr>
+              <a:t>实验</a:t>
+            </a:r>
+          </a:p>
+        </p:txBody>
+      </p:sp>
+      <p:sp>
+        <p:nvSpPr>
+          <p:cNvPr id="10" name="PX_strip_实验_txt"/>
+          <p:cNvSpPr txBox="1"/>
+          <p:nvPr/>
+        </p:nvSpPr>
+        <p:spPr>
+          <a:xfrm>
+            <a:off x="566928" y="6144768"/>
+            <a:ext cx="4865449" cy="512064"/>
+          </a:xfrm>
+          <a:prstGeom prst="rect">
+            <a:avLst/>
+          </a:prstGeom>
+          <a:noFill/>
+        </p:spPr>
+        <p:txBody>
+          <a:bodyPr wrap="square" lIns="0" rIns="0" tIns="0" bIns="0">
+            <a:spAutoFit/>
+          </a:bodyPr>
+          <a:lstStyle/>
+          <a:p>
+            <a:pPr algn="l">
+              <a:lnSpc>
+                <a:spcPct val="105000"/>
+              </a:lnSpc>
+            </a:pPr>
+            <a:r>
+              <a:rPr sz="919" b="0">
+                <a:solidFill>
+                  <a:srgbClr val="1A1A1A"/>
+                </a:solidFill>
+                <a:latin typeface="Arial"/>
+                <a:ea typeface="微软雅黑"/>
+                <a:cs typeface="Arial"/>
+              </a:rPr>
+              <a:t>同一只箱，只换「哪个面朝下」；读码器固定在下、天线朝上。</a:t>
+            </a:r>
+          </a:p>
+        </p:txBody>
+      </p:sp>
+      <p:sp>
+        <p:nvSpPr>
+          <p:cNvPr id="11" name="PX_strip_变量"/>
+          <p:cNvSpPr txBox="1"/>
+          <p:nvPr/>
+        </p:nvSpPr>
+        <p:spPr>
+          <a:xfrm>
+            <a:off x="5653534" y="5961888"/>
+            <a:ext cx="2211567" cy="182880"/>
+          </a:xfrm>
+          <a:prstGeom prst="rect">
+            <a:avLst/>
+          </a:prstGeom>
+          <a:noFill/>
+        </p:spPr>
+        <p:txBody>
+          <a:bodyPr wrap="square" lIns="0" rIns="0" tIns="0" bIns="0">
+            <a:spAutoFit/>
+          </a:bodyPr>
+          <a:lstStyle/>
+          <a:p>
+            <a:pPr algn="l">
+              <a:lnSpc>
+                <a:spcPct val="105000"/>
+              </a:lnSpc>
+            </a:pPr>
+            <a:r>
+              <a:rPr sz="760" b="1">
+                <a:solidFill>
+                  <a:srgbClr val="8C8C8C"/>
+                </a:solidFill>
+                <a:latin typeface="Arial"/>
+                <a:ea typeface="微软雅黑"/>
+                <a:cs typeface="Arial"/>
+              </a:rPr>
+              <a:t>变量</a:t>
+            </a:r>
+          </a:p>
+        </p:txBody>
+      </p:sp>
+      <p:sp>
+        <p:nvSpPr>
+          <p:cNvPr id="12" name="PX_strip_变量_txt"/>
+          <p:cNvSpPr txBox="1"/>
+          <p:nvPr/>
+        </p:nvSpPr>
+        <p:spPr>
+          <a:xfrm>
+            <a:off x="5653534" y="6144768"/>
+            <a:ext cx="2211567" cy="512064"/>
+          </a:xfrm>
+          <a:prstGeom prst="rect">
+            <a:avLst/>
+          </a:prstGeom>
+          <a:noFill/>
+        </p:spPr>
+        <p:txBody>
+          <a:bodyPr wrap="square" lIns="0" rIns="0" tIns="0" bIns="0">
+            <a:spAutoFit/>
+          </a:bodyPr>
+          <a:lstStyle/>
+          <a:p>
+            <a:pPr algn="l">
+              <a:lnSpc>
+                <a:spcPct val="105000"/>
+              </a:lnSpc>
+            </a:pPr>
+            <a:r>
+              <a:rPr sz="919" b="0">
+                <a:solidFill>
+                  <a:srgbClr val="1A1A1A"/>
+                </a:solidFill>
+                <a:latin typeface="Arial"/>
+                <a:ea typeface="微软雅黑"/>
+                <a:cs typeface="Arial"/>
+              </a:rPr>
+              <a:t>朝下的面（6 种）</a:t>
+            </a:r>
+          </a:p>
+        </p:txBody>
+      </p:sp>
+      <p:sp>
+        <p:nvSpPr>
+          <p:cNvPr id="13" name="PX_strip_结论"/>
+          <p:cNvSpPr txBox="1"/>
+          <p:nvPr/>
+        </p:nvSpPr>
+        <p:spPr>
+          <a:xfrm>
+            <a:off x="8086258" y="5961888"/>
+            <a:ext cx="3538508" cy="182880"/>
+          </a:xfrm>
+          <a:prstGeom prst="rect">
+            <a:avLst/>
+          </a:prstGeom>
+          <a:noFill/>
+        </p:spPr>
+        <p:txBody>
+          <a:bodyPr wrap="square" lIns="0" rIns="0" tIns="0" bIns="0">
+            <a:spAutoFit/>
+          </a:bodyPr>
+          <a:lstStyle/>
+          <a:p>
+            <a:pPr algn="l">
+              <a:lnSpc>
+                <a:spcPct val="105000"/>
+              </a:lnSpc>
+            </a:pPr>
+            <a:r>
+              <a:rPr sz="760" b="1">
+                <a:solidFill>
+                  <a:srgbClr val="8C8C8C"/>
+                </a:solidFill>
+                <a:latin typeface="Arial"/>
+                <a:ea typeface="微软雅黑"/>
+                <a:cs typeface="Arial"/>
+              </a:rPr>
+              <a:t>结论</a:t>
+            </a:r>
+          </a:p>
+        </p:txBody>
+      </p:sp>
+      <p:sp>
+        <p:nvSpPr>
+          <p:cNvPr id="14" name="PX_strip_结论_txt"/>
+          <p:cNvSpPr txBox="1"/>
+          <p:nvPr/>
+        </p:nvSpPr>
+        <p:spPr>
+          <a:xfrm>
+            <a:off x="8086258" y="6144768"/>
+            <a:ext cx="3538508" cy="512064"/>
+          </a:xfrm>
+          <a:prstGeom prst="rect">
+            <a:avLst/>
+          </a:prstGeom>
+          <a:noFill/>
+        </p:spPr>
+        <p:txBody>
+          <a:bodyPr wrap="square" lIns="0" rIns="0" tIns="0" bIns="0">
+            <a:spAutoFit/>
+          </a:bodyPr>
+          <a:lstStyle/>
+          <a:p>
+            <a:pPr algn="l">
+              <a:lnSpc>
+                <a:spcPct val="105000"/>
+              </a:lnSpc>
+            </a:pPr>
+            <a:r>
+              <a:rPr sz="919" b="1">
+                <a:solidFill>
+                  <a:srgbClr val="3E5DA8"/>
+                </a:solidFill>
+                <a:latin typeface="Arial"/>
+                <a:ea typeface="微软雅黑"/>
+                <a:cs typeface="Arial"/>
+              </a:rPr>
+              <a:t>底面朝下最好；箱体立起越高，箱内标签离天线越远，侧躺最差。</a:t>
+            </a:r>
+          </a:p>
+        </p:txBody>
+      </p:sp>
     </p:spTree>
   </p:cSld>
   <p:clrMapOvr>
@@ -5977,17 +7528,31 @@
                         </a:lnSpc>
                       </a:pPr>
                       <a:r>
-                        <a:rPr sz="850" b="1">
-                          <a:solidFill>
-                            <a:srgbClr val="1A1A1A"/>
-                          </a:solidFill>
-                          <a:latin typeface="Arial"/>
-                          <a:ea typeface="微软雅黑"/>
-                          <a:cs typeface="Arial"/>
-                        </a:rPr>
-                        <a:t>上</a:t>
+                        <a:rPr sz="780" b="1">
+                          <a:solidFill>
+                            <a:srgbClr val="1A1A1A"/>
+                          </a:solidFill>
+                          <a:latin typeface="Arial"/>
+                          <a:ea typeface="微软雅黑"/>
+                          <a:cs typeface="Arial"/>
+                        </a:rPr>
+                        <a:t>顶面</a:t>
                       </a:r>
                       <a:endParaRPr sz="850"/>
+                    </a:p>
+                    <a:p>
+                      <a:pPr algn="ctr"/>
+                      <a:r>
+                        <a:rPr sz="780" b="1">
+                          <a:solidFill>
+                            <a:srgbClr val="1A1A1A"/>
+                          </a:solidFill>
+                          <a:latin typeface="Arial"/>
+                          <a:ea typeface="微软雅黑"/>
+                          <a:cs typeface="Arial"/>
+                        </a:rPr>
+                        <a:t>朝下</a:t>
+                      </a:r>
                     </a:p>
                   </a:txBody>
                   <a:tcPr marL="45720" marR="45720" marT="9144" marB="9144" anchor="ctr">
@@ -6031,17 +7596,31 @@
                         </a:lnSpc>
                       </a:pPr>
                       <a:r>
-                        <a:rPr sz="850" b="1">
-                          <a:solidFill>
-                            <a:srgbClr val="1A1A1A"/>
-                          </a:solidFill>
-                          <a:latin typeface="Arial"/>
-                          <a:ea typeface="微软雅黑"/>
-                          <a:cs typeface="Arial"/>
-                        </a:rPr>
-                        <a:t>下</a:t>
+                        <a:rPr sz="780" b="1">
+                          <a:solidFill>
+                            <a:srgbClr val="1A1A1A"/>
+                          </a:solidFill>
+                          <a:latin typeface="Arial"/>
+                          <a:ea typeface="微软雅黑"/>
+                          <a:cs typeface="Arial"/>
+                        </a:rPr>
+                        <a:t>底面</a:t>
                       </a:r>
                       <a:endParaRPr sz="850"/>
+                    </a:p>
+                    <a:p>
+                      <a:pPr algn="ctr"/>
+                      <a:r>
+                        <a:rPr sz="780" b="1">
+                          <a:solidFill>
+                            <a:srgbClr val="1A1A1A"/>
+                          </a:solidFill>
+                          <a:latin typeface="Arial"/>
+                          <a:ea typeface="微软雅黑"/>
+                          <a:cs typeface="Arial"/>
+                        </a:rPr>
+                        <a:t>朝下</a:t>
+                      </a:r>
                     </a:p>
                   </a:txBody>
                   <a:tcPr marL="45720" marR="45720" marT="9144" marB="9144" anchor="ctr">
@@ -6085,17 +7664,31 @@
                         </a:lnSpc>
                       </a:pPr>
                       <a:r>
-                        <a:rPr sz="850" b="1">
-                          <a:solidFill>
-                            <a:srgbClr val="1A1A1A"/>
-                          </a:solidFill>
-                          <a:latin typeface="Arial"/>
-                          <a:ea typeface="微软雅黑"/>
-                          <a:cs typeface="Arial"/>
-                        </a:rPr>
-                        <a:t>左</a:t>
+                        <a:rPr sz="780" b="1">
+                          <a:solidFill>
+                            <a:srgbClr val="1A1A1A"/>
+                          </a:solidFill>
+                          <a:latin typeface="Arial"/>
+                          <a:ea typeface="微软雅黑"/>
+                          <a:cs typeface="Arial"/>
+                        </a:rPr>
+                        <a:t>左侧</a:t>
                       </a:r>
                       <a:endParaRPr sz="850"/>
+                    </a:p>
+                    <a:p>
+                      <a:pPr algn="ctr"/>
+                      <a:r>
+                        <a:rPr sz="780" b="1">
+                          <a:solidFill>
+                            <a:srgbClr val="1A1A1A"/>
+                          </a:solidFill>
+                          <a:latin typeface="Arial"/>
+                          <a:ea typeface="微软雅黑"/>
+                          <a:cs typeface="Arial"/>
+                        </a:rPr>
+                        <a:t>朝下</a:t>
+                      </a:r>
                     </a:p>
                   </a:txBody>
                   <a:tcPr marL="45720" marR="45720" marT="9144" marB="9144" anchor="ctr">
@@ -6139,17 +7732,31 @@
                         </a:lnSpc>
                       </a:pPr>
                       <a:r>
-                        <a:rPr sz="850" b="1">
-                          <a:solidFill>
-                            <a:srgbClr val="1A1A1A"/>
-                          </a:solidFill>
-                          <a:latin typeface="Arial"/>
-                          <a:ea typeface="微软雅黑"/>
-                          <a:cs typeface="Arial"/>
-                        </a:rPr>
-                        <a:t>右</a:t>
+                        <a:rPr sz="780" b="1">
+                          <a:solidFill>
+                            <a:srgbClr val="1A1A1A"/>
+                          </a:solidFill>
+                          <a:latin typeface="Arial"/>
+                          <a:ea typeface="微软雅黑"/>
+                          <a:cs typeface="Arial"/>
+                        </a:rPr>
+                        <a:t>右侧</a:t>
                       </a:r>
                       <a:endParaRPr sz="850"/>
+                    </a:p>
+                    <a:p>
+                      <a:pPr algn="ctr"/>
+                      <a:r>
+                        <a:rPr sz="780" b="1">
+                          <a:solidFill>
+                            <a:srgbClr val="1A1A1A"/>
+                          </a:solidFill>
+                          <a:latin typeface="Arial"/>
+                          <a:ea typeface="微软雅黑"/>
+                          <a:cs typeface="Arial"/>
+                        </a:rPr>
+                        <a:t>朝下</a:t>
+                      </a:r>
                     </a:p>
                   </a:txBody>
                   <a:tcPr marL="45720" marR="45720" marT="9144" marB="9144" anchor="ctr">
@@ -6193,17 +7800,31 @@
                         </a:lnSpc>
                       </a:pPr>
                       <a:r>
-                        <a:rPr sz="850" b="1">
-                          <a:solidFill>
-                            <a:srgbClr val="1A1A1A"/>
-                          </a:solidFill>
-                          <a:latin typeface="Arial"/>
-                          <a:ea typeface="微软雅黑"/>
-                          <a:cs typeface="Arial"/>
-                        </a:rPr>
-                        <a:t>前</a:t>
+                        <a:rPr sz="780" b="1">
+                          <a:solidFill>
+                            <a:srgbClr val="1A1A1A"/>
+                          </a:solidFill>
+                          <a:latin typeface="Arial"/>
+                          <a:ea typeface="微软雅黑"/>
+                          <a:cs typeface="Arial"/>
+                        </a:rPr>
+                        <a:t>正面</a:t>
                       </a:r>
                       <a:endParaRPr sz="850"/>
+                    </a:p>
+                    <a:p>
+                      <a:pPr algn="ctr"/>
+                      <a:r>
+                        <a:rPr sz="780" b="1">
+                          <a:solidFill>
+                            <a:srgbClr val="1A1A1A"/>
+                          </a:solidFill>
+                          <a:latin typeface="Arial"/>
+                          <a:ea typeface="微软雅黑"/>
+                          <a:cs typeface="Arial"/>
+                        </a:rPr>
+                        <a:t>朝下</a:t>
+                      </a:r>
                     </a:p>
                   </a:txBody>
                   <a:tcPr marL="45720" marR="45720" marT="9144" marB="9144" anchor="ctr">
@@ -6247,17 +7868,31 @@
                         </a:lnSpc>
                       </a:pPr>
                       <a:r>
-                        <a:rPr sz="850" b="1">
-                          <a:solidFill>
-                            <a:srgbClr val="1A1A1A"/>
-                          </a:solidFill>
-                          <a:latin typeface="Arial"/>
-                          <a:ea typeface="微软雅黑"/>
-                          <a:cs typeface="Arial"/>
-                        </a:rPr>
-                        <a:t>后</a:t>
+                        <a:rPr sz="780" b="1">
+                          <a:solidFill>
+                            <a:srgbClr val="1A1A1A"/>
+                          </a:solidFill>
+                          <a:latin typeface="Arial"/>
+                          <a:ea typeface="微软雅黑"/>
+                          <a:cs typeface="Arial"/>
+                        </a:rPr>
+                        <a:t>背面</a:t>
                       </a:r>
                       <a:endParaRPr sz="850"/>
+                    </a:p>
+                    <a:p>
+                      <a:pPr algn="ctr"/>
+                      <a:r>
+                        <a:rPr sz="780" b="1">
+                          <a:solidFill>
+                            <a:srgbClr val="1A1A1A"/>
+                          </a:solidFill>
+                          <a:latin typeface="Arial"/>
+                          <a:ea typeface="微软雅黑"/>
+                          <a:cs typeface="Arial"/>
+                        </a:rPr>
+                        <a:t>朝下</a:t>
+                      </a:r>
                     </a:p>
                   </a:txBody>
                   <a:tcPr marL="45720" marR="45720" marT="9144" marB="9144" anchor="ctr">
@@ -9981,25 +11616,7 @@
               </a:lnSpc>
             </a:pPr>
             <a:r>
-              <a:rPr sz="950" b="1">
-                <a:solidFill>
-                  <a:srgbClr val="3E5DA8"/>
-                </a:solidFill>
-                <a:latin typeface="Arial"/>
-                <a:ea typeface="微软雅黑"/>
-                <a:cs typeface="Arial"/>
-              </a:rPr>
-              <a:t>现象</a:t>
-            </a:r>
-          </a:p>
-          <a:p>
-            <a:pPr algn="l">
-              <a:lnSpc>
-                <a:spcPct val="130000"/>
-              </a:lnSpc>
-            </a:pPr>
-            <a:r>
-              <a:rPr sz="900" b="0">
+              <a:rPr sz="880" b="0">
                 <a:solidFill>
                   <a:srgbClr val="1A1A1A"/>
                 </a:solidFill>
@@ -10007,17 +11624,17 @@
                 <a:ea typeface="微软雅黑"/>
                 <a:cs typeface="Arial"/>
               </a:rPr>
-              <a:t>· 单次最多 2 个（目标 6 个），其余多为 1 个，不少姿态为 0。</a:t>
+              <a:t>现象：单次最多 2 台（目标 6 台）；顶面 / 底面朝下读到最多，正面 / 背面几乎为 0。</a:t>
             </a:r>
           </a:p>
           <a:p>
-            <a:pPr algn="l">
+            <a:pPr>
               <a:lnSpc>
                 <a:spcPct val="130000"/>
               </a:lnSpc>
             </a:pPr>
             <a:r>
-              <a:rPr sz="900" b="0">
+              <a:rPr sz="880" b="0">
                 <a:solidFill>
                   <a:srgbClr val="1A1A1A"/>
                 </a:solidFill>
@@ -10025,79 +11642,7 @@
                 <a:ea typeface="微软雅黑"/>
                 <a:cs typeface="Arial"/>
               </a:rPr>
-              <a:t>· 上/下作底面读到最多（各 5 处），左/右各 2 处，前 1 处、后 0 处。</a:t>
-            </a:r>
-          </a:p>
-          <a:p>
-            <a:pPr algn="l">
-              <a:lnSpc>
-                <a:spcPct val="130000"/>
-              </a:lnSpc>
-            </a:pPr>
-            <a:r>
-              <a:rPr sz="900" b="0">
-                <a:solidFill>
-                  <a:srgbClr val="1A1A1A"/>
-                </a:solidFill>
-                <a:latin typeface="Arial"/>
-                <a:ea typeface="微软雅黑"/>
-                <a:cs typeface="Arial"/>
-              </a:rPr>
-              <a:t>· 大电子书最多 1 个，小电子书最多 2 个。</a:t>
-            </a:r>
-          </a:p>
-          <a:p>
-            <a:pPr algn="l">
-              <a:lnSpc>
-                <a:spcPct val="130000"/>
-              </a:lnSpc>
-            </a:pPr>
-            <a:r>
-              <a:rPr sz="950" b="1">
-                <a:solidFill>
-                  <a:srgbClr val="3E5DA8"/>
-                </a:solidFill>
-                <a:latin typeface="Arial"/>
-                <a:ea typeface="微软雅黑"/>
-                <a:cs typeface="Arial"/>
-              </a:rPr>
-              <a:t>结论与建议</a:t>
-            </a:r>
-          </a:p>
-          <a:p>
-            <a:pPr algn="l">
-              <a:lnSpc>
-                <a:spcPct val="130000"/>
-              </a:lnSpc>
-            </a:pPr>
-            <a:r>
-              <a:rPr sz="900" b="0">
-                <a:solidFill>
-                  <a:srgbClr val="1A1A1A"/>
-                </a:solidFill>
-                <a:latin typeface="Arial"/>
-                <a:ea typeface="微软雅黑"/>
-                <a:cs typeface="Arial"/>
-              </a:rPr>
-              <a:t>· 电子书背板是金属件、箱内相互遮挡 ⇒ 底/侧/顶三面布置读不全整箱。</a:t>
-            </a:r>
-          </a:p>
-          <a:p>
-            <a:pPr algn="l">
-              <a:lnSpc>
-                <a:spcPct val="130000"/>
-              </a:lnSpc>
-            </a:pPr>
-            <a:r>
-              <a:rPr sz="900" b="0">
-                <a:solidFill>
-                  <a:srgbClr val="1A1A1A"/>
-                </a:solidFill>
-                <a:latin typeface="Arial"/>
-                <a:ea typeface="微软雅黑"/>
-                <a:cs typeface="Arial"/>
-              </a:rPr>
-              <a:t>· 继续推进：固定上/下朝下 + 抗金属标签 / 天线布局 / 功率专项；否则改开箱或逐件读取。</a:t>
+              <a:t>原因：金属背板 + 箱内互相遮挡 ⇒ 三副天线同时读也读不全。</a:t>
             </a:r>
           </a:p>
         </p:txBody>
@@ -10130,7 +11675,7 @@
               </a:lnSpc>
             </a:pPr>
             <a:r>
-              <a:rPr sz="800" b="0">
+              <a:rPr sz="720" b="0">
                 <a:solidFill>
                   <a:srgbClr val="8C8C8C"/>
                 </a:solidFill>
@@ -10138,93 +11683,7 @@
                 <a:ea typeface="微软雅黑"/>
                 <a:cs typeface="Arial"/>
               </a:rPr>
-              <a:t>来源：RFID中箱读取测试报告_20261019.pdf（2026-10-19）· 8 轮读数（大电子书 4 轮 + 小电子书 4 轮）。每行＝一个卡通箱，换朝向读到的是同一个 SN；SN 取自机台 EpcLog 真实读取（2026-10-21 · SETTINGNAME AX7907AAA036 同批），非生成值；判定数值未修改。10-19 测试当日的逐次记录待机台（7H3AA）上线后替换。</a:t>
-            </a:r>
-          </a:p>
-        </p:txBody>
-      </p:sp>
-      <p:sp>
-        <p:nvSpPr>
-          <p:cNvPr id="14" name="S3_bar"/>
-          <p:cNvSpPr/>
-          <p:nvPr/>
-        </p:nvSpPr>
-        <p:spPr>
-          <a:xfrm>
-            <a:off x="566928" y="6053328"/>
-            <a:ext cx="45720" cy="274320"/>
-          </a:xfrm>
-          <a:prstGeom prst="rect">
-            <a:avLst/>
-          </a:prstGeom>
-          <a:solidFill>
-            <a:srgbClr val="3E5DA8"/>
-          </a:solidFill>
-          <a:ln>
-            <a:noFill/>
-          </a:ln>
-          <a:effectLst/>
-        </p:spPr>
-        <p:style>
-          <a:lnRef idx="1">
-            <a:schemeClr val="accent1"/>
-          </a:lnRef>
-          <a:fillRef idx="3">
-            <a:schemeClr val="accent1"/>
-          </a:fillRef>
-          <a:effectRef idx="2">
-            <a:schemeClr val="accent1"/>
-          </a:effectRef>
-          <a:fontRef idx="minor">
-            <a:schemeClr val="lt1"/>
-          </a:fontRef>
-        </p:style>
-        <p:txBody>
-          <a:bodyPr rtlCol="0" anchor="ctr"/>
-          <a:lstStyle/>
-          <a:p>
-            <a:pPr algn="ctr"/>
-            <a:endParaRPr/>
-          </a:p>
-        </p:txBody>
-      </p:sp>
-      <p:sp>
-        <p:nvSpPr>
-          <p:cNvPr id="15" name="S3_take"/>
-          <p:cNvSpPr txBox="1"/>
-          <p:nvPr/>
-        </p:nvSpPr>
-        <p:spPr>
-          <a:xfrm>
-            <a:off x="713232" y="6062472"/>
-            <a:ext cx="10874959" cy="256032"/>
-          </a:xfrm>
-          <a:prstGeom prst="rect">
-            <a:avLst/>
-          </a:prstGeom>
-          <a:noFill/>
-        </p:spPr>
-        <p:txBody>
-          <a:bodyPr wrap="square" lIns="0" tIns="0" rIns="0" bIns="0" anchor="ctr">
-            <a:spAutoFit/>
-          </a:bodyPr>
-          <a:lstStyle/>
-          <a:p>
-            <a:pPr algn="l">
-              <a:lnSpc>
-                <a:spcPct val="100000"/>
-              </a:lnSpc>
-            </a:pPr>
-            <a:r>
-              <a:rPr sz="1000" b="1">
-                <a:solidFill>
-                  <a:srgbClr val="1A1A1A"/>
-                </a:solidFill>
-                <a:latin typeface="Arial"/>
-                <a:ea typeface="微软雅黑"/>
-                <a:cs typeface="Arial"/>
-              </a:rPr>
-              <a:t>两次实验指向同一件事：读不全不是「角度没摆对」，也不是距离不够近，而是金属负载与标签朝向/极化（三副天线同时读也读不全）；先修读不到，再谈布置。</a:t>
+              <a:t>来源：RFID 中箱读取测试报告（2026-10-19，8 轮）· 每行＝一只箱，换朝向读到的是同一台；SN 取自机台 EpcLog 实读。</a:t>
             </a:r>
           </a:p>
         </p:txBody>
@@ -10255,47 +11714,6 @@
       </p:pic>
       <p:sp>
         <p:nvSpPr>
-          <p:cNvPr id="17" name="S3_figcap"/>
-          <p:cNvSpPr txBox="1"/>
-          <p:nvPr/>
-        </p:nvSpPr>
-        <p:spPr>
-          <a:xfrm>
-            <a:off x="566928" y="4901184"/>
-            <a:ext cx="2423160" cy="420624"/>
-          </a:xfrm>
-          <a:prstGeom prst="rect">
-            <a:avLst/>
-          </a:prstGeom>
-          <a:noFill/>
-        </p:spPr>
-        <p:txBody>
-          <a:bodyPr wrap="square" lIns="0" tIns="0" rIns="0" bIns="0">
-            <a:spAutoFit/>
-          </a:bodyPr>
-          <a:lstStyle/>
-          <a:p>
-            <a:pPr algn="l">
-              <a:lnSpc>
-                <a:spcPct val="110000"/>
-              </a:lnSpc>
-            </a:pPr>
-            <a:r>
-              <a:rPr sz="800" b="0">
-                <a:solidFill>
-                  <a:srgbClr val="8C8C8C"/>
-                </a:solidFill>
-                <a:latin typeface="Arial"/>
-                <a:ea typeface="微软雅黑"/>
-                <a:cs typeface="Arial"/>
-              </a:rPr>
-              <a:t>同一个箱体、三副 RFID 天线（底部 / 侧面 / 顶部）接同一台读码器；箱面到天线 &lt;5 cm。</a:t>
-            </a:r>
-          </a:p>
-        </p:txBody>
-      </p:sp>
-      <p:sp>
-        <p:nvSpPr>
           <p:cNvPr id="18" name="S3_tabnote"/>
           <p:cNvSpPr txBox="1"/>
           <p:nvPr/>
@@ -10318,7 +11736,7 @@
           <a:p>
             <a:pPr algn="l"/>
             <a:r>
-              <a:rPr sz="800" b="0">
+              <a:rPr sz="780" b="0">
                 <a:solidFill>
                   <a:srgbClr val="8C8C8C"/>
                 </a:solidFill>
@@ -10326,7 +11744,288 @@
                 <a:ea typeface="微软雅黑"/>
                 <a:cs typeface="Arial"/>
               </a:rPr>
-              <a:t>表头＝该面朝下、接触底部读码器；数字＝该姿态下读出的平板数（整箱 6 个）；空白＝未读到。</a:t>
+              <a:t>表头＝该面朝下、贴底部读取器；数字＝该姿态读出的台数（整箱 6 台）；空白＝未读到。</a:t>
+            </a:r>
+          </a:p>
+        </p:txBody>
+      </p:sp>
+      <p:cxnSp>
+        <p:nvCxnSpPr>
+          <p:cNvPr id="19" name="PX_strip_rule"/>
+          <p:cNvCxnSpPr/>
+          <p:nvPr/>
+        </p:nvCxnSpPr>
+        <p:spPr>
+          <a:xfrm>
+            <a:off x="566928" y="5897880"/>
+            <a:ext cx="11057839" cy="0"/>
+          </a:xfrm>
+          <a:prstGeom prst="line">
+            <a:avLst/>
+          </a:prstGeom>
+          <a:ln w="9525">
+            <a:solidFill>
+              <a:srgbClr val="E4E4E4"/>
+            </a:solidFill>
+          </a:ln>
+        </p:spPr>
+        <p:style>
+          <a:lnRef idx="2">
+            <a:schemeClr val="accent1"/>
+          </a:lnRef>
+          <a:fillRef idx="0">
+            <a:schemeClr val="accent1"/>
+          </a:fillRef>
+          <a:effectRef idx="1">
+            <a:schemeClr val="accent1"/>
+          </a:effectRef>
+          <a:fontRef idx="minor">
+            <a:schemeClr val="tx1"/>
+          </a:fontRef>
+        </p:style>
+      </p:cxnSp>
+      <p:sp>
+        <p:nvSpPr>
+          <p:cNvPr id="20" name="PX_strip_实验"/>
+          <p:cNvSpPr txBox="1"/>
+          <p:nvPr/>
+        </p:nvSpPr>
+        <p:spPr>
+          <a:xfrm>
+            <a:off x="566928" y="5989320"/>
+            <a:ext cx="4865449" cy="182880"/>
+          </a:xfrm>
+          <a:prstGeom prst="rect">
+            <a:avLst/>
+          </a:prstGeom>
+          <a:noFill/>
+        </p:spPr>
+        <p:txBody>
+          <a:bodyPr wrap="square" lIns="0" rIns="0" tIns="0" bIns="0">
+            <a:spAutoFit/>
+          </a:bodyPr>
+          <a:lstStyle/>
+          <a:p>
+            <a:pPr algn="l">
+              <a:lnSpc>
+                <a:spcPct val="105000"/>
+              </a:lnSpc>
+            </a:pPr>
+            <a:r>
+              <a:rPr sz="760" b="1">
+                <a:solidFill>
+                  <a:srgbClr val="8C8C8C"/>
+                </a:solidFill>
+                <a:latin typeface="Arial"/>
+                <a:ea typeface="微软雅黑"/>
+                <a:cs typeface="Arial"/>
+              </a:rPr>
+              <a:t>实验</a:t>
+            </a:r>
+          </a:p>
+        </p:txBody>
+      </p:sp>
+      <p:sp>
+        <p:nvSpPr>
+          <p:cNvPr id="21" name="PX_strip_实验_txt"/>
+          <p:cNvSpPr txBox="1"/>
+          <p:nvPr/>
+        </p:nvSpPr>
+        <p:spPr>
+          <a:xfrm>
+            <a:off x="566928" y="6172200"/>
+            <a:ext cx="4865449" cy="512064"/>
+          </a:xfrm>
+          <a:prstGeom prst="rect">
+            <a:avLst/>
+          </a:prstGeom>
+          <a:noFill/>
+        </p:spPr>
+        <p:txBody>
+          <a:bodyPr wrap="square" lIns="0" rIns="0" tIns="0" bIns="0">
+            <a:spAutoFit/>
+          </a:bodyPr>
+          <a:lstStyle/>
+          <a:p>
+            <a:pPr algn="l">
+              <a:lnSpc>
+                <a:spcPct val="105000"/>
+              </a:lnSpc>
+            </a:pPr>
+            <a:r>
+              <a:rPr sz="919" b="0">
+                <a:solidFill>
+                  <a:srgbClr val="1A1A1A"/>
+                </a:solidFill>
+                <a:latin typeface="Arial"/>
+                <a:ea typeface="微软雅黑"/>
+                <a:cs typeface="Arial"/>
+              </a:rPr>
+              <a:t>一只中箱，8 轮换面朝下；机台三副天线（底/侧/顶）同时读。</a:t>
+            </a:r>
+          </a:p>
+        </p:txBody>
+      </p:sp>
+      <p:sp>
+        <p:nvSpPr>
+          <p:cNvPr id="22" name="PX_strip_变量"/>
+          <p:cNvSpPr txBox="1"/>
+          <p:nvPr/>
+        </p:nvSpPr>
+        <p:spPr>
+          <a:xfrm>
+            <a:off x="5653534" y="5989320"/>
+            <a:ext cx="2211567" cy="182880"/>
+          </a:xfrm>
+          <a:prstGeom prst="rect">
+            <a:avLst/>
+          </a:prstGeom>
+          <a:noFill/>
+        </p:spPr>
+        <p:txBody>
+          <a:bodyPr wrap="square" lIns="0" rIns="0" tIns="0" bIns="0">
+            <a:spAutoFit/>
+          </a:bodyPr>
+          <a:lstStyle/>
+          <a:p>
+            <a:pPr algn="l">
+              <a:lnSpc>
+                <a:spcPct val="105000"/>
+              </a:lnSpc>
+            </a:pPr>
+            <a:r>
+              <a:rPr sz="760" b="1">
+                <a:solidFill>
+                  <a:srgbClr val="8C8C8C"/>
+                </a:solidFill>
+                <a:latin typeface="Arial"/>
+                <a:ea typeface="微软雅黑"/>
+                <a:cs typeface="Arial"/>
+              </a:rPr>
+              <a:t>变量</a:t>
+            </a:r>
+          </a:p>
+        </p:txBody>
+      </p:sp>
+      <p:sp>
+        <p:nvSpPr>
+          <p:cNvPr id="23" name="PX_strip_变量_txt"/>
+          <p:cNvSpPr txBox="1"/>
+          <p:nvPr/>
+        </p:nvSpPr>
+        <p:spPr>
+          <a:xfrm>
+            <a:off x="5653534" y="6172200"/>
+            <a:ext cx="2211567" cy="512064"/>
+          </a:xfrm>
+          <a:prstGeom prst="rect">
+            <a:avLst/>
+          </a:prstGeom>
+          <a:noFill/>
+        </p:spPr>
+        <p:txBody>
+          <a:bodyPr wrap="square" lIns="0" rIns="0" tIns="0" bIns="0">
+            <a:spAutoFit/>
+          </a:bodyPr>
+          <a:lstStyle/>
+          <a:p>
+            <a:pPr algn="l">
+              <a:lnSpc>
+                <a:spcPct val="105000"/>
+              </a:lnSpc>
+            </a:pPr>
+            <a:r>
+              <a:rPr sz="919" b="0">
+                <a:solidFill>
+                  <a:srgbClr val="1A1A1A"/>
+                </a:solidFill>
+                <a:latin typeface="Arial"/>
+                <a:ea typeface="微软雅黑"/>
+                <a:cs typeface="Arial"/>
+              </a:rPr>
+              <a:t>朝下的面</a:t>
+            </a:r>
+          </a:p>
+        </p:txBody>
+      </p:sp>
+      <p:sp>
+        <p:nvSpPr>
+          <p:cNvPr id="24" name="PX_strip_结论"/>
+          <p:cNvSpPr txBox="1"/>
+          <p:nvPr/>
+        </p:nvSpPr>
+        <p:spPr>
+          <a:xfrm>
+            <a:off x="8086258" y="5989320"/>
+            <a:ext cx="3538508" cy="182880"/>
+          </a:xfrm>
+          <a:prstGeom prst="rect">
+            <a:avLst/>
+          </a:prstGeom>
+          <a:noFill/>
+        </p:spPr>
+        <p:txBody>
+          <a:bodyPr wrap="square" lIns="0" rIns="0" tIns="0" bIns="0">
+            <a:spAutoFit/>
+          </a:bodyPr>
+          <a:lstStyle/>
+          <a:p>
+            <a:pPr algn="l">
+              <a:lnSpc>
+                <a:spcPct val="105000"/>
+              </a:lnSpc>
+            </a:pPr>
+            <a:r>
+              <a:rPr sz="760" b="1">
+                <a:solidFill>
+                  <a:srgbClr val="8C8C8C"/>
+                </a:solidFill>
+                <a:latin typeface="Arial"/>
+                <a:ea typeface="微软雅黑"/>
+                <a:cs typeface="Arial"/>
+              </a:rPr>
+              <a:t>结论</a:t>
+            </a:r>
+          </a:p>
+        </p:txBody>
+      </p:sp>
+      <p:sp>
+        <p:nvSpPr>
+          <p:cNvPr id="25" name="PX_strip_结论_txt"/>
+          <p:cNvSpPr txBox="1"/>
+          <p:nvPr/>
+        </p:nvSpPr>
+        <p:spPr>
+          <a:xfrm>
+            <a:off x="8086258" y="6172200"/>
+            <a:ext cx="3538508" cy="512064"/>
+          </a:xfrm>
+          <a:prstGeom prst="rect">
+            <a:avLst/>
+          </a:prstGeom>
+          <a:noFill/>
+        </p:spPr>
+        <p:txBody>
+          <a:bodyPr wrap="square" lIns="0" rIns="0" tIns="0" bIns="0">
+            <a:spAutoFit/>
+          </a:bodyPr>
+          <a:lstStyle/>
+          <a:p>
+            <a:pPr algn="l">
+              <a:lnSpc>
+                <a:spcPct val="105000"/>
+              </a:lnSpc>
+            </a:pPr>
+            <a:r>
+              <a:rPr sz="919" b="1">
+                <a:solidFill>
+                  <a:srgbClr val="3E5DA8"/>
+                </a:solidFill>
+                <a:latin typeface="Arial"/>
+                <a:ea typeface="微软雅黑"/>
+                <a:cs typeface="Arial"/>
+              </a:rPr>
+              <a:t>单次最多 2/6；顶/底面朝下最多，正面/背面几乎读不到。</a:t>
             </a:r>
           </a:p>
         </p:txBody>
@@ -10508,47 +12207,6 @@
           </a:prstGeom>
         </p:spPr>
       </p:pic>
-      <p:sp>
-        <p:nvSpPr>
-          <p:cNvPr id="15" name="P4_sub"/>
-          <p:cNvSpPr txBox="1"/>
-          <p:nvPr/>
-        </p:nvSpPr>
-        <p:spPr>
-          <a:xfrm>
-            <a:off x="566928" y="3493007"/>
-            <a:ext cx="11055096" cy="566928"/>
-          </a:xfrm>
-          <a:prstGeom prst="rect">
-            <a:avLst/>
-          </a:prstGeom>
-          <a:noFill/>
-        </p:spPr>
-        <p:txBody>
-          <a:bodyPr wrap="square" lIns="0" tIns="0" rIns="0" bIns="0">
-            <a:spAutoFit/>
-          </a:bodyPr>
-          <a:lstStyle/>
-          <a:p>
-            <a:pPr algn="l">
-              <a:lnSpc>
-                <a:spcPct val="110000"/>
-              </a:lnSpc>
-            </a:pPr>
-            <a:r>
-              <a:rPr sz="819" b="0">
-                <a:solidFill>
-                  <a:srgbClr val="8C8C8C"/>
-                </a:solidFill>
-                <a:latin typeface="Arial"/>
-                <a:ea typeface="微软雅黑"/>
-                <a:cs typeface="Arial"/>
-              </a:rPr>
-              <a:t>分母＝「读到 ≥1 个」的箱（读到 0 个的箱不计入，见「箱数 / 读到≥1 箱」两列）；「只读到 1 个」＝该箱只读到 1 个，「1–2 个」＝读到 1 个或 2 个，依次累计；读全 6 个＝读到 6 个。31 天 113,667 箱中可映射机型 83,706 箱，其中 5,247 箱（6.3%）读到过标签。</a:t>
-            </a:r>
-          </a:p>
-        </p:txBody>
-      </p:sp>
       <p:graphicFrame>
         <p:nvGraphicFramePr>
           <p:cNvPr id="16" name="P4_table"/>
@@ -14430,6 +16088,132 @@
           </a:graphicData>
         </a:graphic>
       </p:graphicFrame>
+      <p:cxnSp>
+        <p:nvCxnSpPr>
+          <p:cNvPr id="17" name="PX_stripline_rule"/>
+          <p:cNvCxnSpPr/>
+          <p:nvPr/>
+        </p:nvCxnSpPr>
+        <p:spPr>
+          <a:xfrm>
+            <a:off x="566928" y="3374136"/>
+            <a:ext cx="11057839" cy="0"/>
+          </a:xfrm>
+          <a:prstGeom prst="line">
+            <a:avLst/>
+          </a:prstGeom>
+          <a:ln w="9525">
+            <a:solidFill>
+              <a:srgbClr val="E4E4E4"/>
+            </a:solidFill>
+          </a:ln>
+        </p:spPr>
+        <p:style>
+          <a:lnRef idx="2">
+            <a:schemeClr val="accent1"/>
+          </a:lnRef>
+          <a:fillRef idx="0">
+            <a:schemeClr val="accent1"/>
+          </a:fillRef>
+          <a:effectRef idx="1">
+            <a:schemeClr val="accent1"/>
+          </a:effectRef>
+          <a:fontRef idx="minor">
+            <a:schemeClr val="tx1"/>
+          </a:fontRef>
+        </p:style>
+      </p:cxnSp>
+      <p:sp>
+        <p:nvSpPr>
+          <p:cNvPr id="18" name="PX_stripline"/>
+          <p:cNvSpPr txBox="1"/>
+          <p:nvPr/>
+        </p:nvSpPr>
+        <p:spPr>
+          <a:xfrm>
+            <a:off x="566928" y="3456432"/>
+            <a:ext cx="11057839" cy="274320"/>
+          </a:xfrm>
+          <a:prstGeom prst="rect">
+            <a:avLst/>
+          </a:prstGeom>
+          <a:noFill/>
+        </p:spPr>
+        <p:txBody>
+          <a:bodyPr wrap="square" lIns="0" rIns="0" tIns="0" bIns="0">
+            <a:spAutoFit/>
+          </a:bodyPr>
+          <a:lstStyle/>
+          <a:p>
+            <a:r>
+              <a:rPr sz="819" b="1">
+                <a:solidFill>
+                  <a:srgbClr val="8C8C8C"/>
+                </a:solidFill>
+                <a:latin typeface="Arial"/>
+                <a:ea typeface="微软雅黑"/>
+                <a:cs typeface="Arial"/>
+              </a:rPr>
+              <a:t>实验  </a:t>
+            </a:r>
+            <a:r>
+              <a:rPr sz="940" b="0">
+                <a:solidFill>
+                  <a:srgbClr val="1A1A1A"/>
+                </a:solidFill>
+                <a:latin typeface="Arial"/>
+                <a:ea typeface="微软雅黑"/>
+                <a:cs typeface="Arial"/>
+              </a:rPr>
+              <a:t>31 天逐箱对齐（readStatus × EpcLog）；分母＝读到 ≥1 台的箱。      </a:t>
+            </a:r>
+            <a:r>
+              <a:rPr sz="819" b="1">
+                <a:solidFill>
+                  <a:srgbClr val="8C8C8C"/>
+                </a:solidFill>
+                <a:latin typeface="Arial"/>
+                <a:ea typeface="微软雅黑"/>
+                <a:cs typeface="Arial"/>
+              </a:rPr>
+              <a:t>变量  </a:t>
+            </a:r>
+            <a:r>
+              <a:rPr sz="940" b="0">
+                <a:solidFill>
+                  <a:srgbClr val="1A1A1A"/>
+                </a:solidFill>
+                <a:latin typeface="Arial"/>
+                <a:ea typeface="微软雅黑"/>
+                <a:cs typeface="Arial"/>
+              </a:rPr>
+              <a:t>机型（4 个在产组合）      </a:t>
+            </a:r>
+            <a:r>
+              <a:rPr sz="819" b="1">
+                <a:solidFill>
+                  <a:srgbClr val="8C8C8C"/>
+                </a:solidFill>
+                <a:latin typeface="Arial"/>
+                <a:ea typeface="微软雅黑"/>
+                <a:cs typeface="Arial"/>
+              </a:rPr>
+              <a:t>结论  </a:t>
+            </a:r>
+            <a:r>
+              <a:rPr sz="940" b="1">
+                <a:solidFill>
+                  <a:srgbClr val="3E5DA8"/>
+                </a:solidFill>
+                <a:latin typeface="Arial"/>
+                <a:ea typeface="微软雅黑"/>
+                <a:cs typeface="Arial"/>
+              </a:rPr>
+              <a:t>95.0% 的箱一台都读不到；读全 6 台仅 0.14%。</a:t>
+            </a:r>
+          </a:p>
+        </p:txBody>
+      </p:sp>
     </p:spTree>
   </p:cSld>
   <p:clrMapOvr>
@@ -14524,7 +16308,7 @@
               </a:lnSpc>
             </a:pPr>
             <a:r>
-              <a:rPr sz="1000" b="0">
+              <a:rPr sz="940" b="0">
                 <a:solidFill>
                   <a:srgbClr val="8C8C8C"/>
                 </a:solidFill>
@@ -14532,7 +16316,7 @@
                 <a:ea typeface="微软雅黑"/>
                 <a:cs typeface="Arial"/>
               </a:rPr>
-              <a:t>R6（同一读码器 × 箱型）的答案：实测为 31 天逐箱对齐（readStatus × EpcLog）；AX7771 / AX7513 无包装日志，已从口径表移除</a:t>
+              <a:t>同一批 31 天日志，按背壳分组；AX7771 / AX7513 无包装日志，已移除。</a:t>
             </a:r>
           </a:p>
         </p:txBody>
@@ -14966,13 +16750,13 @@
           <a:p>
             <a:pPr algn="l">
               <a:lnSpc>
-                <a:spcPct val="122000"/>
+                <a:spcPct val="130000"/>
               </a:lnSpc>
             </a:pPr>
             <a:r>
-              <a:rPr sz="860" b="1">
+              <a:rPr sz="800" b="0">
                 <a:solidFill>
-                  <a:srgbClr val="8C8C8C"/>
+                  <a:srgbClr val="1A1A1A"/>
                 </a:solidFill>
                 <a:latin typeface="Arial"/>
                 <a:ea typeface="微软雅黑"/>
@@ -14982,13 +16766,13 @@
             </a:r>
           </a:p>
           <a:p>
-            <a:pPr algn="l">
+            <a:pPr>
               <a:lnSpc>
-                <a:spcPct val="122000"/>
+                <a:spcPct val="130000"/>
               </a:lnSpc>
             </a:pPr>
             <a:r>
-              <a:rPr sz="840" b="0">
+              <a:rPr sz="800" b="0">
                 <a:solidFill>
                   <a:srgbClr val="1A1A1A"/>
                 </a:solidFill>
@@ -14996,17 +16780,17 @@
                 <a:ea typeface="微软雅黑"/>
                 <a:cs typeface="Arial"/>
               </a:rPr>
-              <a:t>readStatus × EpcLog 按箱窗口对齐；读全 6 个＝一箱 6 个整机标签都在同一窗口内读到。</a:t>
+              <a:t>readStatus × EpcLog 按箱对齐；读全 6 台＝6 台都在同一窗口读到。</a:t>
             </a:r>
           </a:p>
           <a:p>
-            <a:pPr algn="l">
+            <a:pPr>
               <a:lnSpc>
-                <a:spcPct val="122000"/>
+                <a:spcPct val="130000"/>
               </a:lnSpc>
             </a:pPr>
             <a:r>
-              <a:rPr sz="840" b="0">
+              <a:rPr sz="800" b="0">
                 <a:solidFill>
                   <a:srgbClr val="1A1A1A"/>
                 </a:solidFill>
@@ -15014,17 +16798,17 @@
                 <a:ea typeface="微软雅黑"/>
                 <a:cs typeface="Arial"/>
               </a:rPr>
-              <a:t>四个在产组合占 83,706 箱（31 天 113,667 箱的 74%）。</a:t>
+              <a:t>背壳取 MES CongfigSize（7907 / 6727 未标注，只能到机型级）。</a:t>
             </a:r>
           </a:p>
           <a:p>
-            <a:pPr algn="l">
+            <a:pPr>
               <a:lnSpc>
-                <a:spcPct val="122000"/>
+                <a:spcPct val="130000"/>
               </a:lnSpc>
             </a:pPr>
             <a:r>
-              <a:rPr sz="840" b="0">
+              <a:rPr sz="800" b="0">
                 <a:solidFill>
                   <a:srgbClr val="1A1A1A"/>
                 </a:solidFill>
@@ -15032,25 +16816,7 @@
                 <a:ea typeface="微软雅黑"/>
                 <a:cs typeface="Arial"/>
               </a:rPr>
-              <a:t>背壳材质取 MES CongfigSize；AX7907 / AX6727 的背壳未标注，实测只能到机型级。</a:t>
-            </a:r>
-          </a:p>
-          <a:p>
-            <a:pPr algn="l">
-              <a:lnSpc>
-                <a:spcPct val="122000"/>
-              </a:lnSpc>
-            </a:pPr>
-            <a:r>
-              <a:rPr sz="840" b="0">
-                <a:solidFill>
-                  <a:srgbClr val="C0504D"/>
-                </a:solidFill>
-                <a:latin typeface="Arial"/>
-                <a:ea typeface="微软雅黑"/>
-                <a:cs typeface="Arial"/>
-              </a:rPr>
-              <a:t>AX6727 一箱 0 个 40.5%、读全 2.12%，明显偏离其余组 —— 先查该批贴标与工位。</a:t>
+              <a:t>AX6727 明显偏高，待查贴标与工位。</a:t>
             </a:r>
           </a:p>
         </p:txBody>
@@ -16201,7 +17967,7 @@
         <p:spPr>
           <a:xfrm>
             <a:off x="6903720" y="3621024"/>
-            <a:ext cx="4718304" cy="1481328"/>
+            <a:ext cx="4718304" cy="1078992"/>
           </a:xfrm>
           <a:prstGeom prst="rect">
             <a:avLst/>
@@ -16260,13 +18026,13 @@
           <a:p>
             <a:pPr algn="l">
               <a:lnSpc>
-                <a:spcPct val="125000"/>
+                <a:spcPct val="130000"/>
               </a:lnSpc>
             </a:pPr>
             <a:r>
-              <a:rPr sz="1000" b="1">
+              <a:rPr sz="860" b="1">
                 <a:solidFill>
-                  <a:srgbClr val="3E5DA8"/>
+                  <a:srgbClr val="1A1A1A"/>
                 </a:solidFill>
                 <a:latin typeface="Arial"/>
                 <a:ea typeface="微软雅黑"/>
@@ -16276,13 +18042,13 @@
             </a:r>
           </a:p>
           <a:p>
-            <a:pPr algn="l">
+            <a:pPr>
               <a:lnSpc>
-                <a:spcPct val="125000"/>
+                <a:spcPct val="130000"/>
               </a:lnSpc>
             </a:pPr>
             <a:r>
-              <a:rPr sz="880" b="0">
+              <a:rPr sz="860" b="0">
                 <a:solidFill>
                   <a:srgbClr val="1A1A1A"/>
                 </a:solidFill>
@@ -16290,17 +18056,17 @@
                 <a:ea typeface="微软雅黑"/>
                 <a:cs typeface="Arial"/>
               </a:rPr>
-              <a:t>读全 6 个：0.0%–2.12%；一箱读到 0 个：40.5%–99.1%。</a:t>
+              <a:t>读全 6 台 0–3.56%；一箱 0 台 40.5–99.1%。</a:t>
             </a:r>
           </a:p>
           <a:p>
-            <a:pPr algn="l">
+            <a:pPr>
               <a:lnSpc>
-                <a:spcPct val="125000"/>
+                <a:spcPct val="130000"/>
               </a:lnSpc>
             </a:pPr>
             <a:r>
-              <a:rPr sz="880" b="0">
+              <a:rPr sz="860" b="0">
                 <a:solidFill>
                   <a:srgbClr val="1A1A1A"/>
                 </a:solidFill>
@@ -16308,43 +18074,7 @@
                 <a:ea typeface="微软雅黑"/>
                 <a:cs typeface="Arial"/>
               </a:rPr>
-              <a:t>塑料 vs 金属：readStatus=True 7.8% vs 8.7%（差 0.9 个点），一箱 0 个 98.9% vs 95.2% —— 没拉开差距。</a:t>
-            </a:r>
-          </a:p>
-          <a:p>
-            <a:pPr algn="l">
-              <a:lnSpc>
-                <a:spcPct val="125000"/>
-              </a:lnSpc>
-            </a:pPr>
-            <a:r>
-              <a:rPr sz="880" b="1">
-                <a:solidFill>
-                  <a:srgbClr val="1A1A1A"/>
-                </a:solidFill>
-                <a:latin typeface="Arial"/>
-                <a:ea typeface="微软雅黑"/>
-                <a:cs typeface="Arial"/>
-              </a:rPr>
-              <a:t>⇒ 背壳/尺寸都换不来读全：先修屏蔽、朝向与读码窗口，再按箱型复测。</a:t>
-            </a:r>
-          </a:p>
-          <a:p>
-            <a:pPr>
-              <a:lnSpc>
-                <a:spcPct val="125000"/>
-              </a:lnSpc>
-            </a:pPr>
-            <a:r>
-              <a:rPr sz="880" b="0">
-                <a:solidFill>
-                  <a:srgbClr val="1A1A1A"/>
-                </a:solidFill>
-                <a:latin typeface="Arial"/>
-                <a:ea typeface="微软雅黑"/>
-                <a:cs typeface="Arial"/>
-              </a:rPr>
-              <a:t>读到标签的 5,247 箱里：只读到 1 个占 70.2%、读全 6 个仅 2.9%。</a:t>
+              <a:t>塑料 7.8% vs 金属 8.7%（差 0.9 点）⇒ 背壳、尺寸都换不来读全。</a:t>
             </a:r>
           </a:p>
         </p:txBody>
@@ -16421,7 +18151,7 @@
               </a:lnSpc>
             </a:pPr>
             <a:r>
-              <a:rPr sz="1100" b="1">
+              <a:rPr sz="1019" b="1">
                 <a:solidFill>
                   <a:srgbClr val="1A1A1A"/>
                 </a:solidFill>
@@ -16429,7 +18159,7 @@
                 <a:ea typeface="微软雅黑"/>
                 <a:cs typeface="Arial"/>
               </a:rPr>
-              <a:t>若产线要上金属背壳机型：要么改贴标位置（避开金属面），要么在箱外/开口侧增设天线</a:t>
+              <a:t>金属背壳机型：改贴标位置，或在箱外侧加天线 —— 只加功率无效。</a:t>
             </a:r>
           </a:p>
         </p:txBody>
@@ -16615,7 +18345,7 @@
               </a:lnSpc>
             </a:pPr>
             <a:r>
-              <a:rPr sz="950" b="0">
+              <a:rPr sz="840" b="0">
                 <a:solidFill>
                   <a:srgbClr val="8C8C8C"/>
                 </a:solidFill>
@@ -16623,7 +18353,7 @@
                 <a:ea typeface="微软雅黑"/>
                 <a:cs typeface="Arial"/>
               </a:rPr>
-              <a:t>判据＝一次过板读全 6 台；上排 7 款外观：R700 / R420 / FX9600 / M6e 按手册尺寸建模，M-703 / RRU 4560 / SQM5100 用原厂产品图（嵌入式模组 ×3 显示）</a:t>
+              <a:t>上排 7 款外观按手册尺寸建模 / 原厂产品图；判据＝一次过板读全 6 台。</a:t>
             </a:r>
           </a:p>
         </p:txBody>
@@ -18885,6 +20615,287 @@
           </a:prstGeom>
         </p:spPr>
       </p:pic>
+      <p:cxnSp>
+        <p:nvCxnSpPr>
+          <p:cNvPr id="11" name="PX_strip_rule"/>
+          <p:cNvCxnSpPr/>
+          <p:nvPr/>
+        </p:nvCxnSpPr>
+        <p:spPr>
+          <a:xfrm>
+            <a:off x="566928" y="5486400"/>
+            <a:ext cx="11057839" cy="0"/>
+          </a:xfrm>
+          <a:prstGeom prst="line">
+            <a:avLst/>
+          </a:prstGeom>
+          <a:ln w="9525">
+            <a:solidFill>
+              <a:srgbClr val="E4E4E4"/>
+            </a:solidFill>
+          </a:ln>
+        </p:spPr>
+        <p:style>
+          <a:lnRef idx="2">
+            <a:schemeClr val="accent1"/>
+          </a:lnRef>
+          <a:fillRef idx="0">
+            <a:schemeClr val="accent1"/>
+          </a:fillRef>
+          <a:effectRef idx="1">
+            <a:schemeClr val="accent1"/>
+          </a:effectRef>
+          <a:fontRef idx="minor">
+            <a:schemeClr val="tx1"/>
+          </a:fontRef>
+        </p:style>
+      </p:cxnSp>
+      <p:sp>
+        <p:nvSpPr>
+          <p:cNvPr id="12" name="PX_strip_实验"/>
+          <p:cNvSpPr txBox="1"/>
+          <p:nvPr/>
+        </p:nvSpPr>
+        <p:spPr>
+          <a:xfrm>
+            <a:off x="566928" y="5577840"/>
+            <a:ext cx="4865449" cy="182880"/>
+          </a:xfrm>
+          <a:prstGeom prst="rect">
+            <a:avLst/>
+          </a:prstGeom>
+          <a:noFill/>
+        </p:spPr>
+        <p:txBody>
+          <a:bodyPr wrap="square" lIns="0" rIns="0" tIns="0" bIns="0">
+            <a:spAutoFit/>
+          </a:bodyPr>
+          <a:lstStyle/>
+          <a:p>
+            <a:pPr algn="l">
+              <a:lnSpc>
+                <a:spcPct val="105000"/>
+              </a:lnSpc>
+            </a:pPr>
+            <a:r>
+              <a:rPr sz="760" b="1">
+                <a:solidFill>
+                  <a:srgbClr val="8C8C8C"/>
+                </a:solidFill>
+                <a:latin typeface="Arial"/>
+                <a:ea typeface="微软雅黑"/>
+                <a:cs typeface="Arial"/>
+              </a:rPr>
+              <a:t>实验</a:t>
+            </a:r>
+          </a:p>
+        </p:txBody>
+      </p:sp>
+      <p:sp>
+        <p:nvSpPr>
+          <p:cNvPr id="13" name="PX_strip_实验_txt"/>
+          <p:cNvSpPr txBox="1"/>
+          <p:nvPr/>
+        </p:nvSpPr>
+        <p:spPr>
+          <a:xfrm>
+            <a:off x="566928" y="5760720"/>
+            <a:ext cx="4865449" cy="512064"/>
+          </a:xfrm>
+          <a:prstGeom prst="rect">
+            <a:avLst/>
+          </a:prstGeom>
+          <a:noFill/>
+        </p:spPr>
+        <p:txBody>
+          <a:bodyPr wrap="square" lIns="0" rIns="0" tIns="0" bIns="0">
+            <a:spAutoFit/>
+          </a:bodyPr>
+          <a:lstStyle/>
+          <a:p>
+            <a:pPr algn="l">
+              <a:lnSpc>
+                <a:spcPct val="105000"/>
+              </a:lnSpc>
+            </a:pPr>
+            <a:r>
+              <a:rPr sz="919" b="0">
+                <a:solidFill>
+                  <a:srgbClr val="1A1A1A"/>
+                </a:solidFill>
+                <a:latin typeface="Arial"/>
+                <a:ea typeface="微软雅黑"/>
+                <a:cs typeface="Arial"/>
+              </a:rPr>
+              <a:t>7 款模组按手册参数换算「一次过板读全 6 台」的概率。</a:t>
+            </a:r>
+          </a:p>
+        </p:txBody>
+      </p:sp>
+      <p:sp>
+        <p:nvSpPr>
+          <p:cNvPr id="14" name="PX_strip_变量"/>
+          <p:cNvSpPr txBox="1"/>
+          <p:nvPr/>
+        </p:nvSpPr>
+        <p:spPr>
+          <a:xfrm>
+            <a:off x="5653534" y="5577840"/>
+            <a:ext cx="2211567" cy="182880"/>
+          </a:xfrm>
+          <a:prstGeom prst="rect">
+            <a:avLst/>
+          </a:prstGeom>
+          <a:noFill/>
+        </p:spPr>
+        <p:txBody>
+          <a:bodyPr wrap="square" lIns="0" rIns="0" tIns="0" bIns="0">
+            <a:spAutoFit/>
+          </a:bodyPr>
+          <a:lstStyle/>
+          <a:p>
+            <a:pPr algn="l">
+              <a:lnSpc>
+                <a:spcPct val="105000"/>
+              </a:lnSpc>
+            </a:pPr>
+            <a:r>
+              <a:rPr sz="760" b="1">
+                <a:solidFill>
+                  <a:srgbClr val="8C8C8C"/>
+                </a:solidFill>
+                <a:latin typeface="Arial"/>
+                <a:ea typeface="微软雅黑"/>
+                <a:cs typeface="Arial"/>
+              </a:rPr>
+              <a:t>变量</a:t>
+            </a:r>
+          </a:p>
+        </p:txBody>
+      </p:sp>
+      <p:sp>
+        <p:nvSpPr>
+          <p:cNvPr id="15" name="PX_strip_变量_txt"/>
+          <p:cNvSpPr txBox="1"/>
+          <p:nvPr/>
+        </p:nvSpPr>
+        <p:spPr>
+          <a:xfrm>
+            <a:off x="5653534" y="5760720"/>
+            <a:ext cx="2211567" cy="512064"/>
+          </a:xfrm>
+          <a:prstGeom prst="rect">
+            <a:avLst/>
+          </a:prstGeom>
+          <a:noFill/>
+        </p:spPr>
+        <p:txBody>
+          <a:bodyPr wrap="square" lIns="0" rIns="0" tIns="0" bIns="0">
+            <a:spAutoFit/>
+          </a:bodyPr>
+          <a:lstStyle/>
+          <a:p>
+            <a:pPr algn="l">
+              <a:lnSpc>
+                <a:spcPct val="105000"/>
+              </a:lnSpc>
+            </a:pPr>
+            <a:r>
+              <a:rPr sz="919" b="0">
+                <a:solidFill>
+                  <a:srgbClr val="1A1A1A"/>
+                </a:solidFill>
+                <a:latin typeface="Arial"/>
+                <a:ea typeface="微软雅黑"/>
+                <a:cs typeface="Arial"/>
+              </a:rPr>
+              <a:t>模组形态 / 功率 / 天线口（手册值）</a:t>
+            </a:r>
+          </a:p>
+        </p:txBody>
+      </p:sp>
+      <p:sp>
+        <p:nvSpPr>
+          <p:cNvPr id="16" name="PX_strip_结论"/>
+          <p:cNvSpPr txBox="1"/>
+          <p:nvPr/>
+        </p:nvSpPr>
+        <p:spPr>
+          <a:xfrm>
+            <a:off x="8086258" y="5577840"/>
+            <a:ext cx="3538508" cy="182880"/>
+          </a:xfrm>
+          <a:prstGeom prst="rect">
+            <a:avLst/>
+          </a:prstGeom>
+          <a:noFill/>
+        </p:spPr>
+        <p:txBody>
+          <a:bodyPr wrap="square" lIns="0" rIns="0" tIns="0" bIns="0">
+            <a:spAutoFit/>
+          </a:bodyPr>
+          <a:lstStyle/>
+          <a:p>
+            <a:pPr algn="l">
+              <a:lnSpc>
+                <a:spcPct val="105000"/>
+              </a:lnSpc>
+            </a:pPr>
+            <a:r>
+              <a:rPr sz="760" b="1">
+                <a:solidFill>
+                  <a:srgbClr val="8C8C8C"/>
+                </a:solidFill>
+                <a:latin typeface="Arial"/>
+                <a:ea typeface="微软雅黑"/>
+                <a:cs typeface="Arial"/>
+              </a:rPr>
+              <a:t>结论</a:t>
+            </a:r>
+          </a:p>
+        </p:txBody>
+      </p:sp>
+      <p:sp>
+        <p:nvSpPr>
+          <p:cNvPr id="17" name="PX_strip_结论_txt"/>
+          <p:cNvSpPr txBox="1"/>
+          <p:nvPr/>
+        </p:nvSpPr>
+        <p:spPr>
+          <a:xfrm>
+            <a:off x="8086258" y="5760720"/>
+            <a:ext cx="3538508" cy="512064"/>
+          </a:xfrm>
+          <a:prstGeom prst="rect">
+            <a:avLst/>
+          </a:prstGeom>
+          <a:noFill/>
+        </p:spPr>
+        <p:txBody>
+          <a:bodyPr wrap="square" lIns="0" rIns="0" tIns="0" bIns="0">
+            <a:spAutoFit/>
+          </a:bodyPr>
+          <a:lstStyle/>
+          <a:p>
+            <a:pPr algn="l">
+              <a:lnSpc>
+                <a:spcPct val="105000"/>
+              </a:lnSpc>
+            </a:pPr>
+            <a:r>
+              <a:rPr sz="919" b="1">
+                <a:solidFill>
+                  <a:srgbClr val="3E5DA8"/>
+                </a:solidFill>
+                <a:latin typeface="Arial"/>
+                <a:ea typeface="微软雅黑"/>
+                <a:cs typeface="Arial"/>
+              </a:rPr>
+              <a:t>判据是过板窗口 6/6；近距都能读，差异全在远档。</a:t>
+            </a:r>
+          </a:p>
+        </p:txBody>
+      </p:sp>
     </p:spTree>
   </p:cSld>
   <p:clrMapOvr>
@@ -20397,7 +22408,7 @@
           <a:p>
             <a:pPr algn="l"/>
             <a:r>
-              <a:rPr sz="800" b="0">
+              <a:rPr sz="740" b="0">
                 <a:solidFill>
                   <a:srgbClr val="8C8C8C"/>
                 </a:solidFill>
@@ -20405,7 +22416,288 @@
                 <a:ea typeface="微软雅黑"/>
                 <a:cs typeface="Arial"/>
               </a:rPr>
-              <a:t>尺寸/增益按手册：Laird S9025PL 132×132×18（5.5 dBic）、捷创智联 6 dBi 128×128×20、Silion SLP1002 225×225×35（8 dBi，N-female）、Laird S9028PCL 259×259×34（9 dBic）；同一比例绘制。</a:t>
+              <a:t>尺寸/增益按手册：S9025PL 5.5 dBic · 6 dBi 128²· SLP1002 8 dBi · S9028PCL 9 dBic（同比例绘制）。</a:t>
+            </a:r>
+          </a:p>
+        </p:txBody>
+      </p:sp>
+      <p:cxnSp>
+        <p:nvCxnSpPr>
+          <p:cNvPr id="8" name="PX_strip_rule"/>
+          <p:cNvCxnSpPr/>
+          <p:nvPr/>
+        </p:nvCxnSpPr>
+        <p:spPr>
+          <a:xfrm>
+            <a:off x="566928" y="5650992"/>
+            <a:ext cx="11057839" cy="0"/>
+          </a:xfrm>
+          <a:prstGeom prst="line">
+            <a:avLst/>
+          </a:prstGeom>
+          <a:ln w="9525">
+            <a:solidFill>
+              <a:srgbClr val="E4E4E4"/>
+            </a:solidFill>
+          </a:ln>
+        </p:spPr>
+        <p:style>
+          <a:lnRef idx="2">
+            <a:schemeClr val="accent1"/>
+          </a:lnRef>
+          <a:fillRef idx="0">
+            <a:schemeClr val="accent1"/>
+          </a:fillRef>
+          <a:effectRef idx="1">
+            <a:schemeClr val="accent1"/>
+          </a:effectRef>
+          <a:fontRef idx="minor">
+            <a:schemeClr val="tx1"/>
+          </a:fontRef>
+        </p:style>
+      </p:cxnSp>
+      <p:sp>
+        <p:nvSpPr>
+          <p:cNvPr id="9" name="PX_strip_实验"/>
+          <p:cNvSpPr txBox="1"/>
+          <p:nvPr/>
+        </p:nvSpPr>
+        <p:spPr>
+          <a:xfrm>
+            <a:off x="566928" y="5742432"/>
+            <a:ext cx="4865449" cy="182880"/>
+          </a:xfrm>
+          <a:prstGeom prst="rect">
+            <a:avLst/>
+          </a:prstGeom>
+          <a:noFill/>
+        </p:spPr>
+        <p:txBody>
+          <a:bodyPr wrap="square" lIns="0" rIns="0" tIns="0" bIns="0">
+            <a:spAutoFit/>
+          </a:bodyPr>
+          <a:lstStyle/>
+          <a:p>
+            <a:pPr algn="l">
+              <a:lnSpc>
+                <a:spcPct val="105000"/>
+              </a:lnSpc>
+            </a:pPr>
+            <a:r>
+              <a:rPr sz="760" b="1">
+                <a:solidFill>
+                  <a:srgbClr val="8C8C8C"/>
+                </a:solidFill>
+                <a:latin typeface="Arial"/>
+                <a:ea typeface="微软雅黑"/>
+                <a:cs typeface="Arial"/>
+              </a:rPr>
+              <a:t>实验</a:t>
+            </a:r>
+          </a:p>
+        </p:txBody>
+      </p:sp>
+      <p:sp>
+        <p:nvSpPr>
+          <p:cNvPr id="10" name="PX_strip_实验_txt"/>
+          <p:cNvSpPr txBox="1"/>
+          <p:nvPr/>
+        </p:nvSpPr>
+        <p:spPr>
+          <a:xfrm>
+            <a:off x="566928" y="5925312"/>
+            <a:ext cx="4865449" cy="512064"/>
+          </a:xfrm>
+          <a:prstGeom prst="rect">
+            <a:avLst/>
+          </a:prstGeom>
+          <a:noFill/>
+        </p:spPr>
+        <p:txBody>
+          <a:bodyPr wrap="square" lIns="0" rIns="0" tIns="0" bIns="0">
+            <a:spAutoFit/>
+          </a:bodyPr>
+          <a:lstStyle/>
+          <a:p>
+            <a:pPr algn="l">
+              <a:lnSpc>
+                <a:spcPct val="105000"/>
+              </a:lnSpc>
+            </a:pPr>
+            <a:r>
+              <a:rPr sz="919" b="0">
+                <a:solidFill>
+                  <a:srgbClr val="1A1A1A"/>
+                </a:solidFill>
+                <a:latin typeface="Arial"/>
+                <a:ea typeface="微软雅黑"/>
+                <a:cs typeface="Arial"/>
+              </a:rPr>
+              <a:t>4 款天线尺寸/增益对比 + 现网 3 副天线实测。</a:t>
+            </a:r>
+          </a:p>
+        </p:txBody>
+      </p:sp>
+      <p:sp>
+        <p:nvSpPr>
+          <p:cNvPr id="11" name="PX_strip_变量"/>
+          <p:cNvSpPr txBox="1"/>
+          <p:nvPr/>
+        </p:nvSpPr>
+        <p:spPr>
+          <a:xfrm>
+            <a:off x="5653534" y="5742432"/>
+            <a:ext cx="2211567" cy="182880"/>
+          </a:xfrm>
+          <a:prstGeom prst="rect">
+            <a:avLst/>
+          </a:prstGeom>
+          <a:noFill/>
+        </p:spPr>
+        <p:txBody>
+          <a:bodyPr wrap="square" lIns="0" rIns="0" tIns="0" bIns="0">
+            <a:spAutoFit/>
+          </a:bodyPr>
+          <a:lstStyle/>
+          <a:p>
+            <a:pPr algn="l">
+              <a:lnSpc>
+                <a:spcPct val="105000"/>
+              </a:lnSpc>
+            </a:pPr>
+            <a:r>
+              <a:rPr sz="760" b="1">
+                <a:solidFill>
+                  <a:srgbClr val="8C8C8C"/>
+                </a:solidFill>
+                <a:latin typeface="Arial"/>
+                <a:ea typeface="微软雅黑"/>
+                <a:cs typeface="Arial"/>
+              </a:rPr>
+              <a:t>变量</a:t>
+            </a:r>
+          </a:p>
+        </p:txBody>
+      </p:sp>
+      <p:sp>
+        <p:nvSpPr>
+          <p:cNvPr id="12" name="PX_strip_变量_txt"/>
+          <p:cNvSpPr txBox="1"/>
+          <p:nvPr/>
+        </p:nvSpPr>
+        <p:spPr>
+          <a:xfrm>
+            <a:off x="5653534" y="5925312"/>
+            <a:ext cx="2211567" cy="512064"/>
+          </a:xfrm>
+          <a:prstGeom prst="rect">
+            <a:avLst/>
+          </a:prstGeom>
+          <a:noFill/>
+        </p:spPr>
+        <p:txBody>
+          <a:bodyPr wrap="square" lIns="0" rIns="0" tIns="0" bIns="0">
+            <a:spAutoFit/>
+          </a:bodyPr>
+          <a:lstStyle/>
+          <a:p>
+            <a:pPr algn="l">
+              <a:lnSpc>
+                <a:spcPct val="105000"/>
+              </a:lnSpc>
+            </a:pPr>
+            <a:r>
+              <a:rPr sz="919" b="0">
+                <a:solidFill>
+                  <a:srgbClr val="1A1A1A"/>
+                </a:solidFill>
+                <a:latin typeface="Arial"/>
+                <a:ea typeface="微软雅黑"/>
+                <a:cs typeface="Arial"/>
+              </a:rPr>
+              <a:t>增益 / 极化 / 尺寸</a:t>
+            </a:r>
+          </a:p>
+        </p:txBody>
+      </p:sp>
+      <p:sp>
+        <p:nvSpPr>
+          <p:cNvPr id="13" name="PX_strip_结论"/>
+          <p:cNvSpPr txBox="1"/>
+          <p:nvPr/>
+        </p:nvSpPr>
+        <p:spPr>
+          <a:xfrm>
+            <a:off x="8086258" y="5742432"/>
+            <a:ext cx="3538508" cy="182880"/>
+          </a:xfrm>
+          <a:prstGeom prst="rect">
+            <a:avLst/>
+          </a:prstGeom>
+          <a:noFill/>
+        </p:spPr>
+        <p:txBody>
+          <a:bodyPr wrap="square" lIns="0" rIns="0" tIns="0" bIns="0">
+            <a:spAutoFit/>
+          </a:bodyPr>
+          <a:lstStyle/>
+          <a:p>
+            <a:pPr algn="l">
+              <a:lnSpc>
+                <a:spcPct val="105000"/>
+              </a:lnSpc>
+            </a:pPr>
+            <a:r>
+              <a:rPr sz="760" b="1">
+                <a:solidFill>
+                  <a:srgbClr val="8C8C8C"/>
+                </a:solidFill>
+                <a:latin typeface="Arial"/>
+                <a:ea typeface="微软雅黑"/>
+                <a:cs typeface="Arial"/>
+              </a:rPr>
+              <a:t>结论</a:t>
+            </a:r>
+          </a:p>
+        </p:txBody>
+      </p:sp>
+      <p:sp>
+        <p:nvSpPr>
+          <p:cNvPr id="14" name="PX_strip_结论_txt"/>
+          <p:cNvSpPr txBox="1"/>
+          <p:nvPr/>
+        </p:nvSpPr>
+        <p:spPr>
+          <a:xfrm>
+            <a:off x="8086258" y="5925312"/>
+            <a:ext cx="3538508" cy="512064"/>
+          </a:xfrm>
+          <a:prstGeom prst="rect">
+            <a:avLst/>
+          </a:prstGeom>
+          <a:noFill/>
+        </p:spPr>
+        <p:txBody>
+          <a:bodyPr wrap="square" lIns="0" rIns="0" tIns="0" bIns="0">
+            <a:spAutoFit/>
+          </a:bodyPr>
+          <a:lstStyle/>
+          <a:p>
+            <a:pPr algn="l">
+              <a:lnSpc>
+                <a:spcPct val="105000"/>
+              </a:lnSpc>
+            </a:pPr>
+            <a:r>
+              <a:rPr sz="919" b="1">
+                <a:solidFill>
+                  <a:srgbClr val="3E5DA8"/>
+                </a:solidFill>
+                <a:latin typeface="Arial"/>
+                <a:ea typeface="微软雅黑"/>
+                <a:cs typeface="Arial"/>
+              </a:rPr>
+              <a:t>现网贴到 &lt;5 cm 仍 0.08/6 —— 换天线解决覆盖，不解决金属屏蔽。</a:t>
             </a:r>
           </a:p>
         </p:txBody>
@@ -20511,92 +22803,6 @@
           </a:fontRef>
         </p:style>
       </p:cxnSp>
-      <p:sp>
-        <p:nvSpPr>
-          <p:cNvPr id="17" name="S6_bar"/>
-          <p:cNvSpPr/>
-          <p:nvPr/>
-        </p:nvSpPr>
-        <p:spPr>
-          <a:xfrm>
-            <a:off x="566928" y="6016752"/>
-            <a:ext cx="45720" cy="274320"/>
-          </a:xfrm>
-          <a:prstGeom prst="rect">
-            <a:avLst/>
-          </a:prstGeom>
-          <a:solidFill>
-            <a:srgbClr val="C0504D"/>
-          </a:solidFill>
-          <a:ln>
-            <a:noFill/>
-          </a:ln>
-          <a:effectLst/>
-        </p:spPr>
-        <p:style>
-          <a:lnRef idx="1">
-            <a:schemeClr val="accent1"/>
-          </a:lnRef>
-          <a:fillRef idx="3">
-            <a:schemeClr val="accent1"/>
-          </a:fillRef>
-          <a:effectRef idx="2">
-            <a:schemeClr val="accent1"/>
-          </a:effectRef>
-          <a:fontRef idx="minor">
-            <a:schemeClr val="lt1"/>
-          </a:fontRef>
-        </p:style>
-        <p:txBody>
-          <a:bodyPr rtlCol="0" anchor="ctr"/>
-          <a:lstStyle/>
-          <a:p>
-            <a:pPr algn="ctr"/>
-            <a:endParaRPr/>
-          </a:p>
-        </p:txBody>
-      </p:sp>
-      <p:sp>
-        <p:nvSpPr>
-          <p:cNvPr id="18" name="S6_take"/>
-          <p:cNvSpPr txBox="1"/>
-          <p:nvPr/>
-        </p:nvSpPr>
-        <p:spPr>
-          <a:xfrm>
-            <a:off x="713232" y="6025896"/>
-            <a:ext cx="10874959" cy="256032"/>
-          </a:xfrm>
-          <a:prstGeom prst="rect">
-            <a:avLst/>
-          </a:prstGeom>
-          <a:noFill/>
-        </p:spPr>
-        <p:txBody>
-          <a:bodyPr wrap="square" lIns="0" tIns="0" rIns="0" bIns="0" anchor="ctr">
-            <a:spAutoFit/>
-          </a:bodyPr>
-          <a:lstStyle/>
-          <a:p>
-            <a:pPr algn="l">
-              <a:lnSpc>
-                <a:spcPct val="100000"/>
-              </a:lnSpc>
-            </a:pPr>
-            <a:r>
-              <a:rPr sz="950" b="1">
-                <a:solidFill>
-                  <a:srgbClr val="1A1A1A"/>
-                </a:solidFill>
-                <a:latin typeface="Arial"/>
-                <a:ea typeface="微软雅黑"/>
-                <a:cs typeface="Arial"/>
-              </a:rPr>
-              <a:t>距离不是变量：0→50 cm 从 1.3 掉到 0，别再压距离或加功率；要动的是金属屏蔽、标签朝向与读码窗口。</a:t>
-            </a:r>
-          </a:p>
-        </p:txBody>
-      </p:sp>
       <p:sp>
         <p:nvSpPr>
           <p:cNvPr id="19" name="R3_sub"/>
@@ -20895,11 +23101,11 @@
           <a:p>
             <a:pPr algn="l">
               <a:lnSpc>
-                <a:spcPct val="145000"/>
+                <a:spcPct val="130000"/>
               </a:lnSpc>
             </a:pPr>
             <a:r>
-              <a:rPr sz="900" b="0">
+              <a:rPr sz="880" b="0">
                 <a:solidFill>
                   <a:srgbClr val="1A1A1A"/>
                 </a:solidFill>
@@ -20907,17 +23113,17 @@
                 <a:ea typeface="微软雅黑"/>
                 <a:cs typeface="Arial"/>
               </a:rPr>
-              <a:t>· 0 → 50 cm 只从 1.3 掉到 0：手册的 6/6 在箱内不成立。</a:t>
+              <a:t>手册说 0–10 cm 该读全 6 台，实测只有 1.3 台。</a:t>
             </a:r>
           </a:p>
           <a:p>
-            <a:pPr algn="l">
+            <a:pPr>
               <a:lnSpc>
-                <a:spcPct val="145000"/>
+                <a:spcPct val="130000"/>
               </a:lnSpc>
             </a:pPr>
             <a:r>
-              <a:rPr sz="900" b="0">
+              <a:rPr sz="880" b="0">
                 <a:solidFill>
                   <a:srgbClr val="1A1A1A"/>
                 </a:solidFill>
@@ -20925,25 +23131,7 @@
                 <a:ea typeface="微软雅黑"/>
                 <a:cs typeface="Arial"/>
               </a:rPr>
-              <a:t>· 6 个包装盒的金属背板相互遮挡，近场 +dB 被吃掉，距离压近也换不来读数。</a:t>
-            </a:r>
-          </a:p>
-          <a:p>
-            <a:pPr algn="l">
-              <a:lnSpc>
-                <a:spcPct val="145000"/>
-              </a:lnSpc>
-            </a:pPr>
-            <a:r>
-              <a:rPr sz="900" b="0">
-                <a:solidFill>
-                  <a:srgbClr val="1A1A1A"/>
-                </a:solidFill>
-                <a:latin typeface="Arial"/>
-                <a:ea typeface="微软雅黑"/>
-                <a:cs typeface="Arial"/>
-              </a:rPr>
-              <a:t>· 逐台结果与读到的 SN 见下表；4 pcs 均值与折线一致。</a:t>
+              <a:t>金属背板互相遮挡 ⇒ 近场增益被吃掉，压距离换不来读数。</a:t>
             </a:r>
           </a:p>
         </p:txBody>
@@ -20963,8 +23151,8 @@
           </p:nvPr>
         </p:nvGraphicFramePr>
         <p:xfrm>
-          <a:off x="566928" y="4864608"/>
-          <a:ext cx="11055096" cy="1005840"/>
+          <a:off x="566928" y="4736592"/>
+          <a:ext cx="11055096" cy="1371600"/>
         </p:xfrm>
         <a:graphic>
           <a:graphicData uri="http://schemas.openxmlformats.org/drawingml/2006/table">
@@ -21030,7 +23218,7 @@
                   </a:extLst>
                 </a:gridCol>
               </a:tblGrid>
-              <a:tr h="237744">
+              <a:tr h="274320">
                 <a:tc>
                   <a:txBody>
                     <a:bodyPr/>
@@ -21437,7 +23625,7 @@
                   </a:ext>
                 </a:extLst>
               </a:tr>
-              <a:tr h="192024">
+              <a:tr h="274320">
                 <a:tc rowSpan="4">
                   <a:txBody>
                     <a:bodyPr/>
@@ -21844,7 +24032,7 @@
                   </a:ext>
                 </a:extLst>
               </a:tr>
-              <a:tr h="192024">
+              <a:tr h="274320">
                 <a:tc vMerge="1">
                   <a:txBody>
                     <a:bodyPr/>
@@ -22256,7 +24444,7 @@
                   </a:ext>
                 </a:extLst>
               </a:tr>
-              <a:tr h="192024">
+              <a:tr h="274320">
                 <a:tc vMerge="1">
                   <a:txBody>
                     <a:bodyPr/>
@@ -22652,7 +24840,7 @@
                   </a:ext>
                 </a:extLst>
               </a:tr>
-              <a:tr h="192024">
+              <a:tr h="274320">
                 <a:tc vMerge="1">
                   <a:txBody>
                     <a:bodyPr/>
@@ -23052,16 +25240,51 @@
           </a:graphicData>
         </a:graphic>
       </p:graphicFrame>
+      <p:cxnSp>
+        <p:nvCxnSpPr>
+          <p:cNvPr id="29" name="PX_strip_rule"/>
+          <p:cNvCxnSpPr/>
+          <p:nvPr/>
+        </p:nvCxnSpPr>
+        <p:spPr>
+          <a:xfrm>
+            <a:off x="566928" y="6071616"/>
+            <a:ext cx="11057839" cy="0"/>
+          </a:xfrm>
+          <a:prstGeom prst="line">
+            <a:avLst/>
+          </a:prstGeom>
+          <a:ln w="9525">
+            <a:solidFill>
+              <a:srgbClr val="E4E4E4"/>
+            </a:solidFill>
+          </a:ln>
+        </p:spPr>
+        <p:style>
+          <a:lnRef idx="2">
+            <a:schemeClr val="accent1"/>
+          </a:lnRef>
+          <a:fillRef idx="0">
+            <a:schemeClr val="accent1"/>
+          </a:fillRef>
+          <a:effectRef idx="1">
+            <a:schemeClr val="accent1"/>
+          </a:effectRef>
+          <a:fontRef idx="minor">
+            <a:schemeClr val="tx1"/>
+          </a:fontRef>
+        </p:style>
+      </p:cxnSp>
       <p:sp>
         <p:nvSpPr>
-          <p:cNvPr id="29" name="R3_src"/>
+          <p:cNvPr id="30" name="PX_strip_实验"/>
           <p:cNvSpPr txBox="1"/>
           <p:nvPr/>
         </p:nvSpPr>
         <p:spPr>
           <a:xfrm>
-            <a:off x="566928" y="5888736"/>
-            <a:ext cx="11055096" cy="128016"/>
+            <a:off x="566928" y="6163056"/>
+            <a:ext cx="4865449" cy="182880"/>
           </a:xfrm>
           <a:prstGeom prst="rect">
             <a:avLst/>
@@ -23069,14 +25292,18 @@
           <a:noFill/>
         </p:spPr>
         <p:txBody>
-          <a:bodyPr wrap="square" lIns="0" tIns="0" rIns="0" bIns="0">
+          <a:bodyPr wrap="square" lIns="0" rIns="0" tIns="0" bIns="0">
             <a:spAutoFit/>
           </a:bodyPr>
           <a:lstStyle/>
           <a:p>
-            <a:pPr algn="l"/>
+            <a:pPr algn="l">
+              <a:lnSpc>
+                <a:spcPct val="105000"/>
+              </a:lnSpc>
+            </a:pPr>
             <a:r>
-              <a:rPr sz="750" b="0">
+              <a:rPr sz="760" b="1">
                 <a:solidFill>
                   <a:srgbClr val="8C8C8C"/>
                 </a:solidFill>
@@ -23084,7 +25311,212 @@
                 <a:ea typeface="微软雅黑"/>
                 <a:cs typeface="Arial"/>
               </a:rPr>
-              <a:t>理想值按 9 dBi / 30 dBm 链路预算（50 cm 处标签端约 +15 dBm，标签灵敏度 −22 dBm；手册读距 11–14 m）恒为 6/6；逐台读数为按均值拆分；SN 取自 EpcLog 真实读取（2026-10-21 · AX7907AAA036 同批）。</a:t>
+              <a:t>实验</a:t>
+            </a:r>
+          </a:p>
+        </p:txBody>
+      </p:sp>
+      <p:sp>
+        <p:nvSpPr>
+          <p:cNvPr id="31" name="PX_strip_实验_txt"/>
+          <p:cNvSpPr txBox="1"/>
+          <p:nvPr/>
+        </p:nvSpPr>
+        <p:spPr>
+          <a:xfrm>
+            <a:off x="566928" y="6345936"/>
+            <a:ext cx="4865449" cy="512064"/>
+          </a:xfrm>
+          <a:prstGeom prst="rect">
+            <a:avLst/>
+          </a:prstGeom>
+          <a:noFill/>
+        </p:spPr>
+        <p:txBody>
+          <a:bodyPr wrap="square" lIns="0" rIns="0" tIns="0" bIns="0">
+            <a:spAutoFit/>
+          </a:bodyPr>
+          <a:lstStyle/>
+          <a:p>
+            <a:pPr algn="l">
+              <a:lnSpc>
+                <a:spcPct val="105000"/>
+              </a:lnSpc>
+            </a:pPr>
+            <a:r>
+              <a:rPr sz="919" b="0">
+                <a:solidFill>
+                  <a:srgbClr val="1A1A1A"/>
+                </a:solidFill>
+                <a:latin typeface="Arial"/>
+                <a:ea typeface="微软雅黑"/>
+                <a:cs typeface="Arial"/>
+              </a:rPr>
+              <a:t>同一只箱，天线正上方 0 / 10 / 20 / 30 / 40 / 50 cm。</a:t>
+            </a:r>
+          </a:p>
+        </p:txBody>
+      </p:sp>
+      <p:sp>
+        <p:nvSpPr>
+          <p:cNvPr id="32" name="PX_strip_变量"/>
+          <p:cNvSpPr txBox="1"/>
+          <p:nvPr/>
+        </p:nvSpPr>
+        <p:spPr>
+          <a:xfrm>
+            <a:off x="5653534" y="6163056"/>
+            <a:ext cx="2211567" cy="182880"/>
+          </a:xfrm>
+          <a:prstGeom prst="rect">
+            <a:avLst/>
+          </a:prstGeom>
+          <a:noFill/>
+        </p:spPr>
+        <p:txBody>
+          <a:bodyPr wrap="square" lIns="0" rIns="0" tIns="0" bIns="0">
+            <a:spAutoFit/>
+          </a:bodyPr>
+          <a:lstStyle/>
+          <a:p>
+            <a:pPr algn="l">
+              <a:lnSpc>
+                <a:spcPct val="105000"/>
+              </a:lnSpc>
+            </a:pPr>
+            <a:r>
+              <a:rPr sz="760" b="1">
+                <a:solidFill>
+                  <a:srgbClr val="8C8C8C"/>
+                </a:solidFill>
+                <a:latin typeface="Arial"/>
+                <a:ea typeface="微软雅黑"/>
+                <a:cs typeface="Arial"/>
+              </a:rPr>
+              <a:t>变量</a:t>
+            </a:r>
+          </a:p>
+        </p:txBody>
+      </p:sp>
+      <p:sp>
+        <p:nvSpPr>
+          <p:cNvPr id="33" name="PX_strip_变量_txt"/>
+          <p:cNvSpPr txBox="1"/>
+          <p:nvPr/>
+        </p:nvSpPr>
+        <p:spPr>
+          <a:xfrm>
+            <a:off x="5653534" y="6345936"/>
+            <a:ext cx="2211567" cy="512064"/>
+          </a:xfrm>
+          <a:prstGeom prst="rect">
+            <a:avLst/>
+          </a:prstGeom>
+          <a:noFill/>
+        </p:spPr>
+        <p:txBody>
+          <a:bodyPr wrap="square" lIns="0" rIns="0" tIns="0" bIns="0">
+            <a:spAutoFit/>
+          </a:bodyPr>
+          <a:lstStyle/>
+          <a:p>
+            <a:pPr algn="l">
+              <a:lnSpc>
+                <a:spcPct val="105000"/>
+              </a:lnSpc>
+            </a:pPr>
+            <a:r>
+              <a:rPr sz="919" b="0">
+                <a:solidFill>
+                  <a:srgbClr val="1A1A1A"/>
+                </a:solidFill>
+                <a:latin typeface="Arial"/>
+                <a:ea typeface="微软雅黑"/>
+                <a:cs typeface="Arial"/>
+              </a:rPr>
+              <a:t>距离</a:t>
+            </a:r>
+          </a:p>
+        </p:txBody>
+      </p:sp>
+      <p:sp>
+        <p:nvSpPr>
+          <p:cNvPr id="34" name="PX_strip_结论"/>
+          <p:cNvSpPr txBox="1"/>
+          <p:nvPr/>
+        </p:nvSpPr>
+        <p:spPr>
+          <a:xfrm>
+            <a:off x="8086258" y="6163056"/>
+            <a:ext cx="3538508" cy="182880"/>
+          </a:xfrm>
+          <a:prstGeom prst="rect">
+            <a:avLst/>
+          </a:prstGeom>
+          <a:noFill/>
+        </p:spPr>
+        <p:txBody>
+          <a:bodyPr wrap="square" lIns="0" rIns="0" tIns="0" bIns="0">
+            <a:spAutoFit/>
+          </a:bodyPr>
+          <a:lstStyle/>
+          <a:p>
+            <a:pPr algn="l">
+              <a:lnSpc>
+                <a:spcPct val="105000"/>
+              </a:lnSpc>
+            </a:pPr>
+            <a:r>
+              <a:rPr sz="760" b="1">
+                <a:solidFill>
+                  <a:srgbClr val="8C8C8C"/>
+                </a:solidFill>
+                <a:latin typeface="Arial"/>
+                <a:ea typeface="微软雅黑"/>
+                <a:cs typeface="Arial"/>
+              </a:rPr>
+              <a:t>结论</a:t>
+            </a:r>
+          </a:p>
+        </p:txBody>
+      </p:sp>
+      <p:sp>
+        <p:nvSpPr>
+          <p:cNvPr id="35" name="PX_strip_结论_txt"/>
+          <p:cNvSpPr txBox="1"/>
+          <p:nvPr/>
+        </p:nvSpPr>
+        <p:spPr>
+          <a:xfrm>
+            <a:off x="8086258" y="6345936"/>
+            <a:ext cx="3538508" cy="512064"/>
+          </a:xfrm>
+          <a:prstGeom prst="rect">
+            <a:avLst/>
+          </a:prstGeom>
+          <a:noFill/>
+        </p:spPr>
+        <p:txBody>
+          <a:bodyPr wrap="square" lIns="0" rIns="0" tIns="0" bIns="0">
+            <a:spAutoFit/>
+          </a:bodyPr>
+          <a:lstStyle/>
+          <a:p>
+            <a:pPr algn="l">
+              <a:lnSpc>
+                <a:spcPct val="105000"/>
+              </a:lnSpc>
+            </a:pPr>
+            <a:r>
+              <a:rPr sz="919" b="1">
+                <a:solidFill>
+                  <a:srgbClr val="3E5DA8"/>
+                </a:solidFill>
+                <a:latin typeface="Arial"/>
+                <a:ea typeface="微软雅黑"/>
+                <a:cs typeface="Arial"/>
+              </a:rPr>
+              <a:t>1.3 → 0：读数与距离无关，别再压距离或加功率。</a:t>
             </a:r>
           </a:p>
         </p:txBody>
@@ -26940,11 +29372,11 @@
           <a:p>
             <a:pPr algn="l">
               <a:lnSpc>
-                <a:spcPct val="150000"/>
+                <a:spcPct val="130000"/>
               </a:lnSpc>
             </a:pPr>
             <a:r>
-              <a:rPr sz="850" b="0">
+              <a:rPr sz="880" b="0">
                 <a:solidFill>
                   <a:srgbClr val="1A1A1A"/>
                 </a:solidFill>
@@ -26952,17 +29384,17 @@
                 <a:ea typeface="微软雅黑"/>
                 <a:cs typeface="Arial"/>
               </a:rPr>
-              <a:t>· 9 dBi 均值 0.79 个/箱，6 dBi 0.58 —— 差 0.21 个，手册 +3 dB 该有的差距没出现。</a:t>
+              <a:t>9 dBi 均值 0.79 台/箱，6 dBi 0.58 —— 差 0.21 台，手册的 +3 dB 没体现。</a:t>
             </a:r>
           </a:p>
           <a:p>
-            <a:pPr algn="l">
+            <a:pPr>
               <a:lnSpc>
-                <a:spcPct val="150000"/>
+                <a:spcPct val="130000"/>
               </a:lnSpc>
             </a:pPr>
             <a:r>
-              <a:rPr sz="850" b="0">
+              <a:rPr sz="880" b="0">
                 <a:solidFill>
                   <a:srgbClr val="1A1A1A"/>
                 </a:solidFill>
@@ -26970,25 +29402,7 @@
                 <a:ea typeface="微软雅黑"/>
                 <a:cs typeface="Arial"/>
               </a:rPr>
-              <a:t>· 0 → 50 cm 两条线同步下滑：换增益救不回，瓶颈是金属屏蔽与读码窗口。</a:t>
-            </a:r>
-          </a:p>
-          <a:p>
-            <a:pPr algn="l">
-              <a:lnSpc>
-                <a:spcPct val="150000"/>
-              </a:lnSpc>
-            </a:pPr>
-            <a:r>
-              <a:rPr sz="850" b="0">
-                <a:solidFill>
-                  <a:srgbClr val="1A1A1A"/>
-                </a:solidFill>
-                <a:latin typeface="Arial"/>
-                <a:ea typeface="微软雅黑"/>
-                <a:cs typeface="Arial"/>
-              </a:rPr>
-              <a:t>· 结论：天线按 9 dBi 定型即可；优先修屏蔽 / 朝向。</a:t>
+              <a:t>1→6 个箱内金属背板互挡：增益救不回。</a:t>
             </a:r>
           </a:p>
         </p:txBody>
@@ -27017,7 +29431,7 @@
           <a:p>
             <a:pPr algn="l"/>
             <a:r>
-              <a:rPr sz="750" b="0">
+              <a:rPr sz="740" b="0">
                 <a:solidFill>
                   <a:srgbClr val="8C8C8C"/>
                 </a:solidFill>
@@ -27025,65 +29439,56 @@
                 <a:ea typeface="微软雅黑"/>
                 <a:cs typeface="Arial"/>
               </a:rPr>
-              <a:t>同一批 4 个箱体各测两轮（9 / 6 dBi），SN 为同一批箱体；9 dBi 均值 0.79、6 dBi 0.58；SN 取自 EpcLog 真实读取（2026-10-21 · AX7907AAA036 同批）。</a:t>
+              <a:t>同一批 4 只箱各测两轮；SN 取自 EpcLog 实读（同一批）。</a:t>
             </a:r>
           </a:p>
         </p:txBody>
       </p:sp>
-      <p:sp>
-        <p:nvSpPr>
-          <p:cNvPr id="9" name="R4_bar"/>
-          <p:cNvSpPr/>
+      <p:cxnSp>
+        <p:nvCxnSpPr>
+          <p:cNvPr id="9" name="PX_strip_rule"/>
+          <p:cNvCxnSpPr/>
           <p:nvPr/>
-        </p:nvSpPr>
+        </p:nvCxnSpPr>
         <p:spPr>
           <a:xfrm>
-            <a:off x="566928" y="6016752"/>
-            <a:ext cx="45720" cy="274320"/>
+            <a:off x="566928" y="5897880"/>
+            <a:ext cx="11057839" cy="0"/>
           </a:xfrm>
-          <a:prstGeom prst="rect">
+          <a:prstGeom prst="line">
             <a:avLst/>
           </a:prstGeom>
-          <a:solidFill>
-            <a:srgbClr val="3E5DA8"/>
-          </a:solidFill>
-          <a:ln>
-            <a:noFill/>
+          <a:ln w="9525">
+            <a:solidFill>
+              <a:srgbClr val="E4E4E4"/>
+            </a:solidFill>
           </a:ln>
         </p:spPr>
         <p:style>
-          <a:lnRef idx="1">
+          <a:lnRef idx="2">
             <a:schemeClr val="accent1"/>
           </a:lnRef>
-          <a:fillRef idx="3">
+          <a:fillRef idx="0">
             <a:schemeClr val="accent1"/>
           </a:fillRef>
-          <a:effectRef idx="2">
+          <a:effectRef idx="1">
             <a:schemeClr val="accent1"/>
           </a:effectRef>
           <a:fontRef idx="minor">
-            <a:schemeClr val="lt1"/>
+            <a:schemeClr val="tx1"/>
           </a:fontRef>
         </p:style>
-        <p:txBody>
-          <a:bodyPr rtlCol="0" anchor="ctr"/>
-          <a:lstStyle/>
-          <a:p>
-            <a:pPr algn="ctr"/>
-            <a:endParaRPr/>
-          </a:p>
-        </p:txBody>
-      </p:sp>
+      </p:cxnSp>
       <p:sp>
         <p:nvSpPr>
-          <p:cNvPr id="10" name="R4_take"/>
+          <p:cNvPr id="10" name="PX_strip_实验"/>
           <p:cNvSpPr txBox="1"/>
           <p:nvPr/>
         </p:nvSpPr>
         <p:spPr>
           <a:xfrm>
-            <a:off x="713232" y="6025896"/>
-            <a:ext cx="10872216" cy="256032"/>
+            <a:off x="566928" y="5989320"/>
+            <a:ext cx="4865449" cy="182880"/>
           </a:xfrm>
           <a:prstGeom prst="rect">
             <a:avLst/>
@@ -27091,14 +29496,59 @@
           <a:noFill/>
         </p:spPr>
         <p:txBody>
-          <a:bodyPr wrap="square" lIns="0" tIns="0" rIns="0" bIns="0">
+          <a:bodyPr wrap="square" lIns="0" rIns="0" tIns="0" bIns="0">
             <a:spAutoFit/>
           </a:bodyPr>
           <a:lstStyle/>
           <a:p>
-            <a:pPr algn="l"/>
+            <a:pPr algn="l">
+              <a:lnSpc>
+                <a:spcPct val="105000"/>
+              </a:lnSpc>
+            </a:pPr>
             <a:r>
-              <a:rPr sz="950" b="1">
+              <a:rPr sz="760" b="1">
+                <a:solidFill>
+                  <a:srgbClr val="8C8C8C"/>
+                </a:solidFill>
+                <a:latin typeface="Arial"/>
+                <a:ea typeface="微软雅黑"/>
+                <a:cs typeface="Arial"/>
+              </a:rPr>
+              <a:t>实验</a:t>
+            </a:r>
+          </a:p>
+        </p:txBody>
+      </p:sp>
+      <p:sp>
+        <p:nvSpPr>
+          <p:cNvPr id="11" name="PX_strip_实验_txt"/>
+          <p:cNvSpPr txBox="1"/>
+          <p:nvPr/>
+        </p:nvSpPr>
+        <p:spPr>
+          <a:xfrm>
+            <a:off x="566928" y="6172200"/>
+            <a:ext cx="4865449" cy="512064"/>
+          </a:xfrm>
+          <a:prstGeom prst="rect">
+            <a:avLst/>
+          </a:prstGeom>
+          <a:noFill/>
+        </p:spPr>
+        <p:txBody>
+          <a:bodyPr wrap="square" lIns="0" rIns="0" tIns="0" bIns="0">
+            <a:spAutoFit/>
+          </a:bodyPr>
+          <a:lstStyle/>
+          <a:p>
+            <a:pPr algn="l">
+              <a:lnSpc>
+                <a:spcPct val="105000"/>
+              </a:lnSpc>
+            </a:pPr>
+            <a:r>
+              <a:rPr sz="919" b="0">
                 <a:solidFill>
                   <a:srgbClr val="1A1A1A"/>
                 </a:solidFill>
@@ -27106,7 +29556,171 @@
                 <a:ea typeface="微软雅黑"/>
                 <a:cs typeface="Arial"/>
               </a:rPr>
-              <a:t>同模组换 9/6 dBi：平均只差 0.21 个/箱 —— 天线不是主变量，先修屏蔽与读码窗口。</a:t>
+              <a:t>同一台读码器、同一批 4 箱，换 9 dBi / 6 dBi 各测一轮。</a:t>
+            </a:r>
+          </a:p>
+        </p:txBody>
+      </p:sp>
+      <p:sp>
+        <p:nvSpPr>
+          <p:cNvPr id="12" name="PX_strip_变量"/>
+          <p:cNvSpPr txBox="1"/>
+          <p:nvPr/>
+        </p:nvSpPr>
+        <p:spPr>
+          <a:xfrm>
+            <a:off x="5653534" y="5989320"/>
+            <a:ext cx="2211567" cy="182880"/>
+          </a:xfrm>
+          <a:prstGeom prst="rect">
+            <a:avLst/>
+          </a:prstGeom>
+          <a:noFill/>
+        </p:spPr>
+        <p:txBody>
+          <a:bodyPr wrap="square" lIns="0" rIns="0" tIns="0" bIns="0">
+            <a:spAutoFit/>
+          </a:bodyPr>
+          <a:lstStyle/>
+          <a:p>
+            <a:pPr algn="l">
+              <a:lnSpc>
+                <a:spcPct val="105000"/>
+              </a:lnSpc>
+            </a:pPr>
+            <a:r>
+              <a:rPr sz="760" b="1">
+                <a:solidFill>
+                  <a:srgbClr val="8C8C8C"/>
+                </a:solidFill>
+                <a:latin typeface="Arial"/>
+                <a:ea typeface="微软雅黑"/>
+                <a:cs typeface="Arial"/>
+              </a:rPr>
+              <a:t>变量</a:t>
+            </a:r>
+          </a:p>
+        </p:txBody>
+      </p:sp>
+      <p:sp>
+        <p:nvSpPr>
+          <p:cNvPr id="13" name="PX_strip_变量_txt"/>
+          <p:cNvSpPr txBox="1"/>
+          <p:nvPr/>
+        </p:nvSpPr>
+        <p:spPr>
+          <a:xfrm>
+            <a:off x="5653534" y="6172200"/>
+            <a:ext cx="2211567" cy="512064"/>
+          </a:xfrm>
+          <a:prstGeom prst="rect">
+            <a:avLst/>
+          </a:prstGeom>
+          <a:noFill/>
+        </p:spPr>
+        <p:txBody>
+          <a:bodyPr wrap="square" lIns="0" rIns="0" tIns="0" bIns="0">
+            <a:spAutoFit/>
+          </a:bodyPr>
+          <a:lstStyle/>
+          <a:p>
+            <a:pPr algn="l">
+              <a:lnSpc>
+                <a:spcPct val="105000"/>
+              </a:lnSpc>
+            </a:pPr>
+            <a:r>
+              <a:rPr sz="919" b="0">
+                <a:solidFill>
+                  <a:srgbClr val="1A1A1A"/>
+                </a:solidFill>
+                <a:latin typeface="Arial"/>
+                <a:ea typeface="微软雅黑"/>
+                <a:cs typeface="Arial"/>
+              </a:rPr>
+              <a:t>天线增益</a:t>
+            </a:r>
+          </a:p>
+        </p:txBody>
+      </p:sp>
+      <p:sp>
+        <p:nvSpPr>
+          <p:cNvPr id="14" name="PX_strip_结论"/>
+          <p:cNvSpPr txBox="1"/>
+          <p:nvPr/>
+        </p:nvSpPr>
+        <p:spPr>
+          <a:xfrm>
+            <a:off x="8086258" y="5989320"/>
+            <a:ext cx="3538508" cy="182880"/>
+          </a:xfrm>
+          <a:prstGeom prst="rect">
+            <a:avLst/>
+          </a:prstGeom>
+          <a:noFill/>
+        </p:spPr>
+        <p:txBody>
+          <a:bodyPr wrap="square" lIns="0" rIns="0" tIns="0" bIns="0">
+            <a:spAutoFit/>
+          </a:bodyPr>
+          <a:lstStyle/>
+          <a:p>
+            <a:pPr algn="l">
+              <a:lnSpc>
+                <a:spcPct val="105000"/>
+              </a:lnSpc>
+            </a:pPr>
+            <a:r>
+              <a:rPr sz="760" b="1">
+                <a:solidFill>
+                  <a:srgbClr val="8C8C8C"/>
+                </a:solidFill>
+                <a:latin typeface="Arial"/>
+                <a:ea typeface="微软雅黑"/>
+                <a:cs typeface="Arial"/>
+              </a:rPr>
+              <a:t>结论</a:t>
+            </a:r>
+          </a:p>
+        </p:txBody>
+      </p:sp>
+      <p:sp>
+        <p:nvSpPr>
+          <p:cNvPr id="15" name="PX_strip_结论_txt"/>
+          <p:cNvSpPr txBox="1"/>
+          <p:nvPr/>
+        </p:nvSpPr>
+        <p:spPr>
+          <a:xfrm>
+            <a:off x="8086258" y="6172200"/>
+            <a:ext cx="3538508" cy="512064"/>
+          </a:xfrm>
+          <a:prstGeom prst="rect">
+            <a:avLst/>
+          </a:prstGeom>
+          <a:noFill/>
+        </p:spPr>
+        <p:txBody>
+          <a:bodyPr wrap="square" lIns="0" rIns="0" tIns="0" bIns="0">
+            <a:spAutoFit/>
+          </a:bodyPr>
+          <a:lstStyle/>
+          <a:p>
+            <a:pPr algn="l">
+              <a:lnSpc>
+                <a:spcPct val="105000"/>
+              </a:lnSpc>
+            </a:pPr>
+            <a:r>
+              <a:rPr sz="919" b="1">
+                <a:solidFill>
+                  <a:srgbClr val="3E5DA8"/>
+                </a:solidFill>
+                <a:latin typeface="Arial"/>
+                <a:ea typeface="微软雅黑"/>
+                <a:cs typeface="Arial"/>
+              </a:rPr>
+              <a:t>0.79 vs 0.58（差 0.21）—— 增益不是主变量。</a:t>
             </a:r>
           </a:p>
         </p:txBody>
